--- a/dist/weeks-포트폴리오제작/포트폴리오제작_15주차_기말발표.pptx
+++ b/dist/weeks-포트폴리오제작/포트폴리오제작_15주차_기말발표.pptx
@@ -1569,7 +1569,7 @@
     <p:bg>
       <p:bgPr>
         <a:solidFill>
-          <a:srgbClr val="14161B"/>
+          <a:srgbClr val="FFFFFF"/>
         </a:solidFill>
       </p:bgPr>
     </p:bg>
@@ -1595,8 +1595,86 @@
         </p:nvSpPr>
         <p:spPr>
           <a:xfrm>
-            <a:off x="7223760" y="502920"/>
-            <a:ext cx="4572000" cy="5852160"/>
+            <a:off x="640080" y="274320"/>
+            <a:ext cx="3657600" cy="219456"/>
+          </a:xfrm>
+          <a:prstGeom prst="rect">
+            <a:avLst/>
+          </a:prstGeom>
+          <a:noFill/>
+          <a:ln/>
+        </p:spPr>
+        <p:txBody>
+          <a:bodyPr wrap="square" lIns="0" tIns="0" rIns="0" bIns="0" rtlCol="0" anchor="ctr"/>
+          <a:lstStyle/>
+          <a:p>
+            <a:pPr indent="0" marL="0">
+              <a:buNone/>
+            </a:pPr>
+            <a:r>
+              <a:rPr lang="en-US" sz="900" spc="120" kern="0" dirty="0">
+                <a:solidFill>
+                  <a:srgbClr val="8A8A8A"/>
+                </a:solidFill>
+                <a:latin typeface="Pretendard" pitchFamily="34" charset="0"/>
+                <a:ea typeface="Pretendard" pitchFamily="34" charset="-122"/>
+                <a:cs typeface="Pretendard" pitchFamily="34" charset="-120"/>
+              </a:rPr>
+              <a:t>포트폴리오제작</a:t>
+            </a:r>
+            <a:endParaRPr lang="en-US" sz="900" dirty="0"/>
+          </a:p>
+        </p:txBody>
+      </p:sp>
+      <p:sp>
+        <p:nvSpPr>
+          <p:cNvPr id="3" name="Text 1"/>
+          <p:cNvSpPr/>
+          <p:nvPr/>
+        </p:nvSpPr>
+        <p:spPr>
+          <a:xfrm>
+            <a:off x="4480560" y="274320"/>
+            <a:ext cx="4572000" cy="219456"/>
+          </a:xfrm>
+          <a:prstGeom prst="rect">
+            <a:avLst/>
+          </a:prstGeom>
+          <a:noFill/>
+          <a:ln/>
+        </p:spPr>
+        <p:txBody>
+          <a:bodyPr wrap="square" lIns="0" tIns="0" rIns="0" bIns="0" rtlCol="0" anchor="ctr"/>
+          <a:lstStyle/>
+          <a:p>
+            <a:pPr algn="ctr" indent="0" marL="0">
+              <a:buNone/>
+            </a:pPr>
+            <a:r>
+              <a:rPr lang="en-US" sz="900" spc="120" kern="0" dirty="0">
+                <a:solidFill>
+                  <a:srgbClr val="8A8A8A"/>
+                </a:solidFill>
+                <a:latin typeface="Pretendard" pitchFamily="34" charset="0"/>
+                <a:ea typeface="Pretendard" pitchFamily="34" charset="-122"/>
+                <a:cs typeface="Pretendard" pitchFamily="34" charset="-120"/>
+              </a:rPr>
+              <a:t>PHASE 3 완성과 발표</a:t>
+            </a:r>
+            <a:endParaRPr lang="en-US" sz="900" dirty="0"/>
+          </a:p>
+        </p:txBody>
+      </p:sp>
+      <p:sp>
+        <p:nvSpPr>
+          <p:cNvPr id="4" name="Text 2"/>
+          <p:cNvSpPr/>
+          <p:nvPr/>
+        </p:nvSpPr>
+        <p:spPr>
+          <a:xfrm>
+            <a:off x="8808415" y="274320"/>
+            <a:ext cx="2743200" cy="219456"/>
           </a:xfrm>
           <a:prstGeom prst="rect">
             <a:avLst/>
@@ -1612,30 +1690,163 @@
               <a:buNone/>
             </a:pPr>
             <a:r>
-              <a:rPr lang="en-US" sz="25500" dirty="0">
-                <a:solidFill>
-                  <a:srgbClr val="262A33"/>
-                </a:solidFill>
-                <a:latin typeface="Pretendard Thin" pitchFamily="34" charset="0"/>
-                <a:ea typeface="Pretendard Thin" pitchFamily="34" charset="-122"/>
-                <a:cs typeface="Pretendard Thin" pitchFamily="34" charset="-120"/>
+              <a:rPr lang="en-US" sz="900" spc="200" kern="0" dirty="0">
+                <a:solidFill>
+                  <a:srgbClr val="8A8A8A"/>
+                </a:solidFill>
+                <a:latin typeface="Pretendard" pitchFamily="34" charset="0"/>
+                <a:ea typeface="Pretendard" pitchFamily="34" charset="-122"/>
+                <a:cs typeface="Pretendard" pitchFamily="34" charset="-120"/>
+              </a:rPr>
+              <a:t>WEEK 15</a:t>
+            </a:r>
+            <a:endParaRPr lang="en-US" sz="900" dirty="0"/>
+          </a:p>
+        </p:txBody>
+      </p:sp>
+      <p:sp>
+        <p:nvSpPr>
+          <p:cNvPr id="5" name="Shape 3"/>
+          <p:cNvSpPr/>
+          <p:nvPr/>
+        </p:nvSpPr>
+        <p:spPr>
+          <a:xfrm>
+            <a:off x="640080" y="548640"/>
+            <a:ext cx="10911535" cy="7315"/>
+          </a:xfrm>
+          <a:prstGeom prst="rect">
+            <a:avLst/>
+          </a:prstGeom>
+          <a:solidFill>
+            <a:srgbClr val="DCDCDC"/>
+          </a:solidFill>
+          <a:ln w="12700">
+            <a:solidFill>
+              <a:srgbClr val="DCDCDC"/>
+            </a:solidFill>
+            <a:prstDash val="solid"/>
+          </a:ln>
+        </p:spPr>
+      </p:sp>
+      <p:sp>
+        <p:nvSpPr>
+          <p:cNvPr id="6" name="Text 4"/>
+          <p:cNvSpPr/>
+          <p:nvPr/>
+        </p:nvSpPr>
+        <p:spPr>
+          <a:xfrm>
+            <a:off x="7894015" y="713232"/>
+            <a:ext cx="3657600" cy="1517904"/>
+          </a:xfrm>
+          <a:prstGeom prst="rect">
+            <a:avLst/>
+          </a:prstGeom>
+          <a:noFill/>
+          <a:ln/>
+        </p:spPr>
+        <p:txBody>
+          <a:bodyPr wrap="square" lIns="0" tIns="0" rIns="0" bIns="0" rtlCol="0" anchor="ctr"/>
+          <a:lstStyle/>
+          <a:p>
+            <a:pPr algn="r" indent="0" marL="0">
+              <a:buNone/>
+            </a:pPr>
+            <a:r>
+              <a:rPr lang="en-US" sz="13200" dirty="0">
+                <a:solidFill>
+                  <a:srgbClr val="111111"/>
+                </a:solidFill>
+                <a:latin typeface="Pretendard Black" pitchFamily="34" charset="0"/>
+                <a:ea typeface="Pretendard Black" pitchFamily="34" charset="-122"/>
+                <a:cs typeface="Pretendard Black" pitchFamily="34" charset="-120"/>
               </a:rPr>
               <a:t>15</a:t>
             </a:r>
-            <a:endParaRPr lang="en-US" sz="25500" dirty="0"/>
-          </a:p>
-        </p:txBody>
-      </p:sp>
-      <p:sp>
-        <p:nvSpPr>
-          <p:cNvPr id="3" name="Text 1"/>
-          <p:cNvSpPr/>
-          <p:nvPr/>
-        </p:nvSpPr>
-        <p:spPr>
-          <a:xfrm>
-            <a:off x="640080" y="1481328"/>
-            <a:ext cx="6949440" cy="274320"/>
+            <a:endParaRPr lang="en-US" sz="13200" dirty="0"/>
+          </a:p>
+        </p:txBody>
+      </p:sp>
+      <p:sp>
+        <p:nvSpPr>
+          <p:cNvPr id="7" name="Shape 5"/>
+          <p:cNvSpPr/>
+          <p:nvPr/>
+        </p:nvSpPr>
+        <p:spPr>
+          <a:xfrm>
+            <a:off x="941832" y="877824"/>
+            <a:ext cx="0" cy="603504"/>
+          </a:xfrm>
+          <a:prstGeom prst="line">
+            <a:avLst/>
+          </a:prstGeom>
+          <a:noFill/>
+          <a:ln w="15875">
+            <a:solidFill>
+              <a:srgbClr val="111111"/>
+            </a:solidFill>
+            <a:prstDash val="solid"/>
+          </a:ln>
+        </p:spPr>
+      </p:sp>
+      <p:sp>
+        <p:nvSpPr>
+          <p:cNvPr id="8" name="Shape 6"/>
+          <p:cNvSpPr/>
+          <p:nvPr/>
+        </p:nvSpPr>
+        <p:spPr>
+          <a:xfrm>
+            <a:off x="640080" y="1239926"/>
+            <a:ext cx="301752" cy="241402"/>
+          </a:xfrm>
+          <a:prstGeom prst="line">
+            <a:avLst/>
+          </a:prstGeom>
+          <a:noFill/>
+          <a:ln w="15875">
+            <a:solidFill>
+              <a:srgbClr val="111111"/>
+            </a:solidFill>
+            <a:prstDash val="solid"/>
+          </a:ln>
+        </p:spPr>
+      </p:sp>
+      <p:sp>
+        <p:nvSpPr>
+          <p:cNvPr id="9" name="Shape 7"/>
+          <p:cNvSpPr/>
+          <p:nvPr/>
+        </p:nvSpPr>
+        <p:spPr>
+          <a:xfrm flipV="1">
+            <a:off x="941832" y="1239926"/>
+            <a:ext cx="301752" cy="241402"/>
+          </a:xfrm>
+          <a:prstGeom prst="line">
+            <a:avLst/>
+          </a:prstGeom>
+          <a:noFill/>
+          <a:ln w="15875">
+            <a:solidFill>
+              <a:srgbClr val="111111"/>
+            </a:solidFill>
+            <a:prstDash val="solid"/>
+          </a:ln>
+        </p:spPr>
+      </p:sp>
+      <p:sp>
+        <p:nvSpPr>
+          <p:cNvPr id="10" name="Text 8"/>
+          <p:cNvSpPr/>
+          <p:nvPr/>
+        </p:nvSpPr>
+        <p:spPr>
+          <a:xfrm>
+            <a:off x="640080" y="1901952"/>
+            <a:ext cx="7498080" cy="237744"/>
           </a:xfrm>
           <a:prstGeom prst="rect">
             <a:avLst/>
@@ -1651,9 +1862,9 @@
               <a:buNone/>
             </a:pPr>
             <a:r>
-              <a:rPr lang="en-US" sz="1200" b="1" spc="160" kern="0" dirty="0">
-                <a:solidFill>
-                  <a:srgbClr val="FF4A1C"/>
+              <a:rPr lang="en-US" sz="950" spc="260" kern="0" dirty="0">
+                <a:solidFill>
+                  <a:srgbClr val="8A8A8A"/>
                 </a:solidFill>
                 <a:latin typeface="Pretendard" pitchFamily="34" charset="0"/>
                 <a:ea typeface="Pretendard" pitchFamily="34" charset="-122"/>
@@ -1661,62 +1872,62 @@
               </a:rPr>
               <a:t>WEEK 15  ·  PHASE 3 완성과 발표</a:t>
             </a:r>
-            <a:endParaRPr lang="en-US" sz="1200" dirty="0"/>
-          </a:p>
-        </p:txBody>
-      </p:sp>
-      <p:sp>
-        <p:nvSpPr>
-          <p:cNvPr id="4" name="Text 2"/>
-          <p:cNvSpPr/>
-          <p:nvPr/>
-        </p:nvSpPr>
-        <p:spPr>
-          <a:xfrm>
-            <a:off x="640080" y="1737360"/>
-            <a:ext cx="7315200" cy="1225296"/>
-          </a:xfrm>
-          <a:prstGeom prst="rect">
-            <a:avLst/>
-          </a:prstGeom>
-          <a:noFill/>
-          <a:ln/>
-        </p:spPr>
-        <p:txBody>
-          <a:bodyPr wrap="square" lIns="0" tIns="0" rIns="0" bIns="0" rtlCol="0" anchor="ctr"/>
+            <a:endParaRPr lang="en-US" sz="950" dirty="0"/>
+          </a:p>
+        </p:txBody>
+      </p:sp>
+      <p:sp>
+        <p:nvSpPr>
+          <p:cNvPr id="11" name="Text 9"/>
+          <p:cNvSpPr/>
+          <p:nvPr/>
+        </p:nvSpPr>
+        <p:spPr>
+          <a:xfrm>
+            <a:off x="640080" y="2194560"/>
+            <a:ext cx="8595360" cy="1225296"/>
+          </a:xfrm>
+          <a:prstGeom prst="rect">
+            <a:avLst/>
+          </a:prstGeom>
+          <a:noFill/>
+          <a:ln/>
+        </p:spPr>
+        <p:txBody>
+          <a:bodyPr wrap="square" lIns="0" tIns="0" rIns="0" bIns="0" rtlCol="0" anchor="t"/>
           <a:lstStyle/>
           <a:p>
             <a:pPr indent="0" marL="0">
               <a:lnSpc>
-                <a:spcPct val="116000"/>
+                <a:spcPct val="112000"/>
               </a:lnSpc>
               <a:buNone/>
             </a:pPr>
             <a:r>
-              <a:rPr lang="en-US" sz="4200" b="1" dirty="0">
-                <a:solidFill>
-                  <a:srgbClr val="FFFFFF"/>
-                </a:solidFill>
-                <a:latin typeface="Pretendard" pitchFamily="34" charset="0"/>
-                <a:ea typeface="Pretendard" pitchFamily="34" charset="-122"/>
-                <a:cs typeface="Pretendard" pitchFamily="34" charset="-120"/>
+              <a:rPr lang="en-US" sz="4800" dirty="0">
+                <a:solidFill>
+                  <a:srgbClr val="111111"/>
+                </a:solidFill>
+                <a:latin typeface="Pretendard Black" pitchFamily="34" charset="0"/>
+                <a:ea typeface="Pretendard Black" pitchFamily="34" charset="-122"/>
+                <a:cs typeface="Pretendard Black" pitchFamily="34" charset="-120"/>
               </a:rPr>
               <a:t>기말 발표 및 종합 평가</a:t>
             </a:r>
-            <a:endParaRPr lang="en-US" sz="4200" dirty="0"/>
-          </a:p>
-        </p:txBody>
-      </p:sp>
-      <p:sp>
-        <p:nvSpPr>
-          <p:cNvPr id="5" name="Text 3"/>
-          <p:cNvSpPr/>
-          <p:nvPr/>
-        </p:nvSpPr>
-        <p:spPr>
-          <a:xfrm>
-            <a:off x="640080" y="3035808"/>
-            <a:ext cx="7132320" cy="640080"/>
+            <a:endParaRPr lang="en-US" sz="4800" dirty="0"/>
+          </a:p>
+        </p:txBody>
+      </p:sp>
+      <p:sp>
+        <p:nvSpPr>
+          <p:cNvPr id="12" name="Text 10"/>
+          <p:cNvSpPr/>
+          <p:nvPr/>
+        </p:nvSpPr>
+        <p:spPr>
+          <a:xfrm>
+            <a:off x="640080" y="3547872"/>
+            <a:ext cx="7863840" cy="694944"/>
           </a:xfrm>
           <a:prstGeom prst="rect">
             <a:avLst/>
@@ -1730,14 +1941,14 @@
           <a:p>
             <a:pPr indent="0" marL="0">
               <a:lnSpc>
-                <a:spcPct val="124000"/>
+                <a:spcPct val="130000"/>
               </a:lnSpc>
               <a:buNone/>
             </a:pPr>
             <a:r>
-              <a:rPr lang="en-US" sz="1700" dirty="0">
-                <a:solidFill>
-                  <a:srgbClr val="C9CDD6"/>
+              <a:rPr lang="en-US" sz="1600" dirty="0">
+                <a:solidFill>
+                  <a:srgbClr val="6E6E6E"/>
                 </a:solidFill>
                 <a:latin typeface="Pretendard Light" pitchFamily="34" charset="0"/>
                 <a:ea typeface="Pretendard Light" pitchFamily="34" charset="-122"/>
@@ -1745,19 +1956,19 @@
               </a:rPr>
               <a:t>완성된 포트폴리오를 발표하고,</a:t>
             </a:r>
-            <a:endParaRPr lang="en-US" sz="1700" dirty="0"/>
+            <a:endParaRPr lang="en-US" sz="1600" dirty="0"/>
           </a:p>
           <a:p>
             <a:pPr indent="0" marL="0">
               <a:lnSpc>
-                <a:spcPct val="124000"/>
+                <a:spcPct val="130000"/>
               </a:lnSpc>
               <a:buNone/>
             </a:pPr>
             <a:r>
-              <a:rPr lang="en-US" sz="1700" dirty="0">
-                <a:solidFill>
-                  <a:srgbClr val="C9CDD6"/>
+              <a:rPr lang="en-US" sz="1600" dirty="0">
+                <a:solidFill>
+                  <a:srgbClr val="6E6E6E"/>
                 </a:solidFill>
                 <a:latin typeface="Pretendard Light" pitchFamily="34" charset="0"/>
                 <a:ea typeface="Pretendard Light" pitchFamily="34" charset="-122"/>
@@ -1765,30 +1976,30 @@
               </a:rPr>
               <a:t>한 학기 성과를 점검해 다음 단계로 넘깁니다.</a:t>
             </a:r>
-            <a:endParaRPr lang="en-US" sz="1700" dirty="0"/>
-          </a:p>
-        </p:txBody>
-      </p:sp>
-      <p:sp>
-        <p:nvSpPr>
-          <p:cNvPr id="6" name="Shape 4"/>
-          <p:cNvSpPr/>
-          <p:nvPr/>
-        </p:nvSpPr>
-        <p:spPr>
-          <a:xfrm>
-            <a:off x="640080" y="3840480"/>
-            <a:ext cx="2926080" cy="9144"/>
+            <a:endParaRPr lang="en-US" sz="1600" dirty="0"/>
+          </a:p>
+        </p:txBody>
+      </p:sp>
+      <p:sp>
+        <p:nvSpPr>
+          <p:cNvPr id="13" name="Shape 11"/>
+          <p:cNvSpPr/>
+          <p:nvPr/>
+        </p:nvSpPr>
+        <p:spPr>
+          <a:xfrm>
+            <a:off x="640080" y="4443984"/>
+            <a:ext cx="2743200" cy="7315"/>
           </a:xfrm>
           <a:prstGeom prst="rect">
             <a:avLst/>
           </a:prstGeom>
           <a:solidFill>
-            <a:srgbClr val="3A3F4B"/>
+            <a:srgbClr val="111111"/>
           </a:solidFill>
           <a:ln w="12700">
             <a:solidFill>
-              <a:srgbClr val="3A3F4B"/>
+              <a:srgbClr val="111111"/>
             </a:solidFill>
             <a:prstDash val="solid"/>
           </a:ln>
@@ -1796,14 +2007,14 @@
       </p:sp>
       <p:sp>
         <p:nvSpPr>
-          <p:cNvPr id="7" name="Text 5"/>
-          <p:cNvSpPr/>
-          <p:nvPr/>
-        </p:nvSpPr>
-        <p:spPr>
-          <a:xfrm>
-            <a:off x="640080" y="4059936"/>
-            <a:ext cx="914400" cy="310896"/>
+          <p:cNvPr id="14" name="Text 12"/>
+          <p:cNvSpPr/>
+          <p:nvPr/>
+        </p:nvSpPr>
+        <p:spPr>
+          <a:xfrm>
+            <a:off x="640080" y="4645152"/>
+            <a:ext cx="914400" cy="292608"/>
           </a:xfrm>
           <a:prstGeom prst="rect">
             <a:avLst/>
@@ -1819,9 +2030,9 @@
               <a:buNone/>
             </a:pPr>
             <a:r>
-              <a:rPr lang="en-US" sz="1100" b="1" dirty="0">
-                <a:solidFill>
-                  <a:srgbClr val="9AA0AA"/>
+              <a:rPr lang="en-US" sz="950" spc="140" kern="0" dirty="0">
+                <a:solidFill>
+                  <a:srgbClr val="9B9B9B"/>
                 </a:solidFill>
                 <a:latin typeface="Pretendard" pitchFamily="34" charset="0"/>
                 <a:ea typeface="Pretendard" pitchFamily="34" charset="-122"/>
@@ -1829,20 +2040,20 @@
               </a:rPr>
               <a:t>과목</a:t>
             </a:r>
-            <a:endParaRPr lang="en-US" sz="1100" dirty="0"/>
-          </a:p>
-        </p:txBody>
-      </p:sp>
-      <p:sp>
-        <p:nvSpPr>
-          <p:cNvPr id="8" name="Text 6"/>
-          <p:cNvSpPr/>
-          <p:nvPr/>
-        </p:nvSpPr>
-        <p:spPr>
-          <a:xfrm>
-            <a:off x="1645920" y="4059936"/>
-            <a:ext cx="6400800" cy="310896"/>
+            <a:endParaRPr lang="en-US" sz="950" dirty="0"/>
+          </a:p>
+        </p:txBody>
+      </p:sp>
+      <p:sp>
+        <p:nvSpPr>
+          <p:cNvPr id="15" name="Text 13"/>
+          <p:cNvSpPr/>
+          <p:nvPr/>
+        </p:nvSpPr>
+        <p:spPr>
+          <a:xfrm>
+            <a:off x="1645920" y="4645152"/>
+            <a:ext cx="7680960" cy="292608"/>
           </a:xfrm>
           <a:prstGeom prst="rect">
             <a:avLst/>
@@ -1858,9 +2069,9 @@
               <a:buNone/>
             </a:pPr>
             <a:r>
-              <a:rPr lang="en-US" sz="1250" dirty="0">
-                <a:solidFill>
-                  <a:srgbClr val="DDE0E6"/>
+              <a:rPr lang="en-US" sz="1200" dirty="0">
+                <a:solidFill>
+                  <a:srgbClr val="1F1F1F"/>
                 </a:solidFill>
                 <a:latin typeface="Pretendard" pitchFamily="34" charset="0"/>
                 <a:ea typeface="Pretendard" pitchFamily="34" charset="-122"/>
@@ -1868,20 +2079,20 @@
               </a:rPr>
               <a:t>포트폴리오제작 · 실내·산업디자인학과 3학년</a:t>
             </a:r>
-            <a:endParaRPr lang="en-US" sz="1250" dirty="0"/>
-          </a:p>
-        </p:txBody>
-      </p:sp>
-      <p:sp>
-        <p:nvSpPr>
-          <p:cNvPr id="9" name="Text 7"/>
-          <p:cNvSpPr/>
-          <p:nvPr/>
-        </p:nvSpPr>
-        <p:spPr>
-          <a:xfrm>
-            <a:off x="640080" y="4443984"/>
-            <a:ext cx="914400" cy="310896"/>
+            <a:endParaRPr lang="en-US" sz="1200" dirty="0"/>
+          </a:p>
+        </p:txBody>
+      </p:sp>
+      <p:sp>
+        <p:nvSpPr>
+          <p:cNvPr id="16" name="Text 14"/>
+          <p:cNvSpPr/>
+          <p:nvPr/>
+        </p:nvSpPr>
+        <p:spPr>
+          <a:xfrm>
+            <a:off x="640080" y="5029200"/>
+            <a:ext cx="914400" cy="292608"/>
           </a:xfrm>
           <a:prstGeom prst="rect">
             <a:avLst/>
@@ -1897,9 +2108,9 @@
               <a:buNone/>
             </a:pPr>
             <a:r>
-              <a:rPr lang="en-US" sz="1100" b="1" dirty="0">
-                <a:solidFill>
-                  <a:srgbClr val="9AA0AA"/>
+              <a:rPr lang="en-US" sz="950" spc="140" kern="0" dirty="0">
+                <a:solidFill>
+                  <a:srgbClr val="9B9B9B"/>
                 </a:solidFill>
                 <a:latin typeface="Pretendard" pitchFamily="34" charset="0"/>
                 <a:ea typeface="Pretendard" pitchFamily="34" charset="-122"/>
@@ -1907,20 +2118,20 @@
               </a:rPr>
               <a:t>오늘</a:t>
             </a:r>
-            <a:endParaRPr lang="en-US" sz="1100" dirty="0"/>
-          </a:p>
-        </p:txBody>
-      </p:sp>
-      <p:sp>
-        <p:nvSpPr>
-          <p:cNvPr id="10" name="Text 8"/>
-          <p:cNvSpPr/>
-          <p:nvPr/>
-        </p:nvSpPr>
-        <p:spPr>
-          <a:xfrm>
-            <a:off x="1645920" y="4443984"/>
-            <a:ext cx="6400800" cy="310896"/>
+            <a:endParaRPr lang="en-US" sz="950" dirty="0"/>
+          </a:p>
+        </p:txBody>
+      </p:sp>
+      <p:sp>
+        <p:nvSpPr>
+          <p:cNvPr id="17" name="Text 15"/>
+          <p:cNvSpPr/>
+          <p:nvPr/>
+        </p:nvSpPr>
+        <p:spPr>
+          <a:xfrm>
+            <a:off x="1645920" y="5029200"/>
+            <a:ext cx="7680960" cy="292608"/>
           </a:xfrm>
           <a:prstGeom prst="rect">
             <a:avLst/>
@@ -1936,9 +2147,9 @@
               <a:buNone/>
             </a:pPr>
             <a:r>
-              <a:rPr lang="en-US" sz="1250" dirty="0">
-                <a:solidFill>
-                  <a:srgbClr val="DDE0E6"/>
+              <a:rPr lang="en-US" sz="1200" dirty="0">
+                <a:solidFill>
+                  <a:srgbClr val="1F1F1F"/>
                 </a:solidFill>
                 <a:latin typeface="Pretendard" pitchFamily="34" charset="0"/>
                 <a:ea typeface="Pretendard" pitchFamily="34" charset="-122"/>
@@ -1946,20 +2157,20 @@
               </a:rPr>
               <a:t>90분 — 개인별 최종 발표 각 7분 · 종합 피드백 30분</a:t>
             </a:r>
-            <a:endParaRPr lang="en-US" sz="1250" dirty="0"/>
-          </a:p>
-        </p:txBody>
-      </p:sp>
-      <p:sp>
-        <p:nvSpPr>
-          <p:cNvPr id="11" name="Text 9"/>
-          <p:cNvSpPr/>
-          <p:nvPr/>
-        </p:nvSpPr>
-        <p:spPr>
-          <a:xfrm>
-            <a:off x="640080" y="4828032"/>
-            <a:ext cx="914400" cy="310896"/>
+            <a:endParaRPr lang="en-US" sz="1200" dirty="0"/>
+          </a:p>
+        </p:txBody>
+      </p:sp>
+      <p:sp>
+        <p:nvSpPr>
+          <p:cNvPr id="18" name="Text 16"/>
+          <p:cNvSpPr/>
+          <p:nvPr/>
+        </p:nvSpPr>
+        <p:spPr>
+          <a:xfrm>
+            <a:off x="640080" y="5413248"/>
+            <a:ext cx="914400" cy="292608"/>
           </a:xfrm>
           <a:prstGeom prst="rect">
             <a:avLst/>
@@ -1975,9 +2186,9 @@
               <a:buNone/>
             </a:pPr>
             <a:r>
-              <a:rPr lang="en-US" sz="1100" b="1" dirty="0">
-                <a:solidFill>
-                  <a:srgbClr val="9AA0AA"/>
+              <a:rPr lang="en-US" sz="950" spc="140" kern="0" dirty="0">
+                <a:solidFill>
+                  <a:srgbClr val="9B9B9B"/>
                 </a:solidFill>
                 <a:latin typeface="Pretendard" pitchFamily="34" charset="0"/>
                 <a:ea typeface="Pretendard" pitchFamily="34" charset="-122"/>
@@ -1985,20 +2196,20 @@
               </a:rPr>
               <a:t>제출물</a:t>
             </a:r>
-            <a:endParaRPr lang="en-US" sz="1100" dirty="0"/>
-          </a:p>
-        </p:txBody>
-      </p:sp>
-      <p:sp>
-        <p:nvSpPr>
-          <p:cNvPr id="12" name="Text 10"/>
-          <p:cNvSpPr/>
-          <p:nvPr/>
-        </p:nvSpPr>
-        <p:spPr>
-          <a:xfrm>
-            <a:off x="1645920" y="4828032"/>
-            <a:ext cx="6400800" cy="310896"/>
+            <a:endParaRPr lang="en-US" sz="950" dirty="0"/>
+          </a:p>
+        </p:txBody>
+      </p:sp>
+      <p:sp>
+        <p:nvSpPr>
+          <p:cNvPr id="19" name="Text 17"/>
+          <p:cNvSpPr/>
+          <p:nvPr/>
+        </p:nvSpPr>
+        <p:spPr>
+          <a:xfrm>
+            <a:off x="1645920" y="5413248"/>
+            <a:ext cx="7680960" cy="292608"/>
           </a:xfrm>
           <a:prstGeom prst="rect">
             <a:avLst/>
@@ -2014,9 +2225,9 @@
               <a:buNone/>
             </a:pPr>
             <a:r>
-              <a:rPr lang="en-US" sz="1250" dirty="0">
-                <a:solidFill>
-                  <a:srgbClr val="DDE0E6"/>
+              <a:rPr lang="en-US" sz="1200" dirty="0">
+                <a:solidFill>
+                  <a:srgbClr val="1F1F1F"/>
                 </a:solidFill>
                 <a:latin typeface="Pretendard" pitchFamily="34" charset="0"/>
                 <a:ea typeface="Pretendard" pitchFamily="34" charset="-122"/>
@@ -2024,9 +2235,73 @@
               </a:rPr>
               <a:t>최종 포트폴리오 (링크 + PDF)</a:t>
             </a:r>
-            <a:endParaRPr lang="en-US" sz="1250" dirty="0"/>
-          </a:p>
-        </p:txBody>
+            <a:endParaRPr lang="en-US" sz="1200" dirty="0"/>
+          </a:p>
+        </p:txBody>
+      </p:sp>
+      <p:sp>
+        <p:nvSpPr>
+          <p:cNvPr id="20" name="Text 18"/>
+          <p:cNvSpPr/>
+          <p:nvPr/>
+        </p:nvSpPr>
+        <p:spPr>
+          <a:xfrm rot="16200000">
+            <a:off x="10436047" y="3291840"/>
+            <a:ext cx="2743200" cy="274320"/>
+          </a:xfrm>
+          <a:prstGeom prst="rect">
+            <a:avLst/>
+          </a:prstGeom>
+          <a:noFill/>
+          <a:ln/>
+        </p:spPr>
+        <p:txBody>
+          <a:bodyPr wrap="square" lIns="0" tIns="0" rIns="0" bIns="0" rtlCol="0" anchor="ctr"/>
+          <a:lstStyle/>
+          <a:p>
+            <a:pPr algn="ctr" indent="0" marL="0">
+              <a:buNone/>
+            </a:pPr>
+            <a:r>
+              <a:rPr lang="en-US" sz="850" spc="260" kern="0" dirty="0">
+                <a:solidFill>
+                  <a:srgbClr val="9B9B9B"/>
+                </a:solidFill>
+                <a:latin typeface="Pretendard" pitchFamily="34" charset="0"/>
+                <a:ea typeface="Pretendard" pitchFamily="34" charset="-122"/>
+                <a:cs typeface="Pretendard" pitchFamily="34" charset="-120"/>
+              </a:rPr>
+              <a:t>WONKWANG UNIV · 2026-2</a:t>
+            </a:r>
+            <a:endParaRPr lang="en-US" sz="850" dirty="0"/>
+          </a:p>
+        </p:txBody>
+      </p:sp>
+      <p:sp>
+        <p:nvSpPr>
+          <p:cNvPr id="21" name="Shape 19"/>
+          <p:cNvSpPr/>
+          <p:nvPr/>
+        </p:nvSpPr>
+        <p:spPr>
+          <a:xfrm>
+            <a:off x="640080" y="6291072"/>
+            <a:ext cx="10911535" cy="7315"/>
+          </a:xfrm>
+          <a:prstGeom prst="rect">
+            <a:avLst/>
+          </a:prstGeom>
+          <a:solidFill>
+            <a:srgbClr val="DCDCDC"/>
+          </a:solidFill>
+          <a:ln w="12700">
+            <a:solidFill>
+              <a:srgbClr val="DCDCDC"/>
+            </a:solidFill>
+            <a:prstDash val="solid"/>
+          </a:ln>
+        </p:spPr>
       </p:sp>
     </p:spTree>
   </p:cSld>
@@ -2068,8 +2343,8 @@
         </p:nvSpPr>
         <p:spPr>
           <a:xfrm>
-            <a:off x="640080" y="566928"/>
-            <a:ext cx="10911535" cy="237744"/>
+            <a:off x="640080" y="274320"/>
+            <a:ext cx="3657600" cy="219456"/>
           </a:xfrm>
           <a:prstGeom prst="rect">
             <a:avLst/>
@@ -2085,17 +2360,17 @@
               <a:buNone/>
             </a:pPr>
             <a:r>
-              <a:rPr lang="en-US" sz="1100" b="1" spc="140" kern="0" dirty="0">
-                <a:solidFill>
-                  <a:srgbClr val="FF4A1C"/>
-                </a:solidFill>
-                <a:latin typeface="Pretendard" pitchFamily="34" charset="0"/>
-                <a:ea typeface="Pretendard" pitchFamily="34" charset="-122"/>
-                <a:cs typeface="Pretendard" pitchFamily="34" charset="-120"/>
-              </a:rPr>
-              <a:t>TODAY</a:t>
-            </a:r>
-            <a:endParaRPr lang="en-US" sz="1100" dirty="0"/>
+              <a:rPr lang="en-US" sz="900" spc="120" kern="0" dirty="0">
+                <a:solidFill>
+                  <a:srgbClr val="8A8A8A"/>
+                </a:solidFill>
+                <a:latin typeface="Pretendard" pitchFamily="34" charset="0"/>
+                <a:ea typeface="Pretendard" pitchFamily="34" charset="-122"/>
+                <a:cs typeface="Pretendard" pitchFamily="34" charset="-120"/>
+              </a:rPr>
+              <a:t>포트폴리오제작</a:t>
+            </a:r>
+            <a:endParaRPr lang="en-US" sz="900" dirty="0"/>
           </a:p>
         </p:txBody>
       </p:sp>
@@ -2107,34 +2382,34 @@
         </p:nvSpPr>
         <p:spPr>
           <a:xfrm>
-            <a:off x="640080" y="859536"/>
-            <a:ext cx="10911535" cy="512064"/>
-          </a:xfrm>
-          <a:prstGeom prst="rect">
-            <a:avLst/>
-          </a:prstGeom>
-          <a:noFill/>
-          <a:ln/>
-        </p:spPr>
-        <p:txBody>
-          <a:bodyPr wrap="square" lIns="0" tIns="0" rIns="0" bIns="0" rtlCol="0" anchor="ctr"/>
-          <a:lstStyle/>
-          <a:p>
-            <a:pPr indent="0" marL="0">
-              <a:buNone/>
-            </a:pPr>
-            <a:r>
-              <a:rPr lang="en-US" sz="2800" b="1" dirty="0">
-                <a:solidFill>
-                  <a:srgbClr val="14161B"/>
-                </a:solidFill>
-                <a:latin typeface="Pretendard" pitchFamily="34" charset="0"/>
-                <a:ea typeface="Pretendard" pitchFamily="34" charset="-122"/>
-                <a:cs typeface="Pretendard" pitchFamily="34" charset="-120"/>
-              </a:rPr>
-              <a:t>오늘의 90분</a:t>
-            </a:r>
-            <a:endParaRPr lang="en-US" sz="2800" dirty="0"/>
+            <a:off x="4480560" y="274320"/>
+            <a:ext cx="4572000" cy="219456"/>
+          </a:xfrm>
+          <a:prstGeom prst="rect">
+            <a:avLst/>
+          </a:prstGeom>
+          <a:noFill/>
+          <a:ln/>
+        </p:spPr>
+        <p:txBody>
+          <a:bodyPr wrap="square" lIns="0" tIns="0" rIns="0" bIns="0" rtlCol="0" anchor="ctr"/>
+          <a:lstStyle/>
+          <a:p>
+            <a:pPr algn="ctr" indent="0" marL="0">
+              <a:buNone/>
+            </a:pPr>
+            <a:r>
+              <a:rPr lang="en-US" sz="900" spc="120" kern="0" dirty="0">
+                <a:solidFill>
+                  <a:srgbClr val="8A8A8A"/>
+                </a:solidFill>
+                <a:latin typeface="Pretendard" pitchFamily="34" charset="0"/>
+                <a:ea typeface="Pretendard" pitchFamily="34" charset="-122"/>
+                <a:cs typeface="Pretendard" pitchFamily="34" charset="-120"/>
+              </a:rPr>
+              <a:t>PHASE 3 완성과 발표</a:t>
+            </a:r>
+            <a:endParaRPr lang="en-US" sz="900" dirty="0"/>
           </a:p>
         </p:txBody>
       </p:sp>
@@ -2146,125 +2421,8 @@
         </p:nvSpPr>
         <p:spPr>
           <a:xfrm>
-            <a:off x="640080" y="1371600"/>
-            <a:ext cx="10911535" cy="237744"/>
-          </a:xfrm>
-          <a:prstGeom prst="rect">
-            <a:avLst/>
-          </a:prstGeom>
-          <a:noFill/>
-          <a:ln/>
-        </p:spPr>
-        <p:txBody>
-          <a:bodyPr wrap="square" lIns="0" tIns="0" rIns="0" bIns="0" rtlCol="0" anchor="ctr"/>
-          <a:lstStyle/>
-          <a:p>
-            <a:pPr indent="0" marL="0">
-              <a:buNone/>
-            </a:pPr>
-            <a:r>
-              <a:rPr lang="en-US" sz="1200" dirty="0">
-                <a:solidFill>
-                  <a:srgbClr val="6B7280"/>
-                </a:solidFill>
-                <a:latin typeface="Pretendard" pitchFamily="34" charset="0"/>
-                <a:ea typeface="Pretendard" pitchFamily="34" charset="-122"/>
-                <a:cs typeface="Pretendard" pitchFamily="34" charset="-120"/>
-              </a:rPr>
-              <a:t>개인별 최종 발표 각 7분 · 종합 피드백 30분</a:t>
-            </a:r>
-            <a:endParaRPr lang="en-US" sz="1200" dirty="0"/>
-          </a:p>
-        </p:txBody>
-      </p:sp>
-      <p:sp>
-        <p:nvSpPr>
-          <p:cNvPr id="5" name="Text 3"/>
-          <p:cNvSpPr/>
-          <p:nvPr/>
-        </p:nvSpPr>
-        <p:spPr>
-          <a:xfrm>
-            <a:off x="640080" y="1719072"/>
-            <a:ext cx="1600200" cy="932688"/>
-          </a:xfrm>
-          <a:prstGeom prst="rect">
-            <a:avLst/>
-          </a:prstGeom>
-          <a:noFill/>
-          <a:ln/>
-        </p:spPr>
-        <p:txBody>
-          <a:bodyPr wrap="square" lIns="0" tIns="0" rIns="0" bIns="0" rtlCol="0" anchor="ctr"/>
-          <a:lstStyle/>
-          <a:p>
-            <a:pPr indent="0" marL="0">
-              <a:buNone/>
-            </a:pPr>
-            <a:r>
-              <a:rPr lang="en-US" sz="1100" b="1" dirty="0">
-                <a:solidFill>
-                  <a:srgbClr val="FF4A1C"/>
-                </a:solidFill>
-                <a:latin typeface="Pretendard" pitchFamily="34" charset="0"/>
-                <a:ea typeface="Pretendard" pitchFamily="34" charset="-122"/>
-                <a:cs typeface="Pretendard" pitchFamily="34" charset="-120"/>
-              </a:rPr>
-              <a:t>00:00–01:00</a:t>
-            </a:r>
-            <a:endParaRPr lang="en-US" sz="1100" dirty="0"/>
-          </a:p>
-        </p:txBody>
-      </p:sp>
-      <p:sp>
-        <p:nvSpPr>
-          <p:cNvPr id="6" name="Text 4"/>
-          <p:cNvSpPr/>
-          <p:nvPr/>
-        </p:nvSpPr>
-        <p:spPr>
-          <a:xfrm>
-            <a:off x="2377440" y="1719072"/>
-            <a:ext cx="6888175" cy="932688"/>
-          </a:xfrm>
-          <a:prstGeom prst="rect">
-            <a:avLst/>
-          </a:prstGeom>
-          <a:noFill/>
-          <a:ln/>
-        </p:spPr>
-        <p:txBody>
-          <a:bodyPr wrap="square" lIns="0" tIns="0" rIns="0" bIns="0" rtlCol="0" anchor="ctr"/>
-          <a:lstStyle/>
-          <a:p>
-            <a:pPr indent="0" marL="0">
-              <a:buNone/>
-            </a:pPr>
-            <a:r>
-              <a:rPr lang="en-US" sz="1300" b="1" dirty="0">
-                <a:solidFill>
-                  <a:srgbClr val="14161B"/>
-                </a:solidFill>
-                <a:latin typeface="Pretendard" pitchFamily="34" charset="0"/>
-                <a:ea typeface="Pretendard" pitchFamily="34" charset="-122"/>
-                <a:cs typeface="Pretendard" pitchFamily="34" charset="-120"/>
-              </a:rPr>
-              <a:t>개인별 최종 발표 · 각 7분</a:t>
-            </a:r>
-            <a:endParaRPr lang="en-US" sz="1300" dirty="0"/>
-          </a:p>
-        </p:txBody>
-      </p:sp>
-      <p:sp>
-        <p:nvSpPr>
-          <p:cNvPr id="7" name="Text 5"/>
-          <p:cNvSpPr/>
-          <p:nvPr/>
-        </p:nvSpPr>
-        <p:spPr>
-          <a:xfrm>
-            <a:off x="9265615" y="1719072"/>
-            <a:ext cx="2286000" cy="932688"/>
+            <a:off x="8808415" y="274320"/>
+            <a:ext cx="2743200" cy="219456"/>
           </a:xfrm>
           <a:prstGeom prst="rect">
             <a:avLst/>
@@ -2280,40 +2438,40 @@
               <a:buNone/>
             </a:pPr>
             <a:r>
-              <a:rPr lang="en-US" sz="1100" dirty="0">
-                <a:solidFill>
-                  <a:srgbClr val="6B7280"/>
-                </a:solidFill>
-                <a:latin typeface="Pretendard" pitchFamily="34" charset="0"/>
-                <a:ea typeface="Pretendard" pitchFamily="34" charset="-122"/>
-                <a:cs typeface="Pretendard" pitchFamily="34" charset="-120"/>
-              </a:rPr>
-              <a:t>발표 + 질의</a:t>
-            </a:r>
-            <a:endParaRPr lang="en-US" sz="1100" dirty="0"/>
-          </a:p>
-        </p:txBody>
-      </p:sp>
-      <p:sp>
-        <p:nvSpPr>
-          <p:cNvPr id="8" name="Shape 6"/>
-          <p:cNvSpPr/>
-          <p:nvPr/>
-        </p:nvSpPr>
-        <p:spPr>
-          <a:xfrm>
-            <a:off x="640080" y="2633472"/>
-            <a:ext cx="10911535" cy="9144"/>
+              <a:rPr lang="en-US" sz="900" spc="200" kern="0" dirty="0">
+                <a:solidFill>
+                  <a:srgbClr val="8A8A8A"/>
+                </a:solidFill>
+                <a:latin typeface="Pretendard" pitchFamily="34" charset="0"/>
+                <a:ea typeface="Pretendard" pitchFamily="34" charset="-122"/>
+                <a:cs typeface="Pretendard" pitchFamily="34" charset="-120"/>
+              </a:rPr>
+              <a:t>WEEK 15</a:t>
+            </a:r>
+            <a:endParaRPr lang="en-US" sz="900" dirty="0"/>
+          </a:p>
+        </p:txBody>
+      </p:sp>
+      <p:sp>
+        <p:nvSpPr>
+          <p:cNvPr id="5" name="Shape 3"/>
+          <p:cNvSpPr/>
+          <p:nvPr/>
+        </p:nvSpPr>
+        <p:spPr>
+          <a:xfrm>
+            <a:off x="640080" y="548640"/>
+            <a:ext cx="10911535" cy="7315"/>
           </a:xfrm>
           <a:prstGeom prst="rect">
             <a:avLst/>
           </a:prstGeom>
           <a:solidFill>
-            <a:srgbClr val="E4E6EB"/>
+            <a:srgbClr val="DCDCDC"/>
           </a:solidFill>
           <a:ln w="12700">
             <a:solidFill>
-              <a:srgbClr val="E4E6EB"/>
+              <a:srgbClr val="DCDCDC"/>
             </a:solidFill>
             <a:prstDash val="solid"/>
           </a:ln>
@@ -2321,14 +2479,14 @@
       </p:sp>
       <p:sp>
         <p:nvSpPr>
-          <p:cNvPr id="9" name="Text 7"/>
-          <p:cNvSpPr/>
-          <p:nvPr/>
-        </p:nvSpPr>
-        <p:spPr>
-          <a:xfrm>
-            <a:off x="640080" y="2651760"/>
-            <a:ext cx="1600200" cy="932688"/>
+          <p:cNvPr id="6" name="Text 4"/>
+          <p:cNvSpPr/>
+          <p:nvPr/>
+        </p:nvSpPr>
+        <p:spPr>
+          <a:xfrm>
+            <a:off x="640080" y="640080"/>
+            <a:ext cx="10911535" cy="219456"/>
           </a:xfrm>
           <a:prstGeom prst="rect">
             <a:avLst/>
@@ -2344,30 +2502,30 @@
               <a:buNone/>
             </a:pPr>
             <a:r>
-              <a:rPr lang="en-US" sz="1100" b="1" dirty="0">
-                <a:solidFill>
-                  <a:srgbClr val="FF4A1C"/>
-                </a:solidFill>
-                <a:latin typeface="Pretendard" pitchFamily="34" charset="0"/>
-                <a:ea typeface="Pretendard" pitchFamily="34" charset="-122"/>
-                <a:cs typeface="Pretendard" pitchFamily="34" charset="-120"/>
-              </a:rPr>
-              <a:t>01:00–01:20</a:t>
-            </a:r>
-            <a:endParaRPr lang="en-US" sz="1100" dirty="0"/>
-          </a:p>
-        </p:txBody>
-      </p:sp>
-      <p:sp>
-        <p:nvSpPr>
-          <p:cNvPr id="10" name="Text 8"/>
-          <p:cNvSpPr/>
-          <p:nvPr/>
-        </p:nvSpPr>
-        <p:spPr>
-          <a:xfrm>
-            <a:off x="2377440" y="2651760"/>
-            <a:ext cx="6888175" cy="932688"/>
+              <a:rPr lang="en-US" sz="950" spc="260" kern="0" dirty="0">
+                <a:solidFill>
+                  <a:srgbClr val="8A8A8A"/>
+                </a:solidFill>
+                <a:latin typeface="Pretendard" pitchFamily="34" charset="0"/>
+                <a:ea typeface="Pretendard" pitchFamily="34" charset="-122"/>
+                <a:cs typeface="Pretendard" pitchFamily="34" charset="-120"/>
+              </a:rPr>
+              <a:t>TODAY</a:t>
+            </a:r>
+            <a:endParaRPr lang="en-US" sz="950" dirty="0"/>
+          </a:p>
+        </p:txBody>
+      </p:sp>
+      <p:sp>
+        <p:nvSpPr>
+          <p:cNvPr id="7" name="Text 5"/>
+          <p:cNvSpPr/>
+          <p:nvPr/>
+        </p:nvSpPr>
+        <p:spPr>
+          <a:xfrm>
+            <a:off x="640080" y="859536"/>
+            <a:ext cx="10911535" cy="475488"/>
           </a:xfrm>
           <a:prstGeom prst="rect">
             <a:avLst/>
@@ -2383,79 +2541,79 @@
               <a:buNone/>
             </a:pPr>
             <a:r>
-              <a:rPr lang="en-US" sz="1300" b="1" dirty="0">
-                <a:solidFill>
-                  <a:srgbClr val="14161B"/>
-                </a:solidFill>
-                <a:latin typeface="Pretendard" pitchFamily="34" charset="0"/>
-                <a:ea typeface="Pretendard" pitchFamily="34" charset="-122"/>
-                <a:cs typeface="Pretendard" pitchFamily="34" charset="-120"/>
-              </a:rPr>
-              <a:t>종합 피드백 및 총평</a:t>
-            </a:r>
-            <a:endParaRPr lang="en-US" sz="1300" dirty="0"/>
-          </a:p>
-        </p:txBody>
-      </p:sp>
-      <p:sp>
-        <p:nvSpPr>
-          <p:cNvPr id="11" name="Text 9"/>
-          <p:cNvSpPr/>
-          <p:nvPr/>
-        </p:nvSpPr>
-        <p:spPr>
-          <a:xfrm>
-            <a:off x="9265615" y="2651760"/>
-            <a:ext cx="2286000" cy="932688"/>
-          </a:xfrm>
-          <a:prstGeom prst="rect">
-            <a:avLst/>
-          </a:prstGeom>
-          <a:noFill/>
-          <a:ln/>
-        </p:spPr>
-        <p:txBody>
-          <a:bodyPr wrap="square" lIns="0" tIns="0" rIns="0" bIns="0" rtlCol="0" anchor="ctr"/>
-          <a:lstStyle/>
-          <a:p>
-            <a:pPr algn="r" indent="0" marL="0">
-              <a:buNone/>
-            </a:pPr>
-            <a:r>
-              <a:rPr lang="en-US" sz="1100" dirty="0">
-                <a:solidFill>
-                  <a:srgbClr val="6B7280"/>
-                </a:solidFill>
-                <a:latin typeface="Pretendard" pitchFamily="34" charset="0"/>
-                <a:ea typeface="Pretendard" pitchFamily="34" charset="-122"/>
-                <a:cs typeface="Pretendard" pitchFamily="34" charset="-120"/>
-              </a:rPr>
-              <a:t>강의</a:t>
-            </a:r>
-            <a:endParaRPr lang="en-US" sz="1100" dirty="0"/>
-          </a:p>
-        </p:txBody>
-      </p:sp>
-      <p:sp>
-        <p:nvSpPr>
-          <p:cNvPr id="12" name="Shape 10"/>
-          <p:cNvSpPr/>
-          <p:nvPr/>
-        </p:nvSpPr>
-        <p:spPr>
-          <a:xfrm>
-            <a:off x="640080" y="3566160"/>
-            <a:ext cx="10911535" cy="9144"/>
+              <a:rPr lang="en-US" sz="3000" dirty="0">
+                <a:solidFill>
+                  <a:srgbClr val="111111"/>
+                </a:solidFill>
+                <a:latin typeface="Pretendard Black" pitchFamily="34" charset="0"/>
+                <a:ea typeface="Pretendard Black" pitchFamily="34" charset="-122"/>
+                <a:cs typeface="Pretendard Black" pitchFamily="34" charset="-120"/>
+              </a:rPr>
+              <a:t>오늘의 90분</a:t>
+            </a:r>
+            <a:endParaRPr lang="en-US" sz="3000" dirty="0"/>
+          </a:p>
+        </p:txBody>
+      </p:sp>
+      <p:sp>
+        <p:nvSpPr>
+          <p:cNvPr id="8" name="Text 6"/>
+          <p:cNvSpPr/>
+          <p:nvPr/>
+        </p:nvSpPr>
+        <p:spPr>
+          <a:xfrm>
+            <a:off x="640080" y="1371600"/>
+            <a:ext cx="10911535" cy="219456"/>
+          </a:xfrm>
+          <a:prstGeom prst="rect">
+            <a:avLst/>
+          </a:prstGeom>
+          <a:noFill/>
+          <a:ln/>
+        </p:spPr>
+        <p:txBody>
+          <a:bodyPr wrap="square" lIns="0" tIns="0" rIns="0" bIns="0" rtlCol="0" anchor="ctr"/>
+          <a:lstStyle/>
+          <a:p>
+            <a:pPr indent="0" marL="0">
+              <a:buNone/>
+            </a:pPr>
+            <a:r>
+              <a:rPr lang="en-US" sz="1150" dirty="0">
+                <a:solidFill>
+                  <a:srgbClr val="6E6E6E"/>
+                </a:solidFill>
+                <a:latin typeface="Pretendard" pitchFamily="34" charset="0"/>
+                <a:ea typeface="Pretendard" pitchFamily="34" charset="-122"/>
+                <a:cs typeface="Pretendard" pitchFamily="34" charset="-120"/>
+              </a:rPr>
+              <a:t>개인별 최종 발표 각 7분 · 종합 피드백 30분</a:t>
+            </a:r>
+            <a:endParaRPr lang="en-US" sz="1150" dirty="0"/>
+          </a:p>
+        </p:txBody>
+      </p:sp>
+      <p:sp>
+        <p:nvSpPr>
+          <p:cNvPr id="9" name="Shape 7"/>
+          <p:cNvSpPr/>
+          <p:nvPr/>
+        </p:nvSpPr>
+        <p:spPr>
+          <a:xfrm>
+            <a:off x="640080" y="1682496"/>
+            <a:ext cx="10911535" cy="7315"/>
           </a:xfrm>
           <a:prstGeom prst="rect">
             <a:avLst/>
           </a:prstGeom>
           <a:solidFill>
-            <a:srgbClr val="E4E6EB"/>
+            <a:srgbClr val="111111"/>
           </a:solidFill>
           <a:ln w="12700">
             <a:solidFill>
-              <a:srgbClr val="E4E6EB"/>
+              <a:srgbClr val="111111"/>
             </a:solidFill>
             <a:prstDash val="solid"/>
           </a:ln>
@@ -2463,13 +2621,13 @@
       </p:sp>
       <p:sp>
         <p:nvSpPr>
-          <p:cNvPr id="13" name="Text 11"/>
-          <p:cNvSpPr/>
-          <p:nvPr/>
-        </p:nvSpPr>
-        <p:spPr>
-          <a:xfrm>
-            <a:off x="640080" y="3584448"/>
+          <p:cNvPr id="10" name="Text 8"/>
+          <p:cNvSpPr/>
+          <p:nvPr/>
+        </p:nvSpPr>
+        <p:spPr>
+          <a:xfrm>
+            <a:off x="640080" y="1719072"/>
             <a:ext cx="1600200" cy="932688"/>
           </a:xfrm>
           <a:prstGeom prst="rect">
@@ -2486,29 +2644,29 @@
               <a:buNone/>
             </a:pPr>
             <a:r>
-              <a:rPr lang="en-US" sz="1100" b="1" dirty="0">
-                <a:solidFill>
-                  <a:srgbClr val="FF4A1C"/>
-                </a:solidFill>
-                <a:latin typeface="Pretendard" pitchFamily="34" charset="0"/>
-                <a:ea typeface="Pretendard" pitchFamily="34" charset="-122"/>
-                <a:cs typeface="Pretendard" pitchFamily="34" charset="-120"/>
-              </a:rPr>
-              <a:t>01:20–01:30</a:t>
-            </a:r>
-            <a:endParaRPr lang="en-US" sz="1100" dirty="0"/>
-          </a:p>
-        </p:txBody>
-      </p:sp>
-      <p:sp>
-        <p:nvSpPr>
-          <p:cNvPr id="14" name="Text 12"/>
-          <p:cNvSpPr/>
-          <p:nvPr/>
-        </p:nvSpPr>
-        <p:spPr>
-          <a:xfrm>
-            <a:off x="2377440" y="3584448"/>
+              <a:rPr lang="en-US" sz="1050" b="1" spc="60" kern="0" dirty="0">
+                <a:solidFill>
+                  <a:srgbClr val="111111"/>
+                </a:solidFill>
+                <a:latin typeface="Pretendard" pitchFamily="34" charset="0"/>
+                <a:ea typeface="Pretendard" pitchFamily="34" charset="-122"/>
+                <a:cs typeface="Pretendard" pitchFamily="34" charset="-120"/>
+              </a:rPr>
+              <a:t>00:00–01:00</a:t>
+            </a:r>
+            <a:endParaRPr lang="en-US" sz="1050" dirty="0"/>
+          </a:p>
+        </p:txBody>
+      </p:sp>
+      <p:sp>
+        <p:nvSpPr>
+          <p:cNvPr id="11" name="Text 9"/>
+          <p:cNvSpPr/>
+          <p:nvPr/>
+        </p:nvSpPr>
+        <p:spPr>
+          <a:xfrm>
+            <a:off x="2377440" y="1719072"/>
             <a:ext cx="6888175" cy="932688"/>
           </a:xfrm>
           <a:prstGeom prst="rect">
@@ -2527,13 +2685,13 @@
             <a:r>
               <a:rPr lang="en-US" sz="1300" b="1" dirty="0">
                 <a:solidFill>
-                  <a:srgbClr val="14161B"/>
-                </a:solidFill>
-                <a:latin typeface="Pretendard" pitchFamily="34" charset="0"/>
-                <a:ea typeface="Pretendard" pitchFamily="34" charset="-122"/>
-                <a:cs typeface="Pretendard" pitchFamily="34" charset="-120"/>
-              </a:rPr>
-              <a:t>자기평가 · 차년도 준비 안내</a:t>
+                  <a:srgbClr val="111111"/>
+                </a:solidFill>
+                <a:latin typeface="Pretendard" pitchFamily="34" charset="0"/>
+                <a:ea typeface="Pretendard" pitchFamily="34" charset="-122"/>
+                <a:cs typeface="Pretendard" pitchFamily="34" charset="-120"/>
+              </a:rPr>
+              <a:t>개인별 최종 발표 · 각 7분</a:t>
             </a:r>
             <a:endParaRPr lang="en-US" sz="1300" dirty="0"/>
           </a:p>
@@ -2541,13 +2699,13 @@
       </p:sp>
       <p:sp>
         <p:nvSpPr>
-          <p:cNvPr id="15" name="Text 13"/>
-          <p:cNvSpPr/>
-          <p:nvPr/>
-        </p:nvSpPr>
-        <p:spPr>
-          <a:xfrm>
-            <a:off x="9265615" y="3584448"/>
+          <p:cNvPr id="12" name="Text 10"/>
+          <p:cNvSpPr/>
+          <p:nvPr/>
+        </p:nvSpPr>
+        <p:spPr>
+          <a:xfrm>
+            <a:off x="9265615" y="1719072"/>
             <a:ext cx="2286000" cy="932688"/>
           </a:xfrm>
           <a:prstGeom prst="rect">
@@ -2564,42 +2722,40 @@
               <a:buNone/>
             </a:pPr>
             <a:r>
-              <a:rPr lang="en-US" sz="1100" dirty="0">
-                <a:solidFill>
-                  <a:srgbClr val="6B7280"/>
-                </a:solidFill>
-                <a:latin typeface="Pretendard" pitchFamily="34" charset="0"/>
-                <a:ea typeface="Pretendard" pitchFamily="34" charset="-122"/>
-                <a:cs typeface="Pretendard" pitchFamily="34" charset="-120"/>
-              </a:rPr>
-              <a:t>개인 워크 + 안내</a:t>
-            </a:r>
-            <a:endParaRPr lang="en-US" sz="1100" dirty="0"/>
-          </a:p>
-        </p:txBody>
-      </p:sp>
-      <p:sp>
-        <p:nvSpPr>
-          <p:cNvPr id="16" name="Shape 14"/>
-          <p:cNvSpPr/>
-          <p:nvPr/>
-        </p:nvSpPr>
-        <p:spPr>
-          <a:xfrm>
-            <a:off x="640080" y="4828032"/>
-            <a:ext cx="10911535" cy="969264"/>
-          </a:xfrm>
-          <a:prstGeom prst="roundRect">
-            <a:avLst>
-              <a:gd name="adj" fmla="val 7547"/>
-            </a:avLst>
+              <a:rPr lang="en-US" sz="1050" dirty="0">
+                <a:solidFill>
+                  <a:srgbClr val="6E6E6E"/>
+                </a:solidFill>
+                <a:latin typeface="Pretendard" pitchFamily="34" charset="0"/>
+                <a:ea typeface="Pretendard" pitchFamily="34" charset="-122"/>
+                <a:cs typeface="Pretendard" pitchFamily="34" charset="-120"/>
+              </a:rPr>
+              <a:t>발표 + 질의</a:t>
+            </a:r>
+            <a:endParaRPr lang="en-US" sz="1050" dirty="0"/>
+          </a:p>
+        </p:txBody>
+      </p:sp>
+      <p:sp>
+        <p:nvSpPr>
+          <p:cNvPr id="13" name="Shape 11"/>
+          <p:cNvSpPr/>
+          <p:nvPr/>
+        </p:nvSpPr>
+        <p:spPr>
+          <a:xfrm>
+            <a:off x="640080" y="2633472"/>
+            <a:ext cx="10911535" cy="7315"/>
+          </a:xfrm>
+          <a:prstGeom prst="rect">
+            <a:avLst/>
           </a:prstGeom>
           <a:solidFill>
-            <a:srgbClr val="14161B"/>
+            <a:srgbClr val="DCDCDC"/>
           </a:solidFill>
           <a:ln w="12700">
             <a:solidFill>
-              <a:srgbClr val="14161B"/>
+              <a:srgbClr val="DCDCDC"/>
             </a:solidFill>
             <a:prstDash val="solid"/>
           </a:ln>
@@ -2607,14 +2763,14 @@
       </p:sp>
       <p:sp>
         <p:nvSpPr>
-          <p:cNvPr id="17" name="Text 15"/>
-          <p:cNvSpPr/>
-          <p:nvPr/>
-        </p:nvSpPr>
-        <p:spPr>
-          <a:xfrm>
-            <a:off x="1097280" y="4992624"/>
-            <a:ext cx="2743200" cy="274320"/>
+          <p:cNvPr id="14" name="Text 12"/>
+          <p:cNvSpPr/>
+          <p:nvPr/>
+        </p:nvSpPr>
+        <p:spPr>
+          <a:xfrm>
+            <a:off x="640080" y="2651760"/>
+            <a:ext cx="1600200" cy="932688"/>
           </a:xfrm>
           <a:prstGeom prst="rect">
             <a:avLst/>
@@ -2630,9 +2786,293 @@
               <a:buNone/>
             </a:pPr>
             <a:r>
-              <a:rPr lang="en-US" sz="1050" b="1" spc="120" kern="0" dirty="0">
-                <a:solidFill>
-                  <a:srgbClr val="FF4A1C"/>
+              <a:rPr lang="en-US" sz="1050" b="1" spc="60" kern="0" dirty="0">
+                <a:solidFill>
+                  <a:srgbClr val="111111"/>
+                </a:solidFill>
+                <a:latin typeface="Pretendard" pitchFamily="34" charset="0"/>
+                <a:ea typeface="Pretendard" pitchFamily="34" charset="-122"/>
+                <a:cs typeface="Pretendard" pitchFamily="34" charset="-120"/>
+              </a:rPr>
+              <a:t>01:00–01:20</a:t>
+            </a:r>
+            <a:endParaRPr lang="en-US" sz="1050" dirty="0"/>
+          </a:p>
+        </p:txBody>
+      </p:sp>
+      <p:sp>
+        <p:nvSpPr>
+          <p:cNvPr id="15" name="Text 13"/>
+          <p:cNvSpPr/>
+          <p:nvPr/>
+        </p:nvSpPr>
+        <p:spPr>
+          <a:xfrm>
+            <a:off x="2377440" y="2651760"/>
+            <a:ext cx="6888175" cy="932688"/>
+          </a:xfrm>
+          <a:prstGeom prst="rect">
+            <a:avLst/>
+          </a:prstGeom>
+          <a:noFill/>
+          <a:ln/>
+        </p:spPr>
+        <p:txBody>
+          <a:bodyPr wrap="square" lIns="0" tIns="0" rIns="0" bIns="0" rtlCol="0" anchor="ctr"/>
+          <a:lstStyle/>
+          <a:p>
+            <a:pPr indent="0" marL="0">
+              <a:buNone/>
+            </a:pPr>
+            <a:r>
+              <a:rPr lang="en-US" sz="1300" b="1" dirty="0">
+                <a:solidFill>
+                  <a:srgbClr val="111111"/>
+                </a:solidFill>
+                <a:latin typeface="Pretendard" pitchFamily="34" charset="0"/>
+                <a:ea typeface="Pretendard" pitchFamily="34" charset="-122"/>
+                <a:cs typeface="Pretendard" pitchFamily="34" charset="-120"/>
+              </a:rPr>
+              <a:t>종합 피드백 및 총평</a:t>
+            </a:r>
+            <a:endParaRPr lang="en-US" sz="1300" dirty="0"/>
+          </a:p>
+        </p:txBody>
+      </p:sp>
+      <p:sp>
+        <p:nvSpPr>
+          <p:cNvPr id="16" name="Text 14"/>
+          <p:cNvSpPr/>
+          <p:nvPr/>
+        </p:nvSpPr>
+        <p:spPr>
+          <a:xfrm>
+            <a:off x="9265615" y="2651760"/>
+            <a:ext cx="2286000" cy="932688"/>
+          </a:xfrm>
+          <a:prstGeom prst="rect">
+            <a:avLst/>
+          </a:prstGeom>
+          <a:noFill/>
+          <a:ln/>
+        </p:spPr>
+        <p:txBody>
+          <a:bodyPr wrap="square" lIns="0" tIns="0" rIns="0" bIns="0" rtlCol="0" anchor="ctr"/>
+          <a:lstStyle/>
+          <a:p>
+            <a:pPr algn="r" indent="0" marL="0">
+              <a:buNone/>
+            </a:pPr>
+            <a:r>
+              <a:rPr lang="en-US" sz="1050" dirty="0">
+                <a:solidFill>
+                  <a:srgbClr val="6E6E6E"/>
+                </a:solidFill>
+                <a:latin typeface="Pretendard" pitchFamily="34" charset="0"/>
+                <a:ea typeface="Pretendard" pitchFamily="34" charset="-122"/>
+                <a:cs typeface="Pretendard" pitchFamily="34" charset="-120"/>
+              </a:rPr>
+              <a:t>강의</a:t>
+            </a:r>
+            <a:endParaRPr lang="en-US" sz="1050" dirty="0"/>
+          </a:p>
+        </p:txBody>
+      </p:sp>
+      <p:sp>
+        <p:nvSpPr>
+          <p:cNvPr id="17" name="Shape 15"/>
+          <p:cNvSpPr/>
+          <p:nvPr/>
+        </p:nvSpPr>
+        <p:spPr>
+          <a:xfrm>
+            <a:off x="640080" y="3566160"/>
+            <a:ext cx="10911535" cy="7315"/>
+          </a:xfrm>
+          <a:prstGeom prst="rect">
+            <a:avLst/>
+          </a:prstGeom>
+          <a:solidFill>
+            <a:srgbClr val="DCDCDC"/>
+          </a:solidFill>
+          <a:ln w="12700">
+            <a:solidFill>
+              <a:srgbClr val="DCDCDC"/>
+            </a:solidFill>
+            <a:prstDash val="solid"/>
+          </a:ln>
+        </p:spPr>
+      </p:sp>
+      <p:sp>
+        <p:nvSpPr>
+          <p:cNvPr id="18" name="Text 16"/>
+          <p:cNvSpPr/>
+          <p:nvPr/>
+        </p:nvSpPr>
+        <p:spPr>
+          <a:xfrm>
+            <a:off x="640080" y="3584448"/>
+            <a:ext cx="1600200" cy="932688"/>
+          </a:xfrm>
+          <a:prstGeom prst="rect">
+            <a:avLst/>
+          </a:prstGeom>
+          <a:noFill/>
+          <a:ln/>
+        </p:spPr>
+        <p:txBody>
+          <a:bodyPr wrap="square" lIns="0" tIns="0" rIns="0" bIns="0" rtlCol="0" anchor="ctr"/>
+          <a:lstStyle/>
+          <a:p>
+            <a:pPr indent="0" marL="0">
+              <a:buNone/>
+            </a:pPr>
+            <a:r>
+              <a:rPr lang="en-US" sz="1050" b="1" spc="60" kern="0" dirty="0">
+                <a:solidFill>
+                  <a:srgbClr val="111111"/>
+                </a:solidFill>
+                <a:latin typeface="Pretendard" pitchFamily="34" charset="0"/>
+                <a:ea typeface="Pretendard" pitchFamily="34" charset="-122"/>
+                <a:cs typeface="Pretendard" pitchFamily="34" charset="-120"/>
+              </a:rPr>
+              <a:t>01:20–01:30</a:t>
+            </a:r>
+            <a:endParaRPr lang="en-US" sz="1050" dirty="0"/>
+          </a:p>
+        </p:txBody>
+      </p:sp>
+      <p:sp>
+        <p:nvSpPr>
+          <p:cNvPr id="19" name="Text 17"/>
+          <p:cNvSpPr/>
+          <p:nvPr/>
+        </p:nvSpPr>
+        <p:spPr>
+          <a:xfrm>
+            <a:off x="2377440" y="3584448"/>
+            <a:ext cx="6888175" cy="932688"/>
+          </a:xfrm>
+          <a:prstGeom prst="rect">
+            <a:avLst/>
+          </a:prstGeom>
+          <a:noFill/>
+          <a:ln/>
+        </p:spPr>
+        <p:txBody>
+          <a:bodyPr wrap="square" lIns="0" tIns="0" rIns="0" bIns="0" rtlCol="0" anchor="ctr"/>
+          <a:lstStyle/>
+          <a:p>
+            <a:pPr indent="0" marL="0">
+              <a:buNone/>
+            </a:pPr>
+            <a:r>
+              <a:rPr lang="en-US" sz="1300" b="1" dirty="0">
+                <a:solidFill>
+                  <a:srgbClr val="111111"/>
+                </a:solidFill>
+                <a:latin typeface="Pretendard" pitchFamily="34" charset="0"/>
+                <a:ea typeface="Pretendard" pitchFamily="34" charset="-122"/>
+                <a:cs typeface="Pretendard" pitchFamily="34" charset="-120"/>
+              </a:rPr>
+              <a:t>자기평가 · 차년도 준비 안내</a:t>
+            </a:r>
+            <a:endParaRPr lang="en-US" sz="1300" dirty="0"/>
+          </a:p>
+        </p:txBody>
+      </p:sp>
+      <p:sp>
+        <p:nvSpPr>
+          <p:cNvPr id="20" name="Text 18"/>
+          <p:cNvSpPr/>
+          <p:nvPr/>
+        </p:nvSpPr>
+        <p:spPr>
+          <a:xfrm>
+            <a:off x="9265615" y="3584448"/>
+            <a:ext cx="2286000" cy="932688"/>
+          </a:xfrm>
+          <a:prstGeom prst="rect">
+            <a:avLst/>
+          </a:prstGeom>
+          <a:noFill/>
+          <a:ln/>
+        </p:spPr>
+        <p:txBody>
+          <a:bodyPr wrap="square" lIns="0" tIns="0" rIns="0" bIns="0" rtlCol="0" anchor="ctr"/>
+          <a:lstStyle/>
+          <a:p>
+            <a:pPr algn="r" indent="0" marL="0">
+              <a:buNone/>
+            </a:pPr>
+            <a:r>
+              <a:rPr lang="en-US" sz="1050" dirty="0">
+                <a:solidFill>
+                  <a:srgbClr val="6E6E6E"/>
+                </a:solidFill>
+                <a:latin typeface="Pretendard" pitchFamily="34" charset="0"/>
+                <a:ea typeface="Pretendard" pitchFamily="34" charset="-122"/>
+                <a:cs typeface="Pretendard" pitchFamily="34" charset="-120"/>
+              </a:rPr>
+              <a:t>개인 워크 + 안내</a:t>
+            </a:r>
+            <a:endParaRPr lang="en-US" sz="1050" dirty="0"/>
+          </a:p>
+        </p:txBody>
+      </p:sp>
+      <p:sp>
+        <p:nvSpPr>
+          <p:cNvPr id="21" name="Shape 19"/>
+          <p:cNvSpPr/>
+          <p:nvPr/>
+        </p:nvSpPr>
+        <p:spPr>
+          <a:xfrm>
+            <a:off x="640080" y="4828032"/>
+            <a:ext cx="10911535" cy="969264"/>
+          </a:xfrm>
+          <a:prstGeom prst="rect">
+            <a:avLst/>
+          </a:prstGeom>
+          <a:solidFill>
+            <a:srgbClr val="111111"/>
+          </a:solidFill>
+          <a:ln w="12700">
+            <a:solidFill>
+              <a:srgbClr val="111111"/>
+            </a:solidFill>
+            <a:prstDash val="solid"/>
+          </a:ln>
+        </p:spPr>
+      </p:sp>
+      <p:sp>
+        <p:nvSpPr>
+          <p:cNvPr id="22" name="Text 20"/>
+          <p:cNvSpPr/>
+          <p:nvPr/>
+        </p:nvSpPr>
+        <p:spPr>
+          <a:xfrm>
+            <a:off x="1097280" y="5010912"/>
+            <a:ext cx="2743200" cy="256032"/>
+          </a:xfrm>
+          <a:prstGeom prst="rect">
+            <a:avLst/>
+          </a:prstGeom>
+          <a:noFill/>
+          <a:ln/>
+        </p:spPr>
+        <p:txBody>
+          <a:bodyPr wrap="square" lIns="0" tIns="0" rIns="0" bIns="0" rtlCol="0" anchor="ctr"/>
+          <a:lstStyle/>
+          <a:p>
+            <a:pPr indent="0" marL="0">
+              <a:buNone/>
+            </a:pPr>
+            <a:r>
+              <a:rPr lang="en-US" sz="950" spc="240" kern="0" dirty="0">
+                <a:solidFill>
+                  <a:srgbClr val="9A9A9A"/>
                 </a:solidFill>
                 <a:latin typeface="Pretendard" pitchFamily="34" charset="0"/>
                 <a:ea typeface="Pretendard" pitchFamily="34" charset="-122"/>
@@ -2640,20 +3080,20 @@
               </a:rPr>
               <a:t>오늘 끝나면</a:t>
             </a:r>
-            <a:endParaRPr lang="en-US" sz="1050" dirty="0"/>
-          </a:p>
-        </p:txBody>
-      </p:sp>
-      <p:sp>
-        <p:nvSpPr>
-          <p:cNvPr id="18" name="Text 16"/>
-          <p:cNvSpPr/>
-          <p:nvPr/>
-        </p:nvSpPr>
-        <p:spPr>
-          <a:xfrm>
-            <a:off x="1097280" y="5266944"/>
-            <a:ext cx="9997135" cy="402336"/>
+            <a:endParaRPr lang="en-US" sz="950" dirty="0"/>
+          </a:p>
+        </p:txBody>
+      </p:sp>
+      <p:sp>
+        <p:nvSpPr>
+          <p:cNvPr id="23" name="Text 21"/>
+          <p:cNvSpPr/>
+          <p:nvPr/>
+        </p:nvSpPr>
+        <p:spPr>
+          <a:xfrm>
+            <a:off x="1097280" y="5285232"/>
+            <a:ext cx="9997135" cy="365760"/>
           </a:xfrm>
           <a:prstGeom prst="rect">
             <a:avLst/>
@@ -2667,18 +3107,18 @@
           <a:p>
             <a:pPr indent="0" marL="0">
               <a:lnSpc>
-                <a:spcPct val="124000"/>
+                <a:spcPct val="126000"/>
               </a:lnSpc>
               <a:buNone/>
             </a:pPr>
             <a:r>
-              <a:rPr lang="en-US" sz="1600" b="1" dirty="0">
+              <a:rPr lang="en-US" sz="1600" dirty="0">
                 <a:solidFill>
                   <a:srgbClr val="FFFFFF"/>
                 </a:solidFill>
-                <a:latin typeface="Pretendard" pitchFamily="34" charset="0"/>
-                <a:ea typeface="Pretendard" pitchFamily="34" charset="-122"/>
-                <a:cs typeface="Pretendard" pitchFamily="34" charset="-120"/>
+                <a:latin typeface="Pretendard Black" pitchFamily="34" charset="0"/>
+                <a:ea typeface="Pretendard Black" pitchFamily="34" charset="-122"/>
+                <a:cs typeface="Pretendard Black" pitchFamily="34" charset="-120"/>
               </a:rPr>
               <a:t>완성된 포트폴리오 한 벌과, 다음에 무엇을 채울지에 대한 목록을 갖고 나갑니다.</a:t>
             </a:r>
@@ -2688,14 +3128,39 @@
       </p:sp>
       <p:sp>
         <p:nvSpPr>
-          <p:cNvPr id="19" name="Text 17"/>
-          <p:cNvSpPr/>
-          <p:nvPr/>
-        </p:nvSpPr>
-        <p:spPr>
-          <a:xfrm>
-            <a:off x="640080" y="6345936"/>
-            <a:ext cx="7772400" cy="256032"/>
+          <p:cNvPr id="24" name="Shape 22"/>
+          <p:cNvSpPr/>
+          <p:nvPr/>
+        </p:nvSpPr>
+        <p:spPr>
+          <a:xfrm>
+            <a:off x="640080" y="6291072"/>
+            <a:ext cx="10911535" cy="7315"/>
+          </a:xfrm>
+          <a:prstGeom prst="rect">
+            <a:avLst/>
+          </a:prstGeom>
+          <a:solidFill>
+            <a:srgbClr val="DCDCDC"/>
+          </a:solidFill>
+          <a:ln w="12700">
+            <a:solidFill>
+              <a:srgbClr val="DCDCDC"/>
+            </a:solidFill>
+            <a:prstDash val="solid"/>
+          </a:ln>
+        </p:spPr>
+      </p:sp>
+      <p:sp>
+        <p:nvSpPr>
+          <p:cNvPr id="25" name="Text 23"/>
+          <p:cNvSpPr/>
+          <p:nvPr/>
+        </p:nvSpPr>
+        <p:spPr>
+          <a:xfrm>
+            <a:off x="640080" y="6382512"/>
+            <a:ext cx="7772400" cy="237744"/>
           </a:xfrm>
           <a:prstGeom prst="rect">
             <a:avLst/>
@@ -2711,9 +3176,9 @@
               <a:buNone/>
             </a:pPr>
             <a:r>
-              <a:rPr lang="en-US" sz="900" dirty="0">
-                <a:solidFill>
-                  <a:srgbClr val="9AA0AA"/>
+              <a:rPr lang="en-US" sz="850" spc="40" kern="0" dirty="0">
+                <a:solidFill>
+                  <a:srgbClr val="9B9B9B"/>
                 </a:solidFill>
                 <a:latin typeface="Pretendard" pitchFamily="34" charset="0"/>
                 <a:ea typeface="Pretendard" pitchFamily="34" charset="-122"/>
@@ -2721,20 +3186,20 @@
               </a:rPr>
               <a:t>포트폴리오제작 · 15주차 기말 발표 및 종합 평가</a:t>
             </a:r>
-            <a:endParaRPr lang="en-US" sz="900" dirty="0"/>
-          </a:p>
-        </p:txBody>
-      </p:sp>
-      <p:sp>
-        <p:nvSpPr>
-          <p:cNvPr id="20" name="Text 18"/>
-          <p:cNvSpPr/>
-          <p:nvPr/>
-        </p:nvSpPr>
-        <p:spPr>
-          <a:xfrm>
-            <a:off x="10454335" y="6345936"/>
-            <a:ext cx="1097280" cy="256032"/>
+            <a:endParaRPr lang="en-US" sz="850" dirty="0"/>
+          </a:p>
+        </p:txBody>
+      </p:sp>
+      <p:sp>
+        <p:nvSpPr>
+          <p:cNvPr id="26" name="Text 24"/>
+          <p:cNvSpPr/>
+          <p:nvPr/>
+        </p:nvSpPr>
+        <p:spPr>
+          <a:xfrm>
+            <a:off x="10271455" y="6382512"/>
+            <a:ext cx="1280160" cy="237744"/>
           </a:xfrm>
           <a:prstGeom prst="rect">
             <a:avLst/>
@@ -2750,17 +3215,17 @@
               <a:buNone/>
             </a:pPr>
             <a:r>
-              <a:rPr lang="en-US" sz="900" dirty="0">
-                <a:solidFill>
-                  <a:srgbClr val="9AA0AA"/>
-                </a:solidFill>
-                <a:latin typeface="Pretendard" pitchFamily="34" charset="0"/>
-                <a:ea typeface="Pretendard" pitchFamily="34" charset="-122"/>
-                <a:cs typeface="Pretendard" pitchFamily="34" charset="-120"/>
-              </a:rPr>
-              <a:t>01</a:t>
-            </a:r>
-            <a:endParaRPr lang="en-US" sz="900" dirty="0"/>
+              <a:rPr lang="en-US" sz="850" spc="140" kern="0" dirty="0">
+                <a:solidFill>
+                  <a:srgbClr val="9B9B9B"/>
+                </a:solidFill>
+                <a:latin typeface="Pretendard" pitchFamily="34" charset="0"/>
+                <a:ea typeface="Pretendard" pitchFamily="34" charset="-122"/>
+                <a:cs typeface="Pretendard" pitchFamily="34" charset="-120"/>
+              </a:rPr>
+              <a:t>P.01</a:t>
+            </a:r>
+            <a:endParaRPr lang="en-US" sz="850" dirty="0"/>
           </a:p>
         </p:txBody>
       </p:sp>
@@ -2804,8 +3269,8 @@
         </p:nvSpPr>
         <p:spPr>
           <a:xfrm>
-            <a:off x="640080" y="566928"/>
-            <a:ext cx="10911535" cy="237744"/>
+            <a:off x="640080" y="274320"/>
+            <a:ext cx="3657600" cy="219456"/>
           </a:xfrm>
           <a:prstGeom prst="rect">
             <a:avLst/>
@@ -2821,17 +3286,17 @@
               <a:buNone/>
             </a:pPr>
             <a:r>
-              <a:rPr lang="en-US" sz="1100" b="1" spc="140" kern="0" dirty="0">
-                <a:solidFill>
-                  <a:srgbClr val="FF4A1C"/>
-                </a:solidFill>
-                <a:latin typeface="Pretendard" pitchFamily="34" charset="0"/>
-                <a:ea typeface="Pretendard" pitchFamily="34" charset="-122"/>
-                <a:cs typeface="Pretendard" pitchFamily="34" charset="-120"/>
-              </a:rPr>
-              <a:t>OBJECTIVES</a:t>
-            </a:r>
-            <a:endParaRPr lang="en-US" sz="1100" dirty="0"/>
+              <a:rPr lang="en-US" sz="900" spc="120" kern="0" dirty="0">
+                <a:solidFill>
+                  <a:srgbClr val="8A8A8A"/>
+                </a:solidFill>
+                <a:latin typeface="Pretendard" pitchFamily="34" charset="0"/>
+                <a:ea typeface="Pretendard" pitchFamily="34" charset="-122"/>
+                <a:cs typeface="Pretendard" pitchFamily="34" charset="-120"/>
+              </a:rPr>
+              <a:t>포트폴리오제작</a:t>
+            </a:r>
+            <a:endParaRPr lang="en-US" sz="900" dirty="0"/>
           </a:p>
         </p:txBody>
       </p:sp>
@@ -2843,59 +3308,96 @@
         </p:nvSpPr>
         <p:spPr>
           <a:xfrm>
-            <a:off x="640080" y="859536"/>
-            <a:ext cx="10911535" cy="512064"/>
-          </a:xfrm>
-          <a:prstGeom prst="rect">
-            <a:avLst/>
-          </a:prstGeom>
-          <a:noFill/>
-          <a:ln/>
-        </p:spPr>
-        <p:txBody>
-          <a:bodyPr wrap="square" lIns="0" tIns="0" rIns="0" bIns="0" rtlCol="0" anchor="ctr"/>
-          <a:lstStyle/>
-          <a:p>
-            <a:pPr indent="0" marL="0">
-              <a:buNone/>
-            </a:pPr>
-            <a:r>
-              <a:rPr lang="en-US" sz="2800" b="1" dirty="0">
-                <a:solidFill>
-                  <a:srgbClr val="14161B"/>
-                </a:solidFill>
-                <a:latin typeface="Pretendard" pitchFamily="34" charset="0"/>
-                <a:ea typeface="Pretendard" pitchFamily="34" charset="-122"/>
-                <a:cs typeface="Pretendard" pitchFamily="34" charset="-120"/>
-              </a:rPr>
-              <a:t>오늘 하는 것</a:t>
-            </a:r>
-            <a:endParaRPr lang="en-US" sz="2800" dirty="0"/>
-          </a:p>
-        </p:txBody>
-      </p:sp>
-      <p:sp>
-        <p:nvSpPr>
-          <p:cNvPr id="4" name="Shape 2"/>
-          <p:cNvSpPr/>
-          <p:nvPr/>
-        </p:nvSpPr>
-        <p:spPr>
-          <a:xfrm>
-            <a:off x="640080" y="1810512"/>
-            <a:ext cx="310896" cy="310896"/>
-          </a:xfrm>
-          <a:prstGeom prst="roundRect">
-            <a:avLst>
-              <a:gd name="adj" fmla="val 17647"/>
-            </a:avLst>
+            <a:off x="4480560" y="274320"/>
+            <a:ext cx="4572000" cy="219456"/>
+          </a:xfrm>
+          <a:prstGeom prst="rect">
+            <a:avLst/>
+          </a:prstGeom>
+          <a:noFill/>
+          <a:ln/>
+        </p:spPr>
+        <p:txBody>
+          <a:bodyPr wrap="square" lIns="0" tIns="0" rIns="0" bIns="0" rtlCol="0" anchor="ctr"/>
+          <a:lstStyle/>
+          <a:p>
+            <a:pPr algn="ctr" indent="0" marL="0">
+              <a:buNone/>
+            </a:pPr>
+            <a:r>
+              <a:rPr lang="en-US" sz="900" spc="120" kern="0" dirty="0">
+                <a:solidFill>
+                  <a:srgbClr val="8A8A8A"/>
+                </a:solidFill>
+                <a:latin typeface="Pretendard" pitchFamily="34" charset="0"/>
+                <a:ea typeface="Pretendard" pitchFamily="34" charset="-122"/>
+                <a:cs typeface="Pretendard" pitchFamily="34" charset="-120"/>
+              </a:rPr>
+              <a:t>PHASE 3 완성과 발표</a:t>
+            </a:r>
+            <a:endParaRPr lang="en-US" sz="900" dirty="0"/>
+          </a:p>
+        </p:txBody>
+      </p:sp>
+      <p:sp>
+        <p:nvSpPr>
+          <p:cNvPr id="4" name="Text 2"/>
+          <p:cNvSpPr/>
+          <p:nvPr/>
+        </p:nvSpPr>
+        <p:spPr>
+          <a:xfrm>
+            <a:off x="8808415" y="274320"/>
+            <a:ext cx="2743200" cy="219456"/>
+          </a:xfrm>
+          <a:prstGeom prst="rect">
+            <a:avLst/>
+          </a:prstGeom>
+          <a:noFill/>
+          <a:ln/>
+        </p:spPr>
+        <p:txBody>
+          <a:bodyPr wrap="square" lIns="0" tIns="0" rIns="0" bIns="0" rtlCol="0" anchor="ctr"/>
+          <a:lstStyle/>
+          <a:p>
+            <a:pPr algn="r" indent="0" marL="0">
+              <a:buNone/>
+            </a:pPr>
+            <a:r>
+              <a:rPr lang="en-US" sz="900" spc="200" kern="0" dirty="0">
+                <a:solidFill>
+                  <a:srgbClr val="8A8A8A"/>
+                </a:solidFill>
+                <a:latin typeface="Pretendard" pitchFamily="34" charset="0"/>
+                <a:ea typeface="Pretendard" pitchFamily="34" charset="-122"/>
+                <a:cs typeface="Pretendard" pitchFamily="34" charset="-120"/>
+              </a:rPr>
+              <a:t>WEEK 15</a:t>
+            </a:r>
+            <a:endParaRPr lang="en-US" sz="900" dirty="0"/>
+          </a:p>
+        </p:txBody>
+      </p:sp>
+      <p:sp>
+        <p:nvSpPr>
+          <p:cNvPr id="5" name="Shape 3"/>
+          <p:cNvSpPr/>
+          <p:nvPr/>
+        </p:nvSpPr>
+        <p:spPr>
+          <a:xfrm>
+            <a:off x="640080" y="548640"/>
+            <a:ext cx="10911535" cy="7315"/>
+          </a:xfrm>
+          <a:prstGeom prst="rect">
+            <a:avLst/>
           </a:prstGeom>
           <a:solidFill>
-            <a:srgbClr val="14161B"/>
+            <a:srgbClr val="DCDCDC"/>
           </a:solidFill>
-          <a:ln w="6350">
+          <a:ln w="12700">
             <a:solidFill>
-              <a:srgbClr val="14161B"/>
+              <a:srgbClr val="DCDCDC"/>
             </a:solidFill>
             <a:prstDash val="solid"/>
           </a:ln>
@@ -2903,53 +3405,14 @@
       </p:sp>
       <p:sp>
         <p:nvSpPr>
-          <p:cNvPr id="5" name="Text 3"/>
-          <p:cNvSpPr/>
-          <p:nvPr/>
-        </p:nvSpPr>
-        <p:spPr>
-          <a:xfrm>
-            <a:off x="640080" y="1810512"/>
-            <a:ext cx="310896" cy="310896"/>
-          </a:xfrm>
-          <a:prstGeom prst="rect">
-            <a:avLst/>
-          </a:prstGeom>
-          <a:noFill/>
-          <a:ln/>
-        </p:spPr>
-        <p:txBody>
-          <a:bodyPr wrap="square" lIns="0" tIns="0" rIns="0" bIns="0" rtlCol="0" anchor="ctr"/>
-          <a:lstStyle/>
-          <a:p>
-            <a:pPr algn="ctr" indent="0" marL="0">
-              <a:buNone/>
-            </a:pPr>
-            <a:r>
-              <a:rPr lang="en-US" sz="1050" b="1" dirty="0">
-                <a:solidFill>
-                  <a:srgbClr val="FFFFFF"/>
-                </a:solidFill>
-                <a:latin typeface="Pretendard" pitchFamily="34" charset="0"/>
-                <a:ea typeface="Pretendard" pitchFamily="34" charset="-122"/>
-                <a:cs typeface="Pretendard" pitchFamily="34" charset="-120"/>
-              </a:rPr>
-              <a:t>1</a:t>
-            </a:r>
-            <a:endParaRPr lang="en-US" sz="1050" dirty="0"/>
-          </a:p>
-        </p:txBody>
-      </p:sp>
-      <p:sp>
-        <p:nvSpPr>
           <p:cNvPr id="6" name="Text 4"/>
           <p:cNvSpPr/>
           <p:nvPr/>
         </p:nvSpPr>
         <p:spPr>
           <a:xfrm>
-            <a:off x="1188720" y="1719072"/>
-            <a:ext cx="9875520" cy="310896"/>
+            <a:off x="640080" y="640080"/>
+            <a:ext cx="10911535" cy="219456"/>
           </a:xfrm>
           <a:prstGeom prst="rect">
             <a:avLst/>
@@ -2965,17 +3428,17 @@
               <a:buNone/>
             </a:pPr>
             <a:r>
-              <a:rPr lang="en-US" sz="1450" b="1" dirty="0">
-                <a:solidFill>
-                  <a:srgbClr val="14161B"/>
-                </a:solidFill>
-                <a:latin typeface="Pretendard" pitchFamily="34" charset="0"/>
-                <a:ea typeface="Pretendard" pitchFamily="34" charset="-122"/>
-                <a:cs typeface="Pretendard" pitchFamily="34" charset="-120"/>
-              </a:rPr>
-              <a:t>완성된 포트폴리오를 발표한다</a:t>
-            </a:r>
-            <a:endParaRPr lang="en-US" sz="1450" dirty="0"/>
+              <a:rPr lang="en-US" sz="950" spc="260" kern="0" dirty="0">
+                <a:solidFill>
+                  <a:srgbClr val="8A8A8A"/>
+                </a:solidFill>
+                <a:latin typeface="Pretendard" pitchFamily="34" charset="0"/>
+                <a:ea typeface="Pretendard" pitchFamily="34" charset="-122"/>
+                <a:cs typeface="Pretendard" pitchFamily="34" charset="-120"/>
+              </a:rPr>
+              <a:t>OBJECTIVES</a:t>
+            </a:r>
+            <a:endParaRPr lang="en-US" sz="950" dirty="0"/>
           </a:p>
         </p:txBody>
       </p:sp>
@@ -2987,8 +3450,8 @@
         </p:nvSpPr>
         <p:spPr>
           <a:xfrm>
-            <a:off x="1188720" y="2029968"/>
-            <a:ext cx="9875520" cy="292608"/>
+            <a:off x="640080" y="859536"/>
+            <a:ext cx="10911535" cy="475488"/>
           </a:xfrm>
           <a:prstGeom prst="rect">
             <a:avLst/>
@@ -3004,17 +3467,17 @@
               <a:buNone/>
             </a:pPr>
             <a:r>
-              <a:rPr lang="en-US" sz="1100" dirty="0">
-                <a:solidFill>
-                  <a:srgbClr val="6B7280"/>
-                </a:solidFill>
-                <a:latin typeface="Pretendard" pitchFamily="34" charset="0"/>
-                <a:ea typeface="Pretendard" pitchFamily="34" charset="-122"/>
-                <a:cs typeface="Pretendard" pitchFamily="34" charset="-120"/>
-              </a:rPr>
-              <a:t>7분 — 3분 코어에 질의 응답을 더한 형태</a:t>
-            </a:r>
-            <a:endParaRPr lang="en-US" sz="1100" dirty="0"/>
+              <a:rPr lang="en-US" sz="3000" dirty="0">
+                <a:solidFill>
+                  <a:srgbClr val="111111"/>
+                </a:solidFill>
+                <a:latin typeface="Pretendard Black" pitchFamily="34" charset="0"/>
+                <a:ea typeface="Pretendard Black" pitchFamily="34" charset="-122"/>
+                <a:cs typeface="Pretendard Black" pitchFamily="34" charset="-120"/>
+              </a:rPr>
+              <a:t>오늘 하는 것</a:t>
+            </a:r>
+            <a:endParaRPr lang="en-US" sz="3000" dirty="0"/>
           </a:p>
         </p:txBody>
       </p:sp>
@@ -3026,18 +3489,18 @@
         </p:nvSpPr>
         <p:spPr>
           <a:xfrm>
-            <a:off x="640080" y="2505456"/>
-            <a:ext cx="10911535" cy="9144"/>
+            <a:off x="640080" y="1664208"/>
+            <a:ext cx="10911535" cy="7315"/>
           </a:xfrm>
           <a:prstGeom prst="rect">
             <a:avLst/>
           </a:prstGeom>
           <a:solidFill>
-            <a:srgbClr val="E4E6EB"/>
+            <a:srgbClr val="111111"/>
           </a:solidFill>
           <a:ln w="12700">
             <a:solidFill>
-              <a:srgbClr val="E4E6EB"/>
+              <a:srgbClr val="111111"/>
             </a:solidFill>
             <a:prstDash val="solid"/>
           </a:ln>
@@ -3051,20 +3514,18 @@
         </p:nvSpPr>
         <p:spPr>
           <a:xfrm>
-            <a:off x="640080" y="2670048"/>
+            <a:off x="640080" y="1810512"/>
             <a:ext cx="310896" cy="310896"/>
           </a:xfrm>
-          <a:prstGeom prst="roundRect">
-            <a:avLst>
-              <a:gd name="adj" fmla="val 17647"/>
-            </a:avLst>
+          <a:prstGeom prst="ellipse">
+            <a:avLst/>
           </a:prstGeom>
           <a:solidFill>
-            <a:srgbClr val="14161B"/>
+            <a:srgbClr val="FFFFFF"/>
           </a:solidFill>
-          <a:ln w="6350">
+          <a:ln w="12700">
             <a:solidFill>
-              <a:srgbClr val="14161B"/>
+              <a:srgbClr val="111111"/>
             </a:solidFill>
             <a:prstDash val="solid"/>
           </a:ln>
@@ -3078,135 +3539,135 @@
         </p:nvSpPr>
         <p:spPr>
           <a:xfrm>
+            <a:off x="640080" y="1810512"/>
+            <a:ext cx="310896" cy="310896"/>
+          </a:xfrm>
+          <a:prstGeom prst="rect">
+            <a:avLst/>
+          </a:prstGeom>
+          <a:noFill/>
+          <a:ln/>
+        </p:spPr>
+        <p:txBody>
+          <a:bodyPr wrap="square" lIns="0" tIns="0" rIns="0" bIns="0" rtlCol="0" anchor="ctr"/>
+          <a:lstStyle/>
+          <a:p>
+            <a:pPr algn="ctr" indent="0" marL="0">
+              <a:buNone/>
+            </a:pPr>
+            <a:r>
+              <a:rPr lang="en-US" sz="1000" b="1" dirty="0">
+                <a:solidFill>
+                  <a:srgbClr val="111111"/>
+                </a:solidFill>
+                <a:latin typeface="Pretendard" pitchFamily="34" charset="0"/>
+                <a:ea typeface="Pretendard" pitchFamily="34" charset="-122"/>
+                <a:cs typeface="Pretendard" pitchFamily="34" charset="-120"/>
+              </a:rPr>
+              <a:t>1</a:t>
+            </a:r>
+            <a:endParaRPr lang="en-US" sz="1000" dirty="0"/>
+          </a:p>
+        </p:txBody>
+      </p:sp>
+      <p:sp>
+        <p:nvSpPr>
+          <p:cNvPr id="11" name="Text 9"/>
+          <p:cNvSpPr/>
+          <p:nvPr/>
+        </p:nvSpPr>
+        <p:spPr>
+          <a:xfrm>
+            <a:off x="1188720" y="1719072"/>
+            <a:ext cx="9875520" cy="310896"/>
+          </a:xfrm>
+          <a:prstGeom prst="rect">
+            <a:avLst/>
+          </a:prstGeom>
+          <a:noFill/>
+          <a:ln/>
+        </p:spPr>
+        <p:txBody>
+          <a:bodyPr wrap="square" lIns="0" tIns="0" rIns="0" bIns="0" rtlCol="0" anchor="ctr"/>
+          <a:lstStyle/>
+          <a:p>
+            <a:pPr indent="0" marL="0">
+              <a:buNone/>
+            </a:pPr>
+            <a:r>
+              <a:rPr lang="en-US" sz="1450" dirty="0">
+                <a:solidFill>
+                  <a:srgbClr val="111111"/>
+                </a:solidFill>
+                <a:latin typeface="Pretendard Black" pitchFamily="34" charset="0"/>
+                <a:ea typeface="Pretendard Black" pitchFamily="34" charset="-122"/>
+                <a:cs typeface="Pretendard Black" pitchFamily="34" charset="-120"/>
+              </a:rPr>
+              <a:t>완성된 포트폴리오를 발표한다</a:t>
+            </a:r>
+            <a:endParaRPr lang="en-US" sz="1450" dirty="0"/>
+          </a:p>
+        </p:txBody>
+      </p:sp>
+      <p:sp>
+        <p:nvSpPr>
+          <p:cNvPr id="12" name="Text 10"/>
+          <p:cNvSpPr/>
+          <p:nvPr/>
+        </p:nvSpPr>
+        <p:spPr>
+          <a:xfrm>
+            <a:off x="1188720" y="2029968"/>
+            <a:ext cx="9875520" cy="292608"/>
+          </a:xfrm>
+          <a:prstGeom prst="rect">
+            <a:avLst/>
+          </a:prstGeom>
+          <a:noFill/>
+          <a:ln/>
+        </p:spPr>
+        <p:txBody>
+          <a:bodyPr wrap="square" lIns="0" tIns="0" rIns="0" bIns="0" rtlCol="0" anchor="ctr"/>
+          <a:lstStyle/>
+          <a:p>
+            <a:pPr indent="0" marL="0">
+              <a:buNone/>
+            </a:pPr>
+            <a:r>
+              <a:rPr lang="en-US" sz="1100" dirty="0">
+                <a:solidFill>
+                  <a:srgbClr val="6E6E6E"/>
+                </a:solidFill>
+                <a:latin typeface="Pretendard" pitchFamily="34" charset="0"/>
+                <a:ea typeface="Pretendard" pitchFamily="34" charset="-122"/>
+                <a:cs typeface="Pretendard" pitchFamily="34" charset="-120"/>
+              </a:rPr>
+              <a:t>7분 — 3분 코어에 질의 응답을 더한 형태</a:t>
+            </a:r>
+            <a:endParaRPr lang="en-US" sz="1100" dirty="0"/>
+          </a:p>
+        </p:txBody>
+      </p:sp>
+      <p:sp>
+        <p:nvSpPr>
+          <p:cNvPr id="13" name="Shape 11"/>
+          <p:cNvSpPr/>
+          <p:nvPr/>
+        </p:nvSpPr>
+        <p:spPr>
+          <a:xfrm>
             <a:off x="640080" y="2670048"/>
-            <a:ext cx="310896" cy="310896"/>
-          </a:xfrm>
-          <a:prstGeom prst="rect">
-            <a:avLst/>
-          </a:prstGeom>
-          <a:noFill/>
-          <a:ln/>
-        </p:spPr>
-        <p:txBody>
-          <a:bodyPr wrap="square" lIns="0" tIns="0" rIns="0" bIns="0" rtlCol="0" anchor="ctr"/>
-          <a:lstStyle/>
-          <a:p>
-            <a:pPr algn="ctr" indent="0" marL="0">
-              <a:buNone/>
-            </a:pPr>
-            <a:r>
-              <a:rPr lang="en-US" sz="1050" b="1" dirty="0">
-                <a:solidFill>
-                  <a:srgbClr val="FFFFFF"/>
-                </a:solidFill>
-                <a:latin typeface="Pretendard" pitchFamily="34" charset="0"/>
-                <a:ea typeface="Pretendard" pitchFamily="34" charset="-122"/>
-                <a:cs typeface="Pretendard" pitchFamily="34" charset="-120"/>
-              </a:rPr>
-              <a:t>2</a:t>
-            </a:r>
-            <a:endParaRPr lang="en-US" sz="1050" dirty="0"/>
-          </a:p>
-        </p:txBody>
-      </p:sp>
-      <p:sp>
-        <p:nvSpPr>
-          <p:cNvPr id="11" name="Text 9"/>
-          <p:cNvSpPr/>
-          <p:nvPr/>
-        </p:nvSpPr>
-        <p:spPr>
-          <a:xfrm>
-            <a:off x="1188720" y="2578608"/>
-            <a:ext cx="9875520" cy="310896"/>
-          </a:xfrm>
-          <a:prstGeom prst="rect">
-            <a:avLst/>
-          </a:prstGeom>
-          <a:noFill/>
-          <a:ln/>
-        </p:spPr>
-        <p:txBody>
-          <a:bodyPr wrap="square" lIns="0" tIns="0" rIns="0" bIns="0" rtlCol="0" anchor="ctr"/>
-          <a:lstStyle/>
-          <a:p>
-            <a:pPr indent="0" marL="0">
-              <a:buNone/>
-            </a:pPr>
-            <a:r>
-              <a:rPr lang="en-US" sz="1450" b="1" dirty="0">
-                <a:solidFill>
-                  <a:srgbClr val="14161B"/>
-                </a:solidFill>
-                <a:latin typeface="Pretendard" pitchFamily="34" charset="0"/>
-                <a:ea typeface="Pretendard" pitchFamily="34" charset="-122"/>
-                <a:cs typeface="Pretendard" pitchFamily="34" charset="-120"/>
-              </a:rPr>
-              <a:t>종합 피드백을 받는다</a:t>
-            </a:r>
-            <a:endParaRPr lang="en-US" sz="1450" dirty="0"/>
-          </a:p>
-        </p:txBody>
-      </p:sp>
-      <p:sp>
-        <p:nvSpPr>
-          <p:cNvPr id="12" name="Text 10"/>
-          <p:cNvSpPr/>
-          <p:nvPr/>
-        </p:nvSpPr>
-        <p:spPr>
-          <a:xfrm>
-            <a:off x="1188720" y="2889504"/>
-            <a:ext cx="9875520" cy="292608"/>
-          </a:xfrm>
-          <a:prstGeom prst="rect">
-            <a:avLst/>
-          </a:prstGeom>
-          <a:noFill/>
-          <a:ln/>
-        </p:spPr>
-        <p:txBody>
-          <a:bodyPr wrap="square" lIns="0" tIns="0" rIns="0" bIns="0" rtlCol="0" anchor="ctr"/>
-          <a:lstStyle/>
-          <a:p>
-            <a:pPr indent="0" marL="0">
-              <a:buNone/>
-            </a:pPr>
-            <a:r>
-              <a:rPr lang="en-US" sz="1100" dirty="0">
-                <a:solidFill>
-                  <a:srgbClr val="6B7280"/>
-                </a:solidFill>
-                <a:latin typeface="Pretendard" pitchFamily="34" charset="0"/>
-                <a:ea typeface="Pretendard" pitchFamily="34" charset="-122"/>
-                <a:cs typeface="Pretendard" pitchFamily="34" charset="-120"/>
-              </a:rPr>
-              <a:t>개별 지적보다 전체에 공통된 것 위주로</a:t>
-            </a:r>
-            <a:endParaRPr lang="en-US" sz="1100" dirty="0"/>
-          </a:p>
-        </p:txBody>
-      </p:sp>
-      <p:sp>
-        <p:nvSpPr>
-          <p:cNvPr id="13" name="Shape 11"/>
-          <p:cNvSpPr/>
-          <p:nvPr/>
-        </p:nvSpPr>
-        <p:spPr>
-          <a:xfrm>
-            <a:off x="640080" y="3364992"/>
-            <a:ext cx="10911535" cy="9144"/>
+            <a:ext cx="10911535" cy="7315"/>
           </a:xfrm>
           <a:prstGeom prst="rect">
             <a:avLst/>
           </a:prstGeom>
           <a:solidFill>
-            <a:srgbClr val="E4E6EB"/>
+            <a:srgbClr val="DCDCDC"/>
           </a:solidFill>
           <a:ln w="12700">
             <a:solidFill>
-              <a:srgbClr val="E4E6EB"/>
+              <a:srgbClr val="DCDCDC"/>
             </a:solidFill>
             <a:prstDash val="solid"/>
           </a:ln>
@@ -3220,20 +3681,18 @@
         </p:nvSpPr>
         <p:spPr>
           <a:xfrm>
-            <a:off x="640080" y="3529584"/>
+            <a:off x="640080" y="2834640"/>
             <a:ext cx="310896" cy="310896"/>
           </a:xfrm>
-          <a:prstGeom prst="roundRect">
-            <a:avLst>
-              <a:gd name="adj" fmla="val 17647"/>
-            </a:avLst>
+          <a:prstGeom prst="ellipse">
+            <a:avLst/>
           </a:prstGeom>
           <a:solidFill>
-            <a:srgbClr val="14161B"/>
+            <a:srgbClr val="FFFFFF"/>
           </a:solidFill>
-          <a:ln w="6350">
+          <a:ln w="12700">
             <a:solidFill>
-              <a:srgbClr val="14161B"/>
+              <a:srgbClr val="111111"/>
             </a:solidFill>
             <a:prstDash val="solid"/>
           </a:ln>
@@ -3247,7 +3706,7 @@
         </p:nvSpPr>
         <p:spPr>
           <a:xfrm>
-            <a:off x="640080" y="3529584"/>
+            <a:off x="640080" y="2834640"/>
             <a:ext cx="310896" cy="310896"/>
           </a:xfrm>
           <a:prstGeom prst="rect">
@@ -3264,17 +3723,17 @@
               <a:buNone/>
             </a:pPr>
             <a:r>
-              <a:rPr lang="en-US" sz="1050" b="1" dirty="0">
-                <a:solidFill>
-                  <a:srgbClr val="FFFFFF"/>
-                </a:solidFill>
-                <a:latin typeface="Pretendard" pitchFamily="34" charset="0"/>
-                <a:ea typeface="Pretendard" pitchFamily="34" charset="-122"/>
-                <a:cs typeface="Pretendard" pitchFamily="34" charset="-120"/>
-              </a:rPr>
-              <a:t>3</a:t>
-            </a:r>
-            <a:endParaRPr lang="en-US" sz="1050" dirty="0"/>
+              <a:rPr lang="en-US" sz="1000" b="1" dirty="0">
+                <a:solidFill>
+                  <a:srgbClr val="111111"/>
+                </a:solidFill>
+                <a:latin typeface="Pretendard" pitchFamily="34" charset="0"/>
+                <a:ea typeface="Pretendard" pitchFamily="34" charset="-122"/>
+                <a:cs typeface="Pretendard" pitchFamily="34" charset="-120"/>
+              </a:rPr>
+              <a:t>2</a:t>
+            </a:r>
+            <a:endParaRPr lang="en-US" sz="1000" dirty="0"/>
           </a:p>
         </p:txBody>
       </p:sp>
@@ -3286,7 +3745,7 @@
         </p:nvSpPr>
         <p:spPr>
           <a:xfrm>
-            <a:off x="1188720" y="3438144"/>
+            <a:off x="1188720" y="2743200"/>
             <a:ext cx="9875520" cy="310896"/>
           </a:xfrm>
           <a:prstGeom prst="rect">
@@ -3303,15 +3762,15 @@
               <a:buNone/>
             </a:pPr>
             <a:r>
-              <a:rPr lang="en-US" sz="1450" b="1" dirty="0">
-                <a:solidFill>
-                  <a:srgbClr val="14161B"/>
-                </a:solidFill>
-                <a:latin typeface="Pretendard" pitchFamily="34" charset="0"/>
-                <a:ea typeface="Pretendard" pitchFamily="34" charset="-122"/>
-                <a:cs typeface="Pretendard" pitchFamily="34" charset="-120"/>
-              </a:rPr>
-              <a:t>학기 성과를 스스로 점검한다</a:t>
+              <a:rPr lang="en-US" sz="1450" dirty="0">
+                <a:solidFill>
+                  <a:srgbClr val="111111"/>
+                </a:solidFill>
+                <a:latin typeface="Pretendard Black" pitchFamily="34" charset="0"/>
+                <a:ea typeface="Pretendard Black" pitchFamily="34" charset="-122"/>
+                <a:cs typeface="Pretendard Black" pitchFamily="34" charset="-120"/>
+              </a:rPr>
+              <a:t>종합 피드백을 받는다</a:t>
             </a:r>
             <a:endParaRPr lang="en-US" sz="1450" dirty="0"/>
           </a:p>
@@ -3325,7 +3784,7 @@
         </p:nvSpPr>
         <p:spPr>
           <a:xfrm>
-            <a:off x="1188720" y="3749040"/>
+            <a:off x="1188720" y="3054096"/>
             <a:ext cx="9875520" cy="292608"/>
           </a:xfrm>
           <a:prstGeom prst="rect">
@@ -3344,13 +3803,13 @@
             <a:r>
               <a:rPr lang="en-US" sz="1100" dirty="0">
                 <a:solidFill>
-                  <a:srgbClr val="6B7280"/>
-                </a:solidFill>
-                <a:latin typeface="Pretendard" pitchFamily="34" charset="0"/>
-                <a:ea typeface="Pretendard" pitchFamily="34" charset="-122"/>
-                <a:cs typeface="Pretendard" pitchFamily="34" charset="-120"/>
-              </a:rPr>
-              <a:t>학기 초 방향 문장과 지금을 비교합니다</a:t>
+                  <a:srgbClr val="6E6E6E"/>
+                </a:solidFill>
+                <a:latin typeface="Pretendard" pitchFamily="34" charset="0"/>
+                <a:ea typeface="Pretendard" pitchFamily="34" charset="-122"/>
+                <a:cs typeface="Pretendard" pitchFamily="34" charset="-120"/>
+              </a:rPr>
+              <a:t>개별 지적보다 전체에 공통된 것 위주로</a:t>
             </a:r>
             <a:endParaRPr lang="en-US" sz="1100" dirty="0"/>
           </a:p>
@@ -3364,18 +3823,18 @@
         </p:nvSpPr>
         <p:spPr>
           <a:xfrm>
-            <a:off x="640080" y="4224528"/>
-            <a:ext cx="10911535" cy="9144"/>
+            <a:off x="640080" y="3694176"/>
+            <a:ext cx="10911535" cy="7315"/>
           </a:xfrm>
           <a:prstGeom prst="rect">
             <a:avLst/>
           </a:prstGeom>
           <a:solidFill>
-            <a:srgbClr val="E4E6EB"/>
+            <a:srgbClr val="DCDCDC"/>
           </a:solidFill>
           <a:ln w="12700">
             <a:solidFill>
-              <a:srgbClr val="E4E6EB"/>
+              <a:srgbClr val="DCDCDC"/>
             </a:solidFill>
             <a:prstDash val="solid"/>
           </a:ln>
@@ -3389,20 +3848,18 @@
         </p:nvSpPr>
         <p:spPr>
           <a:xfrm>
-            <a:off x="640080" y="4389120"/>
+            <a:off x="640080" y="3858768"/>
             <a:ext cx="310896" cy="310896"/>
           </a:xfrm>
-          <a:prstGeom prst="roundRect">
-            <a:avLst>
-              <a:gd name="adj" fmla="val 17647"/>
-            </a:avLst>
+          <a:prstGeom prst="ellipse">
+            <a:avLst/>
           </a:prstGeom>
           <a:solidFill>
-            <a:srgbClr val="14161B"/>
+            <a:srgbClr val="FFFFFF"/>
           </a:solidFill>
-          <a:ln w="6350">
+          <a:ln w="12700">
             <a:solidFill>
-              <a:srgbClr val="14161B"/>
+              <a:srgbClr val="111111"/>
             </a:solidFill>
             <a:prstDash val="solid"/>
           </a:ln>
@@ -3416,7 +3873,7 @@
         </p:nvSpPr>
         <p:spPr>
           <a:xfrm>
-            <a:off x="640080" y="4389120"/>
+            <a:off x="640080" y="3858768"/>
             <a:ext cx="310896" cy="310896"/>
           </a:xfrm>
           <a:prstGeom prst="rect">
@@ -3433,9 +3890,176 @@
               <a:buNone/>
             </a:pPr>
             <a:r>
-              <a:rPr lang="en-US" sz="1050" b="1" dirty="0">
-                <a:solidFill>
-                  <a:srgbClr val="FFFFFF"/>
+              <a:rPr lang="en-US" sz="1000" b="1" dirty="0">
+                <a:solidFill>
+                  <a:srgbClr val="111111"/>
+                </a:solidFill>
+                <a:latin typeface="Pretendard" pitchFamily="34" charset="0"/>
+                <a:ea typeface="Pretendard" pitchFamily="34" charset="-122"/>
+                <a:cs typeface="Pretendard" pitchFamily="34" charset="-120"/>
+              </a:rPr>
+              <a:t>3</a:t>
+            </a:r>
+            <a:endParaRPr lang="en-US" sz="1000" dirty="0"/>
+          </a:p>
+        </p:txBody>
+      </p:sp>
+      <p:sp>
+        <p:nvSpPr>
+          <p:cNvPr id="21" name="Text 19"/>
+          <p:cNvSpPr/>
+          <p:nvPr/>
+        </p:nvSpPr>
+        <p:spPr>
+          <a:xfrm>
+            <a:off x="1188720" y="3767328"/>
+            <a:ext cx="9875520" cy="310896"/>
+          </a:xfrm>
+          <a:prstGeom prst="rect">
+            <a:avLst/>
+          </a:prstGeom>
+          <a:noFill/>
+          <a:ln/>
+        </p:spPr>
+        <p:txBody>
+          <a:bodyPr wrap="square" lIns="0" tIns="0" rIns="0" bIns="0" rtlCol="0" anchor="ctr"/>
+          <a:lstStyle/>
+          <a:p>
+            <a:pPr indent="0" marL="0">
+              <a:buNone/>
+            </a:pPr>
+            <a:r>
+              <a:rPr lang="en-US" sz="1450" dirty="0">
+                <a:solidFill>
+                  <a:srgbClr val="111111"/>
+                </a:solidFill>
+                <a:latin typeface="Pretendard Black" pitchFamily="34" charset="0"/>
+                <a:ea typeface="Pretendard Black" pitchFamily="34" charset="-122"/>
+                <a:cs typeface="Pretendard Black" pitchFamily="34" charset="-120"/>
+              </a:rPr>
+              <a:t>학기 성과를 스스로 점검한다</a:t>
+            </a:r>
+            <a:endParaRPr lang="en-US" sz="1450" dirty="0"/>
+          </a:p>
+        </p:txBody>
+      </p:sp>
+      <p:sp>
+        <p:nvSpPr>
+          <p:cNvPr id="22" name="Text 20"/>
+          <p:cNvSpPr/>
+          <p:nvPr/>
+        </p:nvSpPr>
+        <p:spPr>
+          <a:xfrm>
+            <a:off x="1188720" y="4078224"/>
+            <a:ext cx="9875520" cy="292608"/>
+          </a:xfrm>
+          <a:prstGeom prst="rect">
+            <a:avLst/>
+          </a:prstGeom>
+          <a:noFill/>
+          <a:ln/>
+        </p:spPr>
+        <p:txBody>
+          <a:bodyPr wrap="square" lIns="0" tIns="0" rIns="0" bIns="0" rtlCol="0" anchor="ctr"/>
+          <a:lstStyle/>
+          <a:p>
+            <a:pPr indent="0" marL="0">
+              <a:buNone/>
+            </a:pPr>
+            <a:r>
+              <a:rPr lang="en-US" sz="1100" dirty="0">
+                <a:solidFill>
+                  <a:srgbClr val="6E6E6E"/>
+                </a:solidFill>
+                <a:latin typeface="Pretendard" pitchFamily="34" charset="0"/>
+                <a:ea typeface="Pretendard" pitchFamily="34" charset="-122"/>
+                <a:cs typeface="Pretendard" pitchFamily="34" charset="-120"/>
+              </a:rPr>
+              <a:t>학기 초 방향 문장과 지금을 비교합니다</a:t>
+            </a:r>
+            <a:endParaRPr lang="en-US" sz="1100" dirty="0"/>
+          </a:p>
+        </p:txBody>
+      </p:sp>
+      <p:sp>
+        <p:nvSpPr>
+          <p:cNvPr id="23" name="Shape 21"/>
+          <p:cNvSpPr/>
+          <p:nvPr/>
+        </p:nvSpPr>
+        <p:spPr>
+          <a:xfrm>
+            <a:off x="640080" y="4718304"/>
+            <a:ext cx="10911535" cy="7315"/>
+          </a:xfrm>
+          <a:prstGeom prst="rect">
+            <a:avLst/>
+          </a:prstGeom>
+          <a:solidFill>
+            <a:srgbClr val="DCDCDC"/>
+          </a:solidFill>
+          <a:ln w="12700">
+            <a:solidFill>
+              <a:srgbClr val="DCDCDC"/>
+            </a:solidFill>
+            <a:prstDash val="solid"/>
+          </a:ln>
+        </p:spPr>
+      </p:sp>
+      <p:sp>
+        <p:nvSpPr>
+          <p:cNvPr id="24" name="Shape 22"/>
+          <p:cNvSpPr/>
+          <p:nvPr/>
+        </p:nvSpPr>
+        <p:spPr>
+          <a:xfrm>
+            <a:off x="640080" y="4882896"/>
+            <a:ext cx="310896" cy="310896"/>
+          </a:xfrm>
+          <a:prstGeom prst="ellipse">
+            <a:avLst/>
+          </a:prstGeom>
+          <a:solidFill>
+            <a:srgbClr val="FFFFFF"/>
+          </a:solidFill>
+          <a:ln w="12700">
+            <a:solidFill>
+              <a:srgbClr val="111111"/>
+            </a:solidFill>
+            <a:prstDash val="solid"/>
+          </a:ln>
+        </p:spPr>
+      </p:sp>
+      <p:sp>
+        <p:nvSpPr>
+          <p:cNvPr id="25" name="Text 23"/>
+          <p:cNvSpPr/>
+          <p:nvPr/>
+        </p:nvSpPr>
+        <p:spPr>
+          <a:xfrm>
+            <a:off x="640080" y="4882896"/>
+            <a:ext cx="310896" cy="310896"/>
+          </a:xfrm>
+          <a:prstGeom prst="rect">
+            <a:avLst/>
+          </a:prstGeom>
+          <a:noFill/>
+          <a:ln/>
+        </p:spPr>
+        <p:txBody>
+          <a:bodyPr wrap="square" lIns="0" tIns="0" rIns="0" bIns="0" rtlCol="0" anchor="ctr"/>
+          <a:lstStyle/>
+          <a:p>
+            <a:pPr algn="ctr" indent="0" marL="0">
+              <a:buNone/>
+            </a:pPr>
+            <a:r>
+              <a:rPr lang="en-US" sz="1000" b="1" dirty="0">
+                <a:solidFill>
+                  <a:srgbClr val="111111"/>
                 </a:solidFill>
                 <a:latin typeface="Pretendard" pitchFamily="34" charset="0"/>
                 <a:ea typeface="Pretendard" pitchFamily="34" charset="-122"/>
@@ -3443,19 +4067,19 @@
               </a:rPr>
               <a:t>4</a:t>
             </a:r>
-            <a:endParaRPr lang="en-US" sz="1050" dirty="0"/>
-          </a:p>
-        </p:txBody>
-      </p:sp>
-      <p:sp>
-        <p:nvSpPr>
-          <p:cNvPr id="21" name="Text 19"/>
-          <p:cNvSpPr/>
-          <p:nvPr/>
-        </p:nvSpPr>
-        <p:spPr>
-          <a:xfrm>
-            <a:off x="1188720" y="4297680"/>
+            <a:endParaRPr lang="en-US" sz="1000" dirty="0"/>
+          </a:p>
+        </p:txBody>
+      </p:sp>
+      <p:sp>
+        <p:nvSpPr>
+          <p:cNvPr id="26" name="Text 24"/>
+          <p:cNvSpPr/>
+          <p:nvPr/>
+        </p:nvSpPr>
+        <p:spPr>
+          <a:xfrm>
+            <a:off x="1188720" y="4791456"/>
             <a:ext cx="9875520" cy="310896"/>
           </a:xfrm>
           <a:prstGeom prst="rect">
@@ -3472,13 +4096,13 @@
               <a:buNone/>
             </a:pPr>
             <a:r>
-              <a:rPr lang="en-US" sz="1450" b="1" dirty="0">
-                <a:solidFill>
-                  <a:srgbClr val="14161B"/>
-                </a:solidFill>
-                <a:latin typeface="Pretendard" pitchFamily="34" charset="0"/>
-                <a:ea typeface="Pretendard" pitchFamily="34" charset="-122"/>
-                <a:cs typeface="Pretendard" pitchFamily="34" charset="-120"/>
+              <a:rPr lang="en-US" sz="1450" dirty="0">
+                <a:solidFill>
+                  <a:srgbClr val="111111"/>
+                </a:solidFill>
+                <a:latin typeface="Pretendard Black" pitchFamily="34" charset="0"/>
+                <a:ea typeface="Pretendard Black" pitchFamily="34" charset="-122"/>
+                <a:cs typeface="Pretendard Black" pitchFamily="34" charset="-120"/>
               </a:rPr>
               <a:t>다음에 채울 것을 적는다</a:t>
             </a:r>
@@ -3488,13 +4112,13 @@
       </p:sp>
       <p:sp>
         <p:nvSpPr>
-          <p:cNvPr id="22" name="Text 20"/>
-          <p:cNvSpPr/>
-          <p:nvPr/>
-        </p:nvSpPr>
-        <p:spPr>
-          <a:xfrm>
-            <a:off x="1188720" y="4608576"/>
+          <p:cNvPr id="27" name="Text 25"/>
+          <p:cNvSpPr/>
+          <p:nvPr/>
+        </p:nvSpPr>
+        <p:spPr>
+          <a:xfrm>
+            <a:off x="1188720" y="5102352"/>
             <a:ext cx="9875520" cy="292608"/>
           </a:xfrm>
           <a:prstGeom prst="rect">
@@ -3513,7 +4137,7 @@
             <a:r>
               <a:rPr lang="en-US" sz="1100" dirty="0">
                 <a:solidFill>
-                  <a:srgbClr val="6B7280"/>
+                  <a:srgbClr val="6E6E6E"/>
                 </a:solidFill>
                 <a:latin typeface="Pretendard" pitchFamily="34" charset="0"/>
                 <a:ea typeface="Pretendard" pitchFamily="34" charset="-122"/>
@@ -3527,14 +4151,39 @@
       </p:sp>
       <p:sp>
         <p:nvSpPr>
-          <p:cNvPr id="23" name="Text 21"/>
-          <p:cNvSpPr/>
-          <p:nvPr/>
-        </p:nvSpPr>
-        <p:spPr>
-          <a:xfrm>
-            <a:off x="640080" y="6345936"/>
-            <a:ext cx="7772400" cy="256032"/>
+          <p:cNvPr id="28" name="Shape 26"/>
+          <p:cNvSpPr/>
+          <p:nvPr/>
+        </p:nvSpPr>
+        <p:spPr>
+          <a:xfrm>
+            <a:off x="640080" y="6291072"/>
+            <a:ext cx="10911535" cy="7315"/>
+          </a:xfrm>
+          <a:prstGeom prst="rect">
+            <a:avLst/>
+          </a:prstGeom>
+          <a:solidFill>
+            <a:srgbClr val="DCDCDC"/>
+          </a:solidFill>
+          <a:ln w="12700">
+            <a:solidFill>
+              <a:srgbClr val="DCDCDC"/>
+            </a:solidFill>
+            <a:prstDash val="solid"/>
+          </a:ln>
+        </p:spPr>
+      </p:sp>
+      <p:sp>
+        <p:nvSpPr>
+          <p:cNvPr id="29" name="Text 27"/>
+          <p:cNvSpPr/>
+          <p:nvPr/>
+        </p:nvSpPr>
+        <p:spPr>
+          <a:xfrm>
+            <a:off x="640080" y="6382512"/>
+            <a:ext cx="7772400" cy="237744"/>
           </a:xfrm>
           <a:prstGeom prst="rect">
             <a:avLst/>
@@ -3550,9 +4199,9 @@
               <a:buNone/>
             </a:pPr>
             <a:r>
-              <a:rPr lang="en-US" sz="900" dirty="0">
-                <a:solidFill>
-                  <a:srgbClr val="9AA0AA"/>
+              <a:rPr lang="en-US" sz="850" spc="40" kern="0" dirty="0">
+                <a:solidFill>
+                  <a:srgbClr val="9B9B9B"/>
                 </a:solidFill>
                 <a:latin typeface="Pretendard" pitchFamily="34" charset="0"/>
                 <a:ea typeface="Pretendard" pitchFamily="34" charset="-122"/>
@@ -3560,20 +4209,20 @@
               </a:rPr>
               <a:t>포트폴리오제작 · 15주차 기말 발표 및 종합 평가</a:t>
             </a:r>
-            <a:endParaRPr lang="en-US" sz="900" dirty="0"/>
-          </a:p>
-        </p:txBody>
-      </p:sp>
-      <p:sp>
-        <p:nvSpPr>
-          <p:cNvPr id="24" name="Text 22"/>
-          <p:cNvSpPr/>
-          <p:nvPr/>
-        </p:nvSpPr>
-        <p:spPr>
-          <a:xfrm>
-            <a:off x="10454335" y="6345936"/>
-            <a:ext cx="1097280" cy="256032"/>
+            <a:endParaRPr lang="en-US" sz="850" dirty="0"/>
+          </a:p>
+        </p:txBody>
+      </p:sp>
+      <p:sp>
+        <p:nvSpPr>
+          <p:cNvPr id="30" name="Text 28"/>
+          <p:cNvSpPr/>
+          <p:nvPr/>
+        </p:nvSpPr>
+        <p:spPr>
+          <a:xfrm>
+            <a:off x="10271455" y="6382512"/>
+            <a:ext cx="1280160" cy="237744"/>
           </a:xfrm>
           <a:prstGeom prst="rect">
             <a:avLst/>
@@ -3589,17 +4238,17 @@
               <a:buNone/>
             </a:pPr>
             <a:r>
-              <a:rPr lang="en-US" sz="900" dirty="0">
-                <a:solidFill>
-                  <a:srgbClr val="9AA0AA"/>
-                </a:solidFill>
-                <a:latin typeface="Pretendard" pitchFamily="34" charset="0"/>
-                <a:ea typeface="Pretendard" pitchFamily="34" charset="-122"/>
-                <a:cs typeface="Pretendard" pitchFamily="34" charset="-120"/>
-              </a:rPr>
-              <a:t>02</a:t>
-            </a:r>
-            <a:endParaRPr lang="en-US" sz="900" dirty="0"/>
+              <a:rPr lang="en-US" sz="850" spc="140" kern="0" dirty="0">
+                <a:solidFill>
+                  <a:srgbClr val="9B9B9B"/>
+                </a:solidFill>
+                <a:latin typeface="Pretendard" pitchFamily="34" charset="0"/>
+                <a:ea typeface="Pretendard" pitchFamily="34" charset="-122"/>
+                <a:cs typeface="Pretendard" pitchFamily="34" charset="-120"/>
+              </a:rPr>
+              <a:t>P.02</a:t>
+            </a:r>
+            <a:endParaRPr lang="en-US" sz="850" dirty="0"/>
           </a:p>
         </p:txBody>
       </p:sp>
@@ -3617,7 +4266,7 @@
     <p:bg>
       <p:bgPr>
         <a:solidFill>
-          <a:srgbClr val="14161B"/>
+          <a:srgbClr val="111111"/>
         </a:solidFill>
       </p:bgPr>
     </p:bg>
@@ -3643,8 +4292,86 @@
         </p:nvSpPr>
         <p:spPr>
           <a:xfrm>
-            <a:off x="7711135" y="914400"/>
-            <a:ext cx="3840480" cy="5029200"/>
+            <a:off x="640080" y="274320"/>
+            <a:ext cx="3657600" cy="219456"/>
+          </a:xfrm>
+          <a:prstGeom prst="rect">
+            <a:avLst/>
+          </a:prstGeom>
+          <a:noFill/>
+          <a:ln/>
+        </p:spPr>
+        <p:txBody>
+          <a:bodyPr wrap="square" lIns="0" tIns="0" rIns="0" bIns="0" rtlCol="0" anchor="ctr"/>
+          <a:lstStyle/>
+          <a:p>
+            <a:pPr indent="0" marL="0">
+              <a:buNone/>
+            </a:pPr>
+            <a:r>
+              <a:rPr lang="en-US" sz="900" spc="120" kern="0" dirty="0">
+                <a:solidFill>
+                  <a:srgbClr val="9A9A9A"/>
+                </a:solidFill>
+                <a:latin typeface="Pretendard" pitchFamily="34" charset="0"/>
+                <a:ea typeface="Pretendard" pitchFamily="34" charset="-122"/>
+                <a:cs typeface="Pretendard" pitchFamily="34" charset="-120"/>
+              </a:rPr>
+              <a:t>포트폴리오제작</a:t>
+            </a:r>
+            <a:endParaRPr lang="en-US" sz="900" dirty="0"/>
+          </a:p>
+        </p:txBody>
+      </p:sp>
+      <p:sp>
+        <p:nvSpPr>
+          <p:cNvPr id="3" name="Text 1"/>
+          <p:cNvSpPr/>
+          <p:nvPr/>
+        </p:nvSpPr>
+        <p:spPr>
+          <a:xfrm>
+            <a:off x="4480560" y="274320"/>
+            <a:ext cx="4572000" cy="219456"/>
+          </a:xfrm>
+          <a:prstGeom prst="rect">
+            <a:avLst/>
+          </a:prstGeom>
+          <a:noFill/>
+          <a:ln/>
+        </p:spPr>
+        <p:txBody>
+          <a:bodyPr wrap="square" lIns="0" tIns="0" rIns="0" bIns="0" rtlCol="0" anchor="ctr"/>
+          <a:lstStyle/>
+          <a:p>
+            <a:pPr algn="ctr" indent="0" marL="0">
+              <a:buNone/>
+            </a:pPr>
+            <a:r>
+              <a:rPr lang="en-US" sz="900" spc="120" kern="0" dirty="0">
+                <a:solidFill>
+                  <a:srgbClr val="9A9A9A"/>
+                </a:solidFill>
+                <a:latin typeface="Pretendard" pitchFamily="34" charset="0"/>
+                <a:ea typeface="Pretendard" pitchFamily="34" charset="-122"/>
+                <a:cs typeface="Pretendard" pitchFamily="34" charset="-120"/>
+              </a:rPr>
+              <a:t>PHASE 3 완성과 발표</a:t>
+            </a:r>
+            <a:endParaRPr lang="en-US" sz="900" dirty="0"/>
+          </a:p>
+        </p:txBody>
+      </p:sp>
+      <p:sp>
+        <p:nvSpPr>
+          <p:cNvPr id="4" name="Text 2"/>
+          <p:cNvSpPr/>
+          <p:nvPr/>
+        </p:nvSpPr>
+        <p:spPr>
+          <a:xfrm>
+            <a:off x="8808415" y="274320"/>
+            <a:ext cx="2743200" cy="219456"/>
           </a:xfrm>
           <a:prstGeom prst="rect">
             <a:avLst/>
@@ -3660,30 +4387,163 @@
               <a:buNone/>
             </a:pPr>
             <a:r>
-              <a:rPr lang="en-US" sz="25500" dirty="0">
-                <a:solidFill>
-                  <a:srgbClr val="262A33"/>
-                </a:solidFill>
-                <a:latin typeface="Pretendard Thin" pitchFamily="34" charset="0"/>
-                <a:ea typeface="Pretendard Thin" pitchFamily="34" charset="-122"/>
-                <a:cs typeface="Pretendard Thin" pitchFamily="34" charset="-120"/>
+              <a:rPr lang="en-US" sz="900" spc="200" kern="0" dirty="0">
+                <a:solidFill>
+                  <a:srgbClr val="9A9A9A"/>
+                </a:solidFill>
+                <a:latin typeface="Pretendard" pitchFamily="34" charset="0"/>
+                <a:ea typeface="Pretendard" pitchFamily="34" charset="-122"/>
+                <a:cs typeface="Pretendard" pitchFamily="34" charset="-120"/>
+              </a:rPr>
+              <a:t>WEEK 15</a:t>
+            </a:r>
+            <a:endParaRPr lang="en-US" sz="900" dirty="0"/>
+          </a:p>
+        </p:txBody>
+      </p:sp>
+      <p:sp>
+        <p:nvSpPr>
+          <p:cNvPr id="5" name="Shape 3"/>
+          <p:cNvSpPr/>
+          <p:nvPr/>
+        </p:nvSpPr>
+        <p:spPr>
+          <a:xfrm>
+            <a:off x="640080" y="548640"/>
+            <a:ext cx="10911535" cy="7315"/>
+          </a:xfrm>
+          <a:prstGeom prst="rect">
+            <a:avLst/>
+          </a:prstGeom>
+          <a:solidFill>
+            <a:srgbClr val="333333"/>
+          </a:solidFill>
+          <a:ln w="12700">
+            <a:solidFill>
+              <a:srgbClr val="333333"/>
+            </a:solidFill>
+            <a:prstDash val="solid"/>
+          </a:ln>
+        </p:spPr>
+      </p:sp>
+      <p:sp>
+        <p:nvSpPr>
+          <p:cNvPr id="6" name="Text 4"/>
+          <p:cNvSpPr/>
+          <p:nvPr/>
+        </p:nvSpPr>
+        <p:spPr>
+          <a:xfrm>
+            <a:off x="7345375" y="1737360"/>
+            <a:ext cx="4206240" cy="3291840"/>
+          </a:xfrm>
+          <a:prstGeom prst="rect">
+            <a:avLst/>
+          </a:prstGeom>
+          <a:noFill/>
+          <a:ln/>
+        </p:spPr>
+        <p:txBody>
+          <a:bodyPr wrap="square" lIns="0" tIns="0" rIns="0" bIns="0" rtlCol="0" anchor="ctr"/>
+          <a:lstStyle/>
+          <a:p>
+            <a:pPr algn="r" indent="0" marL="0">
+              <a:buNone/>
+            </a:pPr>
+            <a:r>
+              <a:rPr lang="en-US" sz="20000" dirty="0">
+                <a:solidFill>
+                  <a:srgbClr val="1B1B1B"/>
+                </a:solidFill>
+                <a:latin typeface="Pretendard Black" pitchFamily="34" charset="0"/>
+                <a:ea typeface="Pretendard Black" pitchFamily="34" charset="-122"/>
+                <a:cs typeface="Pretendard Black" pitchFamily="34" charset="-120"/>
               </a:rPr>
               <a:t>01</a:t>
             </a:r>
-            <a:endParaRPr lang="en-US" sz="25500" dirty="0"/>
-          </a:p>
-        </p:txBody>
-      </p:sp>
-      <p:sp>
-        <p:nvSpPr>
-          <p:cNvPr id="3" name="Text 1"/>
-          <p:cNvSpPr/>
-          <p:nvPr/>
-        </p:nvSpPr>
-        <p:spPr>
-          <a:xfrm>
-            <a:off x="640080" y="2487168"/>
-            <a:ext cx="7315200" cy="274320"/>
+            <a:endParaRPr lang="en-US" sz="20000" dirty="0"/>
+          </a:p>
+        </p:txBody>
+      </p:sp>
+      <p:sp>
+        <p:nvSpPr>
+          <p:cNvPr id="7" name="Shape 5"/>
+          <p:cNvSpPr/>
+          <p:nvPr/>
+        </p:nvSpPr>
+        <p:spPr>
+          <a:xfrm>
+            <a:off x="941832" y="1371600"/>
+            <a:ext cx="0" cy="603504"/>
+          </a:xfrm>
+          <a:prstGeom prst="line">
+            <a:avLst/>
+          </a:prstGeom>
+          <a:noFill/>
+          <a:ln w="15875">
+            <a:solidFill>
+              <a:srgbClr val="FFFFFF"/>
+            </a:solidFill>
+            <a:prstDash val="solid"/>
+          </a:ln>
+        </p:spPr>
+      </p:sp>
+      <p:sp>
+        <p:nvSpPr>
+          <p:cNvPr id="8" name="Shape 6"/>
+          <p:cNvSpPr/>
+          <p:nvPr/>
+        </p:nvSpPr>
+        <p:spPr>
+          <a:xfrm>
+            <a:off x="640080" y="1733702"/>
+            <a:ext cx="301752" cy="241402"/>
+          </a:xfrm>
+          <a:prstGeom prst="line">
+            <a:avLst/>
+          </a:prstGeom>
+          <a:noFill/>
+          <a:ln w="15875">
+            <a:solidFill>
+              <a:srgbClr val="FFFFFF"/>
+            </a:solidFill>
+            <a:prstDash val="solid"/>
+          </a:ln>
+        </p:spPr>
+      </p:sp>
+      <p:sp>
+        <p:nvSpPr>
+          <p:cNvPr id="9" name="Shape 7"/>
+          <p:cNvSpPr/>
+          <p:nvPr/>
+        </p:nvSpPr>
+        <p:spPr>
+          <a:xfrm flipV="1">
+            <a:off x="941832" y="1733702"/>
+            <a:ext cx="301752" cy="241402"/>
+          </a:xfrm>
+          <a:prstGeom prst="line">
+            <a:avLst/>
+          </a:prstGeom>
+          <a:noFill/>
+          <a:ln w="15875">
+            <a:solidFill>
+              <a:srgbClr val="FFFFFF"/>
+            </a:solidFill>
+            <a:prstDash val="solid"/>
+          </a:ln>
+        </p:spPr>
+      </p:sp>
+      <p:sp>
+        <p:nvSpPr>
+          <p:cNvPr id="10" name="Text 8"/>
+          <p:cNvSpPr/>
+          <p:nvPr/>
+        </p:nvSpPr>
+        <p:spPr>
+          <a:xfrm>
+            <a:off x="640080" y="2615184"/>
+            <a:ext cx="7863840" cy="256032"/>
           </a:xfrm>
           <a:prstGeom prst="rect">
             <a:avLst/>
@@ -3699,9 +4559,9 @@
               <a:buNone/>
             </a:pPr>
             <a:r>
-              <a:rPr lang="en-US" sz="1100" b="1" spc="200" kern="0" dirty="0">
-                <a:solidFill>
-                  <a:srgbClr val="FF4A1C"/>
+              <a:rPr lang="en-US" sz="950" spc="280" kern="0" dirty="0">
+                <a:solidFill>
+                  <a:srgbClr val="9A9A9A"/>
                 </a:solidFill>
                 <a:latin typeface="Pretendard" pitchFamily="34" charset="0"/>
                 <a:ea typeface="Pretendard" pitchFamily="34" charset="-122"/>
@@ -3709,20 +4569,20 @@
               </a:rPr>
               <a:t>PART 01</a:t>
             </a:r>
-            <a:endParaRPr lang="en-US" sz="1100" dirty="0"/>
-          </a:p>
-        </p:txBody>
-      </p:sp>
-      <p:sp>
-        <p:nvSpPr>
-          <p:cNvPr id="4" name="Text 2"/>
-          <p:cNvSpPr/>
-          <p:nvPr/>
-        </p:nvSpPr>
-        <p:spPr>
-          <a:xfrm>
-            <a:off x="640080" y="2834640"/>
-            <a:ext cx="7315200" cy="731520"/>
+            <a:endParaRPr lang="en-US" sz="950" dirty="0"/>
+          </a:p>
+        </p:txBody>
+      </p:sp>
+      <p:sp>
+        <p:nvSpPr>
+          <p:cNvPr id="11" name="Text 9"/>
+          <p:cNvSpPr/>
+          <p:nvPr/>
+        </p:nvSpPr>
+        <p:spPr>
+          <a:xfrm>
+            <a:off x="640080" y="2889504"/>
+            <a:ext cx="7863840" cy="786384"/>
           </a:xfrm>
           <a:prstGeom prst="rect">
             <a:avLst/>
@@ -3738,30 +4598,55 @@
               <a:buNone/>
             </a:pPr>
             <a:r>
-              <a:rPr lang="en-US" sz="4200" b="1" dirty="0">
+              <a:rPr lang="en-US" sz="4600" dirty="0">
                 <a:solidFill>
                   <a:srgbClr val="FFFFFF"/>
                 </a:solidFill>
-                <a:latin typeface="Pretendard" pitchFamily="34" charset="0"/>
-                <a:ea typeface="Pretendard" pitchFamily="34" charset="-122"/>
-                <a:cs typeface="Pretendard" pitchFamily="34" charset="-120"/>
+                <a:latin typeface="Pretendard Black" pitchFamily="34" charset="0"/>
+                <a:ea typeface="Pretendard Black" pitchFamily="34" charset="-122"/>
+                <a:cs typeface="Pretendard Black" pitchFamily="34" charset="-120"/>
               </a:rPr>
               <a:t>최종 발표</a:t>
             </a:r>
-            <a:endParaRPr lang="en-US" sz="4200" dirty="0"/>
-          </a:p>
-        </p:txBody>
-      </p:sp>
-      <p:sp>
-        <p:nvSpPr>
-          <p:cNvPr id="5" name="Text 3"/>
-          <p:cNvSpPr/>
-          <p:nvPr/>
-        </p:nvSpPr>
-        <p:spPr>
-          <a:xfrm>
-            <a:off x="640080" y="3657600"/>
-            <a:ext cx="6766560" cy="640080"/>
+            <a:endParaRPr lang="en-US" sz="4600" dirty="0"/>
+          </a:p>
+        </p:txBody>
+      </p:sp>
+      <p:sp>
+        <p:nvSpPr>
+          <p:cNvPr id="12" name="Shape 10"/>
+          <p:cNvSpPr/>
+          <p:nvPr/>
+        </p:nvSpPr>
+        <p:spPr>
+          <a:xfrm>
+            <a:off x="640080" y="3803904"/>
+            <a:ext cx="2194560" cy="7315"/>
+          </a:xfrm>
+          <a:prstGeom prst="rect">
+            <a:avLst/>
+          </a:prstGeom>
+          <a:solidFill>
+            <a:srgbClr val="FFFFFF"/>
+          </a:solidFill>
+          <a:ln w="12700">
+            <a:solidFill>
+              <a:srgbClr val="FFFFFF"/>
+            </a:solidFill>
+            <a:prstDash val="solid"/>
+          </a:ln>
+        </p:spPr>
+      </p:sp>
+      <p:sp>
+        <p:nvSpPr>
+          <p:cNvPr id="13" name="Text 11"/>
+          <p:cNvSpPr/>
+          <p:nvPr/>
+        </p:nvSpPr>
+        <p:spPr>
+          <a:xfrm>
+            <a:off x="640080" y="4005072"/>
+            <a:ext cx="6949440" cy="731520"/>
           </a:xfrm>
           <a:prstGeom prst="rect">
             <a:avLst/>
@@ -3775,22 +4660,61 @@
           <a:p>
             <a:pPr indent="0" marL="0">
               <a:lnSpc>
-                <a:spcPct val="130000"/>
+                <a:spcPct val="134000"/>
               </a:lnSpc>
               <a:buNone/>
             </a:pPr>
             <a:r>
               <a:rPr lang="en-US" sz="1350" dirty="0">
                 <a:solidFill>
-                  <a:srgbClr val="AEB4BF"/>
-                </a:solidFill>
-                <a:latin typeface="Pretendard" pitchFamily="34" charset="0"/>
-                <a:ea typeface="Pretendard" pitchFamily="34" charset="-122"/>
-                <a:cs typeface="Pretendard" pitchFamily="34" charset="-120"/>
+                  <a:srgbClr val="B8B8B8"/>
+                </a:solidFill>
+                <a:latin typeface="Pretendard Light" pitchFamily="34" charset="0"/>
+                <a:ea typeface="Pretendard Light" pitchFamily="34" charset="-122"/>
+                <a:cs typeface="Pretendard Light" pitchFamily="34" charset="-120"/>
               </a:rPr>
               <a:t>7분. 3분 스크립트를 코어로 하고 나머지는 질의에 씁니다.</a:t>
             </a:r>
             <a:endParaRPr lang="en-US" sz="1350" dirty="0"/>
+          </a:p>
+        </p:txBody>
+      </p:sp>
+      <p:sp>
+        <p:nvSpPr>
+          <p:cNvPr id="14" name="Text 12"/>
+          <p:cNvSpPr/>
+          <p:nvPr/>
+        </p:nvSpPr>
+        <p:spPr>
+          <a:xfrm rot="16200000">
+            <a:off x="10436047" y="3291840"/>
+            <a:ext cx="2743200" cy="274320"/>
+          </a:xfrm>
+          <a:prstGeom prst="rect">
+            <a:avLst/>
+          </a:prstGeom>
+          <a:noFill/>
+          <a:ln/>
+        </p:spPr>
+        <p:txBody>
+          <a:bodyPr wrap="square" lIns="0" tIns="0" rIns="0" bIns="0" rtlCol="0" anchor="ctr"/>
+          <a:lstStyle/>
+          <a:p>
+            <a:pPr algn="ctr" indent="0" marL="0">
+              <a:buNone/>
+            </a:pPr>
+            <a:r>
+              <a:rPr lang="en-US" sz="850" spc="260" kern="0" dirty="0">
+                <a:solidFill>
+                  <a:srgbClr val="7A7A7A"/>
+                </a:solidFill>
+                <a:latin typeface="Pretendard" pitchFamily="34" charset="0"/>
+                <a:ea typeface="Pretendard" pitchFamily="34" charset="-122"/>
+                <a:cs typeface="Pretendard" pitchFamily="34" charset="-120"/>
+              </a:rPr>
+              <a:t>SECTION 01</a:t>
+            </a:r>
+            <a:endParaRPr lang="en-US" sz="850" dirty="0"/>
           </a:p>
         </p:txBody>
       </p:sp>
@@ -3834,8 +4758,8 @@
         </p:nvSpPr>
         <p:spPr>
           <a:xfrm>
-            <a:off x="640080" y="566928"/>
-            <a:ext cx="10911535" cy="237744"/>
+            <a:off x="640080" y="274320"/>
+            <a:ext cx="3657600" cy="219456"/>
           </a:xfrm>
           <a:prstGeom prst="rect">
             <a:avLst/>
@@ -3851,17 +4775,17 @@
               <a:buNone/>
             </a:pPr>
             <a:r>
-              <a:rPr lang="en-US" sz="1100" b="1" spc="140" kern="0" dirty="0">
-                <a:solidFill>
-                  <a:srgbClr val="FF4A1C"/>
-                </a:solidFill>
-                <a:latin typeface="Pretendard" pitchFamily="34" charset="0"/>
-                <a:ea typeface="Pretendard" pitchFamily="34" charset="-122"/>
-                <a:cs typeface="Pretendard" pitchFamily="34" charset="-120"/>
-              </a:rPr>
-              <a:t>CHECK</a:t>
-            </a:r>
-            <a:endParaRPr lang="en-US" sz="1100" dirty="0"/>
+              <a:rPr lang="en-US" sz="900" spc="120" kern="0" dirty="0">
+                <a:solidFill>
+                  <a:srgbClr val="8A8A8A"/>
+                </a:solidFill>
+                <a:latin typeface="Pretendard" pitchFamily="34" charset="0"/>
+                <a:ea typeface="Pretendard" pitchFamily="34" charset="-122"/>
+                <a:cs typeface="Pretendard" pitchFamily="34" charset="-120"/>
+              </a:rPr>
+              <a:t>포트폴리오제작</a:t>
+            </a:r>
+            <a:endParaRPr lang="en-US" sz="900" dirty="0"/>
           </a:p>
         </p:txBody>
       </p:sp>
@@ -3873,34 +4797,34 @@
         </p:nvSpPr>
         <p:spPr>
           <a:xfrm>
-            <a:off x="640080" y="859536"/>
-            <a:ext cx="10911535" cy="512064"/>
-          </a:xfrm>
-          <a:prstGeom prst="rect">
-            <a:avLst/>
-          </a:prstGeom>
-          <a:noFill/>
-          <a:ln/>
-        </p:spPr>
-        <p:txBody>
-          <a:bodyPr wrap="square" lIns="0" tIns="0" rIns="0" bIns="0" rtlCol="0" anchor="ctr"/>
-          <a:lstStyle/>
-          <a:p>
-            <a:pPr indent="0" marL="0">
-              <a:buNone/>
-            </a:pPr>
-            <a:r>
-              <a:rPr lang="en-US" sz="2800" b="1" dirty="0">
-                <a:solidFill>
-                  <a:srgbClr val="14161B"/>
-                </a:solidFill>
-                <a:latin typeface="Pretendard" pitchFamily="34" charset="0"/>
-                <a:ea typeface="Pretendard" pitchFamily="34" charset="-122"/>
-                <a:cs typeface="Pretendard" pitchFamily="34" charset="-120"/>
-              </a:rPr>
-              <a:t>최종 발표 체크리스트</a:t>
-            </a:r>
-            <a:endParaRPr lang="en-US" sz="2800" dirty="0"/>
+            <a:off x="4480560" y="274320"/>
+            <a:ext cx="4572000" cy="219456"/>
+          </a:xfrm>
+          <a:prstGeom prst="rect">
+            <a:avLst/>
+          </a:prstGeom>
+          <a:noFill/>
+          <a:ln/>
+        </p:spPr>
+        <p:txBody>
+          <a:bodyPr wrap="square" lIns="0" tIns="0" rIns="0" bIns="0" rtlCol="0" anchor="ctr"/>
+          <a:lstStyle/>
+          <a:p>
+            <a:pPr algn="ctr" indent="0" marL="0">
+              <a:buNone/>
+            </a:pPr>
+            <a:r>
+              <a:rPr lang="en-US" sz="900" spc="120" kern="0" dirty="0">
+                <a:solidFill>
+                  <a:srgbClr val="8A8A8A"/>
+                </a:solidFill>
+                <a:latin typeface="Pretendard" pitchFamily="34" charset="0"/>
+                <a:ea typeface="Pretendard" pitchFamily="34" charset="-122"/>
+                <a:cs typeface="Pretendard" pitchFamily="34" charset="-120"/>
+              </a:rPr>
+              <a:t>PHASE 3 완성과 발표</a:t>
+            </a:r>
+            <a:endParaRPr lang="en-US" sz="900" dirty="0"/>
           </a:p>
         </p:txBody>
       </p:sp>
@@ -3912,34 +4836,34 @@
         </p:nvSpPr>
         <p:spPr>
           <a:xfrm>
-            <a:off x="640080" y="1371600"/>
-            <a:ext cx="10911535" cy="237744"/>
-          </a:xfrm>
-          <a:prstGeom prst="rect">
-            <a:avLst/>
-          </a:prstGeom>
-          <a:noFill/>
-          <a:ln/>
-        </p:spPr>
-        <p:txBody>
-          <a:bodyPr wrap="square" lIns="0" tIns="0" rIns="0" bIns="0" rtlCol="0" anchor="ctr"/>
-          <a:lstStyle/>
-          <a:p>
-            <a:pPr indent="0" marL="0">
-              <a:buNone/>
-            </a:pPr>
-            <a:r>
-              <a:rPr lang="en-US" sz="1200" dirty="0">
-                <a:solidFill>
-                  <a:srgbClr val="6B7280"/>
-                </a:solidFill>
-                <a:latin typeface="Pretendard" pitchFamily="34" charset="0"/>
-                <a:ea typeface="Pretendard" pitchFamily="34" charset="-122"/>
-                <a:cs typeface="Pretendard" pitchFamily="34" charset="-120"/>
-              </a:rPr>
-              <a:t>발표 전에 스스로 한 번 훑어보세요.</a:t>
-            </a:r>
-            <a:endParaRPr lang="en-US" sz="1200" dirty="0"/>
+            <a:off x="8808415" y="274320"/>
+            <a:ext cx="2743200" cy="219456"/>
+          </a:xfrm>
+          <a:prstGeom prst="rect">
+            <a:avLst/>
+          </a:prstGeom>
+          <a:noFill/>
+          <a:ln/>
+        </p:spPr>
+        <p:txBody>
+          <a:bodyPr wrap="square" lIns="0" tIns="0" rIns="0" bIns="0" rtlCol="0" anchor="ctr"/>
+          <a:lstStyle/>
+          <a:p>
+            <a:pPr algn="r" indent="0" marL="0">
+              <a:buNone/>
+            </a:pPr>
+            <a:r>
+              <a:rPr lang="en-US" sz="900" spc="200" kern="0" dirty="0">
+                <a:solidFill>
+                  <a:srgbClr val="8A8A8A"/>
+                </a:solidFill>
+                <a:latin typeface="Pretendard" pitchFamily="34" charset="0"/>
+                <a:ea typeface="Pretendard" pitchFamily="34" charset="-122"/>
+                <a:cs typeface="Pretendard" pitchFamily="34" charset="-120"/>
+              </a:rPr>
+              <a:t>WEEK 15</a:t>
+            </a:r>
+            <a:endParaRPr lang="en-US" sz="900" dirty="0"/>
           </a:p>
         </p:txBody>
       </p:sp>
@@ -3951,20 +4875,18 @@
         </p:nvSpPr>
         <p:spPr>
           <a:xfrm>
-            <a:off x="640080" y="1755648"/>
-            <a:ext cx="5254600" cy="585216"/>
-          </a:xfrm>
-          <a:prstGeom prst="roundRect">
-            <a:avLst>
-              <a:gd name="adj" fmla="val 12500"/>
-            </a:avLst>
+            <a:off x="640080" y="548640"/>
+            <a:ext cx="10911535" cy="7315"/>
+          </a:xfrm>
+          <a:prstGeom prst="rect">
+            <a:avLst/>
           </a:prstGeom>
           <a:solidFill>
-            <a:srgbClr val="F4F5F7"/>
+            <a:srgbClr val="DCDCDC"/>
           </a:solidFill>
           <a:ln w="12700">
             <a:solidFill>
-              <a:srgbClr val="F4F5F7"/>
+              <a:srgbClr val="DCDCDC"/>
             </a:solidFill>
             <a:prstDash val="solid"/>
           </a:ln>
@@ -3972,26 +4894,141 @@
       </p:sp>
       <p:sp>
         <p:nvSpPr>
-          <p:cNvPr id="6" name="Shape 4"/>
-          <p:cNvSpPr/>
-          <p:nvPr/>
-        </p:nvSpPr>
-        <p:spPr>
-          <a:xfrm>
-            <a:off x="914400" y="1892808"/>
-            <a:ext cx="310896" cy="310896"/>
-          </a:xfrm>
-          <a:prstGeom prst="roundRect">
-            <a:avLst>
-              <a:gd name="adj" fmla="val 17647"/>
-            </a:avLst>
+          <p:cNvPr id="6" name="Text 4"/>
+          <p:cNvSpPr/>
+          <p:nvPr/>
+        </p:nvSpPr>
+        <p:spPr>
+          <a:xfrm>
+            <a:off x="640080" y="640080"/>
+            <a:ext cx="10911535" cy="219456"/>
+          </a:xfrm>
+          <a:prstGeom prst="rect">
+            <a:avLst/>
+          </a:prstGeom>
+          <a:noFill/>
+          <a:ln/>
+        </p:spPr>
+        <p:txBody>
+          <a:bodyPr wrap="square" lIns="0" tIns="0" rIns="0" bIns="0" rtlCol="0" anchor="ctr"/>
+          <a:lstStyle/>
+          <a:p>
+            <a:pPr indent="0" marL="0">
+              <a:buNone/>
+            </a:pPr>
+            <a:r>
+              <a:rPr lang="en-US" sz="950" spc="260" kern="0" dirty="0">
+                <a:solidFill>
+                  <a:srgbClr val="8A8A8A"/>
+                </a:solidFill>
+                <a:latin typeface="Pretendard" pitchFamily="34" charset="0"/>
+                <a:ea typeface="Pretendard" pitchFamily="34" charset="-122"/>
+                <a:cs typeface="Pretendard" pitchFamily="34" charset="-120"/>
+              </a:rPr>
+              <a:t>CHECK</a:t>
+            </a:r>
+            <a:endParaRPr lang="en-US" sz="950" dirty="0"/>
+          </a:p>
+        </p:txBody>
+      </p:sp>
+      <p:sp>
+        <p:nvSpPr>
+          <p:cNvPr id="7" name="Text 5"/>
+          <p:cNvSpPr/>
+          <p:nvPr/>
+        </p:nvSpPr>
+        <p:spPr>
+          <a:xfrm>
+            <a:off x="640080" y="859536"/>
+            <a:ext cx="10911535" cy="475488"/>
+          </a:xfrm>
+          <a:prstGeom prst="rect">
+            <a:avLst/>
+          </a:prstGeom>
+          <a:noFill/>
+          <a:ln/>
+        </p:spPr>
+        <p:txBody>
+          <a:bodyPr wrap="square" lIns="0" tIns="0" rIns="0" bIns="0" rtlCol="0" anchor="ctr"/>
+          <a:lstStyle/>
+          <a:p>
+            <a:pPr indent="0" marL="0">
+              <a:buNone/>
+            </a:pPr>
+            <a:r>
+              <a:rPr lang="en-US" sz="3000" dirty="0">
+                <a:solidFill>
+                  <a:srgbClr val="111111"/>
+                </a:solidFill>
+                <a:latin typeface="Pretendard Black" pitchFamily="34" charset="0"/>
+                <a:ea typeface="Pretendard Black" pitchFamily="34" charset="-122"/>
+                <a:cs typeface="Pretendard Black" pitchFamily="34" charset="-120"/>
+              </a:rPr>
+              <a:t>최종 발표 체크리스트</a:t>
+            </a:r>
+            <a:endParaRPr lang="en-US" sz="3000" dirty="0"/>
+          </a:p>
+        </p:txBody>
+      </p:sp>
+      <p:sp>
+        <p:nvSpPr>
+          <p:cNvPr id="8" name="Text 6"/>
+          <p:cNvSpPr/>
+          <p:nvPr/>
+        </p:nvSpPr>
+        <p:spPr>
+          <a:xfrm>
+            <a:off x="640080" y="1371600"/>
+            <a:ext cx="10911535" cy="219456"/>
+          </a:xfrm>
+          <a:prstGeom prst="rect">
+            <a:avLst/>
+          </a:prstGeom>
+          <a:noFill/>
+          <a:ln/>
+        </p:spPr>
+        <p:txBody>
+          <a:bodyPr wrap="square" lIns="0" tIns="0" rIns="0" bIns="0" rtlCol="0" anchor="ctr"/>
+          <a:lstStyle/>
+          <a:p>
+            <a:pPr indent="0" marL="0">
+              <a:buNone/>
+            </a:pPr>
+            <a:r>
+              <a:rPr lang="en-US" sz="1150" dirty="0">
+                <a:solidFill>
+                  <a:srgbClr val="6E6E6E"/>
+                </a:solidFill>
+                <a:latin typeface="Pretendard" pitchFamily="34" charset="0"/>
+                <a:ea typeface="Pretendard" pitchFamily="34" charset="-122"/>
+                <a:cs typeface="Pretendard" pitchFamily="34" charset="-120"/>
+              </a:rPr>
+              <a:t>발표 전에 스스로 한 번 훑어보세요.</a:t>
+            </a:r>
+            <a:endParaRPr lang="en-US" sz="1150" dirty="0"/>
+          </a:p>
+        </p:txBody>
+      </p:sp>
+      <p:sp>
+        <p:nvSpPr>
+          <p:cNvPr id="9" name="Shape 7"/>
+          <p:cNvSpPr/>
+          <p:nvPr/>
+        </p:nvSpPr>
+        <p:spPr>
+          <a:xfrm>
+            <a:off x="640080" y="1755648"/>
+            <a:ext cx="5254600" cy="585216"/>
+          </a:xfrm>
+          <a:prstGeom prst="rect">
+            <a:avLst/>
           </a:prstGeom>
           <a:solidFill>
-            <a:srgbClr val="FF4A1C"/>
+            <a:srgbClr val="F2F2F2"/>
           </a:solidFill>
-          <a:ln w="6350">
+          <a:ln w="12700">
             <a:solidFill>
-              <a:srgbClr val="FF4A1C"/>
+              <a:srgbClr val="F2F2F2"/>
             </a:solidFill>
             <a:prstDash val="solid"/>
           </a:ln>
@@ -3999,7 +5036,7 @@
       </p:sp>
       <p:sp>
         <p:nvSpPr>
-          <p:cNvPr id="7" name="Text 5"/>
+          <p:cNvPr id="10" name="Shape 8"/>
           <p:cNvSpPr/>
           <p:nvPr/>
         </p:nvSpPr>
@@ -4008,95 +5045,15 @@
             <a:off x="914400" y="1892808"/>
             <a:ext cx="310896" cy="310896"/>
           </a:xfrm>
-          <a:prstGeom prst="rect">
-            <a:avLst/>
-          </a:prstGeom>
-          <a:noFill/>
-          <a:ln/>
-        </p:spPr>
-        <p:txBody>
-          <a:bodyPr wrap="square" lIns="0" tIns="0" rIns="0" bIns="0" rtlCol="0" anchor="ctr"/>
-          <a:lstStyle/>
-          <a:p>
-            <a:pPr algn="ctr" indent="0" marL="0">
-              <a:buNone/>
-            </a:pPr>
-            <a:r>
-              <a:rPr lang="en-US" sz="1000" b="1" dirty="0">
-                <a:solidFill>
-                  <a:srgbClr val="FFFFFF"/>
-                </a:solidFill>
-                <a:latin typeface="Pretendard" pitchFamily="34" charset="0"/>
-                <a:ea typeface="Pretendard" pitchFamily="34" charset="-122"/>
-                <a:cs typeface="Pretendard" pitchFamily="34" charset="-120"/>
-              </a:rPr>
-              <a:t>01</a:t>
-            </a:r>
-            <a:endParaRPr lang="en-US" sz="1000" dirty="0"/>
-          </a:p>
-        </p:txBody>
-      </p:sp>
-      <p:sp>
-        <p:nvSpPr>
-          <p:cNvPr id="8" name="Text 6"/>
-          <p:cNvSpPr/>
-          <p:nvPr/>
-        </p:nvSpPr>
-        <p:spPr>
-          <a:xfrm>
-            <a:off x="1353312" y="1755648"/>
-            <a:ext cx="4248760" cy="585216"/>
-          </a:xfrm>
-          <a:prstGeom prst="rect">
-            <a:avLst/>
-          </a:prstGeom>
-          <a:noFill/>
-          <a:ln/>
-        </p:spPr>
-        <p:txBody>
-          <a:bodyPr wrap="square" lIns="0" tIns="0" rIns="0" bIns="0" rtlCol="0" anchor="ctr"/>
-          <a:lstStyle/>
-          <a:p>
-            <a:pPr indent="0" marL="0">
-              <a:buNone/>
-            </a:pPr>
-            <a:r>
-              <a:rPr lang="en-US" sz="1200" dirty="0">
-                <a:solidFill>
-                  <a:srgbClr val="14161B"/>
-                </a:solidFill>
-                <a:latin typeface="Pretendard" pitchFamily="34" charset="0"/>
-                <a:ea typeface="Pretendard" pitchFamily="34" charset="-122"/>
-                <a:cs typeface="Pretendard" pitchFamily="34" charset="-120"/>
-              </a:rPr>
-              <a:t>링크가 시크릿 창에서 열린다</a:t>
-            </a:r>
-            <a:endParaRPr lang="en-US" sz="1200" dirty="0"/>
-          </a:p>
-        </p:txBody>
-      </p:sp>
-      <p:sp>
-        <p:nvSpPr>
-          <p:cNvPr id="9" name="Shape 7"/>
-          <p:cNvSpPr/>
-          <p:nvPr/>
-        </p:nvSpPr>
-        <p:spPr>
-          <a:xfrm>
-            <a:off x="640080" y="2487168"/>
-            <a:ext cx="5254600" cy="585216"/>
-          </a:xfrm>
-          <a:prstGeom prst="roundRect">
-            <a:avLst>
-              <a:gd name="adj" fmla="val 12500"/>
-            </a:avLst>
+          <a:prstGeom prst="ellipse">
+            <a:avLst/>
           </a:prstGeom>
           <a:solidFill>
-            <a:srgbClr val="F4F5F7"/>
+            <a:srgbClr val="F2F2F2"/>
           </a:solidFill>
           <a:ln w="12700">
             <a:solidFill>
-              <a:srgbClr val="F4F5F7"/>
+              <a:srgbClr val="111111"/>
             </a:solidFill>
             <a:prstDash val="solid"/>
           </a:ln>
@@ -4104,26 +5061,102 @@
       </p:sp>
       <p:sp>
         <p:nvSpPr>
-          <p:cNvPr id="10" name="Shape 8"/>
-          <p:cNvSpPr/>
-          <p:nvPr/>
-        </p:nvSpPr>
-        <p:spPr>
-          <a:xfrm>
-            <a:off x="914400" y="2624328"/>
+          <p:cNvPr id="11" name="Text 9"/>
+          <p:cNvSpPr/>
+          <p:nvPr/>
+        </p:nvSpPr>
+        <p:spPr>
+          <a:xfrm>
+            <a:off x="914400" y="1892808"/>
             <a:ext cx="310896" cy="310896"/>
           </a:xfrm>
-          <a:prstGeom prst="roundRect">
-            <a:avLst>
-              <a:gd name="adj" fmla="val 17647"/>
-            </a:avLst>
+          <a:prstGeom prst="rect">
+            <a:avLst/>
+          </a:prstGeom>
+          <a:noFill/>
+          <a:ln/>
+        </p:spPr>
+        <p:txBody>
+          <a:bodyPr wrap="square" lIns="0" tIns="0" rIns="0" bIns="0" rtlCol="0" anchor="ctr"/>
+          <a:lstStyle/>
+          <a:p>
+            <a:pPr algn="ctr" indent="0" marL="0">
+              <a:buNone/>
+            </a:pPr>
+            <a:r>
+              <a:rPr lang="en-US" sz="900" b="1" dirty="0">
+                <a:solidFill>
+                  <a:srgbClr val="111111"/>
+                </a:solidFill>
+                <a:latin typeface="Pretendard" pitchFamily="34" charset="0"/>
+                <a:ea typeface="Pretendard" pitchFamily="34" charset="-122"/>
+                <a:cs typeface="Pretendard" pitchFamily="34" charset="-120"/>
+              </a:rPr>
+              <a:t>01</a:t>
+            </a:r>
+            <a:endParaRPr lang="en-US" sz="900" dirty="0"/>
+          </a:p>
+        </p:txBody>
+      </p:sp>
+      <p:sp>
+        <p:nvSpPr>
+          <p:cNvPr id="12" name="Text 10"/>
+          <p:cNvSpPr/>
+          <p:nvPr/>
+        </p:nvSpPr>
+        <p:spPr>
+          <a:xfrm>
+            <a:off x="1353312" y="1755648"/>
+            <a:ext cx="4248760" cy="585216"/>
+          </a:xfrm>
+          <a:prstGeom prst="rect">
+            <a:avLst/>
+          </a:prstGeom>
+          <a:noFill/>
+          <a:ln/>
+        </p:spPr>
+        <p:txBody>
+          <a:bodyPr wrap="square" lIns="0" tIns="0" rIns="0" bIns="0" rtlCol="0" anchor="ctr"/>
+          <a:lstStyle/>
+          <a:p>
+            <a:pPr indent="0" marL="0">
+              <a:buNone/>
+            </a:pPr>
+            <a:r>
+              <a:rPr lang="en-US" sz="1200" dirty="0">
+                <a:solidFill>
+                  <a:srgbClr val="111111"/>
+                </a:solidFill>
+                <a:latin typeface="Pretendard" pitchFamily="34" charset="0"/>
+                <a:ea typeface="Pretendard" pitchFamily="34" charset="-122"/>
+                <a:cs typeface="Pretendard" pitchFamily="34" charset="-120"/>
+              </a:rPr>
+              <a:t>링크가 시크릿 창에서 열린다</a:t>
+            </a:r>
+            <a:endParaRPr lang="en-US" sz="1200" dirty="0"/>
+          </a:p>
+        </p:txBody>
+      </p:sp>
+      <p:sp>
+        <p:nvSpPr>
+          <p:cNvPr id="13" name="Shape 11"/>
+          <p:cNvSpPr/>
+          <p:nvPr/>
+        </p:nvSpPr>
+        <p:spPr>
+          <a:xfrm>
+            <a:off x="640080" y="2487168"/>
+            <a:ext cx="5254600" cy="585216"/>
+          </a:xfrm>
+          <a:prstGeom prst="rect">
+            <a:avLst/>
           </a:prstGeom>
           <a:solidFill>
-            <a:srgbClr val="FF4A1C"/>
+            <a:srgbClr val="F2F2F2"/>
           </a:solidFill>
-          <a:ln w="6350">
+          <a:ln w="12700">
             <a:solidFill>
-              <a:srgbClr val="FF4A1C"/>
+              <a:srgbClr val="F2F2F2"/>
             </a:solidFill>
             <a:prstDash val="solid"/>
           </a:ln>
@@ -4131,7 +5164,7 @@
       </p:sp>
       <p:sp>
         <p:nvSpPr>
-          <p:cNvPr id="11" name="Text 9"/>
+          <p:cNvPr id="14" name="Shape 12"/>
           <p:cNvSpPr/>
           <p:nvPr/>
         </p:nvSpPr>
@@ -4140,95 +5173,15 @@
             <a:off x="914400" y="2624328"/>
             <a:ext cx="310896" cy="310896"/>
           </a:xfrm>
-          <a:prstGeom prst="rect">
-            <a:avLst/>
-          </a:prstGeom>
-          <a:noFill/>
-          <a:ln/>
-        </p:spPr>
-        <p:txBody>
-          <a:bodyPr wrap="square" lIns="0" tIns="0" rIns="0" bIns="0" rtlCol="0" anchor="ctr"/>
-          <a:lstStyle/>
-          <a:p>
-            <a:pPr algn="ctr" indent="0" marL="0">
-              <a:buNone/>
-            </a:pPr>
-            <a:r>
-              <a:rPr lang="en-US" sz="1000" b="1" dirty="0">
-                <a:solidFill>
-                  <a:srgbClr val="FFFFFF"/>
-                </a:solidFill>
-                <a:latin typeface="Pretendard" pitchFamily="34" charset="0"/>
-                <a:ea typeface="Pretendard" pitchFamily="34" charset="-122"/>
-                <a:cs typeface="Pretendard" pitchFamily="34" charset="-120"/>
-              </a:rPr>
-              <a:t>02</a:t>
-            </a:r>
-            <a:endParaRPr lang="en-US" sz="1000" dirty="0"/>
-          </a:p>
-        </p:txBody>
-      </p:sp>
-      <p:sp>
-        <p:nvSpPr>
-          <p:cNvPr id="12" name="Text 10"/>
-          <p:cNvSpPr/>
-          <p:nvPr/>
-        </p:nvSpPr>
-        <p:spPr>
-          <a:xfrm>
-            <a:off x="1353312" y="2487168"/>
-            <a:ext cx="4248760" cy="585216"/>
-          </a:xfrm>
-          <a:prstGeom prst="rect">
-            <a:avLst/>
-          </a:prstGeom>
-          <a:noFill/>
-          <a:ln/>
-        </p:spPr>
-        <p:txBody>
-          <a:bodyPr wrap="square" lIns="0" tIns="0" rIns="0" bIns="0" rtlCol="0" anchor="ctr"/>
-          <a:lstStyle/>
-          <a:p>
-            <a:pPr indent="0" marL="0">
-              <a:buNone/>
-            </a:pPr>
-            <a:r>
-              <a:rPr lang="en-US" sz="1200" dirty="0">
-                <a:solidFill>
-                  <a:srgbClr val="14161B"/>
-                </a:solidFill>
-                <a:latin typeface="Pretendard" pitchFamily="34" charset="0"/>
-                <a:ea typeface="Pretendard" pitchFamily="34" charset="-122"/>
-                <a:cs typeface="Pretendard" pitchFamily="34" charset="-120"/>
-              </a:rPr>
-              <a:t>PDF 용량이 10MB 이하다</a:t>
-            </a:r>
-            <a:endParaRPr lang="en-US" sz="1200" dirty="0"/>
-          </a:p>
-        </p:txBody>
-      </p:sp>
-      <p:sp>
-        <p:nvSpPr>
-          <p:cNvPr id="13" name="Shape 11"/>
-          <p:cNvSpPr/>
-          <p:nvPr/>
-        </p:nvSpPr>
-        <p:spPr>
-          <a:xfrm>
-            <a:off x="640080" y="3218688"/>
-            <a:ext cx="5254600" cy="585216"/>
-          </a:xfrm>
-          <a:prstGeom prst="roundRect">
-            <a:avLst>
-              <a:gd name="adj" fmla="val 12500"/>
-            </a:avLst>
+          <a:prstGeom prst="ellipse">
+            <a:avLst/>
           </a:prstGeom>
           <a:solidFill>
-            <a:srgbClr val="F4F5F7"/>
+            <a:srgbClr val="F2F2F2"/>
           </a:solidFill>
           <a:ln w="12700">
             <a:solidFill>
-              <a:srgbClr val="F4F5F7"/>
+              <a:srgbClr val="111111"/>
             </a:solidFill>
             <a:prstDash val="solid"/>
           </a:ln>
@@ -4236,26 +5189,102 @@
       </p:sp>
       <p:sp>
         <p:nvSpPr>
-          <p:cNvPr id="14" name="Shape 12"/>
-          <p:cNvSpPr/>
-          <p:nvPr/>
-        </p:nvSpPr>
-        <p:spPr>
-          <a:xfrm>
-            <a:off x="914400" y="3355848"/>
+          <p:cNvPr id="15" name="Text 13"/>
+          <p:cNvSpPr/>
+          <p:nvPr/>
+        </p:nvSpPr>
+        <p:spPr>
+          <a:xfrm>
+            <a:off x="914400" y="2624328"/>
             <a:ext cx="310896" cy="310896"/>
           </a:xfrm>
-          <a:prstGeom prst="roundRect">
-            <a:avLst>
-              <a:gd name="adj" fmla="val 17647"/>
-            </a:avLst>
+          <a:prstGeom prst="rect">
+            <a:avLst/>
+          </a:prstGeom>
+          <a:noFill/>
+          <a:ln/>
+        </p:spPr>
+        <p:txBody>
+          <a:bodyPr wrap="square" lIns="0" tIns="0" rIns="0" bIns="0" rtlCol="0" anchor="ctr"/>
+          <a:lstStyle/>
+          <a:p>
+            <a:pPr algn="ctr" indent="0" marL="0">
+              <a:buNone/>
+            </a:pPr>
+            <a:r>
+              <a:rPr lang="en-US" sz="900" b="1" dirty="0">
+                <a:solidFill>
+                  <a:srgbClr val="111111"/>
+                </a:solidFill>
+                <a:latin typeface="Pretendard" pitchFamily="34" charset="0"/>
+                <a:ea typeface="Pretendard" pitchFamily="34" charset="-122"/>
+                <a:cs typeface="Pretendard" pitchFamily="34" charset="-120"/>
+              </a:rPr>
+              <a:t>02</a:t>
+            </a:r>
+            <a:endParaRPr lang="en-US" sz="900" dirty="0"/>
+          </a:p>
+        </p:txBody>
+      </p:sp>
+      <p:sp>
+        <p:nvSpPr>
+          <p:cNvPr id="16" name="Text 14"/>
+          <p:cNvSpPr/>
+          <p:nvPr/>
+        </p:nvSpPr>
+        <p:spPr>
+          <a:xfrm>
+            <a:off x="1353312" y="2487168"/>
+            <a:ext cx="4248760" cy="585216"/>
+          </a:xfrm>
+          <a:prstGeom prst="rect">
+            <a:avLst/>
+          </a:prstGeom>
+          <a:noFill/>
+          <a:ln/>
+        </p:spPr>
+        <p:txBody>
+          <a:bodyPr wrap="square" lIns="0" tIns="0" rIns="0" bIns="0" rtlCol="0" anchor="ctr"/>
+          <a:lstStyle/>
+          <a:p>
+            <a:pPr indent="0" marL="0">
+              <a:buNone/>
+            </a:pPr>
+            <a:r>
+              <a:rPr lang="en-US" sz="1200" dirty="0">
+                <a:solidFill>
+                  <a:srgbClr val="111111"/>
+                </a:solidFill>
+                <a:latin typeface="Pretendard" pitchFamily="34" charset="0"/>
+                <a:ea typeface="Pretendard" pitchFamily="34" charset="-122"/>
+                <a:cs typeface="Pretendard" pitchFamily="34" charset="-120"/>
+              </a:rPr>
+              <a:t>PDF 용량이 10MB 이하다</a:t>
+            </a:r>
+            <a:endParaRPr lang="en-US" sz="1200" dirty="0"/>
+          </a:p>
+        </p:txBody>
+      </p:sp>
+      <p:sp>
+        <p:nvSpPr>
+          <p:cNvPr id="17" name="Shape 15"/>
+          <p:cNvSpPr/>
+          <p:nvPr/>
+        </p:nvSpPr>
+        <p:spPr>
+          <a:xfrm>
+            <a:off x="640080" y="3218688"/>
+            <a:ext cx="5254600" cy="585216"/>
+          </a:xfrm>
+          <a:prstGeom prst="rect">
+            <a:avLst/>
           </a:prstGeom>
           <a:solidFill>
-            <a:srgbClr val="FF4A1C"/>
+            <a:srgbClr val="F2F2F2"/>
           </a:solidFill>
-          <a:ln w="6350">
+          <a:ln w="12700">
             <a:solidFill>
-              <a:srgbClr val="FF4A1C"/>
+              <a:srgbClr val="F2F2F2"/>
             </a:solidFill>
             <a:prstDash val="solid"/>
           </a:ln>
@@ -4263,7 +5292,7 @@
       </p:sp>
       <p:sp>
         <p:nvSpPr>
-          <p:cNvPr id="15" name="Text 13"/>
+          <p:cNvPr id="18" name="Shape 16"/>
           <p:cNvSpPr/>
           <p:nvPr/>
         </p:nvSpPr>
@@ -4272,95 +5301,15 @@
             <a:off x="914400" y="3355848"/>
             <a:ext cx="310896" cy="310896"/>
           </a:xfrm>
-          <a:prstGeom prst="rect">
-            <a:avLst/>
-          </a:prstGeom>
-          <a:noFill/>
-          <a:ln/>
-        </p:spPr>
-        <p:txBody>
-          <a:bodyPr wrap="square" lIns="0" tIns="0" rIns="0" bIns="0" rtlCol="0" anchor="ctr"/>
-          <a:lstStyle/>
-          <a:p>
-            <a:pPr algn="ctr" indent="0" marL="0">
-              <a:buNone/>
-            </a:pPr>
-            <a:r>
-              <a:rPr lang="en-US" sz="1000" b="1" dirty="0">
-                <a:solidFill>
-                  <a:srgbClr val="FFFFFF"/>
-                </a:solidFill>
-                <a:latin typeface="Pretendard" pitchFamily="34" charset="0"/>
-                <a:ea typeface="Pretendard" pitchFamily="34" charset="-122"/>
-                <a:cs typeface="Pretendard" pitchFamily="34" charset="-120"/>
-              </a:rPr>
-              <a:t>03</a:t>
-            </a:r>
-            <a:endParaRPr lang="en-US" sz="1000" dirty="0"/>
-          </a:p>
-        </p:txBody>
-      </p:sp>
-      <p:sp>
-        <p:nvSpPr>
-          <p:cNvPr id="16" name="Text 14"/>
-          <p:cNvSpPr/>
-          <p:nvPr/>
-        </p:nvSpPr>
-        <p:spPr>
-          <a:xfrm>
-            <a:off x="1353312" y="3218688"/>
-            <a:ext cx="4248760" cy="585216"/>
-          </a:xfrm>
-          <a:prstGeom prst="rect">
-            <a:avLst/>
-          </a:prstGeom>
-          <a:noFill/>
-          <a:ln/>
-        </p:spPr>
-        <p:txBody>
-          <a:bodyPr wrap="square" lIns="0" tIns="0" rIns="0" bIns="0" rtlCol="0" anchor="ctr"/>
-          <a:lstStyle/>
-          <a:p>
-            <a:pPr indent="0" marL="0">
-              <a:buNone/>
-            </a:pPr>
-            <a:r>
-              <a:rPr lang="en-US" sz="1200" dirty="0">
-                <a:solidFill>
-                  <a:srgbClr val="14161B"/>
-                </a:solidFill>
-                <a:latin typeface="Pretendard" pitchFamily="34" charset="0"/>
-                <a:ea typeface="Pretendard" pitchFamily="34" charset="-122"/>
-                <a:cs typeface="Pretendard" pitchFamily="34" charset="-120"/>
-              </a:rPr>
-              <a:t>파일명이 '이름_포트폴리오_2026' 형식이다</a:t>
-            </a:r>
-            <a:endParaRPr lang="en-US" sz="1200" dirty="0"/>
-          </a:p>
-        </p:txBody>
-      </p:sp>
-      <p:sp>
-        <p:nvSpPr>
-          <p:cNvPr id="17" name="Shape 15"/>
-          <p:cNvSpPr/>
-          <p:nvPr/>
-        </p:nvSpPr>
-        <p:spPr>
-          <a:xfrm>
-            <a:off x="640080" y="3950208"/>
-            <a:ext cx="5254600" cy="585216"/>
-          </a:xfrm>
-          <a:prstGeom prst="roundRect">
-            <a:avLst>
-              <a:gd name="adj" fmla="val 12500"/>
-            </a:avLst>
+          <a:prstGeom prst="ellipse">
+            <a:avLst/>
           </a:prstGeom>
           <a:solidFill>
-            <a:srgbClr val="F4F5F7"/>
+            <a:srgbClr val="F2F2F2"/>
           </a:solidFill>
           <a:ln w="12700">
             <a:solidFill>
-              <a:srgbClr val="F4F5F7"/>
+              <a:srgbClr val="111111"/>
             </a:solidFill>
             <a:prstDash val="solid"/>
           </a:ln>
@@ -4368,26 +5317,102 @@
       </p:sp>
       <p:sp>
         <p:nvSpPr>
-          <p:cNvPr id="18" name="Shape 16"/>
-          <p:cNvSpPr/>
-          <p:nvPr/>
-        </p:nvSpPr>
-        <p:spPr>
-          <a:xfrm>
-            <a:off x="914400" y="4087368"/>
+          <p:cNvPr id="19" name="Text 17"/>
+          <p:cNvSpPr/>
+          <p:nvPr/>
+        </p:nvSpPr>
+        <p:spPr>
+          <a:xfrm>
+            <a:off x="914400" y="3355848"/>
             <a:ext cx="310896" cy="310896"/>
           </a:xfrm>
-          <a:prstGeom prst="roundRect">
-            <a:avLst>
-              <a:gd name="adj" fmla="val 17647"/>
-            </a:avLst>
+          <a:prstGeom prst="rect">
+            <a:avLst/>
+          </a:prstGeom>
+          <a:noFill/>
+          <a:ln/>
+        </p:spPr>
+        <p:txBody>
+          <a:bodyPr wrap="square" lIns="0" tIns="0" rIns="0" bIns="0" rtlCol="0" anchor="ctr"/>
+          <a:lstStyle/>
+          <a:p>
+            <a:pPr algn="ctr" indent="0" marL="0">
+              <a:buNone/>
+            </a:pPr>
+            <a:r>
+              <a:rPr lang="en-US" sz="900" b="1" dirty="0">
+                <a:solidFill>
+                  <a:srgbClr val="111111"/>
+                </a:solidFill>
+                <a:latin typeface="Pretendard" pitchFamily="34" charset="0"/>
+                <a:ea typeface="Pretendard" pitchFamily="34" charset="-122"/>
+                <a:cs typeface="Pretendard" pitchFamily="34" charset="-120"/>
+              </a:rPr>
+              <a:t>03</a:t>
+            </a:r>
+            <a:endParaRPr lang="en-US" sz="900" dirty="0"/>
+          </a:p>
+        </p:txBody>
+      </p:sp>
+      <p:sp>
+        <p:nvSpPr>
+          <p:cNvPr id="20" name="Text 18"/>
+          <p:cNvSpPr/>
+          <p:nvPr/>
+        </p:nvSpPr>
+        <p:spPr>
+          <a:xfrm>
+            <a:off x="1353312" y="3218688"/>
+            <a:ext cx="4248760" cy="585216"/>
+          </a:xfrm>
+          <a:prstGeom prst="rect">
+            <a:avLst/>
+          </a:prstGeom>
+          <a:noFill/>
+          <a:ln/>
+        </p:spPr>
+        <p:txBody>
+          <a:bodyPr wrap="square" lIns="0" tIns="0" rIns="0" bIns="0" rtlCol="0" anchor="ctr"/>
+          <a:lstStyle/>
+          <a:p>
+            <a:pPr indent="0" marL="0">
+              <a:buNone/>
+            </a:pPr>
+            <a:r>
+              <a:rPr lang="en-US" sz="1200" dirty="0">
+                <a:solidFill>
+                  <a:srgbClr val="111111"/>
+                </a:solidFill>
+                <a:latin typeface="Pretendard" pitchFamily="34" charset="0"/>
+                <a:ea typeface="Pretendard" pitchFamily="34" charset="-122"/>
+                <a:cs typeface="Pretendard" pitchFamily="34" charset="-120"/>
+              </a:rPr>
+              <a:t>파일명이 '이름_포트폴리오_2026' 형식이다</a:t>
+            </a:r>
+            <a:endParaRPr lang="en-US" sz="1200" dirty="0"/>
+          </a:p>
+        </p:txBody>
+      </p:sp>
+      <p:sp>
+        <p:nvSpPr>
+          <p:cNvPr id="21" name="Shape 19"/>
+          <p:cNvSpPr/>
+          <p:nvPr/>
+        </p:nvSpPr>
+        <p:spPr>
+          <a:xfrm>
+            <a:off x="640080" y="3950208"/>
+            <a:ext cx="5254600" cy="585216"/>
+          </a:xfrm>
+          <a:prstGeom prst="rect">
+            <a:avLst/>
           </a:prstGeom>
           <a:solidFill>
-            <a:srgbClr val="FF4A1C"/>
+            <a:srgbClr val="F2F2F2"/>
           </a:solidFill>
-          <a:ln w="6350">
+          <a:ln w="12700">
             <a:solidFill>
-              <a:srgbClr val="FF4A1C"/>
+              <a:srgbClr val="F2F2F2"/>
             </a:solidFill>
             <a:prstDash val="solid"/>
           </a:ln>
@@ -4395,7 +5420,7 @@
       </p:sp>
       <p:sp>
         <p:nvSpPr>
-          <p:cNvPr id="19" name="Text 17"/>
+          <p:cNvPr id="22" name="Shape 20"/>
           <p:cNvSpPr/>
           <p:nvPr/>
         </p:nvSpPr>
@@ -4404,95 +5429,15 @@
             <a:off x="914400" y="4087368"/>
             <a:ext cx="310896" cy="310896"/>
           </a:xfrm>
-          <a:prstGeom prst="rect">
-            <a:avLst/>
-          </a:prstGeom>
-          <a:noFill/>
-          <a:ln/>
-        </p:spPr>
-        <p:txBody>
-          <a:bodyPr wrap="square" lIns="0" tIns="0" rIns="0" bIns="0" rtlCol="0" anchor="ctr"/>
-          <a:lstStyle/>
-          <a:p>
-            <a:pPr algn="ctr" indent="0" marL="0">
-              <a:buNone/>
-            </a:pPr>
-            <a:r>
-              <a:rPr lang="en-US" sz="1000" b="1" dirty="0">
-                <a:solidFill>
-                  <a:srgbClr val="FFFFFF"/>
-                </a:solidFill>
-                <a:latin typeface="Pretendard" pitchFamily="34" charset="0"/>
-                <a:ea typeface="Pretendard" pitchFamily="34" charset="-122"/>
-                <a:cs typeface="Pretendard" pitchFamily="34" charset="-120"/>
-              </a:rPr>
-              <a:t>04</a:t>
-            </a:r>
-            <a:endParaRPr lang="en-US" sz="1000" dirty="0"/>
-          </a:p>
-        </p:txBody>
-      </p:sp>
-      <p:sp>
-        <p:nvSpPr>
-          <p:cNvPr id="20" name="Text 18"/>
-          <p:cNvSpPr/>
-          <p:nvPr/>
-        </p:nvSpPr>
-        <p:spPr>
-          <a:xfrm>
-            <a:off x="1353312" y="3950208"/>
-            <a:ext cx="4248760" cy="585216"/>
-          </a:xfrm>
-          <a:prstGeom prst="rect">
-            <a:avLst/>
-          </a:prstGeom>
-          <a:noFill/>
-          <a:ln/>
-        </p:spPr>
-        <p:txBody>
-          <a:bodyPr wrap="square" lIns="0" tIns="0" rIns="0" bIns="0" rtlCol="0" anchor="ctr"/>
-          <a:lstStyle/>
-          <a:p>
-            <a:pPr indent="0" marL="0">
-              <a:buNone/>
-            </a:pPr>
-            <a:r>
-              <a:rPr lang="en-US" sz="1200" dirty="0">
-                <a:solidFill>
-                  <a:srgbClr val="14161B"/>
-                </a:solidFill>
-                <a:latin typeface="Pretendard" pitchFamily="34" charset="0"/>
-                <a:ea typeface="Pretendard" pitchFamily="34" charset="-122"/>
-                <a:cs typeface="Pretendard" pitchFamily="34" charset="-120"/>
-              </a:rPr>
-              <a:t>표지에 이름 · 분야 · 연락처가 있다</a:t>
-            </a:r>
-            <a:endParaRPr lang="en-US" sz="1200" dirty="0"/>
-          </a:p>
-        </p:txBody>
-      </p:sp>
-      <p:sp>
-        <p:nvSpPr>
-          <p:cNvPr id="21" name="Shape 19"/>
-          <p:cNvSpPr/>
-          <p:nvPr/>
-        </p:nvSpPr>
-        <p:spPr>
-          <a:xfrm>
-            <a:off x="6297016" y="1755648"/>
-            <a:ext cx="5254600" cy="585216"/>
-          </a:xfrm>
-          <a:prstGeom prst="roundRect">
-            <a:avLst>
-              <a:gd name="adj" fmla="val 12500"/>
-            </a:avLst>
+          <a:prstGeom prst="ellipse">
+            <a:avLst/>
           </a:prstGeom>
           <a:solidFill>
-            <a:srgbClr val="F4F5F7"/>
+            <a:srgbClr val="F2F2F2"/>
           </a:solidFill>
           <a:ln w="12700">
             <a:solidFill>
-              <a:srgbClr val="F4F5F7"/>
+              <a:srgbClr val="111111"/>
             </a:solidFill>
             <a:prstDash val="solid"/>
           </a:ln>
@@ -4500,26 +5445,102 @@
       </p:sp>
       <p:sp>
         <p:nvSpPr>
-          <p:cNvPr id="22" name="Shape 20"/>
-          <p:cNvSpPr/>
-          <p:nvPr/>
-        </p:nvSpPr>
-        <p:spPr>
-          <a:xfrm>
-            <a:off x="6571336" y="1892808"/>
+          <p:cNvPr id="23" name="Text 21"/>
+          <p:cNvSpPr/>
+          <p:nvPr/>
+        </p:nvSpPr>
+        <p:spPr>
+          <a:xfrm>
+            <a:off x="914400" y="4087368"/>
             <a:ext cx="310896" cy="310896"/>
           </a:xfrm>
-          <a:prstGeom prst="roundRect">
-            <a:avLst>
-              <a:gd name="adj" fmla="val 17647"/>
-            </a:avLst>
+          <a:prstGeom prst="rect">
+            <a:avLst/>
+          </a:prstGeom>
+          <a:noFill/>
+          <a:ln/>
+        </p:spPr>
+        <p:txBody>
+          <a:bodyPr wrap="square" lIns="0" tIns="0" rIns="0" bIns="0" rtlCol="0" anchor="ctr"/>
+          <a:lstStyle/>
+          <a:p>
+            <a:pPr algn="ctr" indent="0" marL="0">
+              <a:buNone/>
+            </a:pPr>
+            <a:r>
+              <a:rPr lang="en-US" sz="900" b="1" dirty="0">
+                <a:solidFill>
+                  <a:srgbClr val="111111"/>
+                </a:solidFill>
+                <a:latin typeface="Pretendard" pitchFamily="34" charset="0"/>
+                <a:ea typeface="Pretendard" pitchFamily="34" charset="-122"/>
+                <a:cs typeface="Pretendard" pitchFamily="34" charset="-120"/>
+              </a:rPr>
+              <a:t>04</a:t>
+            </a:r>
+            <a:endParaRPr lang="en-US" sz="900" dirty="0"/>
+          </a:p>
+        </p:txBody>
+      </p:sp>
+      <p:sp>
+        <p:nvSpPr>
+          <p:cNvPr id="24" name="Text 22"/>
+          <p:cNvSpPr/>
+          <p:nvPr/>
+        </p:nvSpPr>
+        <p:spPr>
+          <a:xfrm>
+            <a:off x="1353312" y="3950208"/>
+            <a:ext cx="4248760" cy="585216"/>
+          </a:xfrm>
+          <a:prstGeom prst="rect">
+            <a:avLst/>
+          </a:prstGeom>
+          <a:noFill/>
+          <a:ln/>
+        </p:spPr>
+        <p:txBody>
+          <a:bodyPr wrap="square" lIns="0" tIns="0" rIns="0" bIns="0" rtlCol="0" anchor="ctr"/>
+          <a:lstStyle/>
+          <a:p>
+            <a:pPr indent="0" marL="0">
+              <a:buNone/>
+            </a:pPr>
+            <a:r>
+              <a:rPr lang="en-US" sz="1200" dirty="0">
+                <a:solidFill>
+                  <a:srgbClr val="111111"/>
+                </a:solidFill>
+                <a:latin typeface="Pretendard" pitchFamily="34" charset="0"/>
+                <a:ea typeface="Pretendard" pitchFamily="34" charset="-122"/>
+                <a:cs typeface="Pretendard" pitchFamily="34" charset="-120"/>
+              </a:rPr>
+              <a:t>표지에 이름 · 분야 · 연락처가 있다</a:t>
+            </a:r>
+            <a:endParaRPr lang="en-US" sz="1200" dirty="0"/>
+          </a:p>
+        </p:txBody>
+      </p:sp>
+      <p:sp>
+        <p:nvSpPr>
+          <p:cNvPr id="25" name="Shape 23"/>
+          <p:cNvSpPr/>
+          <p:nvPr/>
+        </p:nvSpPr>
+        <p:spPr>
+          <a:xfrm>
+            <a:off x="6297016" y="1755648"/>
+            <a:ext cx="5254600" cy="585216"/>
+          </a:xfrm>
+          <a:prstGeom prst="rect">
+            <a:avLst/>
           </a:prstGeom>
           <a:solidFill>
-            <a:srgbClr val="FF4A1C"/>
+            <a:srgbClr val="F2F2F2"/>
           </a:solidFill>
-          <a:ln w="6350">
+          <a:ln w="12700">
             <a:solidFill>
-              <a:srgbClr val="FF4A1C"/>
+              <a:srgbClr val="F2F2F2"/>
             </a:solidFill>
             <a:prstDash val="solid"/>
           </a:ln>
@@ -4527,7 +5548,7 @@
       </p:sp>
       <p:sp>
         <p:nvSpPr>
-          <p:cNvPr id="23" name="Text 21"/>
+          <p:cNvPr id="26" name="Shape 24"/>
           <p:cNvSpPr/>
           <p:nvPr/>
         </p:nvSpPr>
@@ -4536,95 +5557,15 @@
             <a:off x="6571336" y="1892808"/>
             <a:ext cx="310896" cy="310896"/>
           </a:xfrm>
-          <a:prstGeom prst="rect">
-            <a:avLst/>
-          </a:prstGeom>
-          <a:noFill/>
-          <a:ln/>
-        </p:spPr>
-        <p:txBody>
-          <a:bodyPr wrap="square" lIns="0" tIns="0" rIns="0" bIns="0" rtlCol="0" anchor="ctr"/>
-          <a:lstStyle/>
-          <a:p>
-            <a:pPr algn="ctr" indent="0" marL="0">
-              <a:buNone/>
-            </a:pPr>
-            <a:r>
-              <a:rPr lang="en-US" sz="1000" b="1" dirty="0">
-                <a:solidFill>
-                  <a:srgbClr val="FFFFFF"/>
-                </a:solidFill>
-                <a:latin typeface="Pretendard" pitchFamily="34" charset="0"/>
-                <a:ea typeface="Pretendard" pitchFamily="34" charset="-122"/>
-                <a:cs typeface="Pretendard" pitchFamily="34" charset="-120"/>
-              </a:rPr>
-              <a:t>05</a:t>
-            </a:r>
-            <a:endParaRPr lang="en-US" sz="1000" dirty="0"/>
-          </a:p>
-        </p:txBody>
-      </p:sp>
-      <p:sp>
-        <p:nvSpPr>
-          <p:cNvPr id="24" name="Text 22"/>
-          <p:cNvSpPr/>
-          <p:nvPr/>
-        </p:nvSpPr>
-        <p:spPr>
-          <a:xfrm>
-            <a:off x="7010248" y="1755648"/>
-            <a:ext cx="4248760" cy="585216"/>
-          </a:xfrm>
-          <a:prstGeom prst="rect">
-            <a:avLst/>
-          </a:prstGeom>
-          <a:noFill/>
-          <a:ln/>
-        </p:spPr>
-        <p:txBody>
-          <a:bodyPr wrap="square" lIns="0" tIns="0" rIns="0" bIns="0" rtlCol="0" anchor="ctr"/>
-          <a:lstStyle/>
-          <a:p>
-            <a:pPr indent="0" marL="0">
-              <a:buNone/>
-            </a:pPr>
-            <a:r>
-              <a:rPr lang="en-US" sz="1200" dirty="0">
-                <a:solidFill>
-                  <a:srgbClr val="14161B"/>
-                </a:solidFill>
-                <a:latin typeface="Pretendard" pitchFamily="34" charset="0"/>
-                <a:ea typeface="Pretendard" pitchFamily="34" charset="-122"/>
-                <a:cs typeface="Pretendard" pitchFamily="34" charset="-120"/>
-              </a:rPr>
-              <a:t>프로젝트마다 문제 문장이 있다</a:t>
-            </a:r>
-            <a:endParaRPr lang="en-US" sz="1200" dirty="0"/>
-          </a:p>
-        </p:txBody>
-      </p:sp>
-      <p:sp>
-        <p:nvSpPr>
-          <p:cNvPr id="25" name="Shape 23"/>
-          <p:cNvSpPr/>
-          <p:nvPr/>
-        </p:nvSpPr>
-        <p:spPr>
-          <a:xfrm>
-            <a:off x="6297016" y="2487168"/>
-            <a:ext cx="5254600" cy="585216"/>
-          </a:xfrm>
-          <a:prstGeom prst="roundRect">
-            <a:avLst>
-              <a:gd name="adj" fmla="val 12500"/>
-            </a:avLst>
+          <a:prstGeom prst="ellipse">
+            <a:avLst/>
           </a:prstGeom>
           <a:solidFill>
-            <a:srgbClr val="F4F5F7"/>
+            <a:srgbClr val="F2F2F2"/>
           </a:solidFill>
           <a:ln w="12700">
             <a:solidFill>
-              <a:srgbClr val="F4F5F7"/>
+              <a:srgbClr val="111111"/>
             </a:solidFill>
             <a:prstDash val="solid"/>
           </a:ln>
@@ -4632,26 +5573,102 @@
       </p:sp>
       <p:sp>
         <p:nvSpPr>
-          <p:cNvPr id="26" name="Shape 24"/>
-          <p:cNvSpPr/>
-          <p:nvPr/>
-        </p:nvSpPr>
-        <p:spPr>
-          <a:xfrm>
-            <a:off x="6571336" y="2624328"/>
+          <p:cNvPr id="27" name="Text 25"/>
+          <p:cNvSpPr/>
+          <p:nvPr/>
+        </p:nvSpPr>
+        <p:spPr>
+          <a:xfrm>
+            <a:off x="6571336" y="1892808"/>
             <a:ext cx="310896" cy="310896"/>
           </a:xfrm>
-          <a:prstGeom prst="roundRect">
-            <a:avLst>
-              <a:gd name="adj" fmla="val 17647"/>
-            </a:avLst>
+          <a:prstGeom prst="rect">
+            <a:avLst/>
+          </a:prstGeom>
+          <a:noFill/>
+          <a:ln/>
+        </p:spPr>
+        <p:txBody>
+          <a:bodyPr wrap="square" lIns="0" tIns="0" rIns="0" bIns="0" rtlCol="0" anchor="ctr"/>
+          <a:lstStyle/>
+          <a:p>
+            <a:pPr algn="ctr" indent="0" marL="0">
+              <a:buNone/>
+            </a:pPr>
+            <a:r>
+              <a:rPr lang="en-US" sz="900" b="1" dirty="0">
+                <a:solidFill>
+                  <a:srgbClr val="111111"/>
+                </a:solidFill>
+                <a:latin typeface="Pretendard" pitchFamily="34" charset="0"/>
+                <a:ea typeface="Pretendard" pitchFamily="34" charset="-122"/>
+                <a:cs typeface="Pretendard" pitchFamily="34" charset="-120"/>
+              </a:rPr>
+              <a:t>05</a:t>
+            </a:r>
+            <a:endParaRPr lang="en-US" sz="900" dirty="0"/>
+          </a:p>
+        </p:txBody>
+      </p:sp>
+      <p:sp>
+        <p:nvSpPr>
+          <p:cNvPr id="28" name="Text 26"/>
+          <p:cNvSpPr/>
+          <p:nvPr/>
+        </p:nvSpPr>
+        <p:spPr>
+          <a:xfrm>
+            <a:off x="7010248" y="1755648"/>
+            <a:ext cx="4248760" cy="585216"/>
+          </a:xfrm>
+          <a:prstGeom prst="rect">
+            <a:avLst/>
+          </a:prstGeom>
+          <a:noFill/>
+          <a:ln/>
+        </p:spPr>
+        <p:txBody>
+          <a:bodyPr wrap="square" lIns="0" tIns="0" rIns="0" bIns="0" rtlCol="0" anchor="ctr"/>
+          <a:lstStyle/>
+          <a:p>
+            <a:pPr indent="0" marL="0">
+              <a:buNone/>
+            </a:pPr>
+            <a:r>
+              <a:rPr lang="en-US" sz="1200" dirty="0">
+                <a:solidFill>
+                  <a:srgbClr val="111111"/>
+                </a:solidFill>
+                <a:latin typeface="Pretendard" pitchFamily="34" charset="0"/>
+                <a:ea typeface="Pretendard" pitchFamily="34" charset="-122"/>
+                <a:cs typeface="Pretendard" pitchFamily="34" charset="-120"/>
+              </a:rPr>
+              <a:t>프로젝트마다 문제 문장이 있다</a:t>
+            </a:r>
+            <a:endParaRPr lang="en-US" sz="1200" dirty="0"/>
+          </a:p>
+        </p:txBody>
+      </p:sp>
+      <p:sp>
+        <p:nvSpPr>
+          <p:cNvPr id="29" name="Shape 27"/>
+          <p:cNvSpPr/>
+          <p:nvPr/>
+        </p:nvSpPr>
+        <p:spPr>
+          <a:xfrm>
+            <a:off x="6297016" y="2487168"/>
+            <a:ext cx="5254600" cy="585216"/>
+          </a:xfrm>
+          <a:prstGeom prst="rect">
+            <a:avLst/>
           </a:prstGeom>
           <a:solidFill>
-            <a:srgbClr val="FF4A1C"/>
+            <a:srgbClr val="F2F2F2"/>
           </a:solidFill>
-          <a:ln w="6350">
+          <a:ln w="12700">
             <a:solidFill>
-              <a:srgbClr val="FF4A1C"/>
+              <a:srgbClr val="F2F2F2"/>
             </a:solidFill>
             <a:prstDash val="solid"/>
           </a:ln>
@@ -4659,7 +5676,7 @@
       </p:sp>
       <p:sp>
         <p:nvSpPr>
-          <p:cNvPr id="27" name="Text 25"/>
+          <p:cNvPr id="30" name="Shape 28"/>
           <p:cNvSpPr/>
           <p:nvPr/>
         </p:nvSpPr>
@@ -4668,95 +5685,15 @@
             <a:off x="6571336" y="2624328"/>
             <a:ext cx="310896" cy="310896"/>
           </a:xfrm>
-          <a:prstGeom prst="rect">
-            <a:avLst/>
-          </a:prstGeom>
-          <a:noFill/>
-          <a:ln/>
-        </p:spPr>
-        <p:txBody>
-          <a:bodyPr wrap="square" lIns="0" tIns="0" rIns="0" bIns="0" rtlCol="0" anchor="ctr"/>
-          <a:lstStyle/>
-          <a:p>
-            <a:pPr algn="ctr" indent="0" marL="0">
-              <a:buNone/>
-            </a:pPr>
-            <a:r>
-              <a:rPr lang="en-US" sz="1000" b="1" dirty="0">
-                <a:solidFill>
-                  <a:srgbClr val="FFFFFF"/>
-                </a:solidFill>
-                <a:latin typeface="Pretendard" pitchFamily="34" charset="0"/>
-                <a:ea typeface="Pretendard" pitchFamily="34" charset="-122"/>
-                <a:cs typeface="Pretendard" pitchFamily="34" charset="-120"/>
-              </a:rPr>
-              <a:t>06</a:t>
-            </a:r>
-            <a:endParaRPr lang="en-US" sz="1000" dirty="0"/>
-          </a:p>
-        </p:txBody>
-      </p:sp>
-      <p:sp>
-        <p:nvSpPr>
-          <p:cNvPr id="28" name="Text 26"/>
-          <p:cNvSpPr/>
-          <p:nvPr/>
-        </p:nvSpPr>
-        <p:spPr>
-          <a:xfrm>
-            <a:off x="7010248" y="2487168"/>
-            <a:ext cx="4248760" cy="585216"/>
-          </a:xfrm>
-          <a:prstGeom prst="rect">
-            <a:avLst/>
-          </a:prstGeom>
-          <a:noFill/>
-          <a:ln/>
-        </p:spPr>
-        <p:txBody>
-          <a:bodyPr wrap="square" lIns="0" tIns="0" rIns="0" bIns="0" rtlCol="0" anchor="ctr"/>
-          <a:lstStyle/>
-          <a:p>
-            <a:pPr indent="0" marL="0">
-              <a:buNone/>
-            </a:pPr>
-            <a:r>
-              <a:rPr lang="en-US" sz="1200" dirty="0">
-                <a:solidFill>
-                  <a:srgbClr val="14161B"/>
-                </a:solidFill>
-                <a:latin typeface="Pretendard" pitchFamily="34" charset="0"/>
-                <a:ea typeface="Pretendard" pitchFamily="34" charset="-122"/>
-                <a:cs typeface="Pretendard" pitchFamily="34" charset="-120"/>
-              </a:rPr>
-              <a:t>팀 작업에 내 역할이 명시되어 있다</a:t>
-            </a:r>
-            <a:endParaRPr lang="en-US" sz="1200" dirty="0"/>
-          </a:p>
-        </p:txBody>
-      </p:sp>
-      <p:sp>
-        <p:nvSpPr>
-          <p:cNvPr id="29" name="Shape 27"/>
-          <p:cNvSpPr/>
-          <p:nvPr/>
-        </p:nvSpPr>
-        <p:spPr>
-          <a:xfrm>
-            <a:off x="6297016" y="3218688"/>
-            <a:ext cx="5254600" cy="585216"/>
-          </a:xfrm>
-          <a:prstGeom prst="roundRect">
-            <a:avLst>
-              <a:gd name="adj" fmla="val 12500"/>
-            </a:avLst>
+          <a:prstGeom prst="ellipse">
+            <a:avLst/>
           </a:prstGeom>
           <a:solidFill>
-            <a:srgbClr val="F4F5F7"/>
+            <a:srgbClr val="F2F2F2"/>
           </a:solidFill>
           <a:ln w="12700">
             <a:solidFill>
-              <a:srgbClr val="F4F5F7"/>
+              <a:srgbClr val="111111"/>
             </a:solidFill>
             <a:prstDash val="solid"/>
           </a:ln>
@@ -4764,26 +5701,102 @@
       </p:sp>
       <p:sp>
         <p:nvSpPr>
-          <p:cNvPr id="30" name="Shape 28"/>
-          <p:cNvSpPr/>
-          <p:nvPr/>
-        </p:nvSpPr>
-        <p:spPr>
-          <a:xfrm>
-            <a:off x="6571336" y="3355848"/>
+          <p:cNvPr id="31" name="Text 29"/>
+          <p:cNvSpPr/>
+          <p:nvPr/>
+        </p:nvSpPr>
+        <p:spPr>
+          <a:xfrm>
+            <a:off x="6571336" y="2624328"/>
             <a:ext cx="310896" cy="310896"/>
           </a:xfrm>
-          <a:prstGeom prst="roundRect">
-            <a:avLst>
-              <a:gd name="adj" fmla="val 17647"/>
-            </a:avLst>
+          <a:prstGeom prst="rect">
+            <a:avLst/>
+          </a:prstGeom>
+          <a:noFill/>
+          <a:ln/>
+        </p:spPr>
+        <p:txBody>
+          <a:bodyPr wrap="square" lIns="0" tIns="0" rIns="0" bIns="0" rtlCol="0" anchor="ctr"/>
+          <a:lstStyle/>
+          <a:p>
+            <a:pPr algn="ctr" indent="0" marL="0">
+              <a:buNone/>
+            </a:pPr>
+            <a:r>
+              <a:rPr lang="en-US" sz="900" b="1" dirty="0">
+                <a:solidFill>
+                  <a:srgbClr val="111111"/>
+                </a:solidFill>
+                <a:latin typeface="Pretendard" pitchFamily="34" charset="0"/>
+                <a:ea typeface="Pretendard" pitchFamily="34" charset="-122"/>
+                <a:cs typeface="Pretendard" pitchFamily="34" charset="-120"/>
+              </a:rPr>
+              <a:t>06</a:t>
+            </a:r>
+            <a:endParaRPr lang="en-US" sz="900" dirty="0"/>
+          </a:p>
+        </p:txBody>
+      </p:sp>
+      <p:sp>
+        <p:nvSpPr>
+          <p:cNvPr id="32" name="Text 30"/>
+          <p:cNvSpPr/>
+          <p:nvPr/>
+        </p:nvSpPr>
+        <p:spPr>
+          <a:xfrm>
+            <a:off x="7010248" y="2487168"/>
+            <a:ext cx="4248760" cy="585216"/>
+          </a:xfrm>
+          <a:prstGeom prst="rect">
+            <a:avLst/>
+          </a:prstGeom>
+          <a:noFill/>
+          <a:ln/>
+        </p:spPr>
+        <p:txBody>
+          <a:bodyPr wrap="square" lIns="0" tIns="0" rIns="0" bIns="0" rtlCol="0" anchor="ctr"/>
+          <a:lstStyle/>
+          <a:p>
+            <a:pPr indent="0" marL="0">
+              <a:buNone/>
+            </a:pPr>
+            <a:r>
+              <a:rPr lang="en-US" sz="1200" dirty="0">
+                <a:solidFill>
+                  <a:srgbClr val="111111"/>
+                </a:solidFill>
+                <a:latin typeface="Pretendard" pitchFamily="34" charset="0"/>
+                <a:ea typeface="Pretendard" pitchFamily="34" charset="-122"/>
+                <a:cs typeface="Pretendard" pitchFamily="34" charset="-120"/>
+              </a:rPr>
+              <a:t>팀 작업에 내 역할이 명시되어 있다</a:t>
+            </a:r>
+            <a:endParaRPr lang="en-US" sz="1200" dirty="0"/>
+          </a:p>
+        </p:txBody>
+      </p:sp>
+      <p:sp>
+        <p:nvSpPr>
+          <p:cNvPr id="33" name="Shape 31"/>
+          <p:cNvSpPr/>
+          <p:nvPr/>
+        </p:nvSpPr>
+        <p:spPr>
+          <a:xfrm>
+            <a:off x="6297016" y="3218688"/>
+            <a:ext cx="5254600" cy="585216"/>
+          </a:xfrm>
+          <a:prstGeom prst="rect">
+            <a:avLst/>
           </a:prstGeom>
           <a:solidFill>
-            <a:srgbClr val="FF4A1C"/>
+            <a:srgbClr val="F2F2F2"/>
           </a:solidFill>
-          <a:ln w="6350">
+          <a:ln w="12700">
             <a:solidFill>
-              <a:srgbClr val="FF4A1C"/>
+              <a:srgbClr val="F2F2F2"/>
             </a:solidFill>
             <a:prstDash val="solid"/>
           </a:ln>
@@ -4791,7 +5804,7 @@
       </p:sp>
       <p:sp>
         <p:nvSpPr>
-          <p:cNvPr id="31" name="Text 29"/>
+          <p:cNvPr id="34" name="Shape 32"/>
           <p:cNvSpPr/>
           <p:nvPr/>
         </p:nvSpPr>
@@ -4800,95 +5813,15 @@
             <a:off x="6571336" y="3355848"/>
             <a:ext cx="310896" cy="310896"/>
           </a:xfrm>
-          <a:prstGeom prst="rect">
-            <a:avLst/>
-          </a:prstGeom>
-          <a:noFill/>
-          <a:ln/>
-        </p:spPr>
-        <p:txBody>
-          <a:bodyPr wrap="square" lIns="0" tIns="0" rIns="0" bIns="0" rtlCol="0" anchor="ctr"/>
-          <a:lstStyle/>
-          <a:p>
-            <a:pPr algn="ctr" indent="0" marL="0">
-              <a:buNone/>
-            </a:pPr>
-            <a:r>
-              <a:rPr lang="en-US" sz="1000" b="1" dirty="0">
-                <a:solidFill>
-                  <a:srgbClr val="FFFFFF"/>
-                </a:solidFill>
-                <a:latin typeface="Pretendard" pitchFamily="34" charset="0"/>
-                <a:ea typeface="Pretendard" pitchFamily="34" charset="-122"/>
-                <a:cs typeface="Pretendard" pitchFamily="34" charset="-120"/>
-              </a:rPr>
-              <a:t>07</a:t>
-            </a:r>
-            <a:endParaRPr lang="en-US" sz="1000" dirty="0"/>
-          </a:p>
-        </p:txBody>
-      </p:sp>
-      <p:sp>
-        <p:nvSpPr>
-          <p:cNvPr id="32" name="Text 30"/>
-          <p:cNvSpPr/>
-          <p:nvPr/>
-        </p:nvSpPr>
-        <p:spPr>
-          <a:xfrm>
-            <a:off x="7010248" y="3218688"/>
-            <a:ext cx="4248760" cy="585216"/>
-          </a:xfrm>
-          <a:prstGeom prst="rect">
-            <a:avLst/>
-          </a:prstGeom>
-          <a:noFill/>
-          <a:ln/>
-        </p:spPr>
-        <p:txBody>
-          <a:bodyPr wrap="square" lIns="0" tIns="0" rIns="0" bIns="0" rtlCol="0" anchor="ctr"/>
-          <a:lstStyle/>
-          <a:p>
-            <a:pPr indent="0" marL="0">
-              <a:buNone/>
-            </a:pPr>
-            <a:r>
-              <a:rPr lang="en-US" sz="1200" dirty="0">
-                <a:solidFill>
-                  <a:srgbClr val="14161B"/>
-                </a:solidFill>
-                <a:latin typeface="Pretendard" pitchFamily="34" charset="0"/>
-                <a:ea typeface="Pretendard" pitchFamily="34" charset="-122"/>
-                <a:cs typeface="Pretendard" pitchFamily="34" charset="-120"/>
-              </a:rPr>
-              <a:t>오탈자를 한 번 이상 검수했다</a:t>
-            </a:r>
-            <a:endParaRPr lang="en-US" sz="1200" dirty="0"/>
-          </a:p>
-        </p:txBody>
-      </p:sp>
-      <p:sp>
-        <p:nvSpPr>
-          <p:cNvPr id="33" name="Shape 31"/>
-          <p:cNvSpPr/>
-          <p:nvPr/>
-        </p:nvSpPr>
-        <p:spPr>
-          <a:xfrm>
-            <a:off x="6297016" y="3950208"/>
-            <a:ext cx="5254600" cy="585216"/>
-          </a:xfrm>
-          <a:prstGeom prst="roundRect">
-            <a:avLst>
-              <a:gd name="adj" fmla="val 12500"/>
-            </a:avLst>
+          <a:prstGeom prst="ellipse">
+            <a:avLst/>
           </a:prstGeom>
           <a:solidFill>
-            <a:srgbClr val="F4F5F7"/>
+            <a:srgbClr val="F2F2F2"/>
           </a:solidFill>
           <a:ln w="12700">
             <a:solidFill>
-              <a:srgbClr val="F4F5F7"/>
+              <a:srgbClr val="111111"/>
             </a:solidFill>
             <a:prstDash val="solid"/>
           </a:ln>
@@ -4896,26 +5829,102 @@
       </p:sp>
       <p:sp>
         <p:nvSpPr>
-          <p:cNvPr id="34" name="Shape 32"/>
-          <p:cNvSpPr/>
-          <p:nvPr/>
-        </p:nvSpPr>
-        <p:spPr>
-          <a:xfrm>
-            <a:off x="6571336" y="4087368"/>
+          <p:cNvPr id="35" name="Text 33"/>
+          <p:cNvSpPr/>
+          <p:nvPr/>
+        </p:nvSpPr>
+        <p:spPr>
+          <a:xfrm>
+            <a:off x="6571336" y="3355848"/>
             <a:ext cx="310896" cy="310896"/>
           </a:xfrm>
-          <a:prstGeom prst="roundRect">
-            <a:avLst>
-              <a:gd name="adj" fmla="val 17647"/>
-            </a:avLst>
+          <a:prstGeom prst="rect">
+            <a:avLst/>
+          </a:prstGeom>
+          <a:noFill/>
+          <a:ln/>
+        </p:spPr>
+        <p:txBody>
+          <a:bodyPr wrap="square" lIns="0" tIns="0" rIns="0" bIns="0" rtlCol="0" anchor="ctr"/>
+          <a:lstStyle/>
+          <a:p>
+            <a:pPr algn="ctr" indent="0" marL="0">
+              <a:buNone/>
+            </a:pPr>
+            <a:r>
+              <a:rPr lang="en-US" sz="900" b="1" dirty="0">
+                <a:solidFill>
+                  <a:srgbClr val="111111"/>
+                </a:solidFill>
+                <a:latin typeface="Pretendard" pitchFamily="34" charset="0"/>
+                <a:ea typeface="Pretendard" pitchFamily="34" charset="-122"/>
+                <a:cs typeface="Pretendard" pitchFamily="34" charset="-120"/>
+              </a:rPr>
+              <a:t>07</a:t>
+            </a:r>
+            <a:endParaRPr lang="en-US" sz="900" dirty="0"/>
+          </a:p>
+        </p:txBody>
+      </p:sp>
+      <p:sp>
+        <p:nvSpPr>
+          <p:cNvPr id="36" name="Text 34"/>
+          <p:cNvSpPr/>
+          <p:nvPr/>
+        </p:nvSpPr>
+        <p:spPr>
+          <a:xfrm>
+            <a:off x="7010248" y="3218688"/>
+            <a:ext cx="4248760" cy="585216"/>
+          </a:xfrm>
+          <a:prstGeom prst="rect">
+            <a:avLst/>
+          </a:prstGeom>
+          <a:noFill/>
+          <a:ln/>
+        </p:spPr>
+        <p:txBody>
+          <a:bodyPr wrap="square" lIns="0" tIns="0" rIns="0" bIns="0" rtlCol="0" anchor="ctr"/>
+          <a:lstStyle/>
+          <a:p>
+            <a:pPr indent="0" marL="0">
+              <a:buNone/>
+            </a:pPr>
+            <a:r>
+              <a:rPr lang="en-US" sz="1200" dirty="0">
+                <a:solidFill>
+                  <a:srgbClr val="111111"/>
+                </a:solidFill>
+                <a:latin typeface="Pretendard" pitchFamily="34" charset="0"/>
+                <a:ea typeface="Pretendard" pitchFamily="34" charset="-122"/>
+                <a:cs typeface="Pretendard" pitchFamily="34" charset="-120"/>
+              </a:rPr>
+              <a:t>오탈자를 한 번 이상 검수했다</a:t>
+            </a:r>
+            <a:endParaRPr lang="en-US" sz="1200" dirty="0"/>
+          </a:p>
+        </p:txBody>
+      </p:sp>
+      <p:sp>
+        <p:nvSpPr>
+          <p:cNvPr id="37" name="Shape 35"/>
+          <p:cNvSpPr/>
+          <p:nvPr/>
+        </p:nvSpPr>
+        <p:spPr>
+          <a:xfrm>
+            <a:off x="6297016" y="3950208"/>
+            <a:ext cx="5254600" cy="585216"/>
+          </a:xfrm>
+          <a:prstGeom prst="rect">
+            <a:avLst/>
           </a:prstGeom>
           <a:solidFill>
-            <a:srgbClr val="FF4A1C"/>
+            <a:srgbClr val="F2F2F2"/>
           </a:solidFill>
-          <a:ln w="6350">
+          <a:ln w="12700">
             <a:solidFill>
-              <a:srgbClr val="FF4A1C"/>
+              <a:srgbClr val="F2F2F2"/>
             </a:solidFill>
             <a:prstDash val="solid"/>
           </a:ln>
@@ -4923,7 +5932,7 @@
       </p:sp>
       <p:sp>
         <p:nvSpPr>
-          <p:cNvPr id="35" name="Text 33"/>
+          <p:cNvPr id="38" name="Shape 36"/>
           <p:cNvSpPr/>
           <p:nvPr/>
         </p:nvSpPr>
@@ -4932,6 +5941,31 @@
             <a:off x="6571336" y="4087368"/>
             <a:ext cx="310896" cy="310896"/>
           </a:xfrm>
+          <a:prstGeom prst="ellipse">
+            <a:avLst/>
+          </a:prstGeom>
+          <a:solidFill>
+            <a:srgbClr val="F2F2F2"/>
+          </a:solidFill>
+          <a:ln w="12700">
+            <a:solidFill>
+              <a:srgbClr val="111111"/>
+            </a:solidFill>
+            <a:prstDash val="solid"/>
+          </a:ln>
+        </p:spPr>
+      </p:sp>
+      <p:sp>
+        <p:nvSpPr>
+          <p:cNvPr id="39" name="Text 37"/>
+          <p:cNvSpPr/>
+          <p:nvPr/>
+        </p:nvSpPr>
+        <p:spPr>
+          <a:xfrm>
+            <a:off x="6571336" y="4087368"/>
+            <a:ext cx="310896" cy="310896"/>
+          </a:xfrm>
           <a:prstGeom prst="rect">
             <a:avLst/>
           </a:prstGeom>
@@ -4946,9 +5980,9 @@
               <a:buNone/>
             </a:pPr>
             <a:r>
-              <a:rPr lang="en-US" sz="1000" b="1" dirty="0">
-                <a:solidFill>
-                  <a:srgbClr val="FFFFFF"/>
+              <a:rPr lang="en-US" sz="900" b="1" dirty="0">
+                <a:solidFill>
+                  <a:srgbClr val="111111"/>
                 </a:solidFill>
                 <a:latin typeface="Pretendard" pitchFamily="34" charset="0"/>
                 <a:ea typeface="Pretendard" pitchFamily="34" charset="-122"/>
@@ -4956,13 +5990,13 @@
               </a:rPr>
               <a:t>08</a:t>
             </a:r>
-            <a:endParaRPr lang="en-US" sz="1000" dirty="0"/>
-          </a:p>
-        </p:txBody>
-      </p:sp>
-      <p:sp>
-        <p:nvSpPr>
-          <p:cNvPr id="36" name="Text 34"/>
+            <a:endParaRPr lang="en-US" sz="900" dirty="0"/>
+          </a:p>
+        </p:txBody>
+      </p:sp>
+      <p:sp>
+        <p:nvSpPr>
+          <p:cNvPr id="40" name="Text 38"/>
           <p:cNvSpPr/>
           <p:nvPr/>
         </p:nvSpPr>
@@ -4987,7 +6021,7 @@
             <a:r>
               <a:rPr lang="en-US" sz="1200" dirty="0">
                 <a:solidFill>
-                  <a:srgbClr val="14161B"/>
+                  <a:srgbClr val="111111"/>
                 </a:solidFill>
                 <a:latin typeface="Pretendard" pitchFamily="34" charset="0"/>
                 <a:ea typeface="Pretendard" pitchFamily="34" charset="-122"/>
@@ -5001,7 +6035,32 @@
       </p:sp>
       <p:sp>
         <p:nvSpPr>
-          <p:cNvPr id="37" name="Text 35"/>
+          <p:cNvPr id="41" name="Shape 39"/>
+          <p:cNvSpPr/>
+          <p:nvPr/>
+        </p:nvSpPr>
+        <p:spPr>
+          <a:xfrm>
+            <a:off x="640080" y="5468112"/>
+            <a:ext cx="10911535" cy="7315"/>
+          </a:xfrm>
+          <a:prstGeom prst="rect">
+            <a:avLst/>
+          </a:prstGeom>
+          <a:solidFill>
+            <a:srgbClr val="111111"/>
+          </a:solidFill>
+          <a:ln w="12700">
+            <a:solidFill>
+              <a:srgbClr val="111111"/>
+            </a:solidFill>
+            <a:prstDash val="solid"/>
+          </a:ln>
+        </p:spPr>
+      </p:sp>
+      <p:sp>
+        <p:nvSpPr>
+          <p:cNvPr id="42" name="Text 40"/>
           <p:cNvSpPr/>
           <p:nvPr/>
         </p:nvSpPr>
@@ -5026,7 +6085,7 @@
             <a:r>
               <a:rPr lang="en-US" sz="1250" b="1" dirty="0">
                 <a:solidFill>
-                  <a:srgbClr val="14161B"/>
+                  <a:srgbClr val="111111"/>
                 </a:solidFill>
                 <a:latin typeface="Pretendard" pitchFamily="34" charset="0"/>
                 <a:ea typeface="Pretendard" pitchFamily="34" charset="-122"/>
@@ -5040,14 +6099,39 @@
       </p:sp>
       <p:sp>
         <p:nvSpPr>
-          <p:cNvPr id="38" name="Text 36"/>
-          <p:cNvSpPr/>
-          <p:nvPr/>
-        </p:nvSpPr>
-        <p:spPr>
-          <a:xfrm>
-            <a:off x="640080" y="6345936"/>
-            <a:ext cx="7772400" cy="256032"/>
+          <p:cNvPr id="43" name="Shape 41"/>
+          <p:cNvSpPr/>
+          <p:nvPr/>
+        </p:nvSpPr>
+        <p:spPr>
+          <a:xfrm>
+            <a:off x="640080" y="6291072"/>
+            <a:ext cx="10911535" cy="7315"/>
+          </a:xfrm>
+          <a:prstGeom prst="rect">
+            <a:avLst/>
+          </a:prstGeom>
+          <a:solidFill>
+            <a:srgbClr val="DCDCDC"/>
+          </a:solidFill>
+          <a:ln w="12700">
+            <a:solidFill>
+              <a:srgbClr val="DCDCDC"/>
+            </a:solidFill>
+            <a:prstDash val="solid"/>
+          </a:ln>
+        </p:spPr>
+      </p:sp>
+      <p:sp>
+        <p:nvSpPr>
+          <p:cNvPr id="44" name="Text 42"/>
+          <p:cNvSpPr/>
+          <p:nvPr/>
+        </p:nvSpPr>
+        <p:spPr>
+          <a:xfrm>
+            <a:off x="640080" y="6382512"/>
+            <a:ext cx="7772400" cy="237744"/>
           </a:xfrm>
           <a:prstGeom prst="rect">
             <a:avLst/>
@@ -5063,9 +6147,9 @@
               <a:buNone/>
             </a:pPr>
             <a:r>
-              <a:rPr lang="en-US" sz="900" dirty="0">
-                <a:solidFill>
-                  <a:srgbClr val="9AA0AA"/>
+              <a:rPr lang="en-US" sz="850" spc="40" kern="0" dirty="0">
+                <a:solidFill>
+                  <a:srgbClr val="9B9B9B"/>
                 </a:solidFill>
                 <a:latin typeface="Pretendard" pitchFamily="34" charset="0"/>
                 <a:ea typeface="Pretendard" pitchFamily="34" charset="-122"/>
@@ -5073,20 +6157,20 @@
               </a:rPr>
               <a:t>포트폴리오제작 · 15주차 기말 발표 및 종합 평가</a:t>
             </a:r>
-            <a:endParaRPr lang="en-US" sz="900" dirty="0"/>
-          </a:p>
-        </p:txBody>
-      </p:sp>
-      <p:sp>
-        <p:nvSpPr>
-          <p:cNvPr id="39" name="Text 37"/>
-          <p:cNvSpPr/>
-          <p:nvPr/>
-        </p:nvSpPr>
-        <p:spPr>
-          <a:xfrm>
-            <a:off x="10454335" y="6345936"/>
-            <a:ext cx="1097280" cy="256032"/>
+            <a:endParaRPr lang="en-US" sz="850" dirty="0"/>
+          </a:p>
+        </p:txBody>
+      </p:sp>
+      <p:sp>
+        <p:nvSpPr>
+          <p:cNvPr id="45" name="Text 43"/>
+          <p:cNvSpPr/>
+          <p:nvPr/>
+        </p:nvSpPr>
+        <p:spPr>
+          <a:xfrm>
+            <a:off x="10271455" y="6382512"/>
+            <a:ext cx="1280160" cy="237744"/>
           </a:xfrm>
           <a:prstGeom prst="rect">
             <a:avLst/>
@@ -5102,17 +6186,17 @@
               <a:buNone/>
             </a:pPr>
             <a:r>
-              <a:rPr lang="en-US" sz="900" dirty="0">
-                <a:solidFill>
-                  <a:srgbClr val="9AA0AA"/>
-                </a:solidFill>
-                <a:latin typeface="Pretendard" pitchFamily="34" charset="0"/>
-                <a:ea typeface="Pretendard" pitchFamily="34" charset="-122"/>
-                <a:cs typeface="Pretendard" pitchFamily="34" charset="-120"/>
-              </a:rPr>
-              <a:t>03</a:t>
-            </a:r>
-            <a:endParaRPr lang="en-US" sz="900" dirty="0"/>
+              <a:rPr lang="en-US" sz="850" spc="140" kern="0" dirty="0">
+                <a:solidFill>
+                  <a:srgbClr val="9B9B9B"/>
+                </a:solidFill>
+                <a:latin typeface="Pretendard" pitchFamily="34" charset="0"/>
+                <a:ea typeface="Pretendard" pitchFamily="34" charset="-122"/>
+                <a:cs typeface="Pretendard" pitchFamily="34" charset="-120"/>
+              </a:rPr>
+              <a:t>P.03</a:t>
+            </a:r>
+            <a:endParaRPr lang="en-US" sz="850" dirty="0"/>
           </a:p>
         </p:txBody>
       </p:sp>
@@ -5130,7 +6214,7 @@
     <p:bg>
       <p:bgPr>
         <a:solidFill>
-          <a:srgbClr val="14161B"/>
+          <a:srgbClr val="111111"/>
         </a:solidFill>
       </p:bgPr>
     </p:bg>
@@ -5156,8 +6240,86 @@
         </p:nvSpPr>
         <p:spPr>
           <a:xfrm>
-            <a:off x="7711135" y="914400"/>
-            <a:ext cx="3840480" cy="5029200"/>
+            <a:off x="640080" y="274320"/>
+            <a:ext cx="3657600" cy="219456"/>
+          </a:xfrm>
+          <a:prstGeom prst="rect">
+            <a:avLst/>
+          </a:prstGeom>
+          <a:noFill/>
+          <a:ln/>
+        </p:spPr>
+        <p:txBody>
+          <a:bodyPr wrap="square" lIns="0" tIns="0" rIns="0" bIns="0" rtlCol="0" anchor="ctr"/>
+          <a:lstStyle/>
+          <a:p>
+            <a:pPr indent="0" marL="0">
+              <a:buNone/>
+            </a:pPr>
+            <a:r>
+              <a:rPr lang="en-US" sz="900" spc="120" kern="0" dirty="0">
+                <a:solidFill>
+                  <a:srgbClr val="9A9A9A"/>
+                </a:solidFill>
+                <a:latin typeface="Pretendard" pitchFamily="34" charset="0"/>
+                <a:ea typeface="Pretendard" pitchFamily="34" charset="-122"/>
+                <a:cs typeface="Pretendard" pitchFamily="34" charset="-120"/>
+              </a:rPr>
+              <a:t>포트폴리오제작</a:t>
+            </a:r>
+            <a:endParaRPr lang="en-US" sz="900" dirty="0"/>
+          </a:p>
+        </p:txBody>
+      </p:sp>
+      <p:sp>
+        <p:nvSpPr>
+          <p:cNvPr id="3" name="Text 1"/>
+          <p:cNvSpPr/>
+          <p:nvPr/>
+        </p:nvSpPr>
+        <p:spPr>
+          <a:xfrm>
+            <a:off x="4480560" y="274320"/>
+            <a:ext cx="4572000" cy="219456"/>
+          </a:xfrm>
+          <a:prstGeom prst="rect">
+            <a:avLst/>
+          </a:prstGeom>
+          <a:noFill/>
+          <a:ln/>
+        </p:spPr>
+        <p:txBody>
+          <a:bodyPr wrap="square" lIns="0" tIns="0" rIns="0" bIns="0" rtlCol="0" anchor="ctr"/>
+          <a:lstStyle/>
+          <a:p>
+            <a:pPr algn="ctr" indent="0" marL="0">
+              <a:buNone/>
+            </a:pPr>
+            <a:r>
+              <a:rPr lang="en-US" sz="900" spc="120" kern="0" dirty="0">
+                <a:solidFill>
+                  <a:srgbClr val="9A9A9A"/>
+                </a:solidFill>
+                <a:latin typeface="Pretendard" pitchFamily="34" charset="0"/>
+                <a:ea typeface="Pretendard" pitchFamily="34" charset="-122"/>
+                <a:cs typeface="Pretendard" pitchFamily="34" charset="-120"/>
+              </a:rPr>
+              <a:t>PHASE 3 완성과 발표</a:t>
+            </a:r>
+            <a:endParaRPr lang="en-US" sz="900" dirty="0"/>
+          </a:p>
+        </p:txBody>
+      </p:sp>
+      <p:sp>
+        <p:nvSpPr>
+          <p:cNvPr id="4" name="Text 2"/>
+          <p:cNvSpPr/>
+          <p:nvPr/>
+        </p:nvSpPr>
+        <p:spPr>
+          <a:xfrm>
+            <a:off x="8808415" y="274320"/>
+            <a:ext cx="2743200" cy="219456"/>
           </a:xfrm>
           <a:prstGeom prst="rect">
             <a:avLst/>
@@ -5173,30 +6335,163 @@
               <a:buNone/>
             </a:pPr>
             <a:r>
-              <a:rPr lang="en-US" sz="25500" dirty="0">
-                <a:solidFill>
-                  <a:srgbClr val="262A33"/>
-                </a:solidFill>
-                <a:latin typeface="Pretendard Thin" pitchFamily="34" charset="0"/>
-                <a:ea typeface="Pretendard Thin" pitchFamily="34" charset="-122"/>
-                <a:cs typeface="Pretendard Thin" pitchFamily="34" charset="-120"/>
+              <a:rPr lang="en-US" sz="900" spc="200" kern="0" dirty="0">
+                <a:solidFill>
+                  <a:srgbClr val="9A9A9A"/>
+                </a:solidFill>
+                <a:latin typeface="Pretendard" pitchFamily="34" charset="0"/>
+                <a:ea typeface="Pretendard" pitchFamily="34" charset="-122"/>
+                <a:cs typeface="Pretendard" pitchFamily="34" charset="-120"/>
+              </a:rPr>
+              <a:t>WEEK 15</a:t>
+            </a:r>
+            <a:endParaRPr lang="en-US" sz="900" dirty="0"/>
+          </a:p>
+        </p:txBody>
+      </p:sp>
+      <p:sp>
+        <p:nvSpPr>
+          <p:cNvPr id="5" name="Shape 3"/>
+          <p:cNvSpPr/>
+          <p:nvPr/>
+        </p:nvSpPr>
+        <p:spPr>
+          <a:xfrm>
+            <a:off x="640080" y="548640"/>
+            <a:ext cx="10911535" cy="7315"/>
+          </a:xfrm>
+          <a:prstGeom prst="rect">
+            <a:avLst/>
+          </a:prstGeom>
+          <a:solidFill>
+            <a:srgbClr val="333333"/>
+          </a:solidFill>
+          <a:ln w="12700">
+            <a:solidFill>
+              <a:srgbClr val="333333"/>
+            </a:solidFill>
+            <a:prstDash val="solid"/>
+          </a:ln>
+        </p:spPr>
+      </p:sp>
+      <p:sp>
+        <p:nvSpPr>
+          <p:cNvPr id="6" name="Text 4"/>
+          <p:cNvSpPr/>
+          <p:nvPr/>
+        </p:nvSpPr>
+        <p:spPr>
+          <a:xfrm>
+            <a:off x="7345375" y="1737360"/>
+            <a:ext cx="4206240" cy="3291840"/>
+          </a:xfrm>
+          <a:prstGeom prst="rect">
+            <a:avLst/>
+          </a:prstGeom>
+          <a:noFill/>
+          <a:ln/>
+        </p:spPr>
+        <p:txBody>
+          <a:bodyPr wrap="square" lIns="0" tIns="0" rIns="0" bIns="0" rtlCol="0" anchor="ctr"/>
+          <a:lstStyle/>
+          <a:p>
+            <a:pPr algn="r" indent="0" marL="0">
+              <a:buNone/>
+            </a:pPr>
+            <a:r>
+              <a:rPr lang="en-US" sz="20000" dirty="0">
+                <a:solidFill>
+                  <a:srgbClr val="1B1B1B"/>
+                </a:solidFill>
+                <a:latin typeface="Pretendard Black" pitchFamily="34" charset="0"/>
+                <a:ea typeface="Pretendard Black" pitchFamily="34" charset="-122"/>
+                <a:cs typeface="Pretendard Black" pitchFamily="34" charset="-120"/>
               </a:rPr>
               <a:t>02</a:t>
             </a:r>
-            <a:endParaRPr lang="en-US" sz="25500" dirty="0"/>
-          </a:p>
-        </p:txBody>
-      </p:sp>
-      <p:sp>
-        <p:nvSpPr>
-          <p:cNvPr id="3" name="Text 1"/>
-          <p:cNvSpPr/>
-          <p:nvPr/>
-        </p:nvSpPr>
-        <p:spPr>
-          <a:xfrm>
-            <a:off x="640080" y="2487168"/>
-            <a:ext cx="7315200" cy="274320"/>
+            <a:endParaRPr lang="en-US" sz="20000" dirty="0"/>
+          </a:p>
+        </p:txBody>
+      </p:sp>
+      <p:sp>
+        <p:nvSpPr>
+          <p:cNvPr id="7" name="Shape 5"/>
+          <p:cNvSpPr/>
+          <p:nvPr/>
+        </p:nvSpPr>
+        <p:spPr>
+          <a:xfrm>
+            <a:off x="941832" y="1371600"/>
+            <a:ext cx="0" cy="603504"/>
+          </a:xfrm>
+          <a:prstGeom prst="line">
+            <a:avLst/>
+          </a:prstGeom>
+          <a:noFill/>
+          <a:ln w="15875">
+            <a:solidFill>
+              <a:srgbClr val="FFFFFF"/>
+            </a:solidFill>
+            <a:prstDash val="solid"/>
+          </a:ln>
+        </p:spPr>
+      </p:sp>
+      <p:sp>
+        <p:nvSpPr>
+          <p:cNvPr id="8" name="Shape 6"/>
+          <p:cNvSpPr/>
+          <p:nvPr/>
+        </p:nvSpPr>
+        <p:spPr>
+          <a:xfrm>
+            <a:off x="640080" y="1733702"/>
+            <a:ext cx="301752" cy="241402"/>
+          </a:xfrm>
+          <a:prstGeom prst="line">
+            <a:avLst/>
+          </a:prstGeom>
+          <a:noFill/>
+          <a:ln w="15875">
+            <a:solidFill>
+              <a:srgbClr val="FFFFFF"/>
+            </a:solidFill>
+            <a:prstDash val="solid"/>
+          </a:ln>
+        </p:spPr>
+      </p:sp>
+      <p:sp>
+        <p:nvSpPr>
+          <p:cNvPr id="9" name="Shape 7"/>
+          <p:cNvSpPr/>
+          <p:nvPr/>
+        </p:nvSpPr>
+        <p:spPr>
+          <a:xfrm flipV="1">
+            <a:off x="941832" y="1733702"/>
+            <a:ext cx="301752" cy="241402"/>
+          </a:xfrm>
+          <a:prstGeom prst="line">
+            <a:avLst/>
+          </a:prstGeom>
+          <a:noFill/>
+          <a:ln w="15875">
+            <a:solidFill>
+              <a:srgbClr val="FFFFFF"/>
+            </a:solidFill>
+            <a:prstDash val="solid"/>
+          </a:ln>
+        </p:spPr>
+      </p:sp>
+      <p:sp>
+        <p:nvSpPr>
+          <p:cNvPr id="10" name="Text 8"/>
+          <p:cNvSpPr/>
+          <p:nvPr/>
+        </p:nvSpPr>
+        <p:spPr>
+          <a:xfrm>
+            <a:off x="640080" y="2615184"/>
+            <a:ext cx="7863840" cy="256032"/>
           </a:xfrm>
           <a:prstGeom prst="rect">
             <a:avLst/>
@@ -5212,9 +6507,9 @@
               <a:buNone/>
             </a:pPr>
             <a:r>
-              <a:rPr lang="en-US" sz="1100" b="1" spc="200" kern="0" dirty="0">
-                <a:solidFill>
-                  <a:srgbClr val="FF4A1C"/>
+              <a:rPr lang="en-US" sz="950" spc="280" kern="0" dirty="0">
+                <a:solidFill>
+                  <a:srgbClr val="9A9A9A"/>
                 </a:solidFill>
                 <a:latin typeface="Pretendard" pitchFamily="34" charset="0"/>
                 <a:ea typeface="Pretendard" pitchFamily="34" charset="-122"/>
@@ -5222,20 +6517,20 @@
               </a:rPr>
               <a:t>PART 02</a:t>
             </a:r>
-            <a:endParaRPr lang="en-US" sz="1100" dirty="0"/>
-          </a:p>
-        </p:txBody>
-      </p:sp>
-      <p:sp>
-        <p:nvSpPr>
-          <p:cNvPr id="4" name="Text 2"/>
-          <p:cNvSpPr/>
-          <p:nvPr/>
-        </p:nvSpPr>
-        <p:spPr>
-          <a:xfrm>
-            <a:off x="640080" y="2834640"/>
-            <a:ext cx="7315200" cy="731520"/>
+            <a:endParaRPr lang="en-US" sz="950" dirty="0"/>
+          </a:p>
+        </p:txBody>
+      </p:sp>
+      <p:sp>
+        <p:nvSpPr>
+          <p:cNvPr id="11" name="Text 9"/>
+          <p:cNvSpPr/>
+          <p:nvPr/>
+        </p:nvSpPr>
+        <p:spPr>
+          <a:xfrm>
+            <a:off x="640080" y="2889504"/>
+            <a:ext cx="7863840" cy="786384"/>
           </a:xfrm>
           <a:prstGeom prst="rect">
             <a:avLst/>
@@ -5251,30 +6546,55 @@
               <a:buNone/>
             </a:pPr>
             <a:r>
-              <a:rPr lang="en-US" sz="4200" b="1" dirty="0">
+              <a:rPr lang="en-US" sz="4600" dirty="0">
                 <a:solidFill>
                   <a:srgbClr val="FFFFFF"/>
                 </a:solidFill>
-                <a:latin typeface="Pretendard" pitchFamily="34" charset="0"/>
-                <a:ea typeface="Pretendard" pitchFamily="34" charset="-122"/>
-                <a:cs typeface="Pretendard" pitchFamily="34" charset="-120"/>
+                <a:latin typeface="Pretendard Black" pitchFamily="34" charset="0"/>
+                <a:ea typeface="Pretendard Black" pitchFamily="34" charset="-122"/>
+                <a:cs typeface="Pretendard Black" pitchFamily="34" charset="-120"/>
               </a:rPr>
               <a:t>학기 마무리</a:t>
             </a:r>
-            <a:endParaRPr lang="en-US" sz="4200" dirty="0"/>
-          </a:p>
-        </p:txBody>
-      </p:sp>
-      <p:sp>
-        <p:nvSpPr>
-          <p:cNvPr id="5" name="Text 3"/>
-          <p:cNvSpPr/>
-          <p:nvPr/>
-        </p:nvSpPr>
-        <p:spPr>
-          <a:xfrm>
-            <a:off x="640080" y="3657600"/>
-            <a:ext cx="6766560" cy="640080"/>
+            <a:endParaRPr lang="en-US" sz="4600" dirty="0"/>
+          </a:p>
+        </p:txBody>
+      </p:sp>
+      <p:sp>
+        <p:nvSpPr>
+          <p:cNvPr id="12" name="Shape 10"/>
+          <p:cNvSpPr/>
+          <p:nvPr/>
+        </p:nvSpPr>
+        <p:spPr>
+          <a:xfrm>
+            <a:off x="640080" y="3803904"/>
+            <a:ext cx="2194560" cy="7315"/>
+          </a:xfrm>
+          <a:prstGeom prst="rect">
+            <a:avLst/>
+          </a:prstGeom>
+          <a:solidFill>
+            <a:srgbClr val="FFFFFF"/>
+          </a:solidFill>
+          <a:ln w="12700">
+            <a:solidFill>
+              <a:srgbClr val="FFFFFF"/>
+            </a:solidFill>
+            <a:prstDash val="solid"/>
+          </a:ln>
+        </p:spPr>
+      </p:sp>
+      <p:sp>
+        <p:nvSpPr>
+          <p:cNvPr id="13" name="Text 11"/>
+          <p:cNvSpPr/>
+          <p:nvPr/>
+        </p:nvSpPr>
+        <p:spPr>
+          <a:xfrm>
+            <a:off x="640080" y="4005072"/>
+            <a:ext cx="6949440" cy="731520"/>
           </a:xfrm>
           <a:prstGeom prst="rect">
             <a:avLst/>
@@ -5288,22 +6608,61 @@
           <a:p>
             <a:pPr indent="0" marL="0">
               <a:lnSpc>
-                <a:spcPct val="130000"/>
+                <a:spcPct val="134000"/>
               </a:lnSpc>
               <a:buNone/>
             </a:pPr>
             <a:r>
               <a:rPr lang="en-US" sz="1350" dirty="0">
                 <a:solidFill>
-                  <a:srgbClr val="AEB4BF"/>
-                </a:solidFill>
-                <a:latin typeface="Pretendard" pitchFamily="34" charset="0"/>
-                <a:ea typeface="Pretendard" pitchFamily="34" charset="-122"/>
-                <a:cs typeface="Pretendard" pitchFamily="34" charset="-120"/>
+                  <a:srgbClr val="B8B8B8"/>
+                </a:solidFill>
+                <a:latin typeface="Pretendard Light" pitchFamily="34" charset="0"/>
+                <a:ea typeface="Pretendard Light" pitchFamily="34" charset="-122"/>
+                <a:cs typeface="Pretendard Light" pitchFamily="34" charset="-120"/>
               </a:rPr>
               <a:t>무엇을 했고 무엇이 남았는지 정리하고 끝냅니다.</a:t>
             </a:r>
             <a:endParaRPr lang="en-US" sz="1350" dirty="0"/>
+          </a:p>
+        </p:txBody>
+      </p:sp>
+      <p:sp>
+        <p:nvSpPr>
+          <p:cNvPr id="14" name="Text 12"/>
+          <p:cNvSpPr/>
+          <p:nvPr/>
+        </p:nvSpPr>
+        <p:spPr>
+          <a:xfrm rot="16200000">
+            <a:off x="10436047" y="3291840"/>
+            <a:ext cx="2743200" cy="274320"/>
+          </a:xfrm>
+          <a:prstGeom prst="rect">
+            <a:avLst/>
+          </a:prstGeom>
+          <a:noFill/>
+          <a:ln/>
+        </p:spPr>
+        <p:txBody>
+          <a:bodyPr wrap="square" lIns="0" tIns="0" rIns="0" bIns="0" rtlCol="0" anchor="ctr"/>
+          <a:lstStyle/>
+          <a:p>
+            <a:pPr algn="ctr" indent="0" marL="0">
+              <a:buNone/>
+            </a:pPr>
+            <a:r>
+              <a:rPr lang="en-US" sz="850" spc="260" kern="0" dirty="0">
+                <a:solidFill>
+                  <a:srgbClr val="7A7A7A"/>
+                </a:solidFill>
+                <a:latin typeface="Pretendard" pitchFamily="34" charset="0"/>
+                <a:ea typeface="Pretendard" pitchFamily="34" charset="-122"/>
+                <a:cs typeface="Pretendard" pitchFamily="34" charset="-120"/>
+              </a:rPr>
+              <a:t>SECTION 02</a:t>
+            </a:r>
+            <a:endParaRPr lang="en-US" sz="850" dirty="0"/>
           </a:p>
         </p:txBody>
       </p:sp>
@@ -5347,8 +6706,8 @@
         </p:nvSpPr>
         <p:spPr>
           <a:xfrm>
-            <a:off x="640080" y="566928"/>
-            <a:ext cx="10911535" cy="237744"/>
+            <a:off x="640080" y="274320"/>
+            <a:ext cx="3657600" cy="219456"/>
           </a:xfrm>
           <a:prstGeom prst="rect">
             <a:avLst/>
@@ -5364,17 +6723,17 @@
               <a:buNone/>
             </a:pPr>
             <a:r>
-              <a:rPr lang="en-US" sz="1100" b="1" spc="140" kern="0" dirty="0">
-                <a:solidFill>
-                  <a:srgbClr val="FF4A1C"/>
-                </a:solidFill>
-                <a:latin typeface="Pretendard" pitchFamily="34" charset="0"/>
-                <a:ea typeface="Pretendard" pitchFamily="34" charset="-122"/>
-                <a:cs typeface="Pretendard" pitchFamily="34" charset="-120"/>
-              </a:rPr>
-              <a:t>REVIEW</a:t>
-            </a:r>
-            <a:endParaRPr lang="en-US" sz="1100" dirty="0"/>
+              <a:rPr lang="en-US" sz="900" spc="120" kern="0" dirty="0">
+                <a:solidFill>
+                  <a:srgbClr val="8A8A8A"/>
+                </a:solidFill>
+                <a:latin typeface="Pretendard" pitchFamily="34" charset="0"/>
+                <a:ea typeface="Pretendard" pitchFamily="34" charset="-122"/>
+                <a:cs typeface="Pretendard" pitchFamily="34" charset="-120"/>
+              </a:rPr>
+              <a:t>포트폴리오제작</a:t>
+            </a:r>
+            <a:endParaRPr lang="en-US" sz="900" dirty="0"/>
           </a:p>
         </p:txBody>
       </p:sp>
@@ -5386,34 +6745,34 @@
         </p:nvSpPr>
         <p:spPr>
           <a:xfrm>
-            <a:off x="640080" y="859536"/>
-            <a:ext cx="10911535" cy="512064"/>
-          </a:xfrm>
-          <a:prstGeom prst="rect">
-            <a:avLst/>
-          </a:prstGeom>
-          <a:noFill/>
-          <a:ln/>
-        </p:spPr>
-        <p:txBody>
-          <a:bodyPr wrap="square" lIns="0" tIns="0" rIns="0" bIns="0" rtlCol="0" anchor="ctr"/>
-          <a:lstStyle/>
-          <a:p>
-            <a:pPr indent="0" marL="0">
-              <a:buNone/>
-            </a:pPr>
-            <a:r>
-              <a:rPr lang="en-US" sz="2800" b="1" dirty="0">
-                <a:solidFill>
-                  <a:srgbClr val="14161B"/>
-                </a:solidFill>
-                <a:latin typeface="Pretendard" pitchFamily="34" charset="0"/>
-                <a:ea typeface="Pretendard" pitchFamily="34" charset="-122"/>
-                <a:cs typeface="Pretendard" pitchFamily="34" charset="-120"/>
-              </a:rPr>
-              <a:t>자기평가 세 가지 질문</a:t>
-            </a:r>
-            <a:endParaRPr lang="en-US" sz="2800" dirty="0"/>
+            <a:off x="4480560" y="274320"/>
+            <a:ext cx="4572000" cy="219456"/>
+          </a:xfrm>
+          <a:prstGeom prst="rect">
+            <a:avLst/>
+          </a:prstGeom>
+          <a:noFill/>
+          <a:ln/>
+        </p:spPr>
+        <p:txBody>
+          <a:bodyPr wrap="square" lIns="0" tIns="0" rIns="0" bIns="0" rtlCol="0" anchor="ctr"/>
+          <a:lstStyle/>
+          <a:p>
+            <a:pPr algn="ctr" indent="0" marL="0">
+              <a:buNone/>
+            </a:pPr>
+            <a:r>
+              <a:rPr lang="en-US" sz="900" spc="120" kern="0" dirty="0">
+                <a:solidFill>
+                  <a:srgbClr val="8A8A8A"/>
+                </a:solidFill>
+                <a:latin typeface="Pretendard" pitchFamily="34" charset="0"/>
+                <a:ea typeface="Pretendard" pitchFamily="34" charset="-122"/>
+                <a:cs typeface="Pretendard" pitchFamily="34" charset="-120"/>
+              </a:rPr>
+              <a:t>PHASE 3 완성과 발표</a:t>
+            </a:r>
+            <a:endParaRPr lang="en-US" sz="900" dirty="0"/>
           </a:p>
         </p:txBody>
       </p:sp>
@@ -5425,34 +6784,34 @@
         </p:nvSpPr>
         <p:spPr>
           <a:xfrm>
-            <a:off x="640080" y="1371600"/>
-            <a:ext cx="10911535" cy="237744"/>
-          </a:xfrm>
-          <a:prstGeom prst="rect">
-            <a:avLst/>
-          </a:prstGeom>
-          <a:noFill/>
-          <a:ln/>
-        </p:spPr>
-        <p:txBody>
-          <a:bodyPr wrap="square" lIns="0" tIns="0" rIns="0" bIns="0" rtlCol="0" anchor="ctr"/>
-          <a:lstStyle/>
-          <a:p>
-            <a:pPr indent="0" marL="0">
-              <a:buNone/>
-            </a:pPr>
-            <a:r>
-              <a:rPr lang="en-US" sz="1200" dirty="0">
-                <a:solidFill>
-                  <a:srgbClr val="6B7280"/>
-                </a:solidFill>
-                <a:latin typeface="Pretendard" pitchFamily="34" charset="0"/>
-                <a:ea typeface="Pretendard" pitchFamily="34" charset="-122"/>
-                <a:cs typeface="Pretendard" pitchFamily="34" charset="-120"/>
-              </a:rPr>
-              <a:t>성적을 위한 것이 아니라 다음을 위한 것입니다.</a:t>
-            </a:r>
-            <a:endParaRPr lang="en-US" sz="1200" dirty="0"/>
+            <a:off x="8808415" y="274320"/>
+            <a:ext cx="2743200" cy="219456"/>
+          </a:xfrm>
+          <a:prstGeom prst="rect">
+            <a:avLst/>
+          </a:prstGeom>
+          <a:noFill/>
+          <a:ln/>
+        </p:spPr>
+        <p:txBody>
+          <a:bodyPr wrap="square" lIns="0" tIns="0" rIns="0" bIns="0" rtlCol="0" anchor="ctr"/>
+          <a:lstStyle/>
+          <a:p>
+            <a:pPr algn="r" indent="0" marL="0">
+              <a:buNone/>
+            </a:pPr>
+            <a:r>
+              <a:rPr lang="en-US" sz="900" spc="200" kern="0" dirty="0">
+                <a:solidFill>
+                  <a:srgbClr val="8A8A8A"/>
+                </a:solidFill>
+                <a:latin typeface="Pretendard" pitchFamily="34" charset="0"/>
+                <a:ea typeface="Pretendard" pitchFamily="34" charset="-122"/>
+                <a:cs typeface="Pretendard" pitchFamily="34" charset="-120"/>
+              </a:rPr>
+              <a:t>WEEK 15</a:t>
+            </a:r>
+            <a:endParaRPr lang="en-US" sz="900" dirty="0"/>
           </a:p>
         </p:txBody>
       </p:sp>
@@ -5464,20 +6823,18 @@
         </p:nvSpPr>
         <p:spPr>
           <a:xfrm>
-            <a:off x="640080" y="1737360"/>
-            <a:ext cx="3393338" cy="3035808"/>
-          </a:xfrm>
-          <a:prstGeom prst="roundRect">
-            <a:avLst>
-              <a:gd name="adj" fmla="val 2410"/>
-            </a:avLst>
+            <a:off x="640080" y="548640"/>
+            <a:ext cx="10911535" cy="7315"/>
+          </a:xfrm>
+          <a:prstGeom prst="rect">
+            <a:avLst/>
           </a:prstGeom>
           <a:solidFill>
-            <a:srgbClr val="F4F5F7"/>
+            <a:srgbClr val="DCDCDC"/>
           </a:solidFill>
           <a:ln w="12700">
             <a:solidFill>
-              <a:srgbClr val="E4E6EB"/>
+              <a:srgbClr val="DCDCDC"/>
             </a:solidFill>
             <a:prstDash val="solid"/>
           </a:ln>
@@ -5485,26 +6842,141 @@
       </p:sp>
       <p:sp>
         <p:nvSpPr>
-          <p:cNvPr id="6" name="Shape 4"/>
-          <p:cNvSpPr/>
-          <p:nvPr/>
-        </p:nvSpPr>
-        <p:spPr>
-          <a:xfrm>
-            <a:off x="1024128" y="2011680"/>
-            <a:ext cx="365760" cy="365760"/>
-          </a:xfrm>
-          <a:prstGeom prst="roundRect">
-            <a:avLst>
-              <a:gd name="adj" fmla="val 15000"/>
-            </a:avLst>
+          <p:cNvPr id="6" name="Text 4"/>
+          <p:cNvSpPr/>
+          <p:nvPr/>
+        </p:nvSpPr>
+        <p:spPr>
+          <a:xfrm>
+            <a:off x="640080" y="640080"/>
+            <a:ext cx="10911535" cy="219456"/>
+          </a:xfrm>
+          <a:prstGeom prst="rect">
+            <a:avLst/>
+          </a:prstGeom>
+          <a:noFill/>
+          <a:ln/>
+        </p:spPr>
+        <p:txBody>
+          <a:bodyPr wrap="square" lIns="0" tIns="0" rIns="0" bIns="0" rtlCol="0" anchor="ctr"/>
+          <a:lstStyle/>
+          <a:p>
+            <a:pPr indent="0" marL="0">
+              <a:buNone/>
+            </a:pPr>
+            <a:r>
+              <a:rPr lang="en-US" sz="950" spc="260" kern="0" dirty="0">
+                <a:solidFill>
+                  <a:srgbClr val="8A8A8A"/>
+                </a:solidFill>
+                <a:latin typeface="Pretendard" pitchFamily="34" charset="0"/>
+                <a:ea typeface="Pretendard" pitchFamily="34" charset="-122"/>
+                <a:cs typeface="Pretendard" pitchFamily="34" charset="-120"/>
+              </a:rPr>
+              <a:t>REVIEW</a:t>
+            </a:r>
+            <a:endParaRPr lang="en-US" sz="950" dirty="0"/>
+          </a:p>
+        </p:txBody>
+      </p:sp>
+      <p:sp>
+        <p:nvSpPr>
+          <p:cNvPr id="7" name="Text 5"/>
+          <p:cNvSpPr/>
+          <p:nvPr/>
+        </p:nvSpPr>
+        <p:spPr>
+          <a:xfrm>
+            <a:off x="640080" y="859536"/>
+            <a:ext cx="10911535" cy="475488"/>
+          </a:xfrm>
+          <a:prstGeom prst="rect">
+            <a:avLst/>
+          </a:prstGeom>
+          <a:noFill/>
+          <a:ln/>
+        </p:spPr>
+        <p:txBody>
+          <a:bodyPr wrap="square" lIns="0" tIns="0" rIns="0" bIns="0" rtlCol="0" anchor="ctr"/>
+          <a:lstStyle/>
+          <a:p>
+            <a:pPr indent="0" marL="0">
+              <a:buNone/>
+            </a:pPr>
+            <a:r>
+              <a:rPr lang="en-US" sz="3000" dirty="0">
+                <a:solidFill>
+                  <a:srgbClr val="111111"/>
+                </a:solidFill>
+                <a:latin typeface="Pretendard Black" pitchFamily="34" charset="0"/>
+                <a:ea typeface="Pretendard Black" pitchFamily="34" charset="-122"/>
+                <a:cs typeface="Pretendard Black" pitchFamily="34" charset="-120"/>
+              </a:rPr>
+              <a:t>자기평가 세 가지 질문</a:t>
+            </a:r>
+            <a:endParaRPr lang="en-US" sz="3000" dirty="0"/>
+          </a:p>
+        </p:txBody>
+      </p:sp>
+      <p:sp>
+        <p:nvSpPr>
+          <p:cNvPr id="8" name="Text 6"/>
+          <p:cNvSpPr/>
+          <p:nvPr/>
+        </p:nvSpPr>
+        <p:spPr>
+          <a:xfrm>
+            <a:off x="640080" y="1371600"/>
+            <a:ext cx="10911535" cy="219456"/>
+          </a:xfrm>
+          <a:prstGeom prst="rect">
+            <a:avLst/>
+          </a:prstGeom>
+          <a:noFill/>
+          <a:ln/>
+        </p:spPr>
+        <p:txBody>
+          <a:bodyPr wrap="square" lIns="0" tIns="0" rIns="0" bIns="0" rtlCol="0" anchor="ctr"/>
+          <a:lstStyle/>
+          <a:p>
+            <a:pPr indent="0" marL="0">
+              <a:buNone/>
+            </a:pPr>
+            <a:r>
+              <a:rPr lang="en-US" sz="1150" dirty="0">
+                <a:solidFill>
+                  <a:srgbClr val="6E6E6E"/>
+                </a:solidFill>
+                <a:latin typeface="Pretendard" pitchFamily="34" charset="0"/>
+                <a:ea typeface="Pretendard" pitchFamily="34" charset="-122"/>
+                <a:cs typeface="Pretendard" pitchFamily="34" charset="-120"/>
+              </a:rPr>
+              <a:t>성적을 위한 것이 아니라 다음을 위한 것입니다.</a:t>
+            </a:r>
+            <a:endParaRPr lang="en-US" sz="1150" dirty="0"/>
+          </a:p>
+        </p:txBody>
+      </p:sp>
+      <p:sp>
+        <p:nvSpPr>
+          <p:cNvPr id="9" name="Shape 7"/>
+          <p:cNvSpPr/>
+          <p:nvPr/>
+        </p:nvSpPr>
+        <p:spPr>
+          <a:xfrm>
+            <a:off x="640080" y="1737360"/>
+            <a:ext cx="3393338" cy="3035808"/>
+          </a:xfrm>
+          <a:prstGeom prst="rect">
+            <a:avLst/>
           </a:prstGeom>
           <a:solidFill>
-            <a:srgbClr val="14161B"/>
+            <a:srgbClr val="FFFFFF"/>
           </a:solidFill>
-          <a:ln w="6350">
+          <a:ln w="12700">
             <a:solidFill>
-              <a:srgbClr val="14161B"/>
+              <a:srgbClr val="DCDCDC"/>
             </a:solidFill>
             <a:prstDash val="solid"/>
           </a:ln>
@@ -5512,7 +6984,7 @@
       </p:sp>
       <p:sp>
         <p:nvSpPr>
-          <p:cNvPr id="7" name="Text 5"/>
+          <p:cNvPr id="10" name="Shape 8"/>
           <p:cNvSpPr/>
           <p:nvPr/>
         </p:nvSpPr>
@@ -5521,6 +6993,31 @@
             <a:off x="1024128" y="2011680"/>
             <a:ext cx="365760" cy="365760"/>
           </a:xfrm>
+          <a:prstGeom prst="ellipse">
+            <a:avLst/>
+          </a:prstGeom>
+          <a:solidFill>
+            <a:srgbClr val="FFFFFF"/>
+          </a:solidFill>
+          <a:ln w="12700">
+            <a:solidFill>
+              <a:srgbClr val="111111"/>
+            </a:solidFill>
+            <a:prstDash val="solid"/>
+          </a:ln>
+        </p:spPr>
+      </p:sp>
+      <p:sp>
+        <p:nvSpPr>
+          <p:cNvPr id="11" name="Text 9"/>
+          <p:cNvSpPr/>
+          <p:nvPr/>
+        </p:nvSpPr>
+        <p:spPr>
+          <a:xfrm>
+            <a:off x="1024128" y="2011680"/>
+            <a:ext cx="365760" cy="365760"/>
+          </a:xfrm>
           <a:prstGeom prst="rect">
             <a:avLst/>
           </a:prstGeom>
@@ -5535,9 +7032,9 @@
               <a:buNone/>
             </a:pPr>
             <a:r>
-              <a:rPr lang="en-US" sz="1200" b="1" dirty="0">
-                <a:solidFill>
-                  <a:srgbClr val="FFFFFF"/>
+              <a:rPr lang="en-US" sz="1150" b="1" dirty="0">
+                <a:solidFill>
+                  <a:srgbClr val="111111"/>
                 </a:solidFill>
                 <a:latin typeface="Pretendard" pitchFamily="34" charset="0"/>
                 <a:ea typeface="Pretendard" pitchFamily="34" charset="-122"/>
@@ -5545,13 +7042,13 @@
               </a:rPr>
               <a:t>01</a:t>
             </a:r>
-            <a:endParaRPr lang="en-US" sz="1200" dirty="0"/>
-          </a:p>
-        </p:txBody>
-      </p:sp>
-      <p:sp>
-        <p:nvSpPr>
-          <p:cNvPr id="8" name="Text 6"/>
+            <a:endParaRPr lang="en-US" sz="1150" dirty="0"/>
+          </a:p>
+        </p:txBody>
+      </p:sp>
+      <p:sp>
+        <p:nvSpPr>
+          <p:cNvPr id="12" name="Text 10"/>
           <p:cNvSpPr/>
           <p:nvPr/>
         </p:nvSpPr>
@@ -5577,13 +7074,13 @@
               <a:buNone/>
             </a:pPr>
             <a:r>
-              <a:rPr lang="en-US" sz="1700" b="1" dirty="0">
-                <a:solidFill>
-                  <a:srgbClr val="14161B"/>
-                </a:solidFill>
-                <a:latin typeface="Pretendard" pitchFamily="34" charset="0"/>
-                <a:ea typeface="Pretendard" pitchFamily="34" charset="-122"/>
-                <a:cs typeface="Pretendard" pitchFamily="34" charset="-120"/>
+              <a:rPr lang="en-US" sz="1700" dirty="0">
+                <a:solidFill>
+                  <a:srgbClr val="111111"/>
+                </a:solidFill>
+                <a:latin typeface="Pretendard Black" pitchFamily="34" charset="0"/>
+                <a:ea typeface="Pretendard Black" pitchFamily="34" charset="-122"/>
+                <a:cs typeface="Pretendard Black" pitchFamily="34" charset="-120"/>
               </a:rPr>
               <a:t>방향 문장은 지켜졌나</a:t>
             </a:r>
@@ -5593,7 +7090,7 @@
       </p:sp>
       <p:sp>
         <p:nvSpPr>
-          <p:cNvPr id="9" name="Text 7"/>
+          <p:cNvPr id="13" name="Text 11"/>
           <p:cNvSpPr/>
           <p:nvPr/>
         </p:nvSpPr>
@@ -5621,7 +7118,7 @@
             <a:r>
               <a:rPr lang="en-US" sz="1150" dirty="0">
                 <a:solidFill>
-                  <a:srgbClr val="6B7280"/>
+                  <a:srgbClr val="6E6E6E"/>
                 </a:solidFill>
                 <a:latin typeface="Pretendard" pitchFamily="34" charset="0"/>
                 <a:ea typeface="Pretendard" pitchFamily="34" charset="-122"/>
@@ -5635,7 +7132,7 @@
       </p:sp>
       <p:sp>
         <p:nvSpPr>
-          <p:cNvPr id="10" name="Shape 8"/>
+          <p:cNvPr id="14" name="Shape 12"/>
           <p:cNvSpPr/>
           <p:nvPr/>
         </p:nvSpPr>
@@ -5644,17 +7141,15 @@
             <a:off x="4399178" y="1737360"/>
             <a:ext cx="3393338" cy="3035808"/>
           </a:xfrm>
-          <a:prstGeom prst="roundRect">
-            <a:avLst>
-              <a:gd name="adj" fmla="val 2410"/>
-            </a:avLst>
+          <a:prstGeom prst="rect">
+            <a:avLst/>
           </a:prstGeom>
           <a:solidFill>
-            <a:srgbClr val="F4F5F7"/>
+            <a:srgbClr val="FFFFFF"/>
           </a:solidFill>
           <a:ln w="12700">
             <a:solidFill>
-              <a:srgbClr val="E4E6EB"/>
+              <a:srgbClr val="DCDCDC"/>
             </a:solidFill>
             <a:prstDash val="solid"/>
           </a:ln>
@@ -5662,7 +7157,7 @@
       </p:sp>
       <p:sp>
         <p:nvSpPr>
-          <p:cNvPr id="11" name="Shape 9"/>
+          <p:cNvPr id="15" name="Shape 13"/>
           <p:cNvSpPr/>
           <p:nvPr/>
         </p:nvSpPr>
@@ -5671,17 +7166,15 @@
             <a:off x="4783226" y="2011680"/>
             <a:ext cx="365760" cy="365760"/>
           </a:xfrm>
-          <a:prstGeom prst="roundRect">
-            <a:avLst>
-              <a:gd name="adj" fmla="val 15000"/>
-            </a:avLst>
+          <a:prstGeom prst="ellipse">
+            <a:avLst/>
           </a:prstGeom>
           <a:solidFill>
-            <a:srgbClr val="14161B"/>
+            <a:srgbClr val="FFFFFF"/>
           </a:solidFill>
-          <a:ln w="6350">
+          <a:ln w="12700">
             <a:solidFill>
-              <a:srgbClr val="14161B"/>
+              <a:srgbClr val="111111"/>
             </a:solidFill>
             <a:prstDash val="solid"/>
           </a:ln>
@@ -5689,7 +7182,7 @@
       </p:sp>
       <p:sp>
         <p:nvSpPr>
-          <p:cNvPr id="12" name="Text 10"/>
+          <p:cNvPr id="16" name="Text 14"/>
           <p:cNvSpPr/>
           <p:nvPr/>
         </p:nvSpPr>
@@ -5712,9 +7205,9 @@
               <a:buNone/>
             </a:pPr>
             <a:r>
-              <a:rPr lang="en-US" sz="1200" b="1" dirty="0">
-                <a:solidFill>
-                  <a:srgbClr val="FFFFFF"/>
+              <a:rPr lang="en-US" sz="1150" b="1" dirty="0">
+                <a:solidFill>
+                  <a:srgbClr val="111111"/>
                 </a:solidFill>
                 <a:latin typeface="Pretendard" pitchFamily="34" charset="0"/>
                 <a:ea typeface="Pretendard" pitchFamily="34" charset="-122"/>
@@ -5722,13 +7215,13 @@
               </a:rPr>
               <a:t>02</a:t>
             </a:r>
-            <a:endParaRPr lang="en-US" sz="1200" dirty="0"/>
-          </a:p>
-        </p:txBody>
-      </p:sp>
-      <p:sp>
-        <p:nvSpPr>
-          <p:cNvPr id="13" name="Text 11"/>
+            <a:endParaRPr lang="en-US" sz="1150" dirty="0"/>
+          </a:p>
+        </p:txBody>
+      </p:sp>
+      <p:sp>
+        <p:nvSpPr>
+          <p:cNvPr id="17" name="Text 15"/>
           <p:cNvSpPr/>
           <p:nvPr/>
         </p:nvSpPr>
@@ -5754,13 +7247,13 @@
               <a:buNone/>
             </a:pPr>
             <a:r>
-              <a:rPr lang="en-US" sz="1700" b="1" dirty="0">
-                <a:solidFill>
-                  <a:srgbClr val="14161B"/>
-                </a:solidFill>
-                <a:latin typeface="Pretendard" pitchFamily="34" charset="0"/>
-                <a:ea typeface="Pretendard" pitchFamily="34" charset="-122"/>
-                <a:cs typeface="Pretendard" pitchFamily="34" charset="-120"/>
+              <a:rPr lang="en-US" sz="1700" dirty="0">
+                <a:solidFill>
+                  <a:srgbClr val="111111"/>
+                </a:solidFill>
+                <a:latin typeface="Pretendard Black" pitchFamily="34" charset="0"/>
+                <a:ea typeface="Pretendard Black" pitchFamily="34" charset="-122"/>
+                <a:cs typeface="Pretendard Black" pitchFamily="34" charset="-120"/>
               </a:rPr>
               <a:t>무엇이 가장 크게 달라졌나</a:t>
             </a:r>
@@ -5770,7 +7263,7 @@
       </p:sp>
       <p:sp>
         <p:nvSpPr>
-          <p:cNvPr id="14" name="Text 12"/>
+          <p:cNvPr id="18" name="Text 16"/>
           <p:cNvSpPr/>
           <p:nvPr/>
         </p:nvSpPr>
@@ -5798,7 +7291,7 @@
             <a:r>
               <a:rPr lang="en-US" sz="1150" dirty="0">
                 <a:solidFill>
-                  <a:srgbClr val="6B7280"/>
+                  <a:srgbClr val="6E6E6E"/>
                 </a:solidFill>
                 <a:latin typeface="Pretendard" pitchFamily="34" charset="0"/>
                 <a:ea typeface="Pretendard" pitchFamily="34" charset="-122"/>
@@ -5812,7 +7305,7 @@
       </p:sp>
       <p:sp>
         <p:nvSpPr>
-          <p:cNvPr id="15" name="Shape 13"/>
+          <p:cNvPr id="19" name="Shape 17"/>
           <p:cNvSpPr/>
           <p:nvPr/>
         </p:nvSpPr>
@@ -5821,17 +7314,15 @@
             <a:off x="8158277" y="1737360"/>
             <a:ext cx="3393338" cy="3035808"/>
           </a:xfrm>
-          <a:prstGeom prst="roundRect">
-            <a:avLst>
-              <a:gd name="adj" fmla="val 2410"/>
-            </a:avLst>
+          <a:prstGeom prst="rect">
+            <a:avLst/>
           </a:prstGeom>
           <a:solidFill>
-            <a:srgbClr val="14161B"/>
+            <a:srgbClr val="111111"/>
           </a:solidFill>
           <a:ln w="12700">
             <a:solidFill>
-              <a:srgbClr val="14161B"/>
+              <a:srgbClr val="111111"/>
             </a:solidFill>
             <a:prstDash val="solid"/>
           </a:ln>
@@ -5839,7 +7330,7 @@
       </p:sp>
       <p:sp>
         <p:nvSpPr>
-          <p:cNvPr id="16" name="Shape 14"/>
+          <p:cNvPr id="20" name="Shape 18"/>
           <p:cNvSpPr/>
           <p:nvPr/>
         </p:nvSpPr>
@@ -5848,17 +7339,15 @@
             <a:off x="8542325" y="2011680"/>
             <a:ext cx="365760" cy="365760"/>
           </a:xfrm>
-          <a:prstGeom prst="roundRect">
-            <a:avLst>
-              <a:gd name="adj" fmla="val 15000"/>
-            </a:avLst>
+          <a:prstGeom prst="ellipse">
+            <a:avLst/>
           </a:prstGeom>
           <a:solidFill>
-            <a:srgbClr val="FF4A1C"/>
+            <a:srgbClr val="111111"/>
           </a:solidFill>
-          <a:ln w="6350">
+          <a:ln w="12700">
             <a:solidFill>
-              <a:srgbClr val="FF4A1C"/>
+              <a:srgbClr val="FFFFFF"/>
             </a:solidFill>
             <a:prstDash val="solid"/>
           </a:ln>
@@ -5866,7 +7355,7 @@
       </p:sp>
       <p:sp>
         <p:nvSpPr>
-          <p:cNvPr id="17" name="Text 15"/>
+          <p:cNvPr id="21" name="Text 19"/>
           <p:cNvSpPr/>
           <p:nvPr/>
         </p:nvSpPr>
@@ -5889,7 +7378,7 @@
               <a:buNone/>
             </a:pPr>
             <a:r>
-              <a:rPr lang="en-US" sz="1200" b="1" dirty="0">
+              <a:rPr lang="en-US" sz="1150" b="1" dirty="0">
                 <a:solidFill>
                   <a:srgbClr val="FFFFFF"/>
                 </a:solidFill>
@@ -5899,13 +7388,13 @@
               </a:rPr>
               <a:t>03</a:t>
             </a:r>
-            <a:endParaRPr lang="en-US" sz="1200" dirty="0"/>
-          </a:p>
-        </p:txBody>
-      </p:sp>
-      <p:sp>
-        <p:nvSpPr>
-          <p:cNvPr id="18" name="Text 16"/>
+            <a:endParaRPr lang="en-US" sz="1150" dirty="0"/>
+          </a:p>
+        </p:txBody>
+      </p:sp>
+      <p:sp>
+        <p:nvSpPr>
+          <p:cNvPr id="22" name="Text 20"/>
           <p:cNvSpPr/>
           <p:nvPr/>
         </p:nvSpPr>
@@ -5931,13 +7420,13 @@
               <a:buNone/>
             </a:pPr>
             <a:r>
-              <a:rPr lang="en-US" sz="1700" b="1" dirty="0">
+              <a:rPr lang="en-US" sz="1700" dirty="0">
                 <a:solidFill>
                   <a:srgbClr val="FFFFFF"/>
                 </a:solidFill>
-                <a:latin typeface="Pretendard" pitchFamily="34" charset="0"/>
-                <a:ea typeface="Pretendard" pitchFamily="34" charset="-122"/>
-                <a:cs typeface="Pretendard" pitchFamily="34" charset="-120"/>
+                <a:latin typeface="Pretendard Black" pitchFamily="34" charset="0"/>
+                <a:ea typeface="Pretendard Black" pitchFamily="34" charset="-122"/>
+                <a:cs typeface="Pretendard Black" pitchFamily="34" charset="-120"/>
               </a:rPr>
               <a:t>무엇이 아직 비어 있나</a:t>
             </a:r>
@@ -5947,7 +7436,7 @@
       </p:sp>
       <p:sp>
         <p:nvSpPr>
-          <p:cNvPr id="19" name="Text 17"/>
+          <p:cNvPr id="23" name="Text 21"/>
           <p:cNvSpPr/>
           <p:nvPr/>
         </p:nvSpPr>
@@ -5975,7 +7464,7 @@
             <a:r>
               <a:rPr lang="en-US" sz="1150" dirty="0">
                 <a:solidFill>
-                  <a:srgbClr val="AEB4BF"/>
+                  <a:srgbClr val="B8B8B8"/>
                 </a:solidFill>
                 <a:latin typeface="Pretendard" pitchFamily="34" charset="0"/>
                 <a:ea typeface="Pretendard" pitchFamily="34" charset="-122"/>
@@ -5989,13 +7478,38 @@
       </p:sp>
       <p:sp>
         <p:nvSpPr>
-          <p:cNvPr id="20" name="Text 18"/>
-          <p:cNvSpPr/>
-          <p:nvPr/>
-        </p:nvSpPr>
-        <p:spPr>
-          <a:xfrm>
-            <a:off x="640080" y="5138928"/>
+          <p:cNvPr id="24" name="Shape 22"/>
+          <p:cNvSpPr/>
+          <p:nvPr/>
+        </p:nvSpPr>
+        <p:spPr>
+          <a:xfrm>
+            <a:off x="640080" y="5084064"/>
+            <a:ext cx="10911535" cy="7315"/>
+          </a:xfrm>
+          <a:prstGeom prst="rect">
+            <a:avLst/>
+          </a:prstGeom>
+          <a:solidFill>
+            <a:srgbClr val="111111"/>
+          </a:solidFill>
+          <a:ln w="12700">
+            <a:solidFill>
+              <a:srgbClr val="111111"/>
+            </a:solidFill>
+            <a:prstDash val="solid"/>
+          </a:ln>
+        </p:spPr>
+      </p:sp>
+      <p:sp>
+        <p:nvSpPr>
+          <p:cNvPr id="25" name="Text 23"/>
+          <p:cNvSpPr/>
+          <p:nvPr/>
+        </p:nvSpPr>
+        <p:spPr>
+          <a:xfrm>
+            <a:off x="640080" y="5193792"/>
             <a:ext cx="10911535" cy="438912"/>
           </a:xfrm>
           <a:prstGeom prst="rect">
@@ -6017,7 +7531,7 @@
             <a:r>
               <a:rPr lang="en-US" sz="1300" b="1" dirty="0">
                 <a:solidFill>
-                  <a:srgbClr val="FF4A1C"/>
+                  <a:srgbClr val="111111"/>
                 </a:solidFill>
                 <a:latin typeface="Pretendard" pitchFamily="34" charset="0"/>
                 <a:ea typeface="Pretendard" pitchFamily="34" charset="-122"/>
@@ -6031,14 +7545,39 @@
       </p:sp>
       <p:sp>
         <p:nvSpPr>
-          <p:cNvPr id="21" name="Text 19"/>
-          <p:cNvSpPr/>
-          <p:nvPr/>
-        </p:nvSpPr>
-        <p:spPr>
-          <a:xfrm>
-            <a:off x="640080" y="6345936"/>
-            <a:ext cx="7772400" cy="256032"/>
+          <p:cNvPr id="26" name="Shape 24"/>
+          <p:cNvSpPr/>
+          <p:nvPr/>
+        </p:nvSpPr>
+        <p:spPr>
+          <a:xfrm>
+            <a:off x="640080" y="6291072"/>
+            <a:ext cx="10911535" cy="7315"/>
+          </a:xfrm>
+          <a:prstGeom prst="rect">
+            <a:avLst/>
+          </a:prstGeom>
+          <a:solidFill>
+            <a:srgbClr val="DCDCDC"/>
+          </a:solidFill>
+          <a:ln w="12700">
+            <a:solidFill>
+              <a:srgbClr val="DCDCDC"/>
+            </a:solidFill>
+            <a:prstDash val="solid"/>
+          </a:ln>
+        </p:spPr>
+      </p:sp>
+      <p:sp>
+        <p:nvSpPr>
+          <p:cNvPr id="27" name="Text 25"/>
+          <p:cNvSpPr/>
+          <p:nvPr/>
+        </p:nvSpPr>
+        <p:spPr>
+          <a:xfrm>
+            <a:off x="640080" y="6382512"/>
+            <a:ext cx="7772400" cy="237744"/>
           </a:xfrm>
           <a:prstGeom prst="rect">
             <a:avLst/>
@@ -6054,9 +7593,9 @@
               <a:buNone/>
             </a:pPr>
             <a:r>
-              <a:rPr lang="en-US" sz="900" dirty="0">
-                <a:solidFill>
-                  <a:srgbClr val="9AA0AA"/>
+              <a:rPr lang="en-US" sz="850" spc="40" kern="0" dirty="0">
+                <a:solidFill>
+                  <a:srgbClr val="9B9B9B"/>
                 </a:solidFill>
                 <a:latin typeface="Pretendard" pitchFamily="34" charset="0"/>
                 <a:ea typeface="Pretendard" pitchFamily="34" charset="-122"/>
@@ -6064,20 +7603,20 @@
               </a:rPr>
               <a:t>포트폴리오제작 · 15주차 기말 발표 및 종합 평가</a:t>
             </a:r>
-            <a:endParaRPr lang="en-US" sz="900" dirty="0"/>
-          </a:p>
-        </p:txBody>
-      </p:sp>
-      <p:sp>
-        <p:nvSpPr>
-          <p:cNvPr id="22" name="Text 20"/>
-          <p:cNvSpPr/>
-          <p:nvPr/>
-        </p:nvSpPr>
-        <p:spPr>
-          <a:xfrm>
-            <a:off x="10454335" y="6345936"/>
-            <a:ext cx="1097280" cy="256032"/>
+            <a:endParaRPr lang="en-US" sz="850" dirty="0"/>
+          </a:p>
+        </p:txBody>
+      </p:sp>
+      <p:sp>
+        <p:nvSpPr>
+          <p:cNvPr id="28" name="Text 26"/>
+          <p:cNvSpPr/>
+          <p:nvPr/>
+        </p:nvSpPr>
+        <p:spPr>
+          <a:xfrm>
+            <a:off x="10271455" y="6382512"/>
+            <a:ext cx="1280160" cy="237744"/>
           </a:xfrm>
           <a:prstGeom prst="rect">
             <a:avLst/>
@@ -6093,17 +7632,17 @@
               <a:buNone/>
             </a:pPr>
             <a:r>
-              <a:rPr lang="en-US" sz="900" dirty="0">
-                <a:solidFill>
-                  <a:srgbClr val="9AA0AA"/>
-                </a:solidFill>
-                <a:latin typeface="Pretendard" pitchFamily="34" charset="0"/>
-                <a:ea typeface="Pretendard" pitchFamily="34" charset="-122"/>
-                <a:cs typeface="Pretendard" pitchFamily="34" charset="-120"/>
-              </a:rPr>
-              <a:t>04</a:t>
-            </a:r>
-            <a:endParaRPr lang="en-US" sz="900" dirty="0"/>
+              <a:rPr lang="en-US" sz="850" spc="140" kern="0" dirty="0">
+                <a:solidFill>
+                  <a:srgbClr val="9B9B9B"/>
+                </a:solidFill>
+                <a:latin typeface="Pretendard" pitchFamily="34" charset="0"/>
+                <a:ea typeface="Pretendard" pitchFamily="34" charset="-122"/>
+                <a:cs typeface="Pretendard" pitchFamily="34" charset="-120"/>
+              </a:rPr>
+              <a:t>P.04</a:t>
+            </a:r>
+            <a:endParaRPr lang="en-US" sz="850" dirty="0"/>
           </a:p>
         </p:txBody>
       </p:sp>
@@ -6147,8 +7686,8 @@
         </p:nvSpPr>
         <p:spPr>
           <a:xfrm>
-            <a:off x="640080" y="566928"/>
-            <a:ext cx="10911535" cy="237744"/>
+            <a:off x="640080" y="274320"/>
+            <a:ext cx="3657600" cy="219456"/>
           </a:xfrm>
           <a:prstGeom prst="rect">
             <a:avLst/>
@@ -6164,17 +7703,17 @@
               <a:buNone/>
             </a:pPr>
             <a:r>
-              <a:rPr lang="en-US" sz="1100" b="1" spc="140" kern="0" dirty="0">
-                <a:solidFill>
-                  <a:srgbClr val="FF4A1C"/>
-                </a:solidFill>
-                <a:latin typeface="Pretendard" pitchFamily="34" charset="0"/>
-                <a:ea typeface="Pretendard" pitchFamily="34" charset="-122"/>
-                <a:cs typeface="Pretendard" pitchFamily="34" charset="-120"/>
-              </a:rPr>
-              <a:t>NEXT</a:t>
-            </a:r>
-            <a:endParaRPr lang="en-US" sz="1100" dirty="0"/>
+              <a:rPr lang="en-US" sz="900" spc="120" kern="0" dirty="0">
+                <a:solidFill>
+                  <a:srgbClr val="8A8A8A"/>
+                </a:solidFill>
+                <a:latin typeface="Pretendard" pitchFamily="34" charset="0"/>
+                <a:ea typeface="Pretendard" pitchFamily="34" charset="-122"/>
+                <a:cs typeface="Pretendard" pitchFamily="34" charset="-120"/>
+              </a:rPr>
+              <a:t>포트폴리오제작</a:t>
+            </a:r>
+            <a:endParaRPr lang="en-US" sz="900" dirty="0"/>
           </a:p>
         </p:txBody>
       </p:sp>
@@ -6186,34 +7725,34 @@
         </p:nvSpPr>
         <p:spPr>
           <a:xfrm>
-            <a:off x="640080" y="859536"/>
-            <a:ext cx="10911535" cy="512064"/>
-          </a:xfrm>
-          <a:prstGeom prst="rect">
-            <a:avLst/>
-          </a:prstGeom>
-          <a:noFill/>
-          <a:ln/>
-        </p:spPr>
-        <p:txBody>
-          <a:bodyPr wrap="square" lIns="0" tIns="0" rIns="0" bIns="0" rtlCol="0" anchor="ctr"/>
-          <a:lstStyle/>
-          <a:p>
-            <a:pPr indent="0" marL="0">
-              <a:buNone/>
-            </a:pPr>
-            <a:r>
-              <a:rPr lang="en-US" sz="2800" b="1" dirty="0">
-                <a:solidFill>
-                  <a:srgbClr val="14161B"/>
-                </a:solidFill>
-                <a:latin typeface="Pretendard" pitchFamily="34" charset="0"/>
-                <a:ea typeface="Pretendard" pitchFamily="34" charset="-122"/>
-                <a:cs typeface="Pretendard" pitchFamily="34" charset="-120"/>
-              </a:rPr>
-              <a:t>차년도 준비 방향</a:t>
-            </a:r>
-            <a:endParaRPr lang="en-US" sz="2800" dirty="0"/>
+            <a:off x="4480560" y="274320"/>
+            <a:ext cx="4572000" cy="219456"/>
+          </a:xfrm>
+          <a:prstGeom prst="rect">
+            <a:avLst/>
+          </a:prstGeom>
+          <a:noFill/>
+          <a:ln/>
+        </p:spPr>
+        <p:txBody>
+          <a:bodyPr wrap="square" lIns="0" tIns="0" rIns="0" bIns="0" rtlCol="0" anchor="ctr"/>
+          <a:lstStyle/>
+          <a:p>
+            <a:pPr algn="ctr" indent="0" marL="0">
+              <a:buNone/>
+            </a:pPr>
+            <a:r>
+              <a:rPr lang="en-US" sz="900" spc="120" kern="0" dirty="0">
+                <a:solidFill>
+                  <a:srgbClr val="8A8A8A"/>
+                </a:solidFill>
+                <a:latin typeface="Pretendard" pitchFamily="34" charset="0"/>
+                <a:ea typeface="Pretendard" pitchFamily="34" charset="-122"/>
+                <a:cs typeface="Pretendard" pitchFamily="34" charset="-120"/>
+              </a:rPr>
+              <a:t>PHASE 3 완성과 발표</a:t>
+            </a:r>
+            <a:endParaRPr lang="en-US" sz="900" dirty="0"/>
           </a:p>
         </p:txBody>
       </p:sp>
@@ -6225,34 +7764,34 @@
         </p:nvSpPr>
         <p:spPr>
           <a:xfrm>
-            <a:off x="640080" y="1371600"/>
-            <a:ext cx="10911535" cy="237744"/>
-          </a:xfrm>
-          <a:prstGeom prst="rect">
-            <a:avLst/>
-          </a:prstGeom>
-          <a:noFill/>
-          <a:ln/>
-        </p:spPr>
-        <p:txBody>
-          <a:bodyPr wrap="square" lIns="0" tIns="0" rIns="0" bIns="0" rtlCol="0" anchor="ctr"/>
-          <a:lstStyle/>
-          <a:p>
-            <a:pPr indent="0" marL="0">
-              <a:buNone/>
-            </a:pPr>
-            <a:r>
-              <a:rPr lang="en-US" sz="1200" dirty="0">
-                <a:solidFill>
-                  <a:srgbClr val="6B7280"/>
-                </a:solidFill>
-                <a:latin typeface="Pretendard" pitchFamily="34" charset="0"/>
-                <a:ea typeface="Pretendard" pitchFamily="34" charset="-122"/>
-                <a:cs typeface="Pretendard" pitchFamily="34" charset="-120"/>
-              </a:rPr>
-              <a:t>포트폴리오는 오늘 완성된 것이 아니라, 갱신되기 시작한 것입니다.</a:t>
-            </a:r>
-            <a:endParaRPr lang="en-US" sz="1200" dirty="0"/>
+            <a:off x="8808415" y="274320"/>
+            <a:ext cx="2743200" cy="219456"/>
+          </a:xfrm>
+          <a:prstGeom prst="rect">
+            <a:avLst/>
+          </a:prstGeom>
+          <a:noFill/>
+          <a:ln/>
+        </p:spPr>
+        <p:txBody>
+          <a:bodyPr wrap="square" lIns="0" tIns="0" rIns="0" bIns="0" rtlCol="0" anchor="ctr"/>
+          <a:lstStyle/>
+          <a:p>
+            <a:pPr algn="r" indent="0" marL="0">
+              <a:buNone/>
+            </a:pPr>
+            <a:r>
+              <a:rPr lang="en-US" sz="900" spc="200" kern="0" dirty="0">
+                <a:solidFill>
+                  <a:srgbClr val="8A8A8A"/>
+                </a:solidFill>
+                <a:latin typeface="Pretendard" pitchFamily="34" charset="0"/>
+                <a:ea typeface="Pretendard" pitchFamily="34" charset="-122"/>
+                <a:cs typeface="Pretendard" pitchFamily="34" charset="-120"/>
+              </a:rPr>
+              <a:t>WEEK 15</a:t>
+            </a:r>
+            <a:endParaRPr lang="en-US" sz="900" dirty="0"/>
           </a:p>
         </p:txBody>
       </p:sp>
@@ -6264,20 +7803,18 @@
         </p:nvSpPr>
         <p:spPr>
           <a:xfrm>
-            <a:off x="640080" y="1810512"/>
-            <a:ext cx="310896" cy="310896"/>
-          </a:xfrm>
-          <a:prstGeom prst="roundRect">
-            <a:avLst>
-              <a:gd name="adj" fmla="val 17647"/>
-            </a:avLst>
+            <a:off x="640080" y="548640"/>
+            <a:ext cx="10911535" cy="7315"/>
+          </a:xfrm>
+          <a:prstGeom prst="rect">
+            <a:avLst/>
           </a:prstGeom>
           <a:solidFill>
-            <a:srgbClr val="14161B"/>
+            <a:srgbClr val="DCDCDC"/>
           </a:solidFill>
-          <a:ln w="6350">
+          <a:ln w="12700">
             <a:solidFill>
-              <a:srgbClr val="14161B"/>
+              <a:srgbClr val="DCDCDC"/>
             </a:solidFill>
             <a:prstDash val="solid"/>
           </a:ln>
@@ -6291,34 +7828,34 @@
         </p:nvSpPr>
         <p:spPr>
           <a:xfrm>
-            <a:off x="640080" y="1810512"/>
-            <a:ext cx="310896" cy="310896"/>
-          </a:xfrm>
-          <a:prstGeom prst="rect">
-            <a:avLst/>
-          </a:prstGeom>
-          <a:noFill/>
-          <a:ln/>
-        </p:spPr>
-        <p:txBody>
-          <a:bodyPr wrap="square" lIns="0" tIns="0" rIns="0" bIns="0" rtlCol="0" anchor="ctr"/>
-          <a:lstStyle/>
-          <a:p>
-            <a:pPr algn="ctr" indent="0" marL="0">
-              <a:buNone/>
-            </a:pPr>
-            <a:r>
-              <a:rPr lang="en-US" sz="1050" b="1" dirty="0">
-                <a:solidFill>
-                  <a:srgbClr val="FFFFFF"/>
-                </a:solidFill>
-                <a:latin typeface="Pretendard" pitchFamily="34" charset="0"/>
-                <a:ea typeface="Pretendard" pitchFamily="34" charset="-122"/>
-                <a:cs typeface="Pretendard" pitchFamily="34" charset="-120"/>
-              </a:rPr>
-              <a:t>1</a:t>
-            </a:r>
-            <a:endParaRPr lang="en-US" sz="1050" dirty="0"/>
+            <a:off x="640080" y="640080"/>
+            <a:ext cx="10911535" cy="219456"/>
+          </a:xfrm>
+          <a:prstGeom prst="rect">
+            <a:avLst/>
+          </a:prstGeom>
+          <a:noFill/>
+          <a:ln/>
+        </p:spPr>
+        <p:txBody>
+          <a:bodyPr wrap="square" lIns="0" tIns="0" rIns="0" bIns="0" rtlCol="0" anchor="ctr"/>
+          <a:lstStyle/>
+          <a:p>
+            <a:pPr indent="0" marL="0">
+              <a:buNone/>
+            </a:pPr>
+            <a:r>
+              <a:rPr lang="en-US" sz="950" spc="260" kern="0" dirty="0">
+                <a:solidFill>
+                  <a:srgbClr val="8A8A8A"/>
+                </a:solidFill>
+                <a:latin typeface="Pretendard" pitchFamily="34" charset="0"/>
+                <a:ea typeface="Pretendard" pitchFamily="34" charset="-122"/>
+                <a:cs typeface="Pretendard" pitchFamily="34" charset="-120"/>
+              </a:rPr>
+              <a:t>NEXT</a:t>
+            </a:r>
+            <a:endParaRPr lang="en-US" sz="950" dirty="0"/>
           </a:p>
         </p:txBody>
       </p:sp>
@@ -6330,8 +7867,8 @@
         </p:nvSpPr>
         <p:spPr>
           <a:xfrm>
-            <a:off x="1188720" y="1719072"/>
-            <a:ext cx="9875520" cy="310896"/>
+            <a:off x="640080" y="859536"/>
+            <a:ext cx="10911535" cy="475488"/>
           </a:xfrm>
           <a:prstGeom prst="rect">
             <a:avLst/>
@@ -6347,17 +7884,17 @@
               <a:buNone/>
             </a:pPr>
             <a:r>
-              <a:rPr lang="en-US" sz="1450" b="1" dirty="0">
-                <a:solidFill>
-                  <a:srgbClr val="14161B"/>
-                </a:solidFill>
-                <a:latin typeface="Pretendard" pitchFamily="34" charset="0"/>
-                <a:ea typeface="Pretendard" pitchFamily="34" charset="-122"/>
-                <a:cs typeface="Pretendard" pitchFamily="34" charset="-120"/>
-              </a:rPr>
-              <a:t>비어 있는 칸을 채운다</a:t>
-            </a:r>
-            <a:endParaRPr lang="en-US" sz="1450" dirty="0"/>
+              <a:rPr lang="en-US" sz="3000" dirty="0">
+                <a:solidFill>
+                  <a:srgbClr val="111111"/>
+                </a:solidFill>
+                <a:latin typeface="Pretendard Black" pitchFamily="34" charset="0"/>
+                <a:ea typeface="Pretendard Black" pitchFamily="34" charset="-122"/>
+                <a:cs typeface="Pretendard Black" pitchFamily="34" charset="-120"/>
+              </a:rPr>
+              <a:t>차년도 준비 방향</a:t>
+            </a:r>
+            <a:endParaRPr lang="en-US" sz="3000" dirty="0"/>
           </a:p>
         </p:txBody>
       </p:sp>
@@ -6369,8 +7906,8 @@
         </p:nvSpPr>
         <p:spPr>
           <a:xfrm>
-            <a:off x="1188720" y="2029968"/>
-            <a:ext cx="9875520" cy="292608"/>
+            <a:off x="640080" y="1371600"/>
+            <a:ext cx="10911535" cy="219456"/>
           </a:xfrm>
           <a:prstGeom prst="rect">
             <a:avLst/>
@@ -6386,17 +7923,17 @@
               <a:buNone/>
             </a:pPr>
             <a:r>
-              <a:rPr lang="en-US" sz="1100" dirty="0">
-                <a:solidFill>
-                  <a:srgbClr val="6B7280"/>
-                </a:solidFill>
-                <a:latin typeface="Pretendard" pitchFamily="34" charset="0"/>
-                <a:ea typeface="Pretendard" pitchFamily="34" charset="-122"/>
-                <a:cs typeface="Pretendard" pitchFamily="34" charset="-120"/>
-              </a:rPr>
-              <a:t>자기평가 03에서 적은 것. 방학 중 개인 작업이나 공모전으로 채울 수 있습니다</a:t>
-            </a:r>
-            <a:endParaRPr lang="en-US" sz="1100" dirty="0"/>
+              <a:rPr lang="en-US" sz="1150" dirty="0">
+                <a:solidFill>
+                  <a:srgbClr val="6E6E6E"/>
+                </a:solidFill>
+                <a:latin typeface="Pretendard" pitchFamily="34" charset="0"/>
+                <a:ea typeface="Pretendard" pitchFamily="34" charset="-122"/>
+                <a:cs typeface="Pretendard" pitchFamily="34" charset="-120"/>
+              </a:rPr>
+              <a:t>포트폴리오는 오늘 완성된 것이 아니라, 갱신되기 시작한 것입니다.</a:t>
+            </a:r>
+            <a:endParaRPr lang="en-US" sz="1150" dirty="0"/>
           </a:p>
         </p:txBody>
       </p:sp>
@@ -6408,18 +7945,18 @@
         </p:nvSpPr>
         <p:spPr>
           <a:xfrm>
-            <a:off x="640080" y="2505456"/>
-            <a:ext cx="10911535" cy="9144"/>
+            <a:off x="640080" y="1664208"/>
+            <a:ext cx="10911535" cy="7315"/>
           </a:xfrm>
           <a:prstGeom prst="rect">
             <a:avLst/>
           </a:prstGeom>
           <a:solidFill>
-            <a:srgbClr val="E4E6EB"/>
+            <a:srgbClr val="111111"/>
           </a:solidFill>
           <a:ln w="12700">
             <a:solidFill>
-              <a:srgbClr val="E4E6EB"/>
+              <a:srgbClr val="111111"/>
             </a:solidFill>
             <a:prstDash val="solid"/>
           </a:ln>
@@ -6433,20 +7970,18 @@
         </p:nvSpPr>
         <p:spPr>
           <a:xfrm>
-            <a:off x="640080" y="2670048"/>
+            <a:off x="640080" y="1810512"/>
             <a:ext cx="310896" cy="310896"/>
           </a:xfrm>
-          <a:prstGeom prst="roundRect">
-            <a:avLst>
-              <a:gd name="adj" fmla="val 17647"/>
-            </a:avLst>
+          <a:prstGeom prst="ellipse">
+            <a:avLst/>
           </a:prstGeom>
           <a:solidFill>
-            <a:srgbClr val="14161B"/>
+            <a:srgbClr val="FFFFFF"/>
           </a:solidFill>
-          <a:ln w="6350">
+          <a:ln w="12700">
             <a:solidFill>
-              <a:srgbClr val="14161B"/>
+              <a:srgbClr val="111111"/>
             </a:solidFill>
             <a:prstDash val="solid"/>
           </a:ln>
@@ -6460,7 +7995,7 @@
         </p:nvSpPr>
         <p:spPr>
           <a:xfrm>
-            <a:off x="640080" y="2670048"/>
+            <a:off x="640080" y="1810512"/>
             <a:ext cx="310896" cy="310896"/>
           </a:xfrm>
           <a:prstGeom prst="rect">
@@ -6477,17 +8012,17 @@
               <a:buNone/>
             </a:pPr>
             <a:r>
-              <a:rPr lang="en-US" sz="1050" b="1" dirty="0">
-                <a:solidFill>
-                  <a:srgbClr val="FFFFFF"/>
-                </a:solidFill>
-                <a:latin typeface="Pretendard" pitchFamily="34" charset="0"/>
-                <a:ea typeface="Pretendard" pitchFamily="34" charset="-122"/>
-                <a:cs typeface="Pretendard" pitchFamily="34" charset="-120"/>
-              </a:rPr>
-              <a:t>2</a:t>
-            </a:r>
-            <a:endParaRPr lang="en-US" sz="1050" dirty="0"/>
+              <a:rPr lang="en-US" sz="1000" b="1" dirty="0">
+                <a:solidFill>
+                  <a:srgbClr val="111111"/>
+                </a:solidFill>
+                <a:latin typeface="Pretendard" pitchFamily="34" charset="0"/>
+                <a:ea typeface="Pretendard" pitchFamily="34" charset="-122"/>
+                <a:cs typeface="Pretendard" pitchFamily="34" charset="-120"/>
+              </a:rPr>
+              <a:t>1</a:t>
+            </a:r>
+            <a:endParaRPr lang="en-US" sz="1000" dirty="0"/>
           </a:p>
         </p:txBody>
       </p:sp>
@@ -6499,7 +8034,7 @@
         </p:nvSpPr>
         <p:spPr>
           <a:xfrm>
-            <a:off x="1188720" y="2578608"/>
+            <a:off x="1188720" y="1719072"/>
             <a:ext cx="9875520" cy="310896"/>
           </a:xfrm>
           <a:prstGeom prst="rect">
@@ -6516,15 +8051,15 @@
               <a:buNone/>
             </a:pPr>
             <a:r>
-              <a:rPr lang="en-US" sz="1450" b="1" dirty="0">
-                <a:solidFill>
-                  <a:srgbClr val="14161B"/>
-                </a:solidFill>
-                <a:latin typeface="Pretendard" pitchFamily="34" charset="0"/>
-                <a:ea typeface="Pretendard" pitchFamily="34" charset="-122"/>
-                <a:cs typeface="Pretendard" pitchFamily="34" charset="-120"/>
-              </a:rPr>
-              <a:t>과정 자료를 그때그때 남긴다</a:t>
+              <a:rPr lang="en-US" sz="1450" dirty="0">
+                <a:solidFill>
+                  <a:srgbClr val="111111"/>
+                </a:solidFill>
+                <a:latin typeface="Pretendard Black" pitchFamily="34" charset="0"/>
+                <a:ea typeface="Pretendard Black" pitchFamily="34" charset="-122"/>
+                <a:cs typeface="Pretendard Black" pitchFamily="34" charset="-120"/>
+              </a:rPr>
+              <a:t>비어 있는 칸을 채운다</a:t>
             </a:r>
             <a:endParaRPr lang="en-US" sz="1450" dirty="0"/>
           </a:p>
@@ -6538,7 +8073,7 @@
         </p:nvSpPr>
         <p:spPr>
           <a:xfrm>
-            <a:off x="1188720" y="2889504"/>
+            <a:off x="1188720" y="2029968"/>
             <a:ext cx="9875520" cy="292608"/>
           </a:xfrm>
           <a:prstGeom prst="rect">
@@ -6557,13 +8092,13 @@
             <a:r>
               <a:rPr lang="en-US" sz="1100" dirty="0">
                 <a:solidFill>
-                  <a:srgbClr val="6B7280"/>
-                </a:solidFill>
-                <a:latin typeface="Pretendard" pitchFamily="34" charset="0"/>
-                <a:ea typeface="Pretendard" pitchFamily="34" charset="-122"/>
-                <a:cs typeface="Pretendard" pitchFamily="34" charset="-120"/>
-              </a:rPr>
-              <a:t>이번 학기에 가장 아쉬웠던 부분입니다. 다음 작업부터는 진행 중에 기록하세요</a:t>
+                  <a:srgbClr val="6E6E6E"/>
+                </a:solidFill>
+                <a:latin typeface="Pretendard" pitchFamily="34" charset="0"/>
+                <a:ea typeface="Pretendard" pitchFamily="34" charset="-122"/>
+                <a:cs typeface="Pretendard" pitchFamily="34" charset="-120"/>
+              </a:rPr>
+              <a:t>자기평가 03에서 적은 것. 방학 중 개인 작업이나 공모전으로 채울 수 있습니다</a:t>
             </a:r>
             <a:endParaRPr lang="en-US" sz="1100" dirty="0"/>
           </a:p>
@@ -6577,18 +8112,18 @@
         </p:nvSpPr>
         <p:spPr>
           <a:xfrm>
-            <a:off x="640080" y="3364992"/>
-            <a:ext cx="10911535" cy="9144"/>
+            <a:off x="640080" y="2596896"/>
+            <a:ext cx="10911535" cy="7315"/>
           </a:xfrm>
           <a:prstGeom prst="rect">
             <a:avLst/>
           </a:prstGeom>
           <a:solidFill>
-            <a:srgbClr val="E4E6EB"/>
+            <a:srgbClr val="DCDCDC"/>
           </a:solidFill>
           <a:ln w="12700">
             <a:solidFill>
-              <a:srgbClr val="E4E6EB"/>
+              <a:srgbClr val="DCDCDC"/>
             </a:solidFill>
             <a:prstDash val="solid"/>
           </a:ln>
@@ -6602,20 +8137,18 @@
         </p:nvSpPr>
         <p:spPr>
           <a:xfrm>
-            <a:off x="640080" y="3529584"/>
+            <a:off x="640080" y="2761488"/>
             <a:ext cx="310896" cy="310896"/>
           </a:xfrm>
-          <a:prstGeom prst="roundRect">
-            <a:avLst>
-              <a:gd name="adj" fmla="val 17647"/>
-            </a:avLst>
+          <a:prstGeom prst="ellipse">
+            <a:avLst/>
           </a:prstGeom>
           <a:solidFill>
-            <a:srgbClr val="14161B"/>
+            <a:srgbClr val="FFFFFF"/>
           </a:solidFill>
-          <a:ln w="6350">
+          <a:ln w="12700">
             <a:solidFill>
-              <a:srgbClr val="14161B"/>
+              <a:srgbClr val="111111"/>
             </a:solidFill>
             <a:prstDash val="solid"/>
           </a:ln>
@@ -6629,7 +8162,7 @@
         </p:nvSpPr>
         <p:spPr>
           <a:xfrm>
-            <a:off x="640080" y="3529584"/>
+            <a:off x="640080" y="2761488"/>
             <a:ext cx="310896" cy="310896"/>
           </a:xfrm>
           <a:prstGeom prst="rect">
@@ -6646,17 +8179,17 @@
               <a:buNone/>
             </a:pPr>
             <a:r>
-              <a:rPr lang="en-US" sz="1050" b="1" dirty="0">
-                <a:solidFill>
-                  <a:srgbClr val="FFFFFF"/>
-                </a:solidFill>
-                <a:latin typeface="Pretendard" pitchFamily="34" charset="0"/>
-                <a:ea typeface="Pretendard" pitchFamily="34" charset="-122"/>
-                <a:cs typeface="Pretendard" pitchFamily="34" charset="-120"/>
-              </a:rPr>
-              <a:t>3</a:t>
-            </a:r>
-            <a:endParaRPr lang="en-US" sz="1050" dirty="0"/>
+              <a:rPr lang="en-US" sz="1000" b="1" dirty="0">
+                <a:solidFill>
+                  <a:srgbClr val="111111"/>
+                </a:solidFill>
+                <a:latin typeface="Pretendard" pitchFamily="34" charset="0"/>
+                <a:ea typeface="Pretendard" pitchFamily="34" charset="-122"/>
+                <a:cs typeface="Pretendard" pitchFamily="34" charset="-120"/>
+              </a:rPr>
+              <a:t>2</a:t>
+            </a:r>
+            <a:endParaRPr lang="en-US" sz="1000" dirty="0"/>
           </a:p>
         </p:txBody>
       </p:sp>
@@ -6668,7 +8201,7 @@
         </p:nvSpPr>
         <p:spPr>
           <a:xfrm>
-            <a:off x="1188720" y="3438144"/>
+            <a:off x="1188720" y="2670048"/>
             <a:ext cx="9875520" cy="310896"/>
           </a:xfrm>
           <a:prstGeom prst="rect">
@@ -6685,15 +8218,15 @@
               <a:buNone/>
             </a:pPr>
             <a:r>
-              <a:rPr lang="en-US" sz="1450" b="1" dirty="0">
-                <a:solidFill>
-                  <a:srgbClr val="14161B"/>
-                </a:solidFill>
-                <a:latin typeface="Pretendard" pitchFamily="34" charset="0"/>
-                <a:ea typeface="Pretendard" pitchFamily="34" charset="-122"/>
-                <a:cs typeface="Pretendard" pitchFamily="34" charset="-120"/>
-              </a:rPr>
-              <a:t>지원처가 정해지면 다시 맞춘다</a:t>
+              <a:rPr lang="en-US" sz="1450" dirty="0">
+                <a:solidFill>
+                  <a:srgbClr val="111111"/>
+                </a:solidFill>
+                <a:latin typeface="Pretendard Black" pitchFamily="34" charset="0"/>
+                <a:ea typeface="Pretendard Black" pitchFamily="34" charset="-122"/>
+                <a:cs typeface="Pretendard Black" pitchFamily="34" charset="-120"/>
+              </a:rPr>
+              <a:t>과정 자료를 그때그때 남긴다</a:t>
             </a:r>
             <a:endParaRPr lang="en-US" sz="1450" dirty="0"/>
           </a:p>
@@ -6707,7 +8240,7 @@
         </p:nvSpPr>
         <p:spPr>
           <a:xfrm>
-            <a:off x="1188720" y="3749040"/>
+            <a:off x="1188720" y="2980944"/>
             <a:ext cx="9875520" cy="292608"/>
           </a:xfrm>
           <a:prstGeom prst="rect">
@@ -6726,13 +8259,13 @@
             <a:r>
               <a:rPr lang="en-US" sz="1100" dirty="0">
                 <a:solidFill>
-                  <a:srgbClr val="6B7280"/>
-                </a:solidFill>
-                <a:latin typeface="Pretendard" pitchFamily="34" charset="0"/>
-                <a:ea typeface="Pretendard" pitchFamily="34" charset="-122"/>
-                <a:cs typeface="Pretendard" pitchFamily="34" charset="-120"/>
-              </a:rPr>
-              <a:t>포트폴리오는 한 벌로 끝나지 않습니다. 지원처에 따라 순서와 강조를 바꿉니다</a:t>
+                  <a:srgbClr val="6E6E6E"/>
+                </a:solidFill>
+                <a:latin typeface="Pretendard" pitchFamily="34" charset="0"/>
+                <a:ea typeface="Pretendard" pitchFamily="34" charset="-122"/>
+                <a:cs typeface="Pretendard" pitchFamily="34" charset="-120"/>
+              </a:rPr>
+              <a:t>이번 학기에 가장 아쉬웠던 부분입니다. 다음 작업부터는 진행 중에 기록하세요</a:t>
             </a:r>
             <a:endParaRPr lang="en-US" sz="1100" dirty="0"/>
           </a:p>
@@ -6746,18 +8279,18 @@
         </p:nvSpPr>
         <p:spPr>
           <a:xfrm>
-            <a:off x="640080" y="4224528"/>
-            <a:ext cx="10911535" cy="9144"/>
+            <a:off x="640080" y="3547872"/>
+            <a:ext cx="10911535" cy="7315"/>
           </a:xfrm>
           <a:prstGeom prst="rect">
             <a:avLst/>
           </a:prstGeom>
           <a:solidFill>
-            <a:srgbClr val="E4E6EB"/>
+            <a:srgbClr val="DCDCDC"/>
           </a:solidFill>
           <a:ln w="12700">
             <a:solidFill>
-              <a:srgbClr val="E4E6EB"/>
+              <a:srgbClr val="DCDCDC"/>
             </a:solidFill>
             <a:prstDash val="solid"/>
           </a:ln>
@@ -6771,20 +8304,18 @@
         </p:nvSpPr>
         <p:spPr>
           <a:xfrm>
-            <a:off x="640080" y="4389120"/>
+            <a:off x="640080" y="3712464"/>
             <a:ext cx="310896" cy="310896"/>
           </a:xfrm>
-          <a:prstGeom prst="roundRect">
-            <a:avLst>
-              <a:gd name="adj" fmla="val 17647"/>
-            </a:avLst>
+          <a:prstGeom prst="ellipse">
+            <a:avLst/>
           </a:prstGeom>
           <a:solidFill>
-            <a:srgbClr val="14161B"/>
+            <a:srgbClr val="FFFFFF"/>
           </a:solidFill>
-          <a:ln w="6350">
+          <a:ln w="12700">
             <a:solidFill>
-              <a:srgbClr val="14161B"/>
+              <a:srgbClr val="111111"/>
             </a:solidFill>
             <a:prstDash val="solid"/>
           </a:ln>
@@ -6798,7 +8329,7 @@
         </p:nvSpPr>
         <p:spPr>
           <a:xfrm>
-            <a:off x="640080" y="4389120"/>
+            <a:off x="640080" y="3712464"/>
             <a:ext cx="310896" cy="310896"/>
           </a:xfrm>
           <a:prstGeom prst="rect">
@@ -6815,9 +8346,176 @@
               <a:buNone/>
             </a:pPr>
             <a:r>
-              <a:rPr lang="en-US" sz="1050" b="1" dirty="0">
-                <a:solidFill>
-                  <a:srgbClr val="FFFFFF"/>
+              <a:rPr lang="en-US" sz="1000" b="1" dirty="0">
+                <a:solidFill>
+                  <a:srgbClr val="111111"/>
+                </a:solidFill>
+                <a:latin typeface="Pretendard" pitchFamily="34" charset="0"/>
+                <a:ea typeface="Pretendard" pitchFamily="34" charset="-122"/>
+                <a:cs typeface="Pretendard" pitchFamily="34" charset="-120"/>
+              </a:rPr>
+              <a:t>3</a:t>
+            </a:r>
+            <a:endParaRPr lang="en-US" sz="1000" dirty="0"/>
+          </a:p>
+        </p:txBody>
+      </p:sp>
+      <p:sp>
+        <p:nvSpPr>
+          <p:cNvPr id="22" name="Text 20"/>
+          <p:cNvSpPr/>
+          <p:nvPr/>
+        </p:nvSpPr>
+        <p:spPr>
+          <a:xfrm>
+            <a:off x="1188720" y="3621024"/>
+            <a:ext cx="9875520" cy="310896"/>
+          </a:xfrm>
+          <a:prstGeom prst="rect">
+            <a:avLst/>
+          </a:prstGeom>
+          <a:noFill/>
+          <a:ln/>
+        </p:spPr>
+        <p:txBody>
+          <a:bodyPr wrap="square" lIns="0" tIns="0" rIns="0" bIns="0" rtlCol="0" anchor="ctr"/>
+          <a:lstStyle/>
+          <a:p>
+            <a:pPr indent="0" marL="0">
+              <a:buNone/>
+            </a:pPr>
+            <a:r>
+              <a:rPr lang="en-US" sz="1450" dirty="0">
+                <a:solidFill>
+                  <a:srgbClr val="111111"/>
+                </a:solidFill>
+                <a:latin typeface="Pretendard Black" pitchFamily="34" charset="0"/>
+                <a:ea typeface="Pretendard Black" pitchFamily="34" charset="-122"/>
+                <a:cs typeface="Pretendard Black" pitchFamily="34" charset="-120"/>
+              </a:rPr>
+              <a:t>지원처가 정해지면 다시 맞춘다</a:t>
+            </a:r>
+            <a:endParaRPr lang="en-US" sz="1450" dirty="0"/>
+          </a:p>
+        </p:txBody>
+      </p:sp>
+      <p:sp>
+        <p:nvSpPr>
+          <p:cNvPr id="23" name="Text 21"/>
+          <p:cNvSpPr/>
+          <p:nvPr/>
+        </p:nvSpPr>
+        <p:spPr>
+          <a:xfrm>
+            <a:off x="1188720" y="3931920"/>
+            <a:ext cx="9875520" cy="292608"/>
+          </a:xfrm>
+          <a:prstGeom prst="rect">
+            <a:avLst/>
+          </a:prstGeom>
+          <a:noFill/>
+          <a:ln/>
+        </p:spPr>
+        <p:txBody>
+          <a:bodyPr wrap="square" lIns="0" tIns="0" rIns="0" bIns="0" rtlCol="0" anchor="ctr"/>
+          <a:lstStyle/>
+          <a:p>
+            <a:pPr indent="0" marL="0">
+              <a:buNone/>
+            </a:pPr>
+            <a:r>
+              <a:rPr lang="en-US" sz="1100" dirty="0">
+                <a:solidFill>
+                  <a:srgbClr val="6E6E6E"/>
+                </a:solidFill>
+                <a:latin typeface="Pretendard" pitchFamily="34" charset="0"/>
+                <a:ea typeface="Pretendard" pitchFamily="34" charset="-122"/>
+                <a:cs typeface="Pretendard" pitchFamily="34" charset="-120"/>
+              </a:rPr>
+              <a:t>포트폴리오는 한 벌로 끝나지 않습니다. 지원처에 따라 순서와 강조를 바꿉니다</a:t>
+            </a:r>
+            <a:endParaRPr lang="en-US" sz="1100" dirty="0"/>
+          </a:p>
+        </p:txBody>
+      </p:sp>
+      <p:sp>
+        <p:nvSpPr>
+          <p:cNvPr id="24" name="Shape 22"/>
+          <p:cNvSpPr/>
+          <p:nvPr/>
+        </p:nvSpPr>
+        <p:spPr>
+          <a:xfrm>
+            <a:off x="640080" y="4498848"/>
+            <a:ext cx="10911535" cy="7315"/>
+          </a:xfrm>
+          <a:prstGeom prst="rect">
+            <a:avLst/>
+          </a:prstGeom>
+          <a:solidFill>
+            <a:srgbClr val="DCDCDC"/>
+          </a:solidFill>
+          <a:ln w="12700">
+            <a:solidFill>
+              <a:srgbClr val="DCDCDC"/>
+            </a:solidFill>
+            <a:prstDash val="solid"/>
+          </a:ln>
+        </p:spPr>
+      </p:sp>
+      <p:sp>
+        <p:nvSpPr>
+          <p:cNvPr id="25" name="Shape 23"/>
+          <p:cNvSpPr/>
+          <p:nvPr/>
+        </p:nvSpPr>
+        <p:spPr>
+          <a:xfrm>
+            <a:off x="640080" y="4663440"/>
+            <a:ext cx="310896" cy="310896"/>
+          </a:xfrm>
+          <a:prstGeom prst="ellipse">
+            <a:avLst/>
+          </a:prstGeom>
+          <a:solidFill>
+            <a:srgbClr val="FFFFFF"/>
+          </a:solidFill>
+          <a:ln w="12700">
+            <a:solidFill>
+              <a:srgbClr val="111111"/>
+            </a:solidFill>
+            <a:prstDash val="solid"/>
+          </a:ln>
+        </p:spPr>
+      </p:sp>
+      <p:sp>
+        <p:nvSpPr>
+          <p:cNvPr id="26" name="Text 24"/>
+          <p:cNvSpPr/>
+          <p:nvPr/>
+        </p:nvSpPr>
+        <p:spPr>
+          <a:xfrm>
+            <a:off x="640080" y="4663440"/>
+            <a:ext cx="310896" cy="310896"/>
+          </a:xfrm>
+          <a:prstGeom prst="rect">
+            <a:avLst/>
+          </a:prstGeom>
+          <a:noFill/>
+          <a:ln/>
+        </p:spPr>
+        <p:txBody>
+          <a:bodyPr wrap="square" lIns="0" tIns="0" rIns="0" bIns="0" rtlCol="0" anchor="ctr"/>
+          <a:lstStyle/>
+          <a:p>
+            <a:pPr algn="ctr" indent="0" marL="0">
+              <a:buNone/>
+            </a:pPr>
+            <a:r>
+              <a:rPr lang="en-US" sz="1000" b="1" dirty="0">
+                <a:solidFill>
+                  <a:srgbClr val="111111"/>
                 </a:solidFill>
                 <a:latin typeface="Pretendard" pitchFamily="34" charset="0"/>
                 <a:ea typeface="Pretendard" pitchFamily="34" charset="-122"/>
@@ -6825,19 +8523,19 @@
               </a:rPr>
               <a:t>4</a:t>
             </a:r>
-            <a:endParaRPr lang="en-US" sz="1050" dirty="0"/>
-          </a:p>
-        </p:txBody>
-      </p:sp>
-      <p:sp>
-        <p:nvSpPr>
-          <p:cNvPr id="22" name="Text 20"/>
-          <p:cNvSpPr/>
-          <p:nvPr/>
-        </p:nvSpPr>
-        <p:spPr>
-          <a:xfrm>
-            <a:off x="1188720" y="4297680"/>
+            <a:endParaRPr lang="en-US" sz="1000" dirty="0"/>
+          </a:p>
+        </p:txBody>
+      </p:sp>
+      <p:sp>
+        <p:nvSpPr>
+          <p:cNvPr id="27" name="Text 25"/>
+          <p:cNvSpPr/>
+          <p:nvPr/>
+        </p:nvSpPr>
+        <p:spPr>
+          <a:xfrm>
+            <a:off x="1188720" y="4572000"/>
             <a:ext cx="9875520" cy="310896"/>
           </a:xfrm>
           <a:prstGeom prst="rect">
@@ -6854,13 +8552,13 @@
               <a:buNone/>
             </a:pPr>
             <a:r>
-              <a:rPr lang="en-US" sz="1450" b="1" dirty="0">
-                <a:solidFill>
-                  <a:srgbClr val="14161B"/>
-                </a:solidFill>
-                <a:latin typeface="Pretendard" pitchFamily="34" charset="0"/>
-                <a:ea typeface="Pretendard" pitchFamily="34" charset="-122"/>
-                <a:cs typeface="Pretendard" pitchFamily="34" charset="-120"/>
+              <a:rPr lang="en-US" sz="1450" dirty="0">
+                <a:solidFill>
+                  <a:srgbClr val="111111"/>
+                </a:solidFill>
+                <a:latin typeface="Pretendard Black" pitchFamily="34" charset="0"/>
+                <a:ea typeface="Pretendard Black" pitchFamily="34" charset="-122"/>
+                <a:cs typeface="Pretendard Black" pitchFamily="34" charset="-120"/>
               </a:rPr>
               <a:t>링크를 살아 있게 유지한다</a:t>
             </a:r>
@@ -6870,13 +8568,13 @@
       </p:sp>
       <p:sp>
         <p:nvSpPr>
-          <p:cNvPr id="23" name="Text 21"/>
-          <p:cNvSpPr/>
-          <p:nvPr/>
-        </p:nvSpPr>
-        <p:spPr>
-          <a:xfrm>
-            <a:off x="1188720" y="4608576"/>
+          <p:cNvPr id="28" name="Text 26"/>
+          <p:cNvSpPr/>
+          <p:nvPr/>
+        </p:nvSpPr>
+        <p:spPr>
+          <a:xfrm>
+            <a:off x="1188720" y="4882896"/>
             <a:ext cx="9875520" cy="292608"/>
           </a:xfrm>
           <a:prstGeom prst="rect">
@@ -6895,7 +8593,7 @@
             <a:r>
               <a:rPr lang="en-US" sz="1100" dirty="0">
                 <a:solidFill>
-                  <a:srgbClr val="6B7280"/>
+                  <a:srgbClr val="6E6E6E"/>
                 </a:solidFill>
                 <a:latin typeface="Pretendard" pitchFamily="34" charset="0"/>
                 <a:ea typeface="Pretendard" pitchFamily="34" charset="-122"/>
@@ -6909,13 +8607,38 @@
       </p:sp>
       <p:sp>
         <p:nvSpPr>
-          <p:cNvPr id="24" name="Text 22"/>
-          <p:cNvSpPr/>
-          <p:nvPr/>
-        </p:nvSpPr>
-        <p:spPr>
-          <a:xfrm>
-            <a:off x="640080" y="5266944"/>
+          <p:cNvPr id="29" name="Shape 27"/>
+          <p:cNvSpPr/>
+          <p:nvPr/>
+        </p:nvSpPr>
+        <p:spPr>
+          <a:xfrm>
+            <a:off x="640080" y="5522976"/>
+            <a:ext cx="10911535" cy="7315"/>
+          </a:xfrm>
+          <a:prstGeom prst="rect">
+            <a:avLst/>
+          </a:prstGeom>
+          <a:solidFill>
+            <a:srgbClr val="111111"/>
+          </a:solidFill>
+          <a:ln w="12700">
+            <a:solidFill>
+              <a:srgbClr val="111111"/>
+            </a:solidFill>
+            <a:prstDash val="solid"/>
+          </a:ln>
+        </p:spPr>
+      </p:sp>
+      <p:sp>
+        <p:nvSpPr>
+          <p:cNvPr id="30" name="Text 28"/>
+          <p:cNvSpPr/>
+          <p:nvPr/>
+        </p:nvSpPr>
+        <p:spPr>
+          <a:xfrm>
+            <a:off x="640080" y="5632704"/>
             <a:ext cx="10911535" cy="402336"/>
           </a:xfrm>
           <a:prstGeom prst="rect">
@@ -6937,7 +8660,7 @@
             <a:r>
               <a:rPr lang="en-US" sz="1250" b="1" dirty="0">
                 <a:solidFill>
-                  <a:srgbClr val="14161B"/>
+                  <a:srgbClr val="111111"/>
                 </a:solidFill>
                 <a:latin typeface="Pretendard" pitchFamily="34" charset="0"/>
                 <a:ea typeface="Pretendard" pitchFamily="34" charset="-122"/>
@@ -6951,14 +8674,39 @@
       </p:sp>
       <p:sp>
         <p:nvSpPr>
-          <p:cNvPr id="25" name="Text 23"/>
-          <p:cNvSpPr/>
-          <p:nvPr/>
-        </p:nvSpPr>
-        <p:spPr>
-          <a:xfrm>
-            <a:off x="640080" y="6345936"/>
-            <a:ext cx="7772400" cy="256032"/>
+          <p:cNvPr id="31" name="Shape 29"/>
+          <p:cNvSpPr/>
+          <p:nvPr/>
+        </p:nvSpPr>
+        <p:spPr>
+          <a:xfrm>
+            <a:off x="640080" y="6291072"/>
+            <a:ext cx="10911535" cy="7315"/>
+          </a:xfrm>
+          <a:prstGeom prst="rect">
+            <a:avLst/>
+          </a:prstGeom>
+          <a:solidFill>
+            <a:srgbClr val="DCDCDC"/>
+          </a:solidFill>
+          <a:ln w="12700">
+            <a:solidFill>
+              <a:srgbClr val="DCDCDC"/>
+            </a:solidFill>
+            <a:prstDash val="solid"/>
+          </a:ln>
+        </p:spPr>
+      </p:sp>
+      <p:sp>
+        <p:nvSpPr>
+          <p:cNvPr id="32" name="Text 30"/>
+          <p:cNvSpPr/>
+          <p:nvPr/>
+        </p:nvSpPr>
+        <p:spPr>
+          <a:xfrm>
+            <a:off x="640080" y="6382512"/>
+            <a:ext cx="7772400" cy="237744"/>
           </a:xfrm>
           <a:prstGeom prst="rect">
             <a:avLst/>
@@ -6974,9 +8722,9 @@
               <a:buNone/>
             </a:pPr>
             <a:r>
-              <a:rPr lang="en-US" sz="900" dirty="0">
-                <a:solidFill>
-                  <a:srgbClr val="9AA0AA"/>
+              <a:rPr lang="en-US" sz="850" spc="40" kern="0" dirty="0">
+                <a:solidFill>
+                  <a:srgbClr val="9B9B9B"/>
                 </a:solidFill>
                 <a:latin typeface="Pretendard" pitchFamily="34" charset="0"/>
                 <a:ea typeface="Pretendard" pitchFamily="34" charset="-122"/>
@@ -6984,20 +8732,20 @@
               </a:rPr>
               <a:t>포트폴리오제작 · 15주차 기말 발표 및 종합 평가</a:t>
             </a:r>
-            <a:endParaRPr lang="en-US" sz="900" dirty="0"/>
-          </a:p>
-        </p:txBody>
-      </p:sp>
-      <p:sp>
-        <p:nvSpPr>
-          <p:cNvPr id="26" name="Text 24"/>
-          <p:cNvSpPr/>
-          <p:nvPr/>
-        </p:nvSpPr>
-        <p:spPr>
-          <a:xfrm>
-            <a:off x="10454335" y="6345936"/>
-            <a:ext cx="1097280" cy="256032"/>
+            <a:endParaRPr lang="en-US" sz="850" dirty="0"/>
+          </a:p>
+        </p:txBody>
+      </p:sp>
+      <p:sp>
+        <p:nvSpPr>
+          <p:cNvPr id="33" name="Text 31"/>
+          <p:cNvSpPr/>
+          <p:nvPr/>
+        </p:nvSpPr>
+        <p:spPr>
+          <a:xfrm>
+            <a:off x="10271455" y="6382512"/>
+            <a:ext cx="1280160" cy="237744"/>
           </a:xfrm>
           <a:prstGeom prst="rect">
             <a:avLst/>
@@ -7013,17 +8761,17 @@
               <a:buNone/>
             </a:pPr>
             <a:r>
-              <a:rPr lang="en-US" sz="900" dirty="0">
-                <a:solidFill>
-                  <a:srgbClr val="9AA0AA"/>
-                </a:solidFill>
-                <a:latin typeface="Pretendard" pitchFamily="34" charset="0"/>
-                <a:ea typeface="Pretendard" pitchFamily="34" charset="-122"/>
-                <a:cs typeface="Pretendard" pitchFamily="34" charset="-120"/>
-              </a:rPr>
-              <a:t>05</a:t>
-            </a:r>
-            <a:endParaRPr lang="en-US" sz="900" dirty="0"/>
+              <a:rPr lang="en-US" sz="850" spc="140" kern="0" dirty="0">
+                <a:solidFill>
+                  <a:srgbClr val="9B9B9B"/>
+                </a:solidFill>
+                <a:latin typeface="Pretendard" pitchFamily="34" charset="0"/>
+                <a:ea typeface="Pretendard" pitchFamily="34" charset="-122"/>
+                <a:cs typeface="Pretendard" pitchFamily="34" charset="-120"/>
+              </a:rPr>
+              <a:t>P.05</a:t>
+            </a:r>
+            <a:endParaRPr lang="en-US" sz="850" dirty="0"/>
           </a:p>
         </p:txBody>
       </p:sp>
@@ -7067,8 +8815,8 @@
         </p:nvSpPr>
         <p:spPr>
           <a:xfrm>
-            <a:off x="640080" y="566928"/>
-            <a:ext cx="10911535" cy="237744"/>
+            <a:off x="640080" y="274320"/>
+            <a:ext cx="3657600" cy="219456"/>
           </a:xfrm>
           <a:prstGeom prst="rect">
             <a:avLst/>
@@ -7084,17 +8832,17 @@
               <a:buNone/>
             </a:pPr>
             <a:r>
-              <a:rPr lang="en-US" sz="1100" b="1" spc="140" kern="0" dirty="0">
-                <a:solidFill>
-                  <a:srgbClr val="FF4A1C"/>
-                </a:solidFill>
-                <a:latin typeface="Pretendard" pitchFamily="34" charset="0"/>
-                <a:ea typeface="Pretendard" pitchFamily="34" charset="-122"/>
-                <a:cs typeface="Pretendard" pitchFamily="34" charset="-120"/>
-              </a:rPr>
-              <a:t>HOMEWORK</a:t>
-            </a:r>
-            <a:endParaRPr lang="en-US" sz="1100" dirty="0"/>
+              <a:rPr lang="en-US" sz="900" spc="120" kern="0" dirty="0">
+                <a:solidFill>
+                  <a:srgbClr val="8A8A8A"/>
+                </a:solidFill>
+                <a:latin typeface="Pretendard" pitchFamily="34" charset="0"/>
+                <a:ea typeface="Pretendard" pitchFamily="34" charset="-122"/>
+                <a:cs typeface="Pretendard" pitchFamily="34" charset="-120"/>
+              </a:rPr>
+              <a:t>포트폴리오제작</a:t>
+            </a:r>
+            <a:endParaRPr lang="en-US" sz="900" dirty="0"/>
           </a:p>
         </p:txBody>
       </p:sp>
@@ -7106,34 +8854,34 @@
         </p:nvSpPr>
         <p:spPr>
           <a:xfrm>
-            <a:off x="640080" y="859536"/>
-            <a:ext cx="10911535" cy="512064"/>
-          </a:xfrm>
-          <a:prstGeom prst="rect">
-            <a:avLst/>
-          </a:prstGeom>
-          <a:noFill/>
-          <a:ln/>
-        </p:spPr>
-        <p:txBody>
-          <a:bodyPr wrap="square" lIns="0" tIns="0" rIns="0" bIns="0" rtlCol="0" anchor="ctr"/>
-          <a:lstStyle/>
-          <a:p>
-            <a:pPr indent="0" marL="0">
-              <a:buNone/>
-            </a:pPr>
-            <a:r>
-              <a:rPr lang="en-US" sz="2800" b="1" dirty="0">
-                <a:solidFill>
-                  <a:srgbClr val="14161B"/>
-                </a:solidFill>
-                <a:latin typeface="Pretendard" pitchFamily="34" charset="0"/>
-                <a:ea typeface="Pretendard" pitchFamily="34" charset="-122"/>
-                <a:cs typeface="Pretendard" pitchFamily="34" charset="-120"/>
-              </a:rPr>
-              <a:t>과제와 다음 주</a:t>
-            </a:r>
-            <a:endParaRPr lang="en-US" sz="2800" dirty="0"/>
+            <a:off x="4480560" y="274320"/>
+            <a:ext cx="4572000" cy="219456"/>
+          </a:xfrm>
+          <a:prstGeom prst="rect">
+            <a:avLst/>
+          </a:prstGeom>
+          <a:noFill/>
+          <a:ln/>
+        </p:spPr>
+        <p:txBody>
+          <a:bodyPr wrap="square" lIns="0" tIns="0" rIns="0" bIns="0" rtlCol="0" anchor="ctr"/>
+          <a:lstStyle/>
+          <a:p>
+            <a:pPr algn="ctr" indent="0" marL="0">
+              <a:buNone/>
+            </a:pPr>
+            <a:r>
+              <a:rPr lang="en-US" sz="900" spc="120" kern="0" dirty="0">
+                <a:solidFill>
+                  <a:srgbClr val="8A8A8A"/>
+                </a:solidFill>
+                <a:latin typeface="Pretendard" pitchFamily="34" charset="0"/>
+                <a:ea typeface="Pretendard" pitchFamily="34" charset="-122"/>
+                <a:cs typeface="Pretendard" pitchFamily="34" charset="-120"/>
+              </a:rPr>
+              <a:t>PHASE 3 완성과 발표</a:t>
+            </a:r>
+            <a:endParaRPr lang="en-US" sz="900" dirty="0"/>
           </a:p>
         </p:txBody>
       </p:sp>
@@ -7145,34 +8893,34 @@
         </p:nvSpPr>
         <p:spPr>
           <a:xfrm>
-            <a:off x="640080" y="1371600"/>
-            <a:ext cx="10911535" cy="237744"/>
-          </a:xfrm>
-          <a:prstGeom prst="rect">
-            <a:avLst/>
-          </a:prstGeom>
-          <a:noFill/>
-          <a:ln/>
-        </p:spPr>
-        <p:txBody>
-          <a:bodyPr wrap="square" lIns="0" tIns="0" rIns="0" bIns="0" rtlCol="0" anchor="ctr"/>
-          <a:lstStyle/>
-          <a:p>
-            <a:pPr indent="0" marL="0">
-              <a:buNone/>
-            </a:pPr>
-            <a:r>
-              <a:rPr lang="en-US" sz="1200" dirty="0">
-                <a:solidFill>
-                  <a:srgbClr val="6B7280"/>
-                </a:solidFill>
-                <a:latin typeface="Pretendard" pitchFamily="34" charset="0"/>
-                <a:ea typeface="Pretendard" pitchFamily="34" charset="-122"/>
-                <a:cs typeface="Pretendard" pitchFamily="34" charset="-120"/>
-              </a:rPr>
-              <a:t>학기가 끝납니다. 아래는 방학 중 권장 사항입니다.</a:t>
-            </a:r>
-            <a:endParaRPr lang="en-US" sz="1200" dirty="0"/>
+            <a:off x="8808415" y="274320"/>
+            <a:ext cx="2743200" cy="219456"/>
+          </a:xfrm>
+          <a:prstGeom prst="rect">
+            <a:avLst/>
+          </a:prstGeom>
+          <a:noFill/>
+          <a:ln/>
+        </p:spPr>
+        <p:txBody>
+          <a:bodyPr wrap="square" lIns="0" tIns="0" rIns="0" bIns="0" rtlCol="0" anchor="ctr"/>
+          <a:lstStyle/>
+          <a:p>
+            <a:pPr algn="r" indent="0" marL="0">
+              <a:buNone/>
+            </a:pPr>
+            <a:r>
+              <a:rPr lang="en-US" sz="900" spc="200" kern="0" dirty="0">
+                <a:solidFill>
+                  <a:srgbClr val="8A8A8A"/>
+                </a:solidFill>
+                <a:latin typeface="Pretendard" pitchFamily="34" charset="0"/>
+                <a:ea typeface="Pretendard" pitchFamily="34" charset="-122"/>
+                <a:cs typeface="Pretendard" pitchFamily="34" charset="-120"/>
+              </a:rPr>
+              <a:t>WEEK 15</a:t>
+            </a:r>
+            <a:endParaRPr lang="en-US" sz="900" dirty="0"/>
           </a:p>
         </p:txBody>
       </p:sp>
@@ -7184,20 +8932,18 @@
         </p:nvSpPr>
         <p:spPr>
           <a:xfrm>
-            <a:off x="640080" y="1719072"/>
-            <a:ext cx="6309360" cy="896112"/>
-          </a:xfrm>
-          <a:prstGeom prst="roundRect">
-            <a:avLst>
-              <a:gd name="adj" fmla="val 8163"/>
-            </a:avLst>
+            <a:off x="640080" y="548640"/>
+            <a:ext cx="10911535" cy="7315"/>
+          </a:xfrm>
+          <a:prstGeom prst="rect">
+            <a:avLst/>
           </a:prstGeom>
           <a:solidFill>
-            <a:srgbClr val="F4F5F7"/>
+            <a:srgbClr val="DCDCDC"/>
           </a:solidFill>
           <a:ln w="12700">
             <a:solidFill>
-              <a:srgbClr val="E4E6EB"/>
+              <a:srgbClr val="DCDCDC"/>
             </a:solidFill>
             <a:prstDash val="solid"/>
           </a:ln>
@@ -7205,26 +8951,141 @@
       </p:sp>
       <p:sp>
         <p:nvSpPr>
-          <p:cNvPr id="6" name="Shape 4"/>
-          <p:cNvSpPr/>
-          <p:nvPr/>
-        </p:nvSpPr>
-        <p:spPr>
-          <a:xfrm>
-            <a:off x="969264" y="1993392"/>
-            <a:ext cx="329184" cy="329184"/>
-          </a:xfrm>
-          <a:prstGeom prst="roundRect">
-            <a:avLst>
-              <a:gd name="adj" fmla="val 16667"/>
-            </a:avLst>
+          <p:cNvPr id="6" name="Text 4"/>
+          <p:cNvSpPr/>
+          <p:nvPr/>
+        </p:nvSpPr>
+        <p:spPr>
+          <a:xfrm>
+            <a:off x="640080" y="640080"/>
+            <a:ext cx="10911535" cy="219456"/>
+          </a:xfrm>
+          <a:prstGeom prst="rect">
+            <a:avLst/>
+          </a:prstGeom>
+          <a:noFill/>
+          <a:ln/>
+        </p:spPr>
+        <p:txBody>
+          <a:bodyPr wrap="square" lIns="0" tIns="0" rIns="0" bIns="0" rtlCol="0" anchor="ctr"/>
+          <a:lstStyle/>
+          <a:p>
+            <a:pPr indent="0" marL="0">
+              <a:buNone/>
+            </a:pPr>
+            <a:r>
+              <a:rPr lang="en-US" sz="950" spc="260" kern="0" dirty="0">
+                <a:solidFill>
+                  <a:srgbClr val="8A8A8A"/>
+                </a:solidFill>
+                <a:latin typeface="Pretendard" pitchFamily="34" charset="0"/>
+                <a:ea typeface="Pretendard" pitchFamily="34" charset="-122"/>
+                <a:cs typeface="Pretendard" pitchFamily="34" charset="-120"/>
+              </a:rPr>
+              <a:t>HOMEWORK</a:t>
+            </a:r>
+            <a:endParaRPr lang="en-US" sz="950" dirty="0"/>
+          </a:p>
+        </p:txBody>
+      </p:sp>
+      <p:sp>
+        <p:nvSpPr>
+          <p:cNvPr id="7" name="Text 5"/>
+          <p:cNvSpPr/>
+          <p:nvPr/>
+        </p:nvSpPr>
+        <p:spPr>
+          <a:xfrm>
+            <a:off x="640080" y="859536"/>
+            <a:ext cx="10911535" cy="475488"/>
+          </a:xfrm>
+          <a:prstGeom prst="rect">
+            <a:avLst/>
+          </a:prstGeom>
+          <a:noFill/>
+          <a:ln/>
+        </p:spPr>
+        <p:txBody>
+          <a:bodyPr wrap="square" lIns="0" tIns="0" rIns="0" bIns="0" rtlCol="0" anchor="ctr"/>
+          <a:lstStyle/>
+          <a:p>
+            <a:pPr indent="0" marL="0">
+              <a:buNone/>
+            </a:pPr>
+            <a:r>
+              <a:rPr lang="en-US" sz="3000" dirty="0">
+                <a:solidFill>
+                  <a:srgbClr val="111111"/>
+                </a:solidFill>
+                <a:latin typeface="Pretendard Black" pitchFamily="34" charset="0"/>
+                <a:ea typeface="Pretendard Black" pitchFamily="34" charset="-122"/>
+                <a:cs typeface="Pretendard Black" pitchFamily="34" charset="-120"/>
+              </a:rPr>
+              <a:t>과제와 다음 주</a:t>
+            </a:r>
+            <a:endParaRPr lang="en-US" sz="3000" dirty="0"/>
+          </a:p>
+        </p:txBody>
+      </p:sp>
+      <p:sp>
+        <p:nvSpPr>
+          <p:cNvPr id="8" name="Text 6"/>
+          <p:cNvSpPr/>
+          <p:nvPr/>
+        </p:nvSpPr>
+        <p:spPr>
+          <a:xfrm>
+            <a:off x="640080" y="1371600"/>
+            <a:ext cx="10911535" cy="219456"/>
+          </a:xfrm>
+          <a:prstGeom prst="rect">
+            <a:avLst/>
+          </a:prstGeom>
+          <a:noFill/>
+          <a:ln/>
+        </p:spPr>
+        <p:txBody>
+          <a:bodyPr wrap="square" lIns="0" tIns="0" rIns="0" bIns="0" rtlCol="0" anchor="ctr"/>
+          <a:lstStyle/>
+          <a:p>
+            <a:pPr indent="0" marL="0">
+              <a:buNone/>
+            </a:pPr>
+            <a:r>
+              <a:rPr lang="en-US" sz="1150" dirty="0">
+                <a:solidFill>
+                  <a:srgbClr val="6E6E6E"/>
+                </a:solidFill>
+                <a:latin typeface="Pretendard" pitchFamily="34" charset="0"/>
+                <a:ea typeface="Pretendard" pitchFamily="34" charset="-122"/>
+                <a:cs typeface="Pretendard" pitchFamily="34" charset="-120"/>
+              </a:rPr>
+              <a:t>학기가 끝납니다. 아래는 방학 중 권장 사항입니다.</a:t>
+            </a:r>
+            <a:endParaRPr lang="en-US" sz="1150" dirty="0"/>
+          </a:p>
+        </p:txBody>
+      </p:sp>
+      <p:sp>
+        <p:nvSpPr>
+          <p:cNvPr id="9" name="Shape 7"/>
+          <p:cNvSpPr/>
+          <p:nvPr/>
+        </p:nvSpPr>
+        <p:spPr>
+          <a:xfrm>
+            <a:off x="640080" y="1719072"/>
+            <a:ext cx="6309360" cy="896112"/>
+          </a:xfrm>
+          <a:prstGeom prst="rect">
+            <a:avLst/>
           </a:prstGeom>
           <a:solidFill>
-            <a:srgbClr val="FF4A1C"/>
+            <a:srgbClr val="FFFFFF"/>
           </a:solidFill>
-          <a:ln w="6350">
+          <a:ln w="12700">
             <a:solidFill>
-              <a:srgbClr val="FF4A1C"/>
+              <a:srgbClr val="DCDCDC"/>
             </a:solidFill>
             <a:prstDash val="solid"/>
           </a:ln>
@@ -7232,7 +9093,7 @@
       </p:sp>
       <p:sp>
         <p:nvSpPr>
-          <p:cNvPr id="7" name="Text 5"/>
+          <p:cNvPr id="10" name="Shape 8"/>
           <p:cNvSpPr/>
           <p:nvPr/>
         </p:nvSpPr>
@@ -7241,6 +9102,31 @@
             <a:off x="969264" y="1993392"/>
             <a:ext cx="329184" cy="329184"/>
           </a:xfrm>
+          <a:prstGeom prst="ellipse">
+            <a:avLst/>
+          </a:prstGeom>
+          <a:solidFill>
+            <a:srgbClr val="111111"/>
+          </a:solidFill>
+          <a:ln w="12700">
+            <a:solidFill>
+              <a:srgbClr val="111111"/>
+            </a:solidFill>
+            <a:prstDash val="solid"/>
+          </a:ln>
+        </p:spPr>
+      </p:sp>
+      <p:sp>
+        <p:nvSpPr>
+          <p:cNvPr id="11" name="Text 9"/>
+          <p:cNvSpPr/>
+          <p:nvPr/>
+        </p:nvSpPr>
+        <p:spPr>
+          <a:xfrm>
+            <a:off x="969264" y="1993392"/>
+            <a:ext cx="329184" cy="329184"/>
+          </a:xfrm>
           <a:prstGeom prst="rect">
             <a:avLst/>
           </a:prstGeom>
@@ -7271,7 +9157,7 @@
       </p:sp>
       <p:sp>
         <p:nvSpPr>
-          <p:cNvPr id="8" name="Text 6"/>
+          <p:cNvPr id="12" name="Text 10"/>
           <p:cNvSpPr/>
           <p:nvPr/>
         </p:nvSpPr>
@@ -7294,13 +9180,13 @@
               <a:buNone/>
             </a:pPr>
             <a:r>
-              <a:rPr lang="en-US" sz="1400" b="1" dirty="0">
-                <a:solidFill>
-                  <a:srgbClr val="14161B"/>
-                </a:solidFill>
-                <a:latin typeface="Pretendard" pitchFamily="34" charset="0"/>
-                <a:ea typeface="Pretendard" pitchFamily="34" charset="-122"/>
-                <a:cs typeface="Pretendard" pitchFamily="34" charset="-120"/>
+              <a:rPr lang="en-US" sz="1400" dirty="0">
+                <a:solidFill>
+                  <a:srgbClr val="111111"/>
+                </a:solidFill>
+                <a:latin typeface="Pretendard Black" pitchFamily="34" charset="0"/>
+                <a:ea typeface="Pretendard Black" pitchFamily="34" charset="-122"/>
+                <a:cs typeface="Pretendard Black" pitchFamily="34" charset="-120"/>
               </a:rPr>
               <a:t>최종 포트폴리오 제출</a:t>
             </a:r>
@@ -7310,7 +9196,7 @@
       </p:sp>
       <p:sp>
         <p:nvSpPr>
-          <p:cNvPr id="9" name="Text 7"/>
+          <p:cNvPr id="13" name="Text 11"/>
           <p:cNvSpPr/>
           <p:nvPr/>
         </p:nvSpPr>
@@ -7338,7 +9224,7 @@
             <a:r>
               <a:rPr lang="en-US" sz="1100" dirty="0">
                 <a:solidFill>
-                  <a:srgbClr val="6B7280"/>
+                  <a:srgbClr val="6E6E6E"/>
                 </a:solidFill>
                 <a:latin typeface="Pretendard" pitchFamily="34" charset="0"/>
                 <a:ea typeface="Pretendard" pitchFamily="34" charset="-122"/>
@@ -7352,7 +9238,7 @@
       </p:sp>
       <p:sp>
         <p:nvSpPr>
-          <p:cNvPr id="10" name="Shape 8"/>
+          <p:cNvPr id="14" name="Shape 12"/>
           <p:cNvSpPr/>
           <p:nvPr/>
         </p:nvSpPr>
@@ -7361,17 +9247,15 @@
             <a:off x="640080" y="2743200"/>
             <a:ext cx="6309360" cy="896112"/>
           </a:xfrm>
-          <a:prstGeom prst="roundRect">
-            <a:avLst>
-              <a:gd name="adj" fmla="val 8163"/>
-            </a:avLst>
+          <a:prstGeom prst="rect">
+            <a:avLst/>
           </a:prstGeom>
           <a:solidFill>
-            <a:srgbClr val="F4F5F7"/>
+            <a:srgbClr val="FFFFFF"/>
           </a:solidFill>
           <a:ln w="12700">
             <a:solidFill>
-              <a:srgbClr val="E4E6EB"/>
+              <a:srgbClr val="DCDCDC"/>
             </a:solidFill>
             <a:prstDash val="solid"/>
           </a:ln>
@@ -7379,7 +9263,7 @@
       </p:sp>
       <p:sp>
         <p:nvSpPr>
-          <p:cNvPr id="11" name="Shape 9"/>
+          <p:cNvPr id="15" name="Shape 13"/>
           <p:cNvSpPr/>
           <p:nvPr/>
         </p:nvSpPr>
@@ -7388,17 +9272,15 @@
             <a:off x="969264" y="3017520"/>
             <a:ext cx="329184" cy="329184"/>
           </a:xfrm>
-          <a:prstGeom prst="roundRect">
-            <a:avLst>
-              <a:gd name="adj" fmla="val 16667"/>
-            </a:avLst>
+          <a:prstGeom prst="ellipse">
+            <a:avLst/>
           </a:prstGeom>
           <a:solidFill>
-            <a:srgbClr val="FF4A1C"/>
+            <a:srgbClr val="111111"/>
           </a:solidFill>
-          <a:ln w="6350">
+          <a:ln w="12700">
             <a:solidFill>
-              <a:srgbClr val="FF4A1C"/>
+              <a:srgbClr val="111111"/>
             </a:solidFill>
             <a:prstDash val="solid"/>
           </a:ln>
@@ -7406,7 +9288,7 @@
       </p:sp>
       <p:sp>
         <p:nvSpPr>
-          <p:cNvPr id="12" name="Text 10"/>
+          <p:cNvPr id="16" name="Text 14"/>
           <p:cNvSpPr/>
           <p:nvPr/>
         </p:nvSpPr>
@@ -7445,7 +9327,7 @@
       </p:sp>
       <p:sp>
         <p:nvSpPr>
-          <p:cNvPr id="13" name="Text 11"/>
+          <p:cNvPr id="17" name="Text 15"/>
           <p:cNvSpPr/>
           <p:nvPr/>
         </p:nvSpPr>
@@ -7468,13 +9350,13 @@
               <a:buNone/>
             </a:pPr>
             <a:r>
-              <a:rPr lang="en-US" sz="1400" b="1" dirty="0">
-                <a:solidFill>
-                  <a:srgbClr val="14161B"/>
-                </a:solidFill>
-                <a:latin typeface="Pretendard" pitchFamily="34" charset="0"/>
-                <a:ea typeface="Pretendard" pitchFamily="34" charset="-122"/>
-                <a:cs typeface="Pretendard" pitchFamily="34" charset="-120"/>
+              <a:rPr lang="en-US" sz="1400" dirty="0">
+                <a:solidFill>
+                  <a:srgbClr val="111111"/>
+                </a:solidFill>
+                <a:latin typeface="Pretendard Black" pitchFamily="34" charset="0"/>
+                <a:ea typeface="Pretendard Black" pitchFamily="34" charset="-122"/>
+                <a:cs typeface="Pretendard Black" pitchFamily="34" charset="-120"/>
               </a:rPr>
               <a:t>자기평가 1장</a:t>
             </a:r>
@@ -7484,7 +9366,7 @@
       </p:sp>
       <p:sp>
         <p:nvSpPr>
-          <p:cNvPr id="14" name="Text 12"/>
+          <p:cNvPr id="18" name="Text 16"/>
           <p:cNvSpPr/>
           <p:nvPr/>
         </p:nvSpPr>
@@ -7512,7 +9394,7 @@
             <a:r>
               <a:rPr lang="en-US" sz="1100" dirty="0">
                 <a:solidFill>
-                  <a:srgbClr val="6B7280"/>
+                  <a:srgbClr val="6E6E6E"/>
                 </a:solidFill>
                 <a:latin typeface="Pretendard" pitchFamily="34" charset="0"/>
                 <a:ea typeface="Pretendard" pitchFamily="34" charset="-122"/>
@@ -7526,7 +9408,7 @@
       </p:sp>
       <p:sp>
         <p:nvSpPr>
-          <p:cNvPr id="15" name="Shape 13"/>
+          <p:cNvPr id="19" name="Shape 17"/>
           <p:cNvSpPr/>
           <p:nvPr/>
         </p:nvSpPr>
@@ -7535,17 +9417,15 @@
             <a:off x="640080" y="3767328"/>
             <a:ext cx="6309360" cy="896112"/>
           </a:xfrm>
-          <a:prstGeom prst="roundRect">
-            <a:avLst>
-              <a:gd name="adj" fmla="val 8163"/>
-            </a:avLst>
+          <a:prstGeom prst="rect">
+            <a:avLst/>
           </a:prstGeom>
           <a:solidFill>
-            <a:srgbClr val="F4F5F7"/>
+            <a:srgbClr val="FFFFFF"/>
           </a:solidFill>
           <a:ln w="12700">
             <a:solidFill>
-              <a:srgbClr val="E4E6EB"/>
+              <a:srgbClr val="DCDCDC"/>
             </a:solidFill>
             <a:prstDash val="solid"/>
           </a:ln>
@@ -7553,7 +9433,7 @@
       </p:sp>
       <p:sp>
         <p:nvSpPr>
-          <p:cNvPr id="16" name="Shape 14"/>
+          <p:cNvPr id="20" name="Shape 18"/>
           <p:cNvSpPr/>
           <p:nvPr/>
         </p:nvSpPr>
@@ -7562,17 +9442,15 @@
             <a:off x="969264" y="4041648"/>
             <a:ext cx="329184" cy="329184"/>
           </a:xfrm>
-          <a:prstGeom prst="roundRect">
-            <a:avLst>
-              <a:gd name="adj" fmla="val 16667"/>
-            </a:avLst>
+          <a:prstGeom prst="ellipse">
+            <a:avLst/>
           </a:prstGeom>
           <a:solidFill>
-            <a:srgbClr val="FF4A1C"/>
+            <a:srgbClr val="111111"/>
           </a:solidFill>
-          <a:ln w="6350">
+          <a:ln w="12700">
             <a:solidFill>
-              <a:srgbClr val="FF4A1C"/>
+              <a:srgbClr val="111111"/>
             </a:solidFill>
             <a:prstDash val="solid"/>
           </a:ln>
@@ -7580,7 +9458,7 @@
       </p:sp>
       <p:sp>
         <p:nvSpPr>
-          <p:cNvPr id="17" name="Text 15"/>
+          <p:cNvPr id="21" name="Text 19"/>
           <p:cNvSpPr/>
           <p:nvPr/>
         </p:nvSpPr>
@@ -7619,7 +9497,7 @@
       </p:sp>
       <p:sp>
         <p:nvSpPr>
-          <p:cNvPr id="18" name="Text 16"/>
+          <p:cNvPr id="22" name="Text 20"/>
           <p:cNvSpPr/>
           <p:nvPr/>
         </p:nvSpPr>
@@ -7642,13 +9520,13 @@
               <a:buNone/>
             </a:pPr>
             <a:r>
-              <a:rPr lang="en-US" sz="1400" b="1" dirty="0">
-                <a:solidFill>
-                  <a:srgbClr val="14161B"/>
-                </a:solidFill>
-                <a:latin typeface="Pretendard" pitchFamily="34" charset="0"/>
-                <a:ea typeface="Pretendard" pitchFamily="34" charset="-122"/>
-                <a:cs typeface="Pretendard" pitchFamily="34" charset="-120"/>
+              <a:rPr lang="en-US" sz="1400" dirty="0">
+                <a:solidFill>
+                  <a:srgbClr val="111111"/>
+                </a:solidFill>
+                <a:latin typeface="Pretendard Black" pitchFamily="34" charset="0"/>
+                <a:ea typeface="Pretendard Black" pitchFamily="34" charset="-122"/>
+                <a:cs typeface="Pretendard Black" pitchFamily="34" charset="-120"/>
               </a:rPr>
               <a:t>다음 채울 것 3가지</a:t>
             </a:r>
@@ -7658,7 +9536,7 @@
       </p:sp>
       <p:sp>
         <p:nvSpPr>
-          <p:cNvPr id="19" name="Text 17"/>
+          <p:cNvPr id="23" name="Text 21"/>
           <p:cNvSpPr/>
           <p:nvPr/>
         </p:nvSpPr>
@@ -7686,7 +9564,7 @@
             <a:r>
               <a:rPr lang="en-US" sz="1100" dirty="0">
                 <a:solidFill>
-                  <a:srgbClr val="6B7280"/>
+                  <a:srgbClr val="6E6E6E"/>
                 </a:solidFill>
                 <a:latin typeface="Pretendard" pitchFamily="34" charset="0"/>
                 <a:ea typeface="Pretendard" pitchFamily="34" charset="-122"/>
@@ -7700,65 +9578,24 @@
       </p:sp>
       <p:sp>
         <p:nvSpPr>
-          <p:cNvPr id="20" name="Text 18"/>
-          <p:cNvSpPr/>
-          <p:nvPr/>
-        </p:nvSpPr>
-        <p:spPr>
-          <a:xfrm>
-            <a:off x="640080" y="4846320"/>
-            <a:ext cx="6309360" cy="329184"/>
-          </a:xfrm>
-          <a:prstGeom prst="rect">
-            <a:avLst/>
-          </a:prstGeom>
-          <a:noFill/>
-          <a:ln/>
-        </p:spPr>
-        <p:txBody>
-          <a:bodyPr wrap="square" lIns="0" tIns="0" rIns="0" bIns="0" rtlCol="0" anchor="ctr"/>
-          <a:lstStyle/>
-          <a:p>
-            <a:pPr indent="0" marL="0">
-              <a:buNone/>
-            </a:pPr>
-            <a:r>
-              <a:rPr lang="en-US" sz="1200" b="1" dirty="0">
-                <a:solidFill>
-                  <a:srgbClr val="FF4A1C"/>
-                </a:solidFill>
-                <a:latin typeface="Pretendard" pitchFamily="34" charset="0"/>
-                <a:ea typeface="Pretendard" pitchFamily="34" charset="-122"/>
-                <a:cs typeface="Pretendard" pitchFamily="34" charset="-120"/>
-              </a:rPr>
-              <a:t>제출 — 오늘 · 발표 후 최종본 제출</a:t>
-            </a:r>
-            <a:endParaRPr lang="en-US" sz="1200" dirty="0"/>
-          </a:p>
-        </p:txBody>
-      </p:sp>
-      <p:sp>
-        <p:nvSpPr>
-          <p:cNvPr id="21" name="Shape 19"/>
-          <p:cNvSpPr/>
-          <p:nvPr/>
-        </p:nvSpPr>
-        <p:spPr>
-          <a:xfrm>
-            <a:off x="7351776" y="1719072"/>
-            <a:ext cx="4199839" cy="3803904"/>
-          </a:xfrm>
-          <a:prstGeom prst="roundRect">
-            <a:avLst>
-              <a:gd name="adj" fmla="val 1923"/>
-            </a:avLst>
+          <p:cNvPr id="24" name="Shape 22"/>
+          <p:cNvSpPr/>
+          <p:nvPr/>
+        </p:nvSpPr>
+        <p:spPr>
+          <a:xfrm>
+            <a:off x="640080" y="4809744"/>
+            <a:ext cx="6309360" cy="7315"/>
+          </a:xfrm>
+          <a:prstGeom prst="rect">
+            <a:avLst/>
           </a:prstGeom>
           <a:solidFill>
-            <a:srgbClr val="14161B"/>
+            <a:srgbClr val="111111"/>
           </a:solidFill>
           <a:ln w="12700">
             <a:solidFill>
-              <a:srgbClr val="14161B"/>
+              <a:srgbClr val="111111"/>
             </a:solidFill>
             <a:prstDash val="solid"/>
           </a:ln>
@@ -7766,7 +9603,71 @@
       </p:sp>
       <p:sp>
         <p:nvSpPr>
-          <p:cNvPr id="22" name="Text 20"/>
+          <p:cNvPr id="25" name="Text 23"/>
+          <p:cNvSpPr/>
+          <p:nvPr/>
+        </p:nvSpPr>
+        <p:spPr>
+          <a:xfrm>
+            <a:off x="640080" y="4901184"/>
+            <a:ext cx="6309360" cy="329184"/>
+          </a:xfrm>
+          <a:prstGeom prst="rect">
+            <a:avLst/>
+          </a:prstGeom>
+          <a:noFill/>
+          <a:ln/>
+        </p:spPr>
+        <p:txBody>
+          <a:bodyPr wrap="square" lIns="0" tIns="0" rIns="0" bIns="0" rtlCol="0" anchor="ctr"/>
+          <a:lstStyle/>
+          <a:p>
+            <a:pPr indent="0" marL="0">
+              <a:buNone/>
+            </a:pPr>
+            <a:r>
+              <a:rPr lang="en-US" sz="1200" b="1" dirty="0">
+                <a:solidFill>
+                  <a:srgbClr val="111111"/>
+                </a:solidFill>
+                <a:latin typeface="Pretendard" pitchFamily="34" charset="0"/>
+                <a:ea typeface="Pretendard" pitchFamily="34" charset="-122"/>
+                <a:cs typeface="Pretendard" pitchFamily="34" charset="-120"/>
+              </a:rPr>
+              <a:t>제출 — 오늘 · 발표 후 최종본 제출</a:t>
+            </a:r>
+            <a:endParaRPr lang="en-US" sz="1200" dirty="0"/>
+          </a:p>
+        </p:txBody>
+      </p:sp>
+      <p:sp>
+        <p:nvSpPr>
+          <p:cNvPr id="26" name="Shape 24"/>
+          <p:cNvSpPr/>
+          <p:nvPr/>
+        </p:nvSpPr>
+        <p:spPr>
+          <a:xfrm>
+            <a:off x="7351776" y="1719072"/>
+            <a:ext cx="4199839" cy="3803904"/>
+          </a:xfrm>
+          <a:prstGeom prst="rect">
+            <a:avLst/>
+          </a:prstGeom>
+          <a:solidFill>
+            <a:srgbClr val="111111"/>
+          </a:solidFill>
+          <a:ln w="12700">
+            <a:solidFill>
+              <a:srgbClr val="111111"/>
+            </a:solidFill>
+            <a:prstDash val="solid"/>
+          </a:ln>
+        </p:spPr>
+      </p:sp>
+      <p:sp>
+        <p:nvSpPr>
+          <p:cNvPr id="27" name="Text 25"/>
           <p:cNvSpPr/>
           <p:nvPr/>
         </p:nvSpPr>
@@ -7789,9 +9690,9 @@
               <a:buNone/>
             </a:pPr>
             <a:r>
-              <a:rPr lang="en-US" sz="1000" b="1" spc="140" kern="0" dirty="0">
-                <a:solidFill>
-                  <a:srgbClr val="FF4A1C"/>
+              <a:rPr lang="en-US" sz="950" spc="260" kern="0" dirty="0">
+                <a:solidFill>
+                  <a:srgbClr val="9A9A9A"/>
                 </a:solidFill>
                 <a:latin typeface="Pretendard" pitchFamily="34" charset="0"/>
                 <a:ea typeface="Pretendard" pitchFamily="34" charset="-122"/>
@@ -7799,13 +9700,13 @@
               </a:rPr>
               <a:t>NEXT WEEK</a:t>
             </a:r>
-            <a:endParaRPr lang="en-US" sz="1000" dirty="0"/>
-          </a:p>
-        </p:txBody>
-      </p:sp>
-      <p:sp>
-        <p:nvSpPr>
-          <p:cNvPr id="23" name="Text 21"/>
+            <a:endParaRPr lang="en-US" sz="950" dirty="0"/>
+          </a:p>
+        </p:txBody>
+      </p:sp>
+      <p:sp>
+        <p:nvSpPr>
+          <p:cNvPr id="28" name="Text 26"/>
           <p:cNvSpPr/>
           <p:nvPr/>
         </p:nvSpPr>
@@ -7844,7 +9745,7 @@
       </p:sp>
       <p:sp>
         <p:nvSpPr>
-          <p:cNvPr id="24" name="Text 22"/>
+          <p:cNvPr id="29" name="Text 27"/>
           <p:cNvSpPr/>
           <p:nvPr/>
         </p:nvSpPr>
@@ -7870,13 +9771,13 @@
               <a:buNone/>
             </a:pPr>
             <a:r>
-              <a:rPr lang="en-US" sz="1700" b="1" dirty="0">
+              <a:rPr lang="en-US" sz="1700" dirty="0">
                 <a:solidFill>
                   <a:srgbClr val="FFFFFF"/>
                 </a:solidFill>
-                <a:latin typeface="Pretendard" pitchFamily="34" charset="0"/>
-                <a:ea typeface="Pretendard" pitchFamily="34" charset="-122"/>
-                <a:cs typeface="Pretendard" pitchFamily="34" charset="-120"/>
+                <a:latin typeface="Pretendard Black" pitchFamily="34" charset="0"/>
+                <a:ea typeface="Pretendard Black" pitchFamily="34" charset="-122"/>
+                <a:cs typeface="Pretendard Black" pitchFamily="34" charset="-120"/>
               </a:rPr>
               <a:t>학기 종료</a:t>
             </a:r>
@@ -7886,24 +9787,24 @@
       </p:sp>
       <p:sp>
         <p:nvSpPr>
-          <p:cNvPr id="25" name="Shape 23"/>
+          <p:cNvPr id="30" name="Shape 28"/>
           <p:cNvSpPr/>
           <p:nvPr/>
         </p:nvSpPr>
         <p:spPr>
           <a:xfrm>
             <a:off x="7735824" y="3346704"/>
-            <a:ext cx="3431743" cy="9144"/>
+            <a:ext cx="3431743" cy="7315"/>
           </a:xfrm>
           <a:prstGeom prst="rect">
             <a:avLst/>
           </a:prstGeom>
           <a:solidFill>
-            <a:srgbClr val="3A3F4B"/>
+            <a:srgbClr val="333333"/>
           </a:solidFill>
           <a:ln w="12700">
             <a:solidFill>
-              <a:srgbClr val="3A3F4B"/>
+              <a:srgbClr val="333333"/>
             </a:solidFill>
             <a:prstDash val="solid"/>
           </a:ln>
@@ -7911,7 +9812,7 @@
       </p:sp>
       <p:sp>
         <p:nvSpPr>
-          <p:cNvPr id="26" name="Text 24"/>
+          <p:cNvPr id="31" name="Text 29"/>
           <p:cNvSpPr/>
           <p:nvPr/>
         </p:nvSpPr>
@@ -7943,7 +9844,7 @@
             <a:r>
               <a:rPr lang="en-US" sz="1150" dirty="0">
                 <a:solidFill>
-                  <a:srgbClr val="DDE0E6"/>
+                  <a:srgbClr val="DDDDDD"/>
                 </a:solidFill>
                 <a:latin typeface="Pretendard" pitchFamily="34" charset="0"/>
                 <a:ea typeface="Pretendard" pitchFamily="34" charset="-122"/>
@@ -7967,7 +9868,7 @@
             <a:r>
               <a:rPr lang="en-US" sz="1150" dirty="0">
                 <a:solidFill>
-                  <a:srgbClr val="DDE0E6"/>
+                  <a:srgbClr val="DDDDDD"/>
                 </a:solidFill>
                 <a:latin typeface="Pretendard" pitchFamily="34" charset="0"/>
                 <a:ea typeface="Pretendard" pitchFamily="34" charset="-122"/>
@@ -7991,7 +9892,7 @@
             <a:r>
               <a:rPr lang="en-US" sz="1150" dirty="0">
                 <a:solidFill>
-                  <a:srgbClr val="DDE0E6"/>
+                  <a:srgbClr val="DDDDDD"/>
                 </a:solidFill>
                 <a:latin typeface="Pretendard" pitchFamily="34" charset="0"/>
                 <a:ea typeface="Pretendard" pitchFamily="34" charset="-122"/>
@@ -8015,7 +9916,7 @@
             <a:r>
               <a:rPr lang="en-US" sz="1150" dirty="0">
                 <a:solidFill>
-                  <a:srgbClr val="DDE0E6"/>
+                  <a:srgbClr val="DDDDDD"/>
                 </a:solidFill>
                 <a:latin typeface="Pretendard" pitchFamily="34" charset="0"/>
                 <a:ea typeface="Pretendard" pitchFamily="34" charset="-122"/>
@@ -8029,24 +9930,24 @@
       </p:sp>
       <p:sp>
         <p:nvSpPr>
-          <p:cNvPr id="27" name="Shape 25"/>
+          <p:cNvPr id="32" name="Shape 30"/>
           <p:cNvSpPr/>
           <p:nvPr/>
         </p:nvSpPr>
         <p:spPr>
           <a:xfrm>
             <a:off x="7735824" y="4700016"/>
-            <a:ext cx="3431743" cy="9144"/>
+            <a:ext cx="3431743" cy="7315"/>
           </a:xfrm>
           <a:prstGeom prst="rect">
             <a:avLst/>
           </a:prstGeom>
           <a:solidFill>
-            <a:srgbClr val="3A3F4B"/>
+            <a:srgbClr val="333333"/>
           </a:solidFill>
           <a:ln w="12700">
             <a:solidFill>
-              <a:srgbClr val="3A3F4B"/>
+              <a:srgbClr val="333333"/>
             </a:solidFill>
             <a:prstDash val="solid"/>
           </a:ln>
@@ -8054,7 +9955,7 @@
       </p:sp>
       <p:sp>
         <p:nvSpPr>
-          <p:cNvPr id="28" name="Text 26"/>
+          <p:cNvPr id="33" name="Text 31"/>
           <p:cNvSpPr/>
           <p:nvPr/>
         </p:nvSpPr>
@@ -8077,9 +9978,9 @@
               <a:buNone/>
             </a:pPr>
             <a:r>
-              <a:rPr lang="en-US" sz="950" b="1" spc="100" kern="0" dirty="0">
-                <a:solidFill>
-                  <a:srgbClr val="9AA0AA"/>
+              <a:rPr lang="en-US" sz="900" spc="160" kern="0" dirty="0">
+                <a:solidFill>
+                  <a:srgbClr val="9B9B9B"/>
                 </a:solidFill>
                 <a:latin typeface="Pretendard" pitchFamily="34" charset="0"/>
                 <a:ea typeface="Pretendard" pitchFamily="34" charset="-122"/>
@@ -8087,13 +9988,13 @@
               </a:rPr>
               <a:t>미리 준비할 것</a:t>
             </a:r>
-            <a:endParaRPr lang="en-US" sz="950" dirty="0"/>
-          </a:p>
-        </p:txBody>
-      </p:sp>
-      <p:sp>
-        <p:nvSpPr>
-          <p:cNvPr id="29" name="Text 27"/>
+            <a:endParaRPr lang="en-US" sz="900" dirty="0"/>
+          </a:p>
+        </p:txBody>
+      </p:sp>
+      <p:sp>
+        <p:nvSpPr>
+          <p:cNvPr id="34" name="Text 32"/>
           <p:cNvSpPr/>
           <p:nvPr/>
         </p:nvSpPr>
@@ -8121,7 +10022,7 @@
             <a:r>
               <a:rPr lang="en-US" sz="1100" b="1" dirty="0">
                 <a:solidFill>
-                  <a:srgbClr val="FF4A1C"/>
+                  <a:srgbClr val="FFFFFF"/>
                 </a:solidFill>
                 <a:latin typeface="Pretendard" pitchFamily="34" charset="0"/>
                 <a:ea typeface="Pretendard" pitchFamily="34" charset="-122"/>
@@ -8135,14 +10036,39 @@
       </p:sp>
       <p:sp>
         <p:nvSpPr>
-          <p:cNvPr id="30" name="Text 28"/>
-          <p:cNvSpPr/>
-          <p:nvPr/>
-        </p:nvSpPr>
-        <p:spPr>
-          <a:xfrm>
-            <a:off x="640080" y="6345936"/>
-            <a:ext cx="7772400" cy="256032"/>
+          <p:cNvPr id="35" name="Shape 33"/>
+          <p:cNvSpPr/>
+          <p:nvPr/>
+        </p:nvSpPr>
+        <p:spPr>
+          <a:xfrm>
+            <a:off x="640080" y="6291072"/>
+            <a:ext cx="10911535" cy="7315"/>
+          </a:xfrm>
+          <a:prstGeom prst="rect">
+            <a:avLst/>
+          </a:prstGeom>
+          <a:solidFill>
+            <a:srgbClr val="DCDCDC"/>
+          </a:solidFill>
+          <a:ln w="12700">
+            <a:solidFill>
+              <a:srgbClr val="DCDCDC"/>
+            </a:solidFill>
+            <a:prstDash val="solid"/>
+          </a:ln>
+        </p:spPr>
+      </p:sp>
+      <p:sp>
+        <p:nvSpPr>
+          <p:cNvPr id="36" name="Text 34"/>
+          <p:cNvSpPr/>
+          <p:nvPr/>
+        </p:nvSpPr>
+        <p:spPr>
+          <a:xfrm>
+            <a:off x="640080" y="6382512"/>
+            <a:ext cx="7772400" cy="237744"/>
           </a:xfrm>
           <a:prstGeom prst="rect">
             <a:avLst/>
@@ -8158,9 +10084,9 @@
               <a:buNone/>
             </a:pPr>
             <a:r>
-              <a:rPr lang="en-US" sz="900" dirty="0">
-                <a:solidFill>
-                  <a:srgbClr val="9AA0AA"/>
+              <a:rPr lang="en-US" sz="850" spc="40" kern="0" dirty="0">
+                <a:solidFill>
+                  <a:srgbClr val="9B9B9B"/>
                 </a:solidFill>
                 <a:latin typeface="Pretendard" pitchFamily="34" charset="0"/>
                 <a:ea typeface="Pretendard" pitchFamily="34" charset="-122"/>
@@ -8168,20 +10094,20 @@
               </a:rPr>
               <a:t>포트폴리오제작 · 15주차 기말 발표 및 종합 평가</a:t>
             </a:r>
-            <a:endParaRPr lang="en-US" sz="900" dirty="0"/>
-          </a:p>
-        </p:txBody>
-      </p:sp>
-      <p:sp>
-        <p:nvSpPr>
-          <p:cNvPr id="31" name="Text 29"/>
-          <p:cNvSpPr/>
-          <p:nvPr/>
-        </p:nvSpPr>
-        <p:spPr>
-          <a:xfrm>
-            <a:off x="10454335" y="6345936"/>
-            <a:ext cx="1097280" cy="256032"/>
+            <a:endParaRPr lang="en-US" sz="850" dirty="0"/>
+          </a:p>
+        </p:txBody>
+      </p:sp>
+      <p:sp>
+        <p:nvSpPr>
+          <p:cNvPr id="37" name="Text 35"/>
+          <p:cNvSpPr/>
+          <p:nvPr/>
+        </p:nvSpPr>
+        <p:spPr>
+          <a:xfrm>
+            <a:off x="10271455" y="6382512"/>
+            <a:ext cx="1280160" cy="237744"/>
           </a:xfrm>
           <a:prstGeom prst="rect">
             <a:avLst/>
@@ -8197,17 +10123,17 @@
               <a:buNone/>
             </a:pPr>
             <a:r>
-              <a:rPr lang="en-US" sz="900" dirty="0">
-                <a:solidFill>
-                  <a:srgbClr val="9AA0AA"/>
-                </a:solidFill>
-                <a:latin typeface="Pretendard" pitchFamily="34" charset="0"/>
-                <a:ea typeface="Pretendard" pitchFamily="34" charset="-122"/>
-                <a:cs typeface="Pretendard" pitchFamily="34" charset="-120"/>
-              </a:rPr>
-              <a:t>06</a:t>
-            </a:r>
-            <a:endParaRPr lang="en-US" sz="900" dirty="0"/>
+              <a:rPr lang="en-US" sz="850" spc="140" kern="0" dirty="0">
+                <a:solidFill>
+                  <a:srgbClr val="9B9B9B"/>
+                </a:solidFill>
+                <a:latin typeface="Pretendard" pitchFamily="34" charset="0"/>
+                <a:ea typeface="Pretendard" pitchFamily="34" charset="-122"/>
+                <a:cs typeface="Pretendard" pitchFamily="34" charset="-120"/>
+              </a:rPr>
+              <a:t>P.06</a:t>
+            </a:r>
+            <a:endParaRPr lang="en-US" sz="850" dirty="0"/>
           </a:p>
         </p:txBody>
       </p:sp>

--- a/dist/weeks-포트폴리오제작/포트폴리오제작_15주차_기말발표.pptx
+++ b/dist/weeks-포트폴리오제작/포트폴리오제작_15주차_기말발표.pptx
@@ -5107,7 +5107,7 @@
         <p:spPr>
           <a:xfrm>
             <a:off x="1353312" y="1755648"/>
-            <a:ext cx="4248760" cy="585216"/>
+            <a:ext cx="4267048" cy="585216"/>
           </a:xfrm>
           <a:prstGeom prst="rect">
             <a:avLst/>
@@ -5235,7 +5235,7 @@
         <p:spPr>
           <a:xfrm>
             <a:off x="1353312" y="2487168"/>
-            <a:ext cx="4248760" cy="585216"/>
+            <a:ext cx="4267048" cy="585216"/>
           </a:xfrm>
           <a:prstGeom prst="rect">
             <a:avLst/>
@@ -5363,7 +5363,7 @@
         <p:spPr>
           <a:xfrm>
             <a:off x="1353312" y="3218688"/>
-            <a:ext cx="4248760" cy="585216"/>
+            <a:ext cx="4267048" cy="585216"/>
           </a:xfrm>
           <a:prstGeom prst="rect">
             <a:avLst/>
@@ -5491,7 +5491,7 @@
         <p:spPr>
           <a:xfrm>
             <a:off x="1353312" y="3950208"/>
-            <a:ext cx="4248760" cy="585216"/>
+            <a:ext cx="4267048" cy="585216"/>
           </a:xfrm>
           <a:prstGeom prst="rect">
             <a:avLst/>
@@ -5619,7 +5619,7 @@
         <p:spPr>
           <a:xfrm>
             <a:off x="7010248" y="1755648"/>
-            <a:ext cx="4248760" cy="585216"/>
+            <a:ext cx="4267048" cy="585216"/>
           </a:xfrm>
           <a:prstGeom prst="rect">
             <a:avLst/>
@@ -5747,7 +5747,7 @@
         <p:spPr>
           <a:xfrm>
             <a:off x="7010248" y="2487168"/>
-            <a:ext cx="4248760" cy="585216"/>
+            <a:ext cx="4267048" cy="585216"/>
           </a:xfrm>
           <a:prstGeom prst="rect">
             <a:avLst/>
@@ -5875,7 +5875,7 @@
         <p:spPr>
           <a:xfrm>
             <a:off x="7010248" y="3218688"/>
-            <a:ext cx="4248760" cy="585216"/>
+            <a:ext cx="4267048" cy="585216"/>
           </a:xfrm>
           <a:prstGeom prst="rect">
             <a:avLst/>
@@ -6003,7 +6003,7 @@
         <p:spPr>
           <a:xfrm>
             <a:off x="7010248" y="3950208"/>
-            <a:ext cx="4248760" cy="585216"/>
+            <a:ext cx="4267048" cy="585216"/>
           </a:xfrm>
           <a:prstGeom prst="rect">
             <a:avLst/>
@@ -6041,7 +6041,7 @@
         </p:nvSpPr>
         <p:spPr>
           <a:xfrm>
-            <a:off x="640080" y="5468112"/>
+            <a:off x="640080" y="4736592"/>
             <a:ext cx="10911535" cy="7315"/>
           </a:xfrm>
           <a:prstGeom prst="rect">
@@ -6066,7 +6066,7 @@
         </p:nvSpPr>
         <p:spPr>
           <a:xfrm>
-            <a:off x="640080" y="5577840"/>
+            <a:off x="640080" y="4846320"/>
             <a:ext cx="10911535" cy="402336"/>
           </a:xfrm>
           <a:prstGeom prst="rect">

--- a/dist/weeks-포트폴리오제작/포트폴리오제작_15주차_기말발표.pptx
+++ b/dist/weeks-포트폴리오제작/포트폴리오제작_15주차_기말발표.pptx
@@ -2155,7 +2155,7 @@
                 <a:ea typeface="Pretendard" pitchFamily="34" charset="-122"/>
                 <a:cs typeface="Pretendard" pitchFamily="34" charset="-120"/>
               </a:rPr>
-              <a:t>90분 — 개인별 최종 발표 각 7분 · 종합 피드백 30분</a:t>
+              <a:t>120분 — 개인별 최종 발표 각 8분 · 종합 피드백 15분</a:t>
             </a:r>
             <a:endParaRPr lang="en-US" sz="1200" dirty="0"/>
           </a:p>
@@ -2549,7 +2549,7 @@
                 <a:ea typeface="Pretendard Black" pitchFamily="34" charset="-122"/>
                 <a:cs typeface="Pretendard Black" pitchFamily="34" charset="-120"/>
               </a:rPr>
-              <a:t>오늘의 90분</a:t>
+              <a:t>오늘의 120분</a:t>
             </a:r>
             <a:endParaRPr lang="en-US" sz="3000" dirty="0"/>
           </a:p>
@@ -2588,7 +2588,7 @@
                 <a:ea typeface="Pretendard" pitchFamily="34" charset="-122"/>
                 <a:cs typeface="Pretendard" pitchFamily="34" charset="-120"/>
               </a:rPr>
-              <a:t>개인별 최종 발표 각 7분 · 종합 피드백 30분</a:t>
+              <a:t>개인별 최종 발표 각 8분 · 종합 피드백 15분</a:t>
             </a:r>
             <a:endParaRPr lang="en-US" sz="1150" dirty="0"/>
           </a:p>
@@ -2628,7 +2628,7 @@
         <p:spPr>
           <a:xfrm>
             <a:off x="640080" y="1719072"/>
-            <a:ext cx="1600200" cy="932688"/>
+            <a:ext cx="1600200" cy="691896"/>
           </a:xfrm>
           <a:prstGeom prst="rect">
             <a:avLst/>
@@ -2652,7 +2652,7 @@
                 <a:ea typeface="Pretendard" pitchFamily="34" charset="-122"/>
                 <a:cs typeface="Pretendard" pitchFamily="34" charset="-120"/>
               </a:rPr>
-              <a:t>00:00–01:00</a:t>
+              <a:t>00:00–00:10</a:t>
             </a:r>
             <a:endParaRPr lang="en-US" sz="1050" dirty="0"/>
           </a:p>
@@ -2667,7 +2667,7 @@
         <p:spPr>
           <a:xfrm>
             <a:off x="2377440" y="1719072"/>
-            <a:ext cx="6888175" cy="932688"/>
+            <a:ext cx="6888175" cy="691896"/>
           </a:xfrm>
           <a:prstGeom prst="rect">
             <a:avLst/>
@@ -2691,7 +2691,7 @@
                 <a:ea typeface="Pretendard" pitchFamily="34" charset="-122"/>
                 <a:cs typeface="Pretendard" pitchFamily="34" charset="-120"/>
               </a:rPr>
-              <a:t>개인별 최종 발표 · 각 7분</a:t>
+              <a:t>발표 순서 · 평가 안내</a:t>
             </a:r>
             <a:endParaRPr lang="en-US" sz="1300" dirty="0"/>
           </a:p>
@@ -2706,7 +2706,7 @@
         <p:spPr>
           <a:xfrm>
             <a:off x="9265615" y="1719072"/>
-            <a:ext cx="2286000" cy="932688"/>
+            <a:ext cx="2286000" cy="691896"/>
           </a:xfrm>
           <a:prstGeom prst="rect">
             <a:avLst/>
@@ -2730,7 +2730,7 @@
                 <a:ea typeface="Pretendard" pitchFamily="34" charset="-122"/>
                 <a:cs typeface="Pretendard" pitchFamily="34" charset="-120"/>
               </a:rPr>
-              <a:t>발표 + 질의</a:t>
+              <a:t>안내</a:t>
             </a:r>
             <a:endParaRPr lang="en-US" sz="1050" dirty="0"/>
           </a:p>
@@ -2744,7 +2744,7 @@
         </p:nvSpPr>
         <p:spPr>
           <a:xfrm>
-            <a:off x="640080" y="2633472"/>
+            <a:off x="640080" y="2392680"/>
             <a:ext cx="10911535" cy="7315"/>
           </a:xfrm>
           <a:prstGeom prst="rect">
@@ -2769,8 +2769,8 @@
         </p:nvSpPr>
         <p:spPr>
           <a:xfrm>
-            <a:off x="640080" y="2651760"/>
-            <a:ext cx="1600200" cy="932688"/>
+            <a:off x="640080" y="2410968"/>
+            <a:ext cx="1600200" cy="691896"/>
           </a:xfrm>
           <a:prstGeom prst="rect">
             <a:avLst/>
@@ -2794,7 +2794,7 @@
                 <a:ea typeface="Pretendard" pitchFamily="34" charset="-122"/>
                 <a:cs typeface="Pretendard" pitchFamily="34" charset="-120"/>
               </a:rPr>
-              <a:t>01:00–01:20</a:t>
+              <a:t>00:10–01:05</a:t>
             </a:r>
             <a:endParaRPr lang="en-US" sz="1050" dirty="0"/>
           </a:p>
@@ -2808,8 +2808,8 @@
         </p:nvSpPr>
         <p:spPr>
           <a:xfrm>
-            <a:off x="2377440" y="2651760"/>
-            <a:ext cx="6888175" cy="932688"/>
+            <a:off x="2377440" y="2410968"/>
+            <a:ext cx="6888175" cy="691896"/>
           </a:xfrm>
           <a:prstGeom prst="rect">
             <a:avLst/>
@@ -2833,7 +2833,7 @@
                 <a:ea typeface="Pretendard" pitchFamily="34" charset="-122"/>
                 <a:cs typeface="Pretendard" pitchFamily="34" charset="-120"/>
               </a:rPr>
-              <a:t>종합 피드백 및 총평</a:t>
+              <a:t>개인별 최종 발표 1부 · 각 8분</a:t>
             </a:r>
             <a:endParaRPr lang="en-US" sz="1300" dirty="0"/>
           </a:p>
@@ -2847,8 +2847,8 @@
         </p:nvSpPr>
         <p:spPr>
           <a:xfrm>
-            <a:off x="9265615" y="2651760"/>
-            <a:ext cx="2286000" cy="932688"/>
+            <a:off x="9265615" y="2410968"/>
+            <a:ext cx="2286000" cy="691896"/>
           </a:xfrm>
           <a:prstGeom prst="rect">
             <a:avLst/>
@@ -2872,7 +2872,7 @@
                 <a:ea typeface="Pretendard" pitchFamily="34" charset="-122"/>
                 <a:cs typeface="Pretendard" pitchFamily="34" charset="-120"/>
               </a:rPr>
-              <a:t>강의</a:t>
+              <a:t>발표 + 질의</a:t>
             </a:r>
             <a:endParaRPr lang="en-US" sz="1050" dirty="0"/>
           </a:p>
@@ -2886,7 +2886,7 @@
         </p:nvSpPr>
         <p:spPr>
           <a:xfrm>
-            <a:off x="640080" y="3566160"/>
+            <a:off x="640080" y="3084576"/>
             <a:ext cx="10911535" cy="7315"/>
           </a:xfrm>
           <a:prstGeom prst="rect">
@@ -2911,8 +2911,8 @@
         </p:nvSpPr>
         <p:spPr>
           <a:xfrm>
-            <a:off x="640080" y="3584448"/>
-            <a:ext cx="1600200" cy="932688"/>
+            <a:off x="640080" y="3102864"/>
+            <a:ext cx="1600200" cy="691896"/>
           </a:xfrm>
           <a:prstGeom prst="rect">
             <a:avLst/>
@@ -2928,6 +2928,109 @@
               <a:buNone/>
             </a:pPr>
             <a:r>
+              <a:rPr lang="en-US" sz="1050" spc="60" kern="0" dirty="0">
+                <a:solidFill>
+                  <a:srgbClr val="9B9B9B"/>
+                </a:solidFill>
+                <a:latin typeface="Pretendard" pitchFamily="34" charset="0"/>
+                <a:ea typeface="Pretendard" pitchFamily="34" charset="-122"/>
+                <a:cs typeface="Pretendard" pitchFamily="34" charset="-120"/>
+              </a:rPr>
+              <a:t>01:05–01:15</a:t>
+            </a:r>
+            <a:endParaRPr lang="en-US" sz="1050" dirty="0"/>
+          </a:p>
+        </p:txBody>
+      </p:sp>
+      <p:sp>
+        <p:nvSpPr>
+          <p:cNvPr id="19" name="Text 17"/>
+          <p:cNvSpPr/>
+          <p:nvPr/>
+        </p:nvSpPr>
+        <p:spPr>
+          <a:xfrm>
+            <a:off x="2377440" y="3102864"/>
+            <a:ext cx="6888175" cy="691896"/>
+          </a:xfrm>
+          <a:prstGeom prst="rect">
+            <a:avLst/>
+          </a:prstGeom>
+          <a:noFill/>
+          <a:ln/>
+        </p:spPr>
+        <p:txBody>
+          <a:bodyPr wrap="square" lIns="0" tIns="0" rIns="0" bIns="0" rtlCol="0" anchor="ctr"/>
+          <a:lstStyle/>
+          <a:p>
+            <a:pPr indent="0" marL="0">
+              <a:buNone/>
+            </a:pPr>
+            <a:r>
+              <a:rPr lang="en-US" sz="1100" dirty="0">
+                <a:solidFill>
+                  <a:srgbClr val="9B9B9B"/>
+                </a:solidFill>
+                <a:latin typeface="Pretendard" pitchFamily="34" charset="0"/>
+                <a:ea typeface="Pretendard" pitchFamily="34" charset="-122"/>
+                <a:cs typeface="Pretendard" pitchFamily="34" charset="-120"/>
+              </a:rPr>
+              <a:t>휴식</a:t>
+            </a:r>
+            <a:endParaRPr lang="en-US" sz="1100" dirty="0"/>
+          </a:p>
+        </p:txBody>
+      </p:sp>
+      <p:sp>
+        <p:nvSpPr>
+          <p:cNvPr id="20" name="Shape 18"/>
+          <p:cNvSpPr/>
+          <p:nvPr/>
+        </p:nvSpPr>
+        <p:spPr>
+          <a:xfrm>
+            <a:off x="640080" y="3776472"/>
+            <a:ext cx="10911535" cy="7315"/>
+          </a:xfrm>
+          <a:prstGeom prst="rect">
+            <a:avLst/>
+          </a:prstGeom>
+          <a:solidFill>
+            <a:srgbClr val="EFEFEF"/>
+          </a:solidFill>
+          <a:ln w="12700">
+            <a:solidFill>
+              <a:srgbClr val="EFEFEF"/>
+            </a:solidFill>
+            <a:prstDash val="solid"/>
+          </a:ln>
+        </p:spPr>
+      </p:sp>
+      <p:sp>
+        <p:nvSpPr>
+          <p:cNvPr id="21" name="Text 19"/>
+          <p:cNvSpPr/>
+          <p:nvPr/>
+        </p:nvSpPr>
+        <p:spPr>
+          <a:xfrm>
+            <a:off x="640080" y="3794760"/>
+            <a:ext cx="1600200" cy="691896"/>
+          </a:xfrm>
+          <a:prstGeom prst="rect">
+            <a:avLst/>
+          </a:prstGeom>
+          <a:noFill/>
+          <a:ln/>
+        </p:spPr>
+        <p:txBody>
+          <a:bodyPr wrap="square" lIns="0" tIns="0" rIns="0" bIns="0" rtlCol="0" anchor="ctr"/>
+          <a:lstStyle/>
+          <a:p>
+            <a:pPr indent="0" marL="0">
+              <a:buNone/>
+            </a:pPr>
+            <a:r>
               <a:rPr lang="en-US" sz="1050" b="1" spc="60" kern="0" dirty="0">
                 <a:solidFill>
                   <a:srgbClr val="111111"/>
@@ -2936,7 +3039,7 @@
                 <a:ea typeface="Pretendard" pitchFamily="34" charset="-122"/>
                 <a:cs typeface="Pretendard" pitchFamily="34" charset="-120"/>
               </a:rPr>
-              <a:t>01:20–01:30</a:t>
+              <a:t>01:15–01:45</a:t>
             </a:r>
             <a:endParaRPr lang="en-US" sz="1050" dirty="0"/>
           </a:p>
@@ -2944,14 +3047,14 @@
       </p:sp>
       <p:sp>
         <p:nvSpPr>
-          <p:cNvPr id="19" name="Text 17"/>
-          <p:cNvSpPr/>
-          <p:nvPr/>
-        </p:nvSpPr>
-        <p:spPr>
-          <a:xfrm>
-            <a:off x="2377440" y="3584448"/>
-            <a:ext cx="6888175" cy="932688"/>
+          <p:cNvPr id="22" name="Text 20"/>
+          <p:cNvSpPr/>
+          <p:nvPr/>
+        </p:nvSpPr>
+        <p:spPr>
+          <a:xfrm>
+            <a:off x="2377440" y="3794760"/>
+            <a:ext cx="6888175" cy="691896"/>
           </a:xfrm>
           <a:prstGeom prst="rect">
             <a:avLst/>
@@ -2975,6 +3078,290 @@
                 <a:ea typeface="Pretendard" pitchFamily="34" charset="-122"/>
                 <a:cs typeface="Pretendard" pitchFamily="34" charset="-120"/>
               </a:rPr>
+              <a:t>개인별 최종 발표 2부 · 각 8분</a:t>
+            </a:r>
+            <a:endParaRPr lang="en-US" sz="1300" dirty="0"/>
+          </a:p>
+        </p:txBody>
+      </p:sp>
+      <p:sp>
+        <p:nvSpPr>
+          <p:cNvPr id="23" name="Text 21"/>
+          <p:cNvSpPr/>
+          <p:nvPr/>
+        </p:nvSpPr>
+        <p:spPr>
+          <a:xfrm>
+            <a:off x="9265615" y="3794760"/>
+            <a:ext cx="2286000" cy="691896"/>
+          </a:xfrm>
+          <a:prstGeom prst="rect">
+            <a:avLst/>
+          </a:prstGeom>
+          <a:noFill/>
+          <a:ln/>
+        </p:spPr>
+        <p:txBody>
+          <a:bodyPr wrap="square" lIns="0" tIns="0" rIns="0" bIns="0" rtlCol="0" anchor="ctr"/>
+          <a:lstStyle/>
+          <a:p>
+            <a:pPr algn="r" indent="0" marL="0">
+              <a:buNone/>
+            </a:pPr>
+            <a:r>
+              <a:rPr lang="en-US" sz="1050" dirty="0">
+                <a:solidFill>
+                  <a:srgbClr val="6E6E6E"/>
+                </a:solidFill>
+                <a:latin typeface="Pretendard" pitchFamily="34" charset="0"/>
+                <a:ea typeface="Pretendard" pitchFamily="34" charset="-122"/>
+                <a:cs typeface="Pretendard" pitchFamily="34" charset="-120"/>
+              </a:rPr>
+              <a:t>발표 + 질의</a:t>
+            </a:r>
+            <a:endParaRPr lang="en-US" sz="1050" dirty="0"/>
+          </a:p>
+        </p:txBody>
+      </p:sp>
+      <p:sp>
+        <p:nvSpPr>
+          <p:cNvPr id="24" name="Shape 22"/>
+          <p:cNvSpPr/>
+          <p:nvPr/>
+        </p:nvSpPr>
+        <p:spPr>
+          <a:xfrm>
+            <a:off x="640080" y="4468368"/>
+            <a:ext cx="10911535" cy="7315"/>
+          </a:xfrm>
+          <a:prstGeom prst="rect">
+            <a:avLst/>
+          </a:prstGeom>
+          <a:solidFill>
+            <a:srgbClr val="DCDCDC"/>
+          </a:solidFill>
+          <a:ln w="12700">
+            <a:solidFill>
+              <a:srgbClr val="DCDCDC"/>
+            </a:solidFill>
+            <a:prstDash val="solid"/>
+          </a:ln>
+        </p:spPr>
+      </p:sp>
+      <p:sp>
+        <p:nvSpPr>
+          <p:cNvPr id="25" name="Text 23"/>
+          <p:cNvSpPr/>
+          <p:nvPr/>
+        </p:nvSpPr>
+        <p:spPr>
+          <a:xfrm>
+            <a:off x="640080" y="4486656"/>
+            <a:ext cx="1600200" cy="691896"/>
+          </a:xfrm>
+          <a:prstGeom prst="rect">
+            <a:avLst/>
+          </a:prstGeom>
+          <a:noFill/>
+          <a:ln/>
+        </p:spPr>
+        <p:txBody>
+          <a:bodyPr wrap="square" lIns="0" tIns="0" rIns="0" bIns="0" rtlCol="0" anchor="ctr"/>
+          <a:lstStyle/>
+          <a:p>
+            <a:pPr indent="0" marL="0">
+              <a:buNone/>
+            </a:pPr>
+            <a:r>
+              <a:rPr lang="en-US" sz="1050" b="1" spc="60" kern="0" dirty="0">
+                <a:solidFill>
+                  <a:srgbClr val="111111"/>
+                </a:solidFill>
+                <a:latin typeface="Pretendard" pitchFamily="34" charset="0"/>
+                <a:ea typeface="Pretendard" pitchFamily="34" charset="-122"/>
+                <a:cs typeface="Pretendard" pitchFamily="34" charset="-120"/>
+              </a:rPr>
+              <a:t>01:45–01:55</a:t>
+            </a:r>
+            <a:endParaRPr lang="en-US" sz="1050" dirty="0"/>
+          </a:p>
+        </p:txBody>
+      </p:sp>
+      <p:sp>
+        <p:nvSpPr>
+          <p:cNvPr id="26" name="Text 24"/>
+          <p:cNvSpPr/>
+          <p:nvPr/>
+        </p:nvSpPr>
+        <p:spPr>
+          <a:xfrm>
+            <a:off x="2377440" y="4486656"/>
+            <a:ext cx="6888175" cy="691896"/>
+          </a:xfrm>
+          <a:prstGeom prst="rect">
+            <a:avLst/>
+          </a:prstGeom>
+          <a:noFill/>
+          <a:ln/>
+        </p:spPr>
+        <p:txBody>
+          <a:bodyPr wrap="square" lIns="0" tIns="0" rIns="0" bIns="0" rtlCol="0" anchor="ctr"/>
+          <a:lstStyle/>
+          <a:p>
+            <a:pPr indent="0" marL="0">
+              <a:buNone/>
+            </a:pPr>
+            <a:r>
+              <a:rPr lang="en-US" sz="1300" b="1" dirty="0">
+                <a:solidFill>
+                  <a:srgbClr val="111111"/>
+                </a:solidFill>
+                <a:latin typeface="Pretendard" pitchFamily="34" charset="0"/>
+                <a:ea typeface="Pretendard" pitchFamily="34" charset="-122"/>
+                <a:cs typeface="Pretendard" pitchFamily="34" charset="-120"/>
+              </a:rPr>
+              <a:t>종합 피드백 및 총평</a:t>
+            </a:r>
+            <a:endParaRPr lang="en-US" sz="1300" dirty="0"/>
+          </a:p>
+        </p:txBody>
+      </p:sp>
+      <p:sp>
+        <p:nvSpPr>
+          <p:cNvPr id="27" name="Text 25"/>
+          <p:cNvSpPr/>
+          <p:nvPr/>
+        </p:nvSpPr>
+        <p:spPr>
+          <a:xfrm>
+            <a:off x="9265615" y="4486656"/>
+            <a:ext cx="2286000" cy="691896"/>
+          </a:xfrm>
+          <a:prstGeom prst="rect">
+            <a:avLst/>
+          </a:prstGeom>
+          <a:noFill/>
+          <a:ln/>
+        </p:spPr>
+        <p:txBody>
+          <a:bodyPr wrap="square" lIns="0" tIns="0" rIns="0" bIns="0" rtlCol="0" anchor="ctr"/>
+          <a:lstStyle/>
+          <a:p>
+            <a:pPr algn="r" indent="0" marL="0">
+              <a:buNone/>
+            </a:pPr>
+            <a:r>
+              <a:rPr lang="en-US" sz="1050" dirty="0">
+                <a:solidFill>
+                  <a:srgbClr val="6E6E6E"/>
+                </a:solidFill>
+                <a:latin typeface="Pretendard" pitchFamily="34" charset="0"/>
+                <a:ea typeface="Pretendard" pitchFamily="34" charset="-122"/>
+                <a:cs typeface="Pretendard" pitchFamily="34" charset="-120"/>
+              </a:rPr>
+              <a:t>강의</a:t>
+            </a:r>
+            <a:endParaRPr lang="en-US" sz="1050" dirty="0"/>
+          </a:p>
+        </p:txBody>
+      </p:sp>
+      <p:sp>
+        <p:nvSpPr>
+          <p:cNvPr id="28" name="Shape 26"/>
+          <p:cNvSpPr/>
+          <p:nvPr/>
+        </p:nvSpPr>
+        <p:spPr>
+          <a:xfrm>
+            <a:off x="640080" y="5160264"/>
+            <a:ext cx="10911535" cy="7315"/>
+          </a:xfrm>
+          <a:prstGeom prst="rect">
+            <a:avLst/>
+          </a:prstGeom>
+          <a:solidFill>
+            <a:srgbClr val="DCDCDC"/>
+          </a:solidFill>
+          <a:ln w="12700">
+            <a:solidFill>
+              <a:srgbClr val="DCDCDC"/>
+            </a:solidFill>
+            <a:prstDash val="solid"/>
+          </a:ln>
+        </p:spPr>
+      </p:sp>
+      <p:sp>
+        <p:nvSpPr>
+          <p:cNvPr id="29" name="Text 27"/>
+          <p:cNvSpPr/>
+          <p:nvPr/>
+        </p:nvSpPr>
+        <p:spPr>
+          <a:xfrm>
+            <a:off x="640080" y="5178552"/>
+            <a:ext cx="1600200" cy="691896"/>
+          </a:xfrm>
+          <a:prstGeom prst="rect">
+            <a:avLst/>
+          </a:prstGeom>
+          <a:noFill/>
+          <a:ln/>
+        </p:spPr>
+        <p:txBody>
+          <a:bodyPr wrap="square" lIns="0" tIns="0" rIns="0" bIns="0" rtlCol="0" anchor="ctr"/>
+          <a:lstStyle/>
+          <a:p>
+            <a:pPr indent="0" marL="0">
+              <a:buNone/>
+            </a:pPr>
+            <a:r>
+              <a:rPr lang="en-US" sz="1050" b="1" spc="60" kern="0" dirty="0">
+                <a:solidFill>
+                  <a:srgbClr val="111111"/>
+                </a:solidFill>
+                <a:latin typeface="Pretendard" pitchFamily="34" charset="0"/>
+                <a:ea typeface="Pretendard" pitchFamily="34" charset="-122"/>
+                <a:cs typeface="Pretendard" pitchFamily="34" charset="-120"/>
+              </a:rPr>
+              <a:t>01:55–02:00</a:t>
+            </a:r>
+            <a:endParaRPr lang="en-US" sz="1050" dirty="0"/>
+          </a:p>
+        </p:txBody>
+      </p:sp>
+      <p:sp>
+        <p:nvSpPr>
+          <p:cNvPr id="30" name="Text 28"/>
+          <p:cNvSpPr/>
+          <p:nvPr/>
+        </p:nvSpPr>
+        <p:spPr>
+          <a:xfrm>
+            <a:off x="2377440" y="5178552"/>
+            <a:ext cx="6888175" cy="691896"/>
+          </a:xfrm>
+          <a:prstGeom prst="rect">
+            <a:avLst/>
+          </a:prstGeom>
+          <a:noFill/>
+          <a:ln/>
+        </p:spPr>
+        <p:txBody>
+          <a:bodyPr wrap="square" lIns="0" tIns="0" rIns="0" bIns="0" rtlCol="0" anchor="ctr"/>
+          <a:lstStyle/>
+          <a:p>
+            <a:pPr indent="0" marL="0">
+              <a:buNone/>
+            </a:pPr>
+            <a:r>
+              <a:rPr lang="en-US" sz="1300" b="1" dirty="0">
+                <a:solidFill>
+                  <a:srgbClr val="111111"/>
+                </a:solidFill>
+                <a:latin typeface="Pretendard" pitchFamily="34" charset="0"/>
+                <a:ea typeface="Pretendard" pitchFamily="34" charset="-122"/>
+                <a:cs typeface="Pretendard" pitchFamily="34" charset="-120"/>
+              </a:rPr>
               <a:t>자기평가 · 차년도 준비 안내</a:t>
             </a:r>
             <a:endParaRPr lang="en-US" sz="1300" dirty="0"/>
@@ -2983,14 +3370,14 @@
       </p:sp>
       <p:sp>
         <p:nvSpPr>
-          <p:cNvPr id="20" name="Text 18"/>
-          <p:cNvSpPr/>
-          <p:nvPr/>
-        </p:nvSpPr>
-        <p:spPr>
-          <a:xfrm>
-            <a:off x="9265615" y="3584448"/>
-            <a:ext cx="2286000" cy="932688"/>
+          <p:cNvPr id="31" name="Text 29"/>
+          <p:cNvSpPr/>
+          <p:nvPr/>
+        </p:nvSpPr>
+        <p:spPr>
+          <a:xfrm>
+            <a:off x="9265615" y="5178552"/>
+            <a:ext cx="2286000" cy="691896"/>
           </a:xfrm>
           <a:prstGeom prst="rect">
             <a:avLst/>
@@ -3014,7 +3401,7 @@
                 <a:ea typeface="Pretendard" pitchFamily="34" charset="-122"/>
                 <a:cs typeface="Pretendard" pitchFamily="34" charset="-120"/>
               </a:rPr>
-              <a:t>개인 워크 + 안내</a:t>
+              <a:t>안내</a:t>
             </a:r>
             <a:endParaRPr lang="en-US" sz="1050" dirty="0"/>
           </a:p>
@@ -3022,14 +3409,14 @@
       </p:sp>
       <p:sp>
         <p:nvSpPr>
-          <p:cNvPr id="21" name="Shape 19"/>
-          <p:cNvSpPr/>
-          <p:nvPr/>
-        </p:nvSpPr>
-        <p:spPr>
-          <a:xfrm>
-            <a:off x="640080" y="4828032"/>
-            <a:ext cx="10911535" cy="969264"/>
+          <p:cNvPr id="32" name="Shape 30"/>
+          <p:cNvSpPr/>
+          <p:nvPr/>
+        </p:nvSpPr>
+        <p:spPr>
+          <a:xfrm>
+            <a:off x="640080" y="5852160"/>
+            <a:ext cx="10911535" cy="7315"/>
           </a:xfrm>
           <a:prstGeom prst="rect">
             <a:avLst/>
@@ -3047,88 +3434,7 @@
       </p:sp>
       <p:sp>
         <p:nvSpPr>
-          <p:cNvPr id="22" name="Text 20"/>
-          <p:cNvSpPr/>
-          <p:nvPr/>
-        </p:nvSpPr>
-        <p:spPr>
-          <a:xfrm>
-            <a:off x="1097280" y="5010912"/>
-            <a:ext cx="2743200" cy="256032"/>
-          </a:xfrm>
-          <a:prstGeom prst="rect">
-            <a:avLst/>
-          </a:prstGeom>
-          <a:noFill/>
-          <a:ln/>
-        </p:spPr>
-        <p:txBody>
-          <a:bodyPr wrap="square" lIns="0" tIns="0" rIns="0" bIns="0" rtlCol="0" anchor="ctr"/>
-          <a:lstStyle/>
-          <a:p>
-            <a:pPr indent="0" marL="0">
-              <a:buNone/>
-            </a:pPr>
-            <a:r>
-              <a:rPr lang="en-US" sz="950" spc="240" kern="0" dirty="0">
-                <a:solidFill>
-                  <a:srgbClr val="9A9A9A"/>
-                </a:solidFill>
-                <a:latin typeface="Pretendard" pitchFamily="34" charset="0"/>
-                <a:ea typeface="Pretendard" pitchFamily="34" charset="-122"/>
-                <a:cs typeface="Pretendard" pitchFamily="34" charset="-120"/>
-              </a:rPr>
-              <a:t>오늘 끝나면</a:t>
-            </a:r>
-            <a:endParaRPr lang="en-US" sz="950" dirty="0"/>
-          </a:p>
-        </p:txBody>
-      </p:sp>
-      <p:sp>
-        <p:nvSpPr>
-          <p:cNvPr id="23" name="Text 21"/>
-          <p:cNvSpPr/>
-          <p:nvPr/>
-        </p:nvSpPr>
-        <p:spPr>
-          <a:xfrm>
-            <a:off x="1097280" y="5285232"/>
-            <a:ext cx="9997135" cy="365760"/>
-          </a:xfrm>
-          <a:prstGeom prst="rect">
-            <a:avLst/>
-          </a:prstGeom>
-          <a:noFill/>
-          <a:ln/>
-        </p:spPr>
-        <p:txBody>
-          <a:bodyPr wrap="square" lIns="0" tIns="0" rIns="0" bIns="0" rtlCol="0" anchor="ctr"/>
-          <a:lstStyle/>
-          <a:p>
-            <a:pPr indent="0" marL="0">
-              <a:lnSpc>
-                <a:spcPct val="126000"/>
-              </a:lnSpc>
-              <a:buNone/>
-            </a:pPr>
-            <a:r>
-              <a:rPr lang="en-US" sz="1600" dirty="0">
-                <a:solidFill>
-                  <a:srgbClr val="FFFFFF"/>
-                </a:solidFill>
-                <a:latin typeface="Pretendard Black" pitchFamily="34" charset="0"/>
-                <a:ea typeface="Pretendard Black" pitchFamily="34" charset="-122"/>
-                <a:cs typeface="Pretendard Black" pitchFamily="34" charset="-120"/>
-              </a:rPr>
-              <a:t>완성된 포트폴리오 한 벌과, 다음에 무엇을 채울지에 대한 목록을 갖고 나갑니다.</a:t>
-            </a:r>
-            <a:endParaRPr lang="en-US" sz="1600" dirty="0"/>
-          </a:p>
-        </p:txBody>
-      </p:sp>
-      <p:sp>
-        <p:nvSpPr>
-          <p:cNvPr id="24" name="Shape 22"/>
+          <p:cNvPr id="33" name="Shape 31"/>
           <p:cNvSpPr/>
           <p:nvPr/>
         </p:nvSpPr>
@@ -3153,7 +3459,7 @@
       </p:sp>
       <p:sp>
         <p:nvSpPr>
-          <p:cNvPr id="25" name="Text 23"/>
+          <p:cNvPr id="34" name="Text 32"/>
           <p:cNvSpPr/>
           <p:nvPr/>
         </p:nvSpPr>
@@ -3192,7 +3498,7 @@
       </p:sp>
       <p:sp>
         <p:nvSpPr>
-          <p:cNvPr id="26" name="Text 24"/>
+          <p:cNvPr id="35" name="Text 33"/>
           <p:cNvSpPr/>
           <p:nvPr/>
         </p:nvSpPr>

--- a/dist/weeks-포트폴리오제작/포트폴리오제작_15주차_기말발표.pptx
+++ b/dist/weeks-포트폴리오제작/포트폴리오제작_15주차_기말발표.pptx
@@ -510,7 +510,8 @@
           <a:p>
             <a:r>
               <a:rPr lang="en-US" dirty="0"/>
-              <a:t>인원이 많으면 60분에 7분씩은 8~9명분이다. 2주에 나누거나 5분으로 줄여야 한다. 원본의 '팀별'은 개인 포트폴리오 과목이라 개인 발표로 잡았다.</a:t>
+              <a:t>[운영 메모]
+인원이 많으면 60분에 7분씩은 8~9명분이다. 2주에 나누거나 5분으로 줄여야 한다. 원본의 '팀별'은 개인 포트폴리오 과목이라 개인 발표로 잡았다.</a:t>
             </a:r>
             <a:endParaRPr lang="en-US" dirty="0"/>
           </a:p>
@@ -598,7 +599,8 @@
           <a:p>
             <a:r>
               <a:rPr lang="en-US" dirty="0"/>
-              <a:t>발표마다 질의를 1~2개씩 받으면 7분이 금방 찬다. 타이머를 띄우고 정확히 끊되, 마지막 총평 20분은 반드시 확보할 것.</a:t>
+              <a:t>[운영 메모]
+발표마다 질의를 1~2개씩 받으면 7분이 금방 찬다. 타이머를 띄우고 정확히 끊되, 마지막 총평 20분은 반드시 확보할 것.</a:t>
             </a:r>
             <a:endParaRPr lang="en-US" dirty="0"/>
           </a:p>
@@ -686,7 +688,8 @@
           <a:p>
             <a:r>
               <a:rPr lang="en-US" dirty="0"/>
-              <a:t>4번이 이 과목의 마지막 메시지다. 포트폴리오는 완성되는 것이 아니라 계속 갱신되는 문서다.</a:t>
+              <a:t>[운영 메모]
+4번이 이 과목의 마지막 메시지다. 포트폴리오는 완성되는 것이 아니라 계속 갱신되는 문서다.</a:t>
             </a:r>
             <a:endParaRPr lang="en-US" dirty="0"/>
           </a:p>
@@ -774,7 +777,8 @@
           <a:p>
             <a:r>
               <a:rPr lang="en-US" dirty="0"/>
-              <a:t>타이머 필수. 순서는 미리 공지.</a:t>
+              <a:t>[운영 메모]
+타이머 필수. 순서는 미리 공지.</a:t>
             </a:r>
             <a:endParaRPr lang="en-US" dirty="0"/>
           </a:p>
@@ -862,7 +866,8 @@
           <a:p>
             <a:r>
               <a:rPr lang="en-US" dirty="0"/>
-              <a:t>발표 시작 5분 전에 이 슬라이드를 띄워두면 학생들이 스스로 점검한다.</a:t>
+              <a:t>[운영 메모]
+발표 시작 5분 전에 이 슬라이드를 띄워두면 학생들이 스스로 점검한다.</a:t>
             </a:r>
             <a:endParaRPr lang="en-US" dirty="0"/>
           </a:p>
@@ -950,7 +955,8 @@
           <a:p>
             <a:r>
               <a:rPr lang="en-US" dirty="0"/>
-              <a:t>20분. 총평은 개별 지적보다 공통 사항 위주로.</a:t>
+              <a:t>[운영 메모]
+20분. 총평은 개별 지적보다 공통 사항 위주로.</a:t>
             </a:r>
             <a:endParaRPr lang="en-US" dirty="0"/>
           </a:p>
@@ -1038,7 +1044,8 @@
           <a:p>
             <a:r>
               <a:rPr lang="en-US" dirty="0"/>
-              <a:t>03을 솔직하게 쓰게 하려면 성적과 무관하다는 점을 분명히 말해야 한다.</a:t>
+              <a:t>[운영 메모]
+03을 솔직하게 쓰게 하려면 성적과 무관하다는 점을 분명히 말해야 한다.</a:t>
             </a:r>
             <a:endParaRPr lang="en-US" dirty="0"/>
           </a:p>
@@ -1126,7 +1133,8 @@
           <a:p>
             <a:r>
               <a:rPr lang="en-US" dirty="0"/>
-              <a:t>마지막 슬라이드. 이 메시지로 끝내면 학생들이 학기 후에도 관리한다.</a:t>
+              <a:t>[운영 메모]
+마지막 슬라이드. 이 메시지로 끝내면 학생들이 학기 후에도 관리한다.</a:t>
             </a:r>
             <a:endParaRPr lang="en-US" dirty="0"/>
           </a:p>
@@ -1214,7 +1222,8 @@
           <a:p>
             <a:r>
               <a:rPr lang="en-US" dirty="0"/>
-              <a:t>자기평가와 '다음 채울 것'은 성적용이 아니라 학생 본인을 위한 것이다. 형식적으로 받지 말고 짧게라도 피드백을 돌려줄 것.</a:t>
+              <a:t>[운영 메모]
+자기평가와 '다음 채울 것'은 성적용이 아니라 학생 본인을 위한 것이다. 형식적으로 받지 말고 짧게라도 피드백을 돌려줄 것.</a:t>
             </a:r>
             <a:endParaRPr lang="en-US" dirty="0"/>
           </a:p>
